--- a/lessons/lesson-02/slides.pptx
+++ b/lessons/lesson-02/slides.pptx
@@ -2142,7 +2142,7 @@
           <a:lstStyle xmlns:a="http://schemas.openxmlformats.org/drawingml/2006/main"/>
           <a:p xmlns:a="http://schemas.openxmlformats.org/drawingml/2006/main">
             <a:r>
-              <a:t>本页停留 23 分钟。课堂最低产出包含权限矩阵、确认与禁止、风险卡、AI 使用记录和至少一个早期工件追踪；四项追踪在第 3 课前补齐。</a:t>
+              <a:t>本页停留覆盖个人实践全程（两段：第一段约 10 分钟，教师中点点评约 5 分钟，第二段约 10 分钟）。课堂最低产出包含权限矩阵、确认与禁止、风险卡、AI 使用记录和至少一个早期工件追踪；四项追踪在第 3 课前补齐。</a:t>
             </a:r>
           </a:p>
           <a:p xmlns:a="http://schemas.openxmlformats.org/drawingml/2006/main">
@@ -16969,7 +16969,7 @@
                 <a:ea typeface="Arial"/>
                 <a:cs typeface="Arial"/>
               </a:rPr>
-              <a:t>55:00–78:00 个人实践</a:t>
+              <a:t>两段：1-2 权限 · 3-5 风险记录</a:t>
             </a:r>
           </a:p>
         </p:txBody>
@@ -17876,7 +17876,7 @@
                 <a:ea typeface="Microsoft YaHei"/>
                 <a:cs typeface="Microsoft YaHei"/>
               </a:rPr>
-              <a:t>两人互查 · 8 分钟</a:t>
+              <a:t>两人互查</a:t>
             </a:r>
           </a:p>
         </p:txBody>
@@ -19735,7 +19735,7 @@
                 <a:ea typeface="Microsoft YaHei"/>
                 <a:cs typeface="Microsoft YaHei"/>
               </a:rPr>
-              <a:t>必读｜约 15 分钟</a:t>
+              <a:t>必读</a:t>
             </a:r>
           </a:p>
         </p:txBody>
@@ -19872,7 +19872,7 @@
                 <a:ea typeface="Microsoft YaHei"/>
                 <a:cs typeface="Microsoft YaHei"/>
               </a:rPr>
-              <a:t>项目更新｜约 20 分钟</a:t>
+              <a:t>项目更新</a:t>
             </a:r>
           </a:p>
         </p:txBody>
@@ -19985,7 +19985,7 @@
                 <a:ea typeface="Microsoft YaHei"/>
                 <a:cs typeface="Microsoft YaHei"/>
               </a:rPr>
-              <a:t>第 3 课准备｜约 10 分钟</a:t>
+              <a:t>第 3 课准备</a:t>
             </a:r>
           </a:p>
         </p:txBody>

--- a/lessons/lesson-02/slides.pptx
+++ b/lessons/lesson-02/slides.pptx
@@ -2,38 +2,38 @@
 <file path=ppt/presentation.xml><?xml version="1.0" encoding="utf-8"?>
 <p:presentation xmlns:p="http://schemas.openxmlformats.org/presentationml/2006/main">
   <p:sldMasterIdLst>
-    <p:sldMasterId xmlns:r="http://schemas.openxmlformats.org/officeDocument/2006/relationships" id="2147483648" r:id="R6699ccd844b540b4"/>
+    <p:sldMasterId xmlns:r="http://schemas.openxmlformats.org/officeDocument/2006/relationships" id="2147483648" r:id="R27e775859f024e42"/>
   </p:sldMasterIdLst>
   <p:notesMasterIdLst>
-    <p:notesMasterId xmlns:r="http://schemas.openxmlformats.org/officeDocument/2006/relationships" r:id="R5eef2221b42c4a86"/>
+    <p:notesMasterId xmlns:r="http://schemas.openxmlformats.org/officeDocument/2006/relationships" r:id="R8b12e174c1214bec"/>
   </p:notesMasterIdLst>
   <p:sldIdLst>
-    <p:sldId xmlns:r="http://schemas.openxmlformats.org/officeDocument/2006/relationships" id="256" r:id="R32269da3bb074f5f"/>
-    <p:sldId xmlns:r="http://schemas.openxmlformats.org/officeDocument/2006/relationships" id="257" r:id="R732d7e3ee763450c"/>
-    <p:sldId xmlns:r="http://schemas.openxmlformats.org/officeDocument/2006/relationships" id="258" r:id="R0ecfdb7c576c4f74"/>
-    <p:sldId xmlns:r="http://schemas.openxmlformats.org/officeDocument/2006/relationships" id="259" r:id="Rb3d57337893a4d14"/>
-    <p:sldId xmlns:r="http://schemas.openxmlformats.org/officeDocument/2006/relationships" id="260" r:id="R11036c3fa60640e2"/>
-    <p:sldId xmlns:r="http://schemas.openxmlformats.org/officeDocument/2006/relationships" id="261" r:id="Re7585f1301eb4dd6"/>
-    <p:sldId xmlns:r="http://schemas.openxmlformats.org/officeDocument/2006/relationships" id="262" r:id="R4c51a1363145443f"/>
-    <p:sldId xmlns:r="http://schemas.openxmlformats.org/officeDocument/2006/relationships" id="263" r:id="Rfd9aa3db460b44aa"/>
-    <p:sldId xmlns:r="http://schemas.openxmlformats.org/officeDocument/2006/relationships" id="264" r:id="R082e8ad8f8fd4d7d"/>
-    <p:sldId xmlns:r="http://schemas.openxmlformats.org/officeDocument/2006/relationships" id="265" r:id="R7570dd0d54264774"/>
-    <p:sldId xmlns:r="http://schemas.openxmlformats.org/officeDocument/2006/relationships" id="266" r:id="Rffac980e5db54ed8"/>
-    <p:sldId xmlns:r="http://schemas.openxmlformats.org/officeDocument/2006/relationships" id="267" r:id="Rf11b6fdc1c3c456c"/>
-    <p:sldId xmlns:r="http://schemas.openxmlformats.org/officeDocument/2006/relationships" id="268" r:id="R61ec9a412882484d"/>
-    <p:sldId xmlns:r="http://schemas.openxmlformats.org/officeDocument/2006/relationships" id="269" r:id="Rec515577dea34a1b"/>
-    <p:sldId xmlns:r="http://schemas.openxmlformats.org/officeDocument/2006/relationships" id="270" r:id="R8cf96097974e4eb1"/>
-    <p:sldId xmlns:r="http://schemas.openxmlformats.org/officeDocument/2006/relationships" id="271" r:id="Rc4a3758cb60f4515"/>
-    <p:sldId xmlns:r="http://schemas.openxmlformats.org/officeDocument/2006/relationships" id="272" r:id="R157d95df517f4103"/>
-    <p:sldId xmlns:r="http://schemas.openxmlformats.org/officeDocument/2006/relationships" id="273" r:id="R3dadf2f427c24af8"/>
-    <p:sldId xmlns:r="http://schemas.openxmlformats.org/officeDocument/2006/relationships" id="274" r:id="Rb9286dede8f54c79"/>
-    <p:sldId xmlns:r="http://schemas.openxmlformats.org/officeDocument/2006/relationships" id="275" r:id="R481f4e0d43f44407"/>
-    <p:sldId xmlns:r="http://schemas.openxmlformats.org/officeDocument/2006/relationships" id="276" r:id="R47c07e1972894ac4"/>
-    <p:sldId xmlns:r="http://schemas.openxmlformats.org/officeDocument/2006/relationships" id="277" r:id="Re3ec1c5c9b924821"/>
-    <p:sldId xmlns:r="http://schemas.openxmlformats.org/officeDocument/2006/relationships" id="278" r:id="R976ebdc3f7064115"/>
-    <p:sldId xmlns:r="http://schemas.openxmlformats.org/officeDocument/2006/relationships" id="279" r:id="Radd6596446dd4462"/>
-    <p:sldId xmlns:r="http://schemas.openxmlformats.org/officeDocument/2006/relationships" id="280" r:id="R2211c17fbf8b47ef"/>
-    <p:sldId xmlns:r="http://schemas.openxmlformats.org/officeDocument/2006/relationships" id="281" r:id="Rb7cd8102d11c440a"/>
+    <p:sldId xmlns:r="http://schemas.openxmlformats.org/officeDocument/2006/relationships" id="256" r:id="Rad63e9d758c94587"/>
+    <p:sldId xmlns:r="http://schemas.openxmlformats.org/officeDocument/2006/relationships" id="257" r:id="Rcff56995d8c241ab"/>
+    <p:sldId xmlns:r="http://schemas.openxmlformats.org/officeDocument/2006/relationships" id="258" r:id="Rc2c1fd625f2f4794"/>
+    <p:sldId xmlns:r="http://schemas.openxmlformats.org/officeDocument/2006/relationships" id="259" r:id="R84402dabbc4d41dc"/>
+    <p:sldId xmlns:r="http://schemas.openxmlformats.org/officeDocument/2006/relationships" id="260" r:id="Rcdc06186d5b34904"/>
+    <p:sldId xmlns:r="http://schemas.openxmlformats.org/officeDocument/2006/relationships" id="261" r:id="R4089a28eb171414b"/>
+    <p:sldId xmlns:r="http://schemas.openxmlformats.org/officeDocument/2006/relationships" id="262" r:id="R3ac9b16ddc464fa2"/>
+    <p:sldId xmlns:r="http://schemas.openxmlformats.org/officeDocument/2006/relationships" id="263" r:id="R6cb247df47b449d6"/>
+    <p:sldId xmlns:r="http://schemas.openxmlformats.org/officeDocument/2006/relationships" id="264" r:id="R8b190f79ed654cb0"/>
+    <p:sldId xmlns:r="http://schemas.openxmlformats.org/officeDocument/2006/relationships" id="265" r:id="Rcd0b42dc12114a16"/>
+    <p:sldId xmlns:r="http://schemas.openxmlformats.org/officeDocument/2006/relationships" id="266" r:id="R4469e6791faf4ab2"/>
+    <p:sldId xmlns:r="http://schemas.openxmlformats.org/officeDocument/2006/relationships" id="267" r:id="R0a5e1b267ec4477d"/>
+    <p:sldId xmlns:r="http://schemas.openxmlformats.org/officeDocument/2006/relationships" id="268" r:id="R66f75c544a2f4aac"/>
+    <p:sldId xmlns:r="http://schemas.openxmlformats.org/officeDocument/2006/relationships" id="269" r:id="R1b3e3e5356c84b20"/>
+    <p:sldId xmlns:r="http://schemas.openxmlformats.org/officeDocument/2006/relationships" id="270" r:id="R4871bd6e6d3f477a"/>
+    <p:sldId xmlns:r="http://schemas.openxmlformats.org/officeDocument/2006/relationships" id="271" r:id="R3e8df27b7fcb4c93"/>
+    <p:sldId xmlns:r="http://schemas.openxmlformats.org/officeDocument/2006/relationships" id="272" r:id="R2c4548fe8b074d96"/>
+    <p:sldId xmlns:r="http://schemas.openxmlformats.org/officeDocument/2006/relationships" id="273" r:id="Ra81100209cd54af6"/>
+    <p:sldId xmlns:r="http://schemas.openxmlformats.org/officeDocument/2006/relationships" id="274" r:id="R049680b7b890467c"/>
+    <p:sldId xmlns:r="http://schemas.openxmlformats.org/officeDocument/2006/relationships" id="275" r:id="R633f2b5ddbf74580"/>
+    <p:sldId xmlns:r="http://schemas.openxmlformats.org/officeDocument/2006/relationships" id="276" r:id="Rbbe5c0949c9b4d15"/>
+    <p:sldId xmlns:r="http://schemas.openxmlformats.org/officeDocument/2006/relationships" id="277" r:id="R08e205f4f79540d9"/>
+    <p:sldId xmlns:r="http://schemas.openxmlformats.org/officeDocument/2006/relationships" id="278" r:id="Re023c3ba51cf499c"/>
+    <p:sldId xmlns:r="http://schemas.openxmlformats.org/officeDocument/2006/relationships" id="279" r:id="R5b010337d8054fd7"/>
+    <p:sldId xmlns:r="http://schemas.openxmlformats.org/officeDocument/2006/relationships" id="280" r:id="R250c8dffb88c4da9"/>
+    <p:sldId xmlns:r="http://schemas.openxmlformats.org/officeDocument/2006/relationships" id="281" r:id="Rbbaaa06cdcd2457b"/>
   </p:sldIdLst>
   <p:sldSz cx="12192000" cy="6858000"/>
   <p:notesSz cx="6858000" cy="9144000"/>
@@ -421,33 +421,20 @@
                 <a:ea typeface="微软雅黑"/>
                 <a:cs typeface="微软雅黑"/>
               </a:rPr>
-              <a:t>页面任务：识别课程与课次</a:t>
-            </a:r>
-          </a:p>
-          <a:p xmlns:a="http://schemas.openxmlformats.org/drawingml/2006/main">
-            <a:r>
-              <a:rPr sz="1200" b="0">
-                <a:solidFill>
-                  <a:srgbClr val="24292F"/>
-                </a:solidFill>
-                <a:latin typeface="微软雅黑"/>
-                <a:ea typeface="微软雅黑"/>
-                <a:cs typeface="微软雅黑"/>
-              </a:rPr>
-              <a:t>教师讲述：封面只承担识别。</a:t>
-            </a:r>
-          </a:p>
-          <a:p xmlns:a="http://schemas.openxmlformats.org/drawingml/2006/main">
-            <a:r>
-              <a:rPr sz="1200" b="0">
-                <a:solidFill>
-                  <a:srgbClr val="24292F"/>
-                </a:solidFill>
-                <a:latin typeface="微软雅黑"/>
-                <a:ea typeface="微软雅黑"/>
-                <a:cs typeface="微软雅黑"/>
-              </a:rPr>
-              <a:t>学生动作：进入课堂</a:t>
+              <a:t>页面：P01 科研伦理与 Agent 边界</a:t>
+            </a:r>
+          </a:p>
+          <a:p xmlns:a="http://schemas.openxmlformats.org/drawingml/2006/main">
+            <a:r>
+              <a:rPr sz="1200" b="0">
+                <a:solidFill>
+                  <a:srgbClr val="24292F"/>
+                </a:solidFill>
+                <a:latin typeface="微软雅黑"/>
+                <a:ea typeface="微软雅黑"/>
+                <a:cs typeface="微软雅黑"/>
+              </a:rPr>
+              <a:t/>
             </a:r>
           </a:p>
           <a:p xmlns:a="http://schemas.openxmlformats.org/drawingml/2006/main">
@@ -473,32 +460,6 @@
                 <a:ea typeface="微软雅黑"/>
                 <a:cs typeface="微软雅黑"/>
               </a:rPr>
-              <a:t>屏显中的课堂构造案例不代表实测结果。</a:t>
-            </a:r>
-          </a:p>
-          <a:p xmlns:a="http://schemas.openxmlformats.org/drawingml/2006/main">
-            <a:r>
-              <a:rPr sz="1200" b="0">
-                <a:solidFill>
-                  <a:srgbClr val="24292F"/>
-                </a:solidFill>
-                <a:latin typeface="微软雅黑"/>
-                <a:ea typeface="微软雅黑"/>
-                <a:cs typeface="微软雅黑"/>
-              </a:rPr>
-              <a:t>核验日期：2026-09-15。</a:t>
-            </a:r>
-          </a:p>
-          <a:p xmlns:a="http://schemas.openxmlformats.org/drawingml/2006/main">
-            <a:r>
-              <a:rPr sz="1200" b="0">
-                <a:solidFill>
-                  <a:srgbClr val="24292F"/>
-                </a:solidFill>
-                <a:latin typeface="微软雅黑"/>
-                <a:ea typeface="微软雅黑"/>
-                <a:cs typeface="微软雅黑"/>
-              </a:rPr>
               <a:t/>
             </a:r>
           </a:p>
@@ -512,6 +473,162 @@
                 <a:ea typeface="微软雅黑"/>
                 <a:cs typeface="微软雅黑"/>
               </a:rPr>
+              <a:t>屏显核对：</a:t>
+            </a:r>
+          </a:p>
+          <a:p xmlns:a="http://schemas.openxmlformats.org/drawingml/2006/main">
+            <a:r>
+              <a:rPr sz="1200" b="0">
+                <a:solidFill>
+                  <a:srgbClr val="24292F"/>
+                </a:solidFill>
+                <a:latin typeface="微软雅黑"/>
+                <a:ea typeface="微软雅黑"/>
+                <a:cs typeface="微软雅黑"/>
+              </a:rPr>
+              <a:t>科研伦理与 Agent 边界</a:t>
+            </a:r>
+          </a:p>
+          <a:p xmlns:a="http://schemas.openxmlformats.org/drawingml/2006/main">
+            <a:r>
+              <a:rPr sz="1200" b="0">
+                <a:solidFill>
+                  <a:srgbClr val="24292F"/>
+                </a:solidFill>
+                <a:latin typeface="微软雅黑"/>
+                <a:ea typeface="微软雅黑"/>
+                <a:cs typeface="微软雅黑"/>
+              </a:rPr>
+              <a:t/>
+            </a:r>
+          </a:p>
+          <a:p xmlns:a="http://schemas.openxmlformats.org/drawingml/2006/main">
+            <a:r>
+              <a:rPr sz="1200" b="0">
+                <a:solidFill>
+                  <a:srgbClr val="24292F"/>
+                </a:solidFill>
+                <a:latin typeface="微软雅黑"/>
+                <a:ea typeface="微软雅黑"/>
+                <a:cs typeface="微软雅黑"/>
+              </a:rPr>
+              <a:t>教师讲述：</a:t>
+            </a:r>
+          </a:p>
+          <a:p xmlns:a="http://schemas.openxmlformats.org/drawingml/2006/main">
+            <a:r>
+              <a:rPr sz="1200" b="0">
+                <a:solidFill>
+                  <a:srgbClr val="24292F"/>
+                </a:solidFill>
+                <a:latin typeface="微软雅黑"/>
+                <a:ea typeface="微软雅黑"/>
+                <a:cs typeface="微软雅黑"/>
+              </a:rPr>
+              <a:t>封面只承担识别。</a:t>
+            </a:r>
+          </a:p>
+          <a:p xmlns:a="http://schemas.openxmlformats.org/drawingml/2006/main">
+            <a:r>
+              <a:rPr sz="1200" b="0">
+                <a:solidFill>
+                  <a:srgbClr val="24292F"/>
+                </a:solidFill>
+                <a:latin typeface="微软雅黑"/>
+                <a:ea typeface="微软雅黑"/>
+                <a:cs typeface="微软雅黑"/>
+              </a:rPr>
+              <a:t/>
+            </a:r>
+          </a:p>
+          <a:p xmlns:a="http://schemas.openxmlformats.org/drawingml/2006/main">
+            <a:r>
+              <a:rPr sz="1200" b="0">
+                <a:solidFill>
+                  <a:srgbClr val="24292F"/>
+                </a:solidFill>
+                <a:latin typeface="微软雅黑"/>
+                <a:ea typeface="微软雅黑"/>
+                <a:cs typeface="微软雅黑"/>
+              </a:rPr>
+              <a:t>学生动作：</a:t>
+            </a:r>
+          </a:p>
+          <a:p xmlns:a="http://schemas.openxmlformats.org/drawingml/2006/main">
+            <a:r>
+              <a:rPr sz="1200" b="0">
+                <a:solidFill>
+                  <a:srgbClr val="24292F"/>
+                </a:solidFill>
+                <a:latin typeface="微软雅黑"/>
+                <a:ea typeface="微软雅黑"/>
+                <a:cs typeface="微软雅黑"/>
+              </a:rPr>
+              <a:t>进入课堂</a:t>
+            </a:r>
+          </a:p>
+          <a:p xmlns:a="http://schemas.openxmlformats.org/drawingml/2006/main">
+            <a:r>
+              <a:rPr sz="1200" b="0">
+                <a:solidFill>
+                  <a:srgbClr val="24292F"/>
+                </a:solidFill>
+                <a:latin typeface="微软雅黑"/>
+                <a:ea typeface="微软雅黑"/>
+                <a:cs typeface="微软雅黑"/>
+              </a:rPr>
+              <a:t/>
+            </a:r>
+          </a:p>
+          <a:p xmlns:a="http://schemas.openxmlformats.org/drawingml/2006/main">
+            <a:r>
+              <a:rPr sz="1200" b="0">
+                <a:solidFill>
+                  <a:srgbClr val="24292F"/>
+                </a:solidFill>
+                <a:latin typeface="微软雅黑"/>
+                <a:ea typeface="微软雅黑"/>
+                <a:cs typeface="微软雅黑"/>
+              </a:rPr>
+              <a:t>来源与边界：</a:t>
+            </a:r>
+          </a:p>
+          <a:p xmlns:a="http://schemas.openxmlformats.org/drawingml/2006/main">
+            <a:r>
+              <a:rPr sz="1200" b="0">
+                <a:solidFill>
+                  <a:srgbClr val="24292F"/>
+                </a:solidFill>
+                <a:latin typeface="微软雅黑"/>
+                <a:ea typeface="微软雅黑"/>
+                <a:cs typeface="微软雅黑"/>
+              </a:rPr>
+              <a:t>/Users/bright/Projects/courses/graduate/course/syllabus.md</a:t>
+            </a:r>
+          </a:p>
+          <a:p xmlns:a="http://schemas.openxmlformats.org/drawingml/2006/main">
+            <a:r>
+              <a:rPr sz="1200" b="0">
+                <a:solidFill>
+                  <a:srgbClr val="24292F"/>
+                </a:solidFill>
+                <a:latin typeface="微软雅黑"/>
+                <a:ea typeface="微软雅黑"/>
+                <a:cs typeface="微软雅黑"/>
+              </a:rPr>
+              <a:t/>
+            </a:r>
+          </a:p>
+          <a:p xmlns:a="http://schemas.openxmlformats.org/drawingml/2006/main">
+            <a:r>
+              <a:rPr sz="1200" b="0">
+                <a:solidFill>
+                  <a:srgbClr val="24292F"/>
+                </a:solidFill>
+                <a:latin typeface="微软雅黑"/>
+                <a:ea typeface="微软雅黑"/>
+                <a:cs typeface="微软雅黑"/>
+              </a:rPr>
               <a:t>[Sources]</a:t>
             </a:r>
           </a:p>
@@ -525,7 +642,33 @@
                 <a:ea typeface="微软雅黑"/>
                 <a:cs typeface="微软雅黑"/>
               </a:rPr>
-              <a:t>- course/syllabus.md</a:t>
+              <a:t/>
+            </a:r>
+          </a:p>
+          <a:p xmlns:a="http://schemas.openxmlformats.org/drawingml/2006/main">
+            <a:r>
+              <a:rPr sz="1200" b="0">
+                <a:solidFill>
+                  <a:srgbClr val="24292F"/>
+                </a:solidFill>
+                <a:latin typeface="微软雅黑"/>
+                <a:ea typeface="微软雅黑"/>
+                <a:cs typeface="微软雅黑"/>
+              </a:rPr>
+              <a:t>- 本课 handout.md 与 slides.md</a:t>
+            </a:r>
+          </a:p>
+          <a:p xmlns:a="http://schemas.openxmlformats.org/drawingml/2006/main">
+            <a:r>
+              <a:rPr sz="1200" b="0">
+                <a:solidFill>
+                  <a:srgbClr val="24292F"/>
+                </a:solidFill>
+                <a:latin typeface="微软雅黑"/>
+                <a:ea typeface="微软雅黑"/>
+                <a:cs typeface="微软雅黑"/>
+              </a:rPr>
+              <a:t/>
             </a:r>
           </a:p>
           <a:p xmlns:a="http://schemas.openxmlformats.org/drawingml/2006/main">
@@ -616,33 +759,20 @@
                 <a:ea typeface="微软雅黑"/>
                 <a:cs typeface="微软雅黑"/>
               </a:rPr>
-              <a:t>页面任务：回应学生已经使用大模型的现实</a:t>
-            </a:r>
-          </a:p>
-          <a:p xmlns:a="http://schemas.openxmlformats.org/drawingml/2006/main">
-            <a:r>
-              <a:rPr sz="1200" b="0">
-                <a:solidFill>
-                  <a:srgbClr val="24292F"/>
-                </a:solidFill>
-                <a:latin typeface="微软雅黑"/>
-                <a:ea typeface="微软雅黑"/>
-                <a:cs typeface="微软雅黑"/>
-              </a:rPr>
-              <a:t>教师讲述：避免羞辱或不切实际的追责；强调透明和按规则协调。</a:t>
-            </a:r>
-          </a:p>
-          <a:p xmlns:a="http://schemas.openxmlformats.org/drawingml/2006/main">
-            <a:r>
-              <a:rPr sz="1200" b="0">
-                <a:solidFill>
-                  <a:srgbClr val="24292F"/>
-                </a:solidFill>
-                <a:latin typeface="微软雅黑"/>
-                <a:ea typeface="微软雅黑"/>
-                <a:cs typeface="微软雅黑"/>
-              </a:rPr>
-              <a:t>学生动作：选择恢复路径第一步</a:t>
+              <a:t>页面：P10 已发送材料后的恢复</a:t>
+            </a:r>
+          </a:p>
+          <a:p xmlns:a="http://schemas.openxmlformats.org/drawingml/2006/main">
+            <a:r>
+              <a:rPr sz="1200" b="0">
+                <a:solidFill>
+                  <a:srgbClr val="24292F"/>
+                </a:solidFill>
+                <a:latin typeface="微软雅黑"/>
+                <a:ea typeface="微软雅黑"/>
+                <a:cs typeface="微软雅黑"/>
+              </a:rPr>
+              <a:t/>
             </a:r>
           </a:p>
           <a:p xmlns:a="http://schemas.openxmlformats.org/drawingml/2006/main">
@@ -668,32 +798,6 @@
                 <a:ea typeface="微软雅黑"/>
                 <a:cs typeface="微软雅黑"/>
               </a:rPr>
-              <a:t>屏显中的课堂构造案例不代表实测结果。</a:t>
-            </a:r>
-          </a:p>
-          <a:p xmlns:a="http://schemas.openxmlformats.org/drawingml/2006/main">
-            <a:r>
-              <a:rPr sz="1200" b="0">
-                <a:solidFill>
-                  <a:srgbClr val="24292F"/>
-                </a:solidFill>
-                <a:latin typeface="微软雅黑"/>
-                <a:ea typeface="微软雅黑"/>
-                <a:cs typeface="微软雅黑"/>
-              </a:rPr>
-              <a:t>核验日期：2026-09-15。</a:t>
-            </a:r>
-          </a:p>
-          <a:p xmlns:a="http://schemas.openxmlformats.org/drawingml/2006/main">
-            <a:r>
-              <a:rPr sz="1200" b="0">
-                <a:solidFill>
-                  <a:srgbClr val="24292F"/>
-                </a:solidFill>
-                <a:latin typeface="微软雅黑"/>
-                <a:ea typeface="微软雅黑"/>
-                <a:cs typeface="微软雅黑"/>
-              </a:rPr>
               <a:t/>
             </a:r>
           </a:p>
@@ -707,6 +811,162 @@
                 <a:ea typeface="微软雅黑"/>
                 <a:cs typeface="微软雅黑"/>
               </a:rPr>
+              <a:t>屏显核对：</a:t>
+            </a:r>
+          </a:p>
+          <a:p xmlns:a="http://schemas.openxmlformats.org/drawingml/2006/main">
+            <a:r>
+              <a:rPr sz="1200" b="0">
+                <a:solidFill>
+                  <a:srgbClr val="24292F"/>
+                </a:solidFill>
+                <a:latin typeface="微软雅黑"/>
+                <a:ea typeface="微软雅黑"/>
+                <a:cs typeface="微软雅黑"/>
+              </a:rPr>
+              <a:t>先停止进一步发送，保留可核对的记录；停止扩散；暂停后续发送与共享；评估范围；核对输入片段、敏感程度与接收环境；记录事实；保存工具、时间、材料范围与实际动作；按要求沟通；依机构或合作约定处理，并改用合规输入</a:t>
+            </a:r>
+          </a:p>
+          <a:p xmlns:a="http://schemas.openxmlformats.org/drawingml/2006/main">
+            <a:r>
+              <a:rPr sz="1200" b="0">
+                <a:solidFill>
+                  <a:srgbClr val="24292F"/>
+                </a:solidFill>
+                <a:latin typeface="微软雅黑"/>
+                <a:ea typeface="微软雅黑"/>
+                <a:cs typeface="微软雅黑"/>
+              </a:rPr>
+              <a:t/>
+            </a:r>
+          </a:p>
+          <a:p xmlns:a="http://schemas.openxmlformats.org/drawingml/2006/main">
+            <a:r>
+              <a:rPr sz="1200" b="0">
+                <a:solidFill>
+                  <a:srgbClr val="24292F"/>
+                </a:solidFill>
+                <a:latin typeface="微软雅黑"/>
+                <a:ea typeface="微软雅黑"/>
+                <a:cs typeface="微软雅黑"/>
+              </a:rPr>
+              <a:t>教师讲述：</a:t>
+            </a:r>
+          </a:p>
+          <a:p xmlns:a="http://schemas.openxmlformats.org/drawingml/2006/main">
+            <a:r>
+              <a:rPr sz="1200" b="0">
+                <a:solidFill>
+                  <a:srgbClr val="24292F"/>
+                </a:solidFill>
+                <a:latin typeface="微软雅黑"/>
+                <a:ea typeface="微软雅黑"/>
+                <a:cs typeface="微软雅黑"/>
+              </a:rPr>
+              <a:t>避免羞辱或不切实际的追责；强调透明和按规则协调。</a:t>
+            </a:r>
+          </a:p>
+          <a:p xmlns:a="http://schemas.openxmlformats.org/drawingml/2006/main">
+            <a:r>
+              <a:rPr sz="1200" b="0">
+                <a:solidFill>
+                  <a:srgbClr val="24292F"/>
+                </a:solidFill>
+                <a:latin typeface="微软雅黑"/>
+                <a:ea typeface="微软雅黑"/>
+                <a:cs typeface="微软雅黑"/>
+              </a:rPr>
+              <a:t/>
+            </a:r>
+          </a:p>
+          <a:p xmlns:a="http://schemas.openxmlformats.org/drawingml/2006/main">
+            <a:r>
+              <a:rPr sz="1200" b="0">
+                <a:solidFill>
+                  <a:srgbClr val="24292F"/>
+                </a:solidFill>
+                <a:latin typeface="微软雅黑"/>
+                <a:ea typeface="微软雅黑"/>
+                <a:cs typeface="微软雅黑"/>
+              </a:rPr>
+              <a:t>学生动作：</a:t>
+            </a:r>
+          </a:p>
+          <a:p xmlns:a="http://schemas.openxmlformats.org/drawingml/2006/main">
+            <a:r>
+              <a:rPr sz="1200" b="0">
+                <a:solidFill>
+                  <a:srgbClr val="24292F"/>
+                </a:solidFill>
+                <a:latin typeface="微软雅黑"/>
+                <a:ea typeface="微软雅黑"/>
+                <a:cs typeface="微软雅黑"/>
+              </a:rPr>
+              <a:t>选择恢复路径第一步</a:t>
+            </a:r>
+          </a:p>
+          <a:p xmlns:a="http://schemas.openxmlformats.org/drawingml/2006/main">
+            <a:r>
+              <a:rPr sz="1200" b="0">
+                <a:solidFill>
+                  <a:srgbClr val="24292F"/>
+                </a:solidFill>
+                <a:latin typeface="微软雅黑"/>
+                <a:ea typeface="微软雅黑"/>
+                <a:cs typeface="微软雅黑"/>
+              </a:rPr>
+              <a:t/>
+            </a:r>
+          </a:p>
+          <a:p xmlns:a="http://schemas.openxmlformats.org/drawingml/2006/main">
+            <a:r>
+              <a:rPr sz="1200" b="0">
+                <a:solidFill>
+                  <a:srgbClr val="24292F"/>
+                </a:solidFill>
+                <a:latin typeface="微软雅黑"/>
+                <a:ea typeface="微软雅黑"/>
+                <a:cs typeface="微软雅黑"/>
+              </a:rPr>
+              <a:t>来源与边界：</a:t>
+            </a:r>
+          </a:p>
+          <a:p xmlns:a="http://schemas.openxmlformats.org/drawingml/2006/main">
+            <a:r>
+              <a:rPr sz="1200" b="0">
+                <a:solidFill>
+                  <a:srgbClr val="24292F"/>
+                </a:solidFill>
+                <a:latin typeface="微软雅黑"/>
+                <a:ea typeface="微软雅黑"/>
+                <a:cs typeface="微软雅黑"/>
+              </a:rPr>
+              <a:t>/Users/bright/Projects/courses/graduate/lessons/lesson-02/handout.md</a:t>
+            </a:r>
+          </a:p>
+          <a:p xmlns:a="http://schemas.openxmlformats.org/drawingml/2006/main">
+            <a:r>
+              <a:rPr sz="1200" b="0">
+                <a:solidFill>
+                  <a:srgbClr val="24292F"/>
+                </a:solidFill>
+                <a:latin typeface="微软雅黑"/>
+                <a:ea typeface="微软雅黑"/>
+                <a:cs typeface="微软雅黑"/>
+              </a:rPr>
+              <a:t/>
+            </a:r>
+          </a:p>
+          <a:p xmlns:a="http://schemas.openxmlformats.org/drawingml/2006/main">
+            <a:r>
+              <a:rPr sz="1200" b="0">
+                <a:solidFill>
+                  <a:srgbClr val="24292F"/>
+                </a:solidFill>
+                <a:latin typeface="微软雅黑"/>
+                <a:ea typeface="微软雅黑"/>
+                <a:cs typeface="微软雅黑"/>
+              </a:rPr>
               <a:t>[Sources]</a:t>
             </a:r>
           </a:p>
@@ -720,7 +980,33 @@
                 <a:ea typeface="微软雅黑"/>
                 <a:cs typeface="微软雅黑"/>
               </a:rPr>
-              <a:t>- lessons/lesson-02/handout.md</a:t>
+              <a:t/>
+            </a:r>
+          </a:p>
+          <a:p xmlns:a="http://schemas.openxmlformats.org/drawingml/2006/main">
+            <a:r>
+              <a:rPr sz="1200" b="0">
+                <a:solidFill>
+                  <a:srgbClr val="24292F"/>
+                </a:solidFill>
+                <a:latin typeface="微软雅黑"/>
+                <a:ea typeface="微软雅黑"/>
+                <a:cs typeface="微软雅黑"/>
+              </a:rPr>
+              <a:t>- 本课 handout.md 与 slides.md</a:t>
+            </a:r>
+          </a:p>
+          <a:p xmlns:a="http://schemas.openxmlformats.org/drawingml/2006/main">
+            <a:r>
+              <a:rPr sz="1200" b="0">
+                <a:solidFill>
+                  <a:srgbClr val="24292F"/>
+                </a:solidFill>
+                <a:latin typeface="微软雅黑"/>
+                <a:ea typeface="微软雅黑"/>
+                <a:cs typeface="微软雅黑"/>
+              </a:rPr>
+              <a:t/>
             </a:r>
           </a:p>
           <a:p xmlns:a="http://schemas.openxmlformats.org/drawingml/2006/main">
@@ -811,33 +1097,20 @@
                 <a:ea typeface="微软雅黑"/>
                 <a:cs typeface="微软雅黑"/>
               </a:rPr>
-              <a:t>页面任务：用具体例子解释生成数据边界</a:t>
-            </a:r>
-          </a:p>
-          <a:p xmlns:a="http://schemas.openxmlformats.org/drawingml/2006/main">
-            <a:r>
-              <a:rPr sz="1200" b="0">
-                <a:solidFill>
-                  <a:srgbClr val="24292F"/>
-                </a:solidFill>
-                <a:latin typeface="微软雅黑"/>
-                <a:ea typeface="微软雅黑"/>
-                <a:cs typeface="微软雅黑"/>
-              </a:rPr>
-              <a:t>教师讲述：同一张表区分用途、允许结论和禁止结论。</a:t>
-            </a:r>
-          </a:p>
-          <a:p xmlns:a="http://schemas.openxmlformats.org/drawingml/2006/main">
-            <a:r>
-              <a:rPr sz="1200" b="0">
-                <a:solidFill>
-                  <a:srgbClr val="24292F"/>
-                </a:solidFill>
-                <a:latin typeface="微软雅黑"/>
-                <a:ea typeface="微软雅黑"/>
-                <a:cs typeface="微软雅黑"/>
-              </a:rPr>
-              <a:t>学生动作：判断一句结论是否越界</a:t>
+              <a:t>页面：P11 模拟数据与真实观测的结论边界</a:t>
+            </a:r>
+          </a:p>
+          <a:p xmlns:a="http://schemas.openxmlformats.org/drawingml/2006/main">
+            <a:r>
+              <a:rPr sz="1200" b="0">
+                <a:solidFill>
+                  <a:srgbClr val="24292F"/>
+                </a:solidFill>
+                <a:latin typeface="微软雅黑"/>
+                <a:ea typeface="微软雅黑"/>
+                <a:cs typeface="微软雅黑"/>
+              </a:rPr>
+              <a:t/>
             </a:r>
           </a:p>
           <a:p xmlns:a="http://schemas.openxmlformats.org/drawingml/2006/main">
@@ -863,32 +1136,6 @@
                 <a:ea typeface="微软雅黑"/>
                 <a:cs typeface="微软雅黑"/>
               </a:rPr>
-              <a:t>屏显中的课堂构造案例不代表实测结果。</a:t>
-            </a:r>
-          </a:p>
-          <a:p xmlns:a="http://schemas.openxmlformats.org/drawingml/2006/main">
-            <a:r>
-              <a:rPr sz="1200" b="0">
-                <a:solidFill>
-                  <a:srgbClr val="24292F"/>
-                </a:solidFill>
-                <a:latin typeface="微软雅黑"/>
-                <a:ea typeface="微软雅黑"/>
-                <a:cs typeface="微软雅黑"/>
-              </a:rPr>
-              <a:t>核验日期：2026-09-15。</a:t>
-            </a:r>
-          </a:p>
-          <a:p xmlns:a="http://schemas.openxmlformats.org/drawingml/2006/main">
-            <a:r>
-              <a:rPr sz="1200" b="0">
-                <a:solidFill>
-                  <a:srgbClr val="24292F"/>
-                </a:solidFill>
-                <a:latin typeface="微软雅黑"/>
-                <a:ea typeface="微软雅黑"/>
-                <a:cs typeface="微软雅黑"/>
-              </a:rPr>
               <a:t/>
             </a:r>
           </a:p>
@@ -902,6 +1149,162 @@
                 <a:ea typeface="微软雅黑"/>
                 <a:cs typeface="微软雅黑"/>
               </a:rPr>
+              <a:t>屏显核对：</a:t>
+            </a:r>
+          </a:p>
+          <a:p xmlns:a="http://schemas.openxmlformats.org/drawingml/2006/main">
+            <a:r>
+              <a:rPr sz="1200" b="0">
+                <a:solidFill>
+                  <a:srgbClr val="24292F"/>
+                </a:solidFill>
+                <a:latin typeface="微软雅黑"/>
+                <a:ea typeface="微软雅黑"/>
+                <a:cs typeface="微软雅黑"/>
+              </a:rPr>
+              <a:t>模拟数据可以测试方法，不能冒充经验事实</a:t>
+            </a:r>
+          </a:p>
+          <a:p xmlns:a="http://schemas.openxmlformats.org/drawingml/2006/main">
+            <a:r>
+              <a:rPr sz="1200" b="0">
+                <a:solidFill>
+                  <a:srgbClr val="24292F"/>
+                </a:solidFill>
+                <a:latin typeface="微软雅黑"/>
+                <a:ea typeface="微软雅黑"/>
+                <a:cs typeface="微软雅黑"/>
+              </a:rPr>
+              <a:t/>
+            </a:r>
+          </a:p>
+          <a:p xmlns:a="http://schemas.openxmlformats.org/drawingml/2006/main">
+            <a:r>
+              <a:rPr sz="1200" b="0">
+                <a:solidFill>
+                  <a:srgbClr val="24292F"/>
+                </a:solidFill>
+                <a:latin typeface="微软雅黑"/>
+                <a:ea typeface="微软雅黑"/>
+                <a:cs typeface="微软雅黑"/>
+              </a:rPr>
+              <a:t>教师讲述：</a:t>
+            </a:r>
+          </a:p>
+          <a:p xmlns:a="http://schemas.openxmlformats.org/drawingml/2006/main">
+            <a:r>
+              <a:rPr sz="1200" b="0">
+                <a:solidFill>
+                  <a:srgbClr val="24292F"/>
+                </a:solidFill>
+                <a:latin typeface="微软雅黑"/>
+                <a:ea typeface="微软雅黑"/>
+                <a:cs typeface="微软雅黑"/>
+              </a:rPr>
+              <a:t>同一张表区分用途、允许结论和禁止结论。</a:t>
+            </a:r>
+          </a:p>
+          <a:p xmlns:a="http://schemas.openxmlformats.org/drawingml/2006/main">
+            <a:r>
+              <a:rPr sz="1200" b="0">
+                <a:solidFill>
+                  <a:srgbClr val="24292F"/>
+                </a:solidFill>
+                <a:latin typeface="微软雅黑"/>
+                <a:ea typeface="微软雅黑"/>
+                <a:cs typeface="微软雅黑"/>
+              </a:rPr>
+              <a:t/>
+            </a:r>
+          </a:p>
+          <a:p xmlns:a="http://schemas.openxmlformats.org/drawingml/2006/main">
+            <a:r>
+              <a:rPr sz="1200" b="0">
+                <a:solidFill>
+                  <a:srgbClr val="24292F"/>
+                </a:solidFill>
+                <a:latin typeface="微软雅黑"/>
+                <a:ea typeface="微软雅黑"/>
+                <a:cs typeface="微软雅黑"/>
+              </a:rPr>
+              <a:t>学生动作：</a:t>
+            </a:r>
+          </a:p>
+          <a:p xmlns:a="http://schemas.openxmlformats.org/drawingml/2006/main">
+            <a:r>
+              <a:rPr sz="1200" b="0">
+                <a:solidFill>
+                  <a:srgbClr val="24292F"/>
+                </a:solidFill>
+                <a:latin typeface="微软雅黑"/>
+                <a:ea typeface="微软雅黑"/>
+                <a:cs typeface="微软雅黑"/>
+              </a:rPr>
+              <a:t>判断一句结论是否越界</a:t>
+            </a:r>
+          </a:p>
+          <a:p xmlns:a="http://schemas.openxmlformats.org/drawingml/2006/main">
+            <a:r>
+              <a:rPr sz="1200" b="0">
+                <a:solidFill>
+                  <a:srgbClr val="24292F"/>
+                </a:solidFill>
+                <a:latin typeface="微软雅黑"/>
+                <a:ea typeface="微软雅黑"/>
+                <a:cs typeface="微软雅黑"/>
+              </a:rPr>
+              <a:t/>
+            </a:r>
+          </a:p>
+          <a:p xmlns:a="http://schemas.openxmlformats.org/drawingml/2006/main">
+            <a:r>
+              <a:rPr sz="1200" b="0">
+                <a:solidFill>
+                  <a:srgbClr val="24292F"/>
+                </a:solidFill>
+                <a:latin typeface="微软雅黑"/>
+                <a:ea typeface="微软雅黑"/>
+                <a:cs typeface="微软雅黑"/>
+              </a:rPr>
+              <a:t>来源与边界：</a:t>
+            </a:r>
+          </a:p>
+          <a:p xmlns:a="http://schemas.openxmlformats.org/drawingml/2006/main">
+            <a:r>
+              <a:rPr sz="1200" b="0">
+                <a:solidFill>
+                  <a:srgbClr val="24292F"/>
+                </a:solidFill>
+                <a:latin typeface="微软雅黑"/>
+                <a:ea typeface="微软雅黑"/>
+                <a:cs typeface="微软雅黑"/>
+              </a:rPr>
+              <a:t>/Users/bright/Projects/courses/graduate/lessons/lesson-02/handout.md</a:t>
+            </a:r>
+          </a:p>
+          <a:p xmlns:a="http://schemas.openxmlformats.org/drawingml/2006/main">
+            <a:r>
+              <a:rPr sz="1200" b="0">
+                <a:solidFill>
+                  <a:srgbClr val="24292F"/>
+                </a:solidFill>
+                <a:latin typeface="微软雅黑"/>
+                <a:ea typeface="微软雅黑"/>
+                <a:cs typeface="微软雅黑"/>
+              </a:rPr>
+              <a:t/>
+            </a:r>
+          </a:p>
+          <a:p xmlns:a="http://schemas.openxmlformats.org/drawingml/2006/main">
+            <a:r>
+              <a:rPr sz="1200" b="0">
+                <a:solidFill>
+                  <a:srgbClr val="24292F"/>
+                </a:solidFill>
+                <a:latin typeface="微软雅黑"/>
+                <a:ea typeface="微软雅黑"/>
+                <a:cs typeface="微软雅黑"/>
+              </a:rPr>
               <a:t>[Sources]</a:t>
             </a:r>
           </a:p>
@@ -915,7 +1318,33 @@
                 <a:ea typeface="微软雅黑"/>
                 <a:cs typeface="微软雅黑"/>
               </a:rPr>
-              <a:t>- lessons/lesson-02/handout.md</a:t>
+              <a:t/>
+            </a:r>
+          </a:p>
+          <a:p xmlns:a="http://schemas.openxmlformats.org/drawingml/2006/main">
+            <a:r>
+              <a:rPr sz="1200" b="0">
+                <a:solidFill>
+                  <a:srgbClr val="24292F"/>
+                </a:solidFill>
+                <a:latin typeface="微软雅黑"/>
+                <a:ea typeface="微软雅黑"/>
+                <a:cs typeface="微软雅黑"/>
+              </a:rPr>
+              <a:t>- 本课 handout.md 与 slides.md</a:t>
+            </a:r>
+          </a:p>
+          <a:p xmlns:a="http://schemas.openxmlformats.org/drawingml/2006/main">
+            <a:r>
+              <a:rPr sz="1200" b="0">
+                <a:solidFill>
+                  <a:srgbClr val="24292F"/>
+                </a:solidFill>
+                <a:latin typeface="微软雅黑"/>
+                <a:ea typeface="微软雅黑"/>
+                <a:cs typeface="微软雅黑"/>
+              </a:rPr>
+              <a:t/>
             </a:r>
           </a:p>
           <a:p xmlns:a="http://schemas.openxmlformats.org/drawingml/2006/main">
@@ -1006,33 +1435,20 @@
                 <a:ea typeface="微软雅黑"/>
                 <a:cs typeface="微软雅黑"/>
               </a:rPr>
-              <a:t>页面任务：展示单一审批的失败</a:t>
-            </a:r>
-          </a:p>
-          <a:p xmlns:a="http://schemas.openxmlformats.org/drawingml/2006/main">
-            <a:r>
-              <a:rPr sz="1200" b="0">
-                <a:solidFill>
-                  <a:srgbClr val="24292F"/>
-                </a:solidFill>
-                <a:latin typeface="微软雅黑"/>
-                <a:ea typeface="微软雅黑"/>
-                <a:cs typeface="微软雅黑"/>
-              </a:rPr>
-              <a:t>教师讲述：指标变更必须变成版本化文件和 diff，而非口头点击。</a:t>
-            </a:r>
-          </a:p>
-          <a:p xmlns:a="http://schemas.openxmlformats.org/drawingml/2006/main">
-            <a:r>
-              <a:rPr sz="1200" b="0">
-                <a:solidFill>
-                  <a:srgbClr val="24292F"/>
-                </a:solidFill>
-                <a:latin typeface="微软雅黑"/>
-                <a:ea typeface="微软雅黑"/>
-                <a:cs typeface="微软雅黑"/>
-              </a:rPr>
-              <a:t>学生动作：指出审批流程还缺什么</a:t>
+              <a:t>页面：P12 批准必须落实为协议变更</a:t>
+            </a:r>
+          </a:p>
+          <a:p xmlns:a="http://schemas.openxmlformats.org/drawingml/2006/main">
+            <a:r>
+              <a:rPr sz="1200" b="0">
+                <a:solidFill>
+                  <a:srgbClr val="24292F"/>
+                </a:solidFill>
+                <a:latin typeface="微软雅黑"/>
+                <a:ea typeface="微软雅黑"/>
+                <a:cs typeface="微软雅黑"/>
+              </a:rPr>
+              <a:t/>
             </a:r>
           </a:p>
           <a:p xmlns:a="http://schemas.openxmlformats.org/drawingml/2006/main">
@@ -1058,32 +1474,6 @@
                 <a:ea typeface="微软雅黑"/>
                 <a:cs typeface="微软雅黑"/>
               </a:rPr>
-              <a:t>屏显中的课堂构造案例不代表实测结果。</a:t>
-            </a:r>
-          </a:p>
-          <a:p xmlns:a="http://schemas.openxmlformats.org/drawingml/2006/main">
-            <a:r>
-              <a:rPr sz="1200" b="0">
-                <a:solidFill>
-                  <a:srgbClr val="24292F"/>
-                </a:solidFill>
-                <a:latin typeface="微软雅黑"/>
-                <a:ea typeface="微软雅黑"/>
-                <a:cs typeface="微软雅黑"/>
-              </a:rPr>
-              <a:t>核验日期：2026-09-15。</a:t>
-            </a:r>
-          </a:p>
-          <a:p xmlns:a="http://schemas.openxmlformats.org/drawingml/2006/main">
-            <a:r>
-              <a:rPr sz="1200" b="0">
-                <a:solidFill>
-                  <a:srgbClr val="24292F"/>
-                </a:solidFill>
-                <a:latin typeface="微软雅黑"/>
-                <a:ea typeface="微软雅黑"/>
-                <a:cs typeface="微软雅黑"/>
-              </a:rPr>
               <a:t/>
             </a:r>
           </a:p>
@@ -1097,6 +1487,162 @@
                 <a:ea typeface="微软雅黑"/>
                 <a:cs typeface="微软雅黑"/>
               </a:rPr>
+              <a:t>屏显核对：</a:t>
+            </a:r>
+          </a:p>
+          <a:p xmlns:a="http://schemas.openxmlformats.org/drawingml/2006/main">
+            <a:r>
+              <a:rPr sz="1200" b="0">
+                <a:solidFill>
+                  <a:srgbClr val="24292F"/>
+                </a:solidFill>
+                <a:latin typeface="微软雅黑"/>
+                <a:ea typeface="微软雅黑"/>
+                <a:cs typeface="微软雅黑"/>
+              </a:rPr>
+              <a:t>课堂构造的失败情境：看到结果后更换主指标；只有一句“同意修改”；旧协议被覆盖 / 更换理由没有留下 / 只报告新指标的好结果；可核对的协议修订；保留；原主指标与原结果；说明；变更动机和适用范围；写回；新旧协议差异与批准记录；报告；区分原定分析与事后分析</a:t>
+            </a:r>
+          </a:p>
+          <a:p xmlns:a="http://schemas.openxmlformats.org/drawingml/2006/main">
+            <a:r>
+              <a:rPr sz="1200" b="0">
+                <a:solidFill>
+                  <a:srgbClr val="24292F"/>
+                </a:solidFill>
+                <a:latin typeface="微软雅黑"/>
+                <a:ea typeface="微软雅黑"/>
+                <a:cs typeface="微软雅黑"/>
+              </a:rPr>
+              <a:t/>
+            </a:r>
+          </a:p>
+          <a:p xmlns:a="http://schemas.openxmlformats.org/drawingml/2006/main">
+            <a:r>
+              <a:rPr sz="1200" b="0">
+                <a:solidFill>
+                  <a:srgbClr val="24292F"/>
+                </a:solidFill>
+                <a:latin typeface="微软雅黑"/>
+                <a:ea typeface="微软雅黑"/>
+                <a:cs typeface="微软雅黑"/>
+              </a:rPr>
+              <a:t>教师讲述：</a:t>
+            </a:r>
+          </a:p>
+          <a:p xmlns:a="http://schemas.openxmlformats.org/drawingml/2006/main">
+            <a:r>
+              <a:rPr sz="1200" b="0">
+                <a:solidFill>
+                  <a:srgbClr val="24292F"/>
+                </a:solidFill>
+                <a:latin typeface="微软雅黑"/>
+                <a:ea typeface="微软雅黑"/>
+                <a:cs typeface="微软雅黑"/>
+              </a:rPr>
+              <a:t>指标变更必须变成版本化文件和 diff，而非口头点击。</a:t>
+            </a:r>
+          </a:p>
+          <a:p xmlns:a="http://schemas.openxmlformats.org/drawingml/2006/main">
+            <a:r>
+              <a:rPr sz="1200" b="0">
+                <a:solidFill>
+                  <a:srgbClr val="24292F"/>
+                </a:solidFill>
+                <a:latin typeface="微软雅黑"/>
+                <a:ea typeface="微软雅黑"/>
+                <a:cs typeface="微软雅黑"/>
+              </a:rPr>
+              <a:t/>
+            </a:r>
+          </a:p>
+          <a:p xmlns:a="http://schemas.openxmlformats.org/drawingml/2006/main">
+            <a:r>
+              <a:rPr sz="1200" b="0">
+                <a:solidFill>
+                  <a:srgbClr val="24292F"/>
+                </a:solidFill>
+                <a:latin typeface="微软雅黑"/>
+                <a:ea typeface="微软雅黑"/>
+                <a:cs typeface="微软雅黑"/>
+              </a:rPr>
+              <a:t>学生动作：</a:t>
+            </a:r>
+          </a:p>
+          <a:p xmlns:a="http://schemas.openxmlformats.org/drawingml/2006/main">
+            <a:r>
+              <a:rPr sz="1200" b="0">
+                <a:solidFill>
+                  <a:srgbClr val="24292F"/>
+                </a:solidFill>
+                <a:latin typeface="微软雅黑"/>
+                <a:ea typeface="微软雅黑"/>
+                <a:cs typeface="微软雅黑"/>
+              </a:rPr>
+              <a:t>指出审批流程还缺什么</a:t>
+            </a:r>
+          </a:p>
+          <a:p xmlns:a="http://schemas.openxmlformats.org/drawingml/2006/main">
+            <a:r>
+              <a:rPr sz="1200" b="0">
+                <a:solidFill>
+                  <a:srgbClr val="24292F"/>
+                </a:solidFill>
+                <a:latin typeface="微软雅黑"/>
+                <a:ea typeface="微软雅黑"/>
+                <a:cs typeface="微软雅黑"/>
+              </a:rPr>
+              <a:t/>
+            </a:r>
+          </a:p>
+          <a:p xmlns:a="http://schemas.openxmlformats.org/drawingml/2006/main">
+            <a:r>
+              <a:rPr sz="1200" b="0">
+                <a:solidFill>
+                  <a:srgbClr val="24292F"/>
+                </a:solidFill>
+                <a:latin typeface="微软雅黑"/>
+                <a:ea typeface="微软雅黑"/>
+                <a:cs typeface="微软雅黑"/>
+              </a:rPr>
+              <a:t>来源与边界：</a:t>
+            </a:r>
+          </a:p>
+          <a:p xmlns:a="http://schemas.openxmlformats.org/drawingml/2006/main">
+            <a:r>
+              <a:rPr sz="1200" b="0">
+                <a:solidFill>
+                  <a:srgbClr val="24292F"/>
+                </a:solidFill>
+                <a:latin typeface="微软雅黑"/>
+                <a:ea typeface="微软雅黑"/>
+                <a:cs typeface="微软雅黑"/>
+              </a:rPr>
+              <a:t>/Users/bright/Projects/courses/graduate/lessons/lesson-02/handout.md</a:t>
+            </a:r>
+          </a:p>
+          <a:p xmlns:a="http://schemas.openxmlformats.org/drawingml/2006/main">
+            <a:r>
+              <a:rPr sz="1200" b="0">
+                <a:solidFill>
+                  <a:srgbClr val="24292F"/>
+                </a:solidFill>
+                <a:latin typeface="微软雅黑"/>
+                <a:ea typeface="微软雅黑"/>
+                <a:cs typeface="微软雅黑"/>
+              </a:rPr>
+              <a:t/>
+            </a:r>
+          </a:p>
+          <a:p xmlns:a="http://schemas.openxmlformats.org/drawingml/2006/main">
+            <a:r>
+              <a:rPr sz="1200" b="0">
+                <a:solidFill>
+                  <a:srgbClr val="24292F"/>
+                </a:solidFill>
+                <a:latin typeface="微软雅黑"/>
+                <a:ea typeface="微软雅黑"/>
+                <a:cs typeface="微软雅黑"/>
+              </a:rPr>
               <a:t>[Sources]</a:t>
             </a:r>
           </a:p>
@@ -1110,7 +1656,33 @@
                 <a:ea typeface="微软雅黑"/>
                 <a:cs typeface="微软雅黑"/>
               </a:rPr>
-              <a:t>- lessons/lesson-02/handout.md</a:t>
+              <a:t/>
+            </a:r>
+          </a:p>
+          <a:p xmlns:a="http://schemas.openxmlformats.org/drawingml/2006/main">
+            <a:r>
+              <a:rPr sz="1200" b="0">
+                <a:solidFill>
+                  <a:srgbClr val="24292F"/>
+                </a:solidFill>
+                <a:latin typeface="微软雅黑"/>
+                <a:ea typeface="微软雅黑"/>
+                <a:cs typeface="微软雅黑"/>
+              </a:rPr>
+              <a:t>- 本课 handout.md 与 slides.md</a:t>
+            </a:r>
+          </a:p>
+          <a:p xmlns:a="http://schemas.openxmlformats.org/drawingml/2006/main">
+            <a:r>
+              <a:rPr sz="1200" b="0">
+                <a:solidFill>
+                  <a:srgbClr val="24292F"/>
+                </a:solidFill>
+                <a:latin typeface="微软雅黑"/>
+                <a:ea typeface="微软雅黑"/>
+                <a:cs typeface="微软雅黑"/>
+              </a:rPr>
+              <a:t/>
             </a:r>
           </a:p>
           <a:p xmlns:a="http://schemas.openxmlformats.org/drawingml/2006/main">
@@ -1201,7 +1773,7 @@
                 <a:ea typeface="微软雅黑"/>
                 <a:cs typeface="微软雅黑"/>
               </a:rPr>
-              <a:t>研究 harness 的声明、检查、执行、例外处理与 trace 组成同一个边界机制。该图为课程教学结构示意，不声称现成产品会自动理解科研规范。执行环境需将声明配置为可落实的检查；无法自动判断的研究决定必须由人确认。每一步重新核对范围，人工批准不自动绕过其他条件。未获批准则停止。协议与权限声明在图顶部，循环及分支均为可编辑原生连接。</a:t>
+              <a:t>页面：P13 研究 harness：把边界落实到每一步</a:t>
             </a:r>
           </a:p>
           <a:p xmlns:a="http://schemas.openxmlformats.org/drawingml/2006/main">
@@ -1227,6 +1799,188 @@
                 <a:ea typeface="微软雅黑"/>
                 <a:cs typeface="微软雅黑"/>
               </a:rPr>
+              <a:t>讲义位置：§四、§五</a:t>
+            </a:r>
+          </a:p>
+          <a:p xmlns:a="http://schemas.openxmlformats.org/drawingml/2006/main">
+            <a:r>
+              <a:rPr sz="1200" b="0">
+                <a:solidFill>
+                  <a:srgbClr val="24292F"/>
+                </a:solidFill>
+                <a:latin typeface="微软雅黑"/>
+                <a:ea typeface="微软雅黑"/>
+                <a:cs typeface="微软雅黑"/>
+              </a:rPr>
+              <a:t/>
+            </a:r>
+          </a:p>
+          <a:p xmlns:a="http://schemas.openxmlformats.org/drawingml/2006/main">
+            <a:r>
+              <a:rPr sz="1200" b="0">
+                <a:solidFill>
+                  <a:srgbClr val="24292F"/>
+                </a:solidFill>
+                <a:latin typeface="微软雅黑"/>
+                <a:ea typeface="微软雅黑"/>
+                <a:cs typeface="微软雅黑"/>
+              </a:rPr>
+              <a:t>屏显核对：</a:t>
+            </a:r>
+          </a:p>
+          <a:p xmlns:a="http://schemas.openxmlformats.org/drawingml/2006/main">
+            <a:r>
+              <a:rPr sz="1200" b="0">
+                <a:solidFill>
+                  <a:srgbClr val="24292F"/>
+                </a:solidFill>
+                <a:latin typeface="微软雅黑"/>
+                <a:ea typeface="微软雅黑"/>
+                <a:cs typeface="微软雅黑"/>
+              </a:rPr>
+              <a:t>研究协议；目标、指标、停止条件；任务权限；可读、可写、可执行；研究者声明边界；动作提议；边界检查；受限执行；实际 trace；满足条件；按获批范围行动；diff、日志 / 与外部状态；人工确认例外；超出当前边界；获批：更新边界 / 并重新检查；停止；未获批准；下一动作仍经检查</a:t>
+            </a:r>
+          </a:p>
+          <a:p xmlns:a="http://schemas.openxmlformats.org/drawingml/2006/main">
+            <a:r>
+              <a:rPr sz="1200" b="0">
+                <a:solidFill>
+                  <a:srgbClr val="24292F"/>
+                </a:solidFill>
+                <a:latin typeface="微软雅黑"/>
+                <a:ea typeface="微软雅黑"/>
+                <a:cs typeface="微软雅黑"/>
+              </a:rPr>
+              <a:t/>
+            </a:r>
+          </a:p>
+          <a:p xmlns:a="http://schemas.openxmlformats.org/drawingml/2006/main">
+            <a:r>
+              <a:rPr sz="1200" b="0">
+                <a:solidFill>
+                  <a:srgbClr val="24292F"/>
+                </a:solidFill>
+                <a:latin typeface="微软雅黑"/>
+                <a:ea typeface="微软雅黑"/>
+                <a:cs typeface="微软雅黑"/>
+              </a:rPr>
+              <a:t>教师讲述：</a:t>
+            </a:r>
+          </a:p>
+          <a:p xmlns:a="http://schemas.openxmlformats.org/drawingml/2006/main">
+            <a:r>
+              <a:rPr sz="1200" b="0">
+                <a:solidFill>
+                  <a:srgbClr val="24292F"/>
+                </a:solidFill>
+                <a:latin typeface="微软雅黑"/>
+                <a:ea typeface="微软雅黑"/>
+                <a:cs typeface="微软雅黑"/>
+              </a:rPr>
+              <a:t>这一页是全课唯一定义位；OpenCode 只是一个执行实例。</a:t>
+            </a:r>
+          </a:p>
+          <a:p xmlns:a="http://schemas.openxmlformats.org/drawingml/2006/main">
+            <a:r>
+              <a:rPr sz="1200" b="0">
+                <a:solidFill>
+                  <a:srgbClr val="24292F"/>
+                </a:solidFill>
+                <a:latin typeface="微软雅黑"/>
+                <a:ea typeface="微软雅黑"/>
+                <a:cs typeface="微软雅黑"/>
+              </a:rPr>
+              <a:t/>
+            </a:r>
+          </a:p>
+          <a:p xmlns:a="http://schemas.openxmlformats.org/drawingml/2006/main">
+            <a:r>
+              <a:rPr sz="1200" b="0">
+                <a:solidFill>
+                  <a:srgbClr val="24292F"/>
+                </a:solidFill>
+                <a:latin typeface="微软雅黑"/>
+                <a:ea typeface="微软雅黑"/>
+                <a:cs typeface="微软雅黑"/>
+              </a:rPr>
+              <a:t>学生动作：</a:t>
+            </a:r>
+          </a:p>
+          <a:p xmlns:a="http://schemas.openxmlformats.org/drawingml/2006/main">
+            <a:r>
+              <a:rPr sz="1200" b="0">
+                <a:solidFill>
+                  <a:srgbClr val="24292F"/>
+                </a:solidFill>
+                <a:latin typeface="微软雅黑"/>
+                <a:ea typeface="微软雅黑"/>
+                <a:cs typeface="微软雅黑"/>
+              </a:rPr>
+              <a:t>用一句话解释 harness</a:t>
+            </a:r>
+          </a:p>
+          <a:p xmlns:a="http://schemas.openxmlformats.org/drawingml/2006/main">
+            <a:r>
+              <a:rPr sz="1200" b="0">
+                <a:solidFill>
+                  <a:srgbClr val="24292F"/>
+                </a:solidFill>
+                <a:latin typeface="微软雅黑"/>
+                <a:ea typeface="微软雅黑"/>
+                <a:cs typeface="微软雅黑"/>
+              </a:rPr>
+              <a:t/>
+            </a:r>
+          </a:p>
+          <a:p xmlns:a="http://schemas.openxmlformats.org/drawingml/2006/main">
+            <a:r>
+              <a:rPr sz="1200" b="0">
+                <a:solidFill>
+                  <a:srgbClr val="24292F"/>
+                </a:solidFill>
+                <a:latin typeface="微软雅黑"/>
+                <a:ea typeface="微软雅黑"/>
+                <a:cs typeface="微软雅黑"/>
+              </a:rPr>
+              <a:t>来源与边界：</a:t>
+            </a:r>
+          </a:p>
+          <a:p xmlns:a="http://schemas.openxmlformats.org/drawingml/2006/main">
+            <a:r>
+              <a:rPr sz="1200" b="0">
+                <a:solidFill>
+                  <a:srgbClr val="24292F"/>
+                </a:solidFill>
+                <a:latin typeface="微软雅黑"/>
+                <a:ea typeface="微软雅黑"/>
+                <a:cs typeface="微软雅黑"/>
+              </a:rPr>
+              <a:t>/Users/bright/Projects/courses/graduate/lessons/lesson-02/handout.md</a:t>
+            </a:r>
+          </a:p>
+          <a:p xmlns:a="http://schemas.openxmlformats.org/drawingml/2006/main">
+            <a:r>
+              <a:rPr sz="1200" b="0">
+                <a:solidFill>
+                  <a:srgbClr val="24292F"/>
+                </a:solidFill>
+                <a:latin typeface="微软雅黑"/>
+                <a:ea typeface="微软雅黑"/>
+                <a:cs typeface="微软雅黑"/>
+              </a:rPr>
+              <a:t/>
+            </a:r>
+          </a:p>
+          <a:p xmlns:a="http://schemas.openxmlformats.org/drawingml/2006/main">
+            <a:r>
+              <a:rPr sz="1200" b="0">
+                <a:solidFill>
+                  <a:srgbClr val="24292F"/>
+                </a:solidFill>
+                <a:latin typeface="微软雅黑"/>
+                <a:ea typeface="微软雅黑"/>
+                <a:cs typeface="微软雅黑"/>
+              </a:rPr>
               <a:t>[Sources]</a:t>
             </a:r>
           </a:p>
@@ -1240,33 +1994,33 @@
                 <a:ea typeface="微软雅黑"/>
                 <a:cs typeface="微软雅黑"/>
               </a:rPr>
-              <a:t>- lessons/lesson-02/handout.md §四 研究 harness</a:t>
-            </a:r>
-          </a:p>
-          <a:p xmlns:a="http://schemas.openxmlformats.org/drawingml/2006/main">
-            <a:r>
-              <a:rPr sz="1200" b="0">
-                <a:solidFill>
-                  <a:srgbClr val="24292F"/>
-                </a:solidFill>
-                <a:latin typeface="微软雅黑"/>
-                <a:ea typeface="微软雅黑"/>
-                <a:cs typeface="微软雅黑"/>
-              </a:rPr>
-              <a:t>- lessons/lesson-02/handout.md §五 权限矩阵</a:t>
-            </a:r>
-          </a:p>
-          <a:p xmlns:a="http://schemas.openxmlformats.org/drawingml/2006/main">
-            <a:r>
-              <a:rPr sz="1200" b="0">
-                <a:solidFill>
-                  <a:srgbClr val="24292F"/>
-                </a:solidFill>
-                <a:latin typeface="微软雅黑"/>
-                <a:ea typeface="微软雅黑"/>
-                <a:cs typeface="微软雅黑"/>
-              </a:rPr>
-              <a:t>- lessons/lesson-02/slides.md P13</a:t>
+              <a:t/>
+            </a:r>
+          </a:p>
+          <a:p xmlns:a="http://schemas.openxmlformats.org/drawingml/2006/main">
+            <a:r>
+              <a:rPr sz="1200" b="0">
+                <a:solidFill>
+                  <a:srgbClr val="24292F"/>
+                </a:solidFill>
+                <a:latin typeface="微软雅黑"/>
+                <a:ea typeface="微软雅黑"/>
+                <a:cs typeface="微软雅黑"/>
+              </a:rPr>
+              <a:t>- 本课 handout.md 与 slides.md</a:t>
+            </a:r>
+          </a:p>
+          <a:p xmlns:a="http://schemas.openxmlformats.org/drawingml/2006/main">
+            <a:r>
+              <a:rPr sz="1200" b="0">
+                <a:solidFill>
+                  <a:srgbClr val="24292F"/>
+                </a:solidFill>
+                <a:latin typeface="微软雅黑"/>
+                <a:ea typeface="微软雅黑"/>
+                <a:cs typeface="微软雅黑"/>
+              </a:rPr>
+              <a:t/>
             </a:r>
           </a:p>
           <a:p xmlns:a="http://schemas.openxmlformats.org/drawingml/2006/main">
@@ -1357,33 +2111,20 @@
                 <a:ea typeface="微软雅黑"/>
                 <a:cs typeface="微软雅黑"/>
               </a:rPr>
-              <a:t>页面任务：建立两项最重要原则</a:t>
-            </a:r>
-          </a:p>
-          <a:p xmlns:a="http://schemas.openxmlformats.org/drawingml/2006/main">
-            <a:r>
-              <a:rPr sz="1200" b="0">
-                <a:solidFill>
-                  <a:srgbClr val="24292F"/>
-                </a:solidFill>
-                <a:latin typeface="微软雅黑"/>
-                <a:ea typeface="微软雅黑"/>
-                <a:cs typeface="微软雅黑"/>
-              </a:rPr>
-              <a:t>教师讲述：另外两项原则放到备注与讲义，不在首屏并列四张卡。</a:t>
-            </a:r>
-          </a:p>
-          <a:p xmlns:a="http://schemas.openxmlformats.org/drawingml/2006/main">
-            <a:r>
-              <a:rPr sz="1200" b="0">
-                <a:solidFill>
-                  <a:srgbClr val="24292F"/>
-                </a:solidFill>
-                <a:latin typeface="微软雅黑"/>
-                <a:ea typeface="微软雅黑"/>
-                <a:cs typeface="微软雅黑"/>
-              </a:rPr>
-              <a:t>学生动作：将一个过宽权限收窄</a:t>
+              <a:t>页面：P14 默认拒绝与最小权限</a:t>
+            </a:r>
+          </a:p>
+          <a:p xmlns:a="http://schemas.openxmlformats.org/drawingml/2006/main">
+            <a:r>
+              <a:rPr sz="1200" b="0">
+                <a:solidFill>
+                  <a:srgbClr val="24292F"/>
+                </a:solidFill>
+                <a:latin typeface="微软雅黑"/>
+                <a:ea typeface="微软雅黑"/>
+                <a:cs typeface="微软雅黑"/>
+              </a:rPr>
+              <a:t/>
             </a:r>
           </a:p>
           <a:p xmlns:a="http://schemas.openxmlformats.org/drawingml/2006/main">
@@ -1409,32 +2150,6 @@
                 <a:ea typeface="微软雅黑"/>
                 <a:cs typeface="微软雅黑"/>
               </a:rPr>
-              <a:t>屏显中的课堂构造案例不代表实测结果。</a:t>
-            </a:r>
-          </a:p>
-          <a:p xmlns:a="http://schemas.openxmlformats.org/drawingml/2006/main">
-            <a:r>
-              <a:rPr sz="1200" b="0">
-                <a:solidFill>
-                  <a:srgbClr val="24292F"/>
-                </a:solidFill>
-                <a:latin typeface="微软雅黑"/>
-                <a:ea typeface="微软雅黑"/>
-                <a:cs typeface="微软雅黑"/>
-              </a:rPr>
-              <a:t>核验日期：2026-09-15。</a:t>
-            </a:r>
-          </a:p>
-          <a:p xmlns:a="http://schemas.openxmlformats.org/drawingml/2006/main">
-            <a:r>
-              <a:rPr sz="1200" b="0">
-                <a:solidFill>
-                  <a:srgbClr val="24292F"/>
-                </a:solidFill>
-                <a:latin typeface="微软雅黑"/>
-                <a:ea typeface="微软雅黑"/>
-                <a:cs typeface="微软雅黑"/>
-              </a:rPr>
               <a:t/>
             </a:r>
           </a:p>
@@ -1448,6 +2163,162 @@
                 <a:ea typeface="微软雅黑"/>
                 <a:cs typeface="微软雅黑"/>
               </a:rPr>
+              <a:t>屏显核对：</a:t>
+            </a:r>
+          </a:p>
+          <a:p xmlns:a="http://schemas.openxmlformats.org/drawingml/2006/main">
+            <a:r>
+              <a:rPr sz="1200" b="0">
+                <a:solidFill>
+                  <a:srgbClr val="24292F"/>
+                </a:solidFill>
+                <a:latin typeface="微软雅黑"/>
+                <a:ea typeface="微软雅黑"/>
+                <a:cs typeface="微软雅黑"/>
+              </a:rPr>
+              <a:t>默认拒绝；没有明确授权的动作 / 先停在检查点。；例如：联网、外发、额外写入；最小权限；为当前任务开放 / 刚好足够的范围。；具体到文件、段落与动作；任务或动作变化后，重新检查授权。</a:t>
+            </a:r>
+          </a:p>
+          <a:p xmlns:a="http://schemas.openxmlformats.org/drawingml/2006/main">
+            <a:r>
+              <a:rPr sz="1200" b="0">
+                <a:solidFill>
+                  <a:srgbClr val="24292F"/>
+                </a:solidFill>
+                <a:latin typeface="微软雅黑"/>
+                <a:ea typeface="微软雅黑"/>
+                <a:cs typeface="微软雅黑"/>
+              </a:rPr>
+              <a:t/>
+            </a:r>
+          </a:p>
+          <a:p xmlns:a="http://schemas.openxmlformats.org/drawingml/2006/main">
+            <a:r>
+              <a:rPr sz="1200" b="0">
+                <a:solidFill>
+                  <a:srgbClr val="24292F"/>
+                </a:solidFill>
+                <a:latin typeface="微软雅黑"/>
+                <a:ea typeface="微软雅黑"/>
+                <a:cs typeface="微软雅黑"/>
+              </a:rPr>
+              <a:t>教师讲述：</a:t>
+            </a:r>
+          </a:p>
+          <a:p xmlns:a="http://schemas.openxmlformats.org/drawingml/2006/main">
+            <a:r>
+              <a:rPr sz="1200" b="0">
+                <a:solidFill>
+                  <a:srgbClr val="24292F"/>
+                </a:solidFill>
+                <a:latin typeface="微软雅黑"/>
+                <a:ea typeface="微软雅黑"/>
+                <a:cs typeface="微软雅黑"/>
+              </a:rPr>
+              <a:t>另外两项原则放到备注与讲义，不在首屏并列四张卡。</a:t>
+            </a:r>
+          </a:p>
+          <a:p xmlns:a="http://schemas.openxmlformats.org/drawingml/2006/main">
+            <a:r>
+              <a:rPr sz="1200" b="0">
+                <a:solidFill>
+                  <a:srgbClr val="24292F"/>
+                </a:solidFill>
+                <a:latin typeface="微软雅黑"/>
+                <a:ea typeface="微软雅黑"/>
+                <a:cs typeface="微软雅黑"/>
+              </a:rPr>
+              <a:t/>
+            </a:r>
+          </a:p>
+          <a:p xmlns:a="http://schemas.openxmlformats.org/drawingml/2006/main">
+            <a:r>
+              <a:rPr sz="1200" b="0">
+                <a:solidFill>
+                  <a:srgbClr val="24292F"/>
+                </a:solidFill>
+                <a:latin typeface="微软雅黑"/>
+                <a:ea typeface="微软雅黑"/>
+                <a:cs typeface="微软雅黑"/>
+              </a:rPr>
+              <a:t>学生动作：</a:t>
+            </a:r>
+          </a:p>
+          <a:p xmlns:a="http://schemas.openxmlformats.org/drawingml/2006/main">
+            <a:r>
+              <a:rPr sz="1200" b="0">
+                <a:solidFill>
+                  <a:srgbClr val="24292F"/>
+                </a:solidFill>
+                <a:latin typeface="微软雅黑"/>
+                <a:ea typeface="微软雅黑"/>
+                <a:cs typeface="微软雅黑"/>
+              </a:rPr>
+              <a:t>将一个过宽权限收窄</a:t>
+            </a:r>
+          </a:p>
+          <a:p xmlns:a="http://schemas.openxmlformats.org/drawingml/2006/main">
+            <a:r>
+              <a:rPr sz="1200" b="0">
+                <a:solidFill>
+                  <a:srgbClr val="24292F"/>
+                </a:solidFill>
+                <a:latin typeface="微软雅黑"/>
+                <a:ea typeface="微软雅黑"/>
+                <a:cs typeface="微软雅黑"/>
+              </a:rPr>
+              <a:t/>
+            </a:r>
+          </a:p>
+          <a:p xmlns:a="http://schemas.openxmlformats.org/drawingml/2006/main">
+            <a:r>
+              <a:rPr sz="1200" b="0">
+                <a:solidFill>
+                  <a:srgbClr val="24292F"/>
+                </a:solidFill>
+                <a:latin typeface="微软雅黑"/>
+                <a:ea typeface="微软雅黑"/>
+                <a:cs typeface="微软雅黑"/>
+              </a:rPr>
+              <a:t>来源与边界：</a:t>
+            </a:r>
+          </a:p>
+          <a:p xmlns:a="http://schemas.openxmlformats.org/drawingml/2006/main">
+            <a:r>
+              <a:rPr sz="1200" b="0">
+                <a:solidFill>
+                  <a:srgbClr val="24292F"/>
+                </a:solidFill>
+                <a:latin typeface="微软雅黑"/>
+                <a:ea typeface="微软雅黑"/>
+                <a:cs typeface="微软雅黑"/>
+              </a:rPr>
+              <a:t>/Users/bright/Projects/courses/graduate/lessons/lesson-02/handout.md</a:t>
+            </a:r>
+          </a:p>
+          <a:p xmlns:a="http://schemas.openxmlformats.org/drawingml/2006/main">
+            <a:r>
+              <a:rPr sz="1200" b="0">
+                <a:solidFill>
+                  <a:srgbClr val="24292F"/>
+                </a:solidFill>
+                <a:latin typeface="微软雅黑"/>
+                <a:ea typeface="微软雅黑"/>
+                <a:cs typeface="微软雅黑"/>
+              </a:rPr>
+              <a:t/>
+            </a:r>
+          </a:p>
+          <a:p xmlns:a="http://schemas.openxmlformats.org/drawingml/2006/main">
+            <a:r>
+              <a:rPr sz="1200" b="0">
+                <a:solidFill>
+                  <a:srgbClr val="24292F"/>
+                </a:solidFill>
+                <a:latin typeface="微软雅黑"/>
+                <a:ea typeface="微软雅黑"/>
+                <a:cs typeface="微软雅黑"/>
+              </a:rPr>
               <a:t>[Sources]</a:t>
             </a:r>
           </a:p>
@@ -1461,7 +2332,33 @@
                 <a:ea typeface="微软雅黑"/>
                 <a:cs typeface="微软雅黑"/>
               </a:rPr>
-              <a:t>- lessons/lesson-02/handout.md</a:t>
+              <a:t/>
+            </a:r>
+          </a:p>
+          <a:p xmlns:a="http://schemas.openxmlformats.org/drawingml/2006/main">
+            <a:r>
+              <a:rPr sz="1200" b="0">
+                <a:solidFill>
+                  <a:srgbClr val="24292F"/>
+                </a:solidFill>
+                <a:latin typeface="微软雅黑"/>
+                <a:ea typeface="微软雅黑"/>
+                <a:cs typeface="微软雅黑"/>
+              </a:rPr>
+              <a:t>- 本课 handout.md 与 slides.md</a:t>
+            </a:r>
+          </a:p>
+          <a:p xmlns:a="http://schemas.openxmlformats.org/drawingml/2006/main">
+            <a:r>
+              <a:rPr sz="1200" b="0">
+                <a:solidFill>
+                  <a:srgbClr val="24292F"/>
+                </a:solidFill>
+                <a:latin typeface="微软雅黑"/>
+                <a:ea typeface="微软雅黑"/>
+                <a:cs typeface="微软雅黑"/>
+              </a:rPr>
+              <a:t/>
             </a:r>
           </a:p>
           <a:p xmlns:a="http://schemas.openxmlformats.org/drawingml/2006/main">
@@ -1552,7 +2449,7 @@
                 <a:ea typeface="微软雅黑"/>
                 <a:cs typeface="微软雅黑"/>
               </a:rPr>
-              <a:t>这是同一未公开合作稿案例的第二轮权限：原稿保留在本地且不向 Agent 开放，研究者人工抽象问题或选择获准公开摘要。第一轮仅只读审查；人工确认后才允许写回 agent-permissions.md 一行、ethics-and-compliance.md 一张风险卡、ai-usage-log.md 一条记录。表格为课堂构造填写示例，不代表对真实材料的上传授权。实际任务按更窄授权执行。让学生指出确认点是否可操作。</a:t>
+              <a:t>页面：P15 权限矩阵：先写清一次任务授权</a:t>
             </a:r>
           </a:p>
           <a:p xmlns:a="http://schemas.openxmlformats.org/drawingml/2006/main">
@@ -1578,6 +2475,188 @@
                 <a:ea typeface="微软雅黑"/>
                 <a:cs typeface="微软雅黑"/>
               </a:rPr>
+              <a:t>讲义位置：§五</a:t>
+            </a:r>
+          </a:p>
+          <a:p xmlns:a="http://schemas.openxmlformats.org/drawingml/2006/main">
+            <a:r>
+              <a:rPr sz="1200" b="0">
+                <a:solidFill>
+                  <a:srgbClr val="24292F"/>
+                </a:solidFill>
+                <a:latin typeface="微软雅黑"/>
+                <a:ea typeface="微软雅黑"/>
+                <a:cs typeface="微软雅黑"/>
+              </a:rPr>
+              <a:t/>
+            </a:r>
+          </a:p>
+          <a:p xmlns:a="http://schemas.openxmlformats.org/drawingml/2006/main">
+            <a:r>
+              <a:rPr sz="1200" b="0">
+                <a:solidFill>
+                  <a:srgbClr val="24292F"/>
+                </a:solidFill>
+                <a:latin typeface="微软雅黑"/>
+                <a:ea typeface="微软雅黑"/>
+                <a:cs typeface="微软雅黑"/>
+              </a:rPr>
+              <a:t>屏显核对：</a:t>
+            </a:r>
+          </a:p>
+          <a:p xmlns:a="http://schemas.openxmlformats.org/drawingml/2006/main">
+            <a:r>
+              <a:rPr sz="1200" b="0">
+                <a:solidFill>
+                  <a:srgbClr val="24292F"/>
+                </a:solidFill>
+                <a:latin typeface="微软雅黑"/>
+                <a:ea typeface="微软雅黑"/>
+                <a:cs typeface="微软雅黑"/>
+              </a:rPr>
+              <a:t>课堂构造案例：为未公开合作稿选择可授权替代输入。对象或能力：合作稿的替代输入；只读范围：人工抽象问题与已批准公开摘要；可写范围：权限一行、风险卡、使用记录；是否允许执行：本次不运行命令、不联网；人工确认点：写回前确认文件、段落与范围；禁止事项：读取或外发原稿、改问题或指标。</a:t>
+            </a:r>
+          </a:p>
+          <a:p xmlns:a="http://schemas.openxmlformats.org/drawingml/2006/main">
+            <a:r>
+              <a:rPr sz="1200" b="0">
+                <a:solidFill>
+                  <a:srgbClr val="24292F"/>
+                </a:solidFill>
+                <a:latin typeface="微软雅黑"/>
+                <a:ea typeface="微软雅黑"/>
+                <a:cs typeface="微软雅黑"/>
+              </a:rPr>
+              <a:t/>
+            </a:r>
+          </a:p>
+          <a:p xmlns:a="http://schemas.openxmlformats.org/drawingml/2006/main">
+            <a:r>
+              <a:rPr sz="1200" b="0">
+                <a:solidFill>
+                  <a:srgbClr val="24292F"/>
+                </a:solidFill>
+                <a:latin typeface="微软雅黑"/>
+                <a:ea typeface="微软雅黑"/>
+                <a:cs typeface="微软雅黑"/>
+              </a:rPr>
+              <a:t>教师讲述：</a:t>
+            </a:r>
+          </a:p>
+          <a:p xmlns:a="http://schemas.openxmlformats.org/drawingml/2006/main">
+            <a:r>
+              <a:rPr sz="1200" b="0">
+                <a:solidFill>
+                  <a:srgbClr val="24292F"/>
+                </a:solidFill>
+                <a:latin typeface="微软雅黑"/>
+                <a:ea typeface="微软雅黑"/>
+                <a:cs typeface="微软雅黑"/>
+              </a:rPr>
+              <a:t>一行同时承载对象、只读/可写、确认点和禁止项。</a:t>
+            </a:r>
+          </a:p>
+          <a:p xmlns:a="http://schemas.openxmlformats.org/drawingml/2006/main">
+            <a:r>
+              <a:rPr sz="1200" b="0">
+                <a:solidFill>
+                  <a:srgbClr val="24292F"/>
+                </a:solidFill>
+                <a:latin typeface="微软雅黑"/>
+                <a:ea typeface="微软雅黑"/>
+                <a:cs typeface="微软雅黑"/>
+              </a:rPr>
+              <a:t/>
+            </a:r>
+          </a:p>
+          <a:p xmlns:a="http://schemas.openxmlformats.org/drawingml/2006/main">
+            <a:r>
+              <a:rPr sz="1200" b="0">
+                <a:solidFill>
+                  <a:srgbClr val="24292F"/>
+                </a:solidFill>
+                <a:latin typeface="微软雅黑"/>
+                <a:ea typeface="微软雅黑"/>
+                <a:cs typeface="微软雅黑"/>
+              </a:rPr>
+              <a:t>学生动作：</a:t>
+            </a:r>
+          </a:p>
+          <a:p xmlns:a="http://schemas.openxmlformats.org/drawingml/2006/main">
+            <a:r>
+              <a:rPr sz="1200" b="0">
+                <a:solidFill>
+                  <a:srgbClr val="24292F"/>
+                </a:solidFill>
+                <a:latin typeface="微软雅黑"/>
+                <a:ea typeface="微软雅黑"/>
+                <a:cs typeface="微软雅黑"/>
+              </a:rPr>
+              <a:t>选择自己的一个科研动作填写</a:t>
+            </a:r>
+          </a:p>
+          <a:p xmlns:a="http://schemas.openxmlformats.org/drawingml/2006/main">
+            <a:r>
+              <a:rPr sz="1200" b="0">
+                <a:solidFill>
+                  <a:srgbClr val="24292F"/>
+                </a:solidFill>
+                <a:latin typeface="微软雅黑"/>
+                <a:ea typeface="微软雅黑"/>
+                <a:cs typeface="微软雅黑"/>
+              </a:rPr>
+              <a:t/>
+            </a:r>
+          </a:p>
+          <a:p xmlns:a="http://schemas.openxmlformats.org/drawingml/2006/main">
+            <a:r>
+              <a:rPr sz="1200" b="0">
+                <a:solidFill>
+                  <a:srgbClr val="24292F"/>
+                </a:solidFill>
+                <a:latin typeface="微软雅黑"/>
+                <a:ea typeface="微软雅黑"/>
+                <a:cs typeface="微软雅黑"/>
+              </a:rPr>
+              <a:t>来源与边界：</a:t>
+            </a:r>
+          </a:p>
+          <a:p xmlns:a="http://schemas.openxmlformats.org/drawingml/2006/main">
+            <a:r>
+              <a:rPr sz="1200" b="0">
+                <a:solidFill>
+                  <a:srgbClr val="24292F"/>
+                </a:solidFill>
+                <a:latin typeface="微软雅黑"/>
+                <a:ea typeface="微软雅黑"/>
+                <a:cs typeface="微软雅黑"/>
+              </a:rPr>
+              <a:t>/Users/bright/Projects/courses/graduate/lessons/lesson-02/handout.md</a:t>
+            </a:r>
+          </a:p>
+          <a:p xmlns:a="http://schemas.openxmlformats.org/drawingml/2006/main">
+            <a:r>
+              <a:rPr sz="1200" b="0">
+                <a:solidFill>
+                  <a:srgbClr val="24292F"/>
+                </a:solidFill>
+                <a:latin typeface="微软雅黑"/>
+                <a:ea typeface="微软雅黑"/>
+                <a:cs typeface="微软雅黑"/>
+              </a:rPr>
+              <a:t/>
+            </a:r>
+          </a:p>
+          <a:p xmlns:a="http://schemas.openxmlformats.org/drawingml/2006/main">
+            <a:r>
+              <a:rPr sz="1200" b="0">
+                <a:solidFill>
+                  <a:srgbClr val="24292F"/>
+                </a:solidFill>
+                <a:latin typeface="微软雅黑"/>
+                <a:ea typeface="微软雅黑"/>
+                <a:cs typeface="微软雅黑"/>
+              </a:rPr>
               <a:t>[Sources]</a:t>
             </a:r>
           </a:p>
@@ -1591,46 +2670,33 @@
                 <a:ea typeface="微软雅黑"/>
                 <a:cs typeface="微软雅黑"/>
               </a:rPr>
-              <a:t>- course/starter-template.md §8</a:t>
-            </a:r>
-          </a:p>
-          <a:p xmlns:a="http://schemas.openxmlformats.org/drawingml/2006/main">
-            <a:r>
-              <a:rPr sz="1200" b="0">
-                <a:solidFill>
-                  <a:srgbClr val="24292F"/>
-                </a:solidFill>
-                <a:latin typeface="微软雅黑"/>
-                <a:ea typeface="微软雅黑"/>
-                <a:cs typeface="微软雅黑"/>
-              </a:rPr>
-              <a:t>- lessons/lesson-02/handout.md 同一合作稿案例的一行权限</a:t>
-            </a:r>
-          </a:p>
-          <a:p xmlns:a="http://schemas.openxmlformats.org/drawingml/2006/main">
-            <a:r>
-              <a:rPr sz="1200" b="0">
-                <a:solidFill>
-                  <a:srgbClr val="24292F"/>
-                </a:solidFill>
-                <a:latin typeface="微软雅黑"/>
-                <a:ea typeface="微软雅黑"/>
-                <a:cs typeface="微软雅黑"/>
-              </a:rPr>
-              <a:t>- lessons/lesson-02/classroom-pack.md</a:t>
-            </a:r>
-          </a:p>
-          <a:p xmlns:a="http://schemas.openxmlformats.org/drawingml/2006/main">
-            <a:r>
-              <a:rPr sz="1200" b="0">
-                <a:solidFill>
-                  <a:srgbClr val="24292F"/>
-                </a:solidFill>
-                <a:latin typeface="微软雅黑"/>
-                <a:ea typeface="微软雅黑"/>
-                <a:cs typeface="微软雅黑"/>
-              </a:rPr>
-              <a:t>- lessons/lesson-02/slides.md P15</a:t>
+              <a:t/>
+            </a:r>
+          </a:p>
+          <a:p xmlns:a="http://schemas.openxmlformats.org/drawingml/2006/main">
+            <a:r>
+              <a:rPr sz="1200" b="0">
+                <a:solidFill>
+                  <a:srgbClr val="24292F"/>
+                </a:solidFill>
+                <a:latin typeface="微软雅黑"/>
+                <a:ea typeface="微软雅黑"/>
+                <a:cs typeface="微软雅黑"/>
+              </a:rPr>
+              <a:t>- 本课 handout.md 与 slides.md</a:t>
+            </a:r>
+          </a:p>
+          <a:p xmlns:a="http://schemas.openxmlformats.org/drawingml/2006/main">
+            <a:r>
+              <a:rPr sz="1200" b="0">
+                <a:solidFill>
+                  <a:srgbClr val="24292F"/>
+                </a:solidFill>
+                <a:latin typeface="微软雅黑"/>
+                <a:ea typeface="微软雅黑"/>
+                <a:cs typeface="微软雅黑"/>
+              </a:rPr>
+              <a:t/>
             </a:r>
           </a:p>
           <a:p xmlns:a="http://schemas.openxmlformats.org/drawingml/2006/main">
@@ -1721,33 +2787,20 @@
                 <a:ea typeface="微软雅黑"/>
                 <a:cs typeface="微软雅黑"/>
               </a:rPr>
-              <a:t>页面任务：用配置对比而非抽象原则</a:t>
-            </a:r>
-          </a:p>
-          <a:p xmlns:a="http://schemas.openxmlformats.org/drawingml/2006/main">
-            <a:r>
-              <a:rPr sz="1200" b="0">
-                <a:solidFill>
-                  <a:srgbClr val="24292F"/>
-                </a:solidFill>
-                <a:latin typeface="微软雅黑"/>
-                <a:ea typeface="微软雅黑"/>
-                <a:cs typeface="微软雅黑"/>
-              </a:rPr>
-              <a:t>教师讲述：把环境差异翻译为路径、命令、网络和确认点。</a:t>
-            </a:r>
-          </a:p>
-          <a:p xmlns:a="http://schemas.openxmlformats.org/drawingml/2006/main">
-            <a:r>
-              <a:rPr sz="1200" b="0">
-                <a:solidFill>
-                  <a:srgbClr val="24292F"/>
-                </a:solidFill>
-                <a:latin typeface="微软雅黑"/>
-                <a:ea typeface="微软雅黑"/>
-                <a:cs typeface="微软雅黑"/>
-              </a:rPr>
-              <a:t>学生动作：圈出过宽配置的第一处风险</a:t>
+              <a:t>页面：P16 过宽授权与任务授权</a:t>
+            </a:r>
+          </a:p>
+          <a:p xmlns:a="http://schemas.openxmlformats.org/drawingml/2006/main">
+            <a:r>
+              <a:rPr sz="1200" b="0">
+                <a:solidFill>
+                  <a:srgbClr val="24292F"/>
+                </a:solidFill>
+                <a:latin typeface="微软雅黑"/>
+                <a:ea typeface="微软雅黑"/>
+                <a:cs typeface="微软雅黑"/>
+              </a:rPr>
+              <a:t/>
             </a:r>
           </a:p>
           <a:p xmlns:a="http://schemas.openxmlformats.org/drawingml/2006/main">
@@ -1773,32 +2826,6 @@
                 <a:ea typeface="微软雅黑"/>
                 <a:cs typeface="微软雅黑"/>
               </a:rPr>
-              <a:t>屏显中的课堂构造案例不代表实测结果。</a:t>
-            </a:r>
-          </a:p>
-          <a:p xmlns:a="http://schemas.openxmlformats.org/drawingml/2006/main">
-            <a:r>
-              <a:rPr sz="1200" b="0">
-                <a:solidFill>
-                  <a:srgbClr val="24292F"/>
-                </a:solidFill>
-                <a:latin typeface="微软雅黑"/>
-                <a:ea typeface="微软雅黑"/>
-                <a:cs typeface="微软雅黑"/>
-              </a:rPr>
-              <a:t>核验日期：2026-09-15。</a:t>
-            </a:r>
-          </a:p>
-          <a:p xmlns:a="http://schemas.openxmlformats.org/drawingml/2006/main">
-            <a:r>
-              <a:rPr sz="1200" b="0">
-                <a:solidFill>
-                  <a:srgbClr val="24292F"/>
-                </a:solidFill>
-                <a:latin typeface="微软雅黑"/>
-                <a:ea typeface="微软雅黑"/>
-                <a:cs typeface="微软雅黑"/>
-              </a:rPr>
               <a:t/>
             </a:r>
           </a:p>
@@ -1812,6 +2839,162 @@
                 <a:ea typeface="微软雅黑"/>
                 <a:cs typeface="微软雅黑"/>
               </a:rPr>
+              <a:t>屏显核对：</a:t>
+            </a:r>
+          </a:p>
+          <a:p xmlns:a="http://schemas.openxmlformats.org/drawingml/2006/main">
+            <a:r>
+              <a:rPr sz="1200" b="0">
+                <a:solidFill>
+                  <a:srgbClr val="24292F"/>
+                </a:solidFill>
+                <a:latin typeface="微软雅黑"/>
+                <a:ea typeface="微软雅黑"/>
+                <a:cs typeface="微软雅黑"/>
+              </a:rPr>
+              <a:t>课堂构造配置；过宽授权；READ    整个用户目录；WRITE   任意文件；RUN     任意命令；NETWORK on；CONFIRM 完成后告知；任务授权；READ    指定的公开材料；WRITE   获批文件与段落；RUN     本次不执行命令；NETWORK off；CONFIRM 写回前确认范围；先找到过宽范围，再说出怎样收窄。</a:t>
+            </a:r>
+          </a:p>
+          <a:p xmlns:a="http://schemas.openxmlformats.org/drawingml/2006/main">
+            <a:r>
+              <a:rPr sz="1200" b="0">
+                <a:solidFill>
+                  <a:srgbClr val="24292F"/>
+                </a:solidFill>
+                <a:latin typeface="微软雅黑"/>
+                <a:ea typeface="微软雅黑"/>
+                <a:cs typeface="微软雅黑"/>
+              </a:rPr>
+              <a:t/>
+            </a:r>
+          </a:p>
+          <a:p xmlns:a="http://schemas.openxmlformats.org/drawingml/2006/main">
+            <a:r>
+              <a:rPr sz="1200" b="0">
+                <a:solidFill>
+                  <a:srgbClr val="24292F"/>
+                </a:solidFill>
+                <a:latin typeface="微软雅黑"/>
+                <a:ea typeface="微软雅黑"/>
+                <a:cs typeface="微软雅黑"/>
+              </a:rPr>
+              <a:t>教师讲述：</a:t>
+            </a:r>
+          </a:p>
+          <a:p xmlns:a="http://schemas.openxmlformats.org/drawingml/2006/main">
+            <a:r>
+              <a:rPr sz="1200" b="0">
+                <a:solidFill>
+                  <a:srgbClr val="24292F"/>
+                </a:solidFill>
+                <a:latin typeface="微软雅黑"/>
+                <a:ea typeface="微软雅黑"/>
+                <a:cs typeface="微软雅黑"/>
+              </a:rPr>
+              <a:t>把环境差异翻译为路径、命令、网络和确认点。</a:t>
+            </a:r>
+          </a:p>
+          <a:p xmlns:a="http://schemas.openxmlformats.org/drawingml/2006/main">
+            <a:r>
+              <a:rPr sz="1200" b="0">
+                <a:solidFill>
+                  <a:srgbClr val="24292F"/>
+                </a:solidFill>
+                <a:latin typeface="微软雅黑"/>
+                <a:ea typeface="微软雅黑"/>
+                <a:cs typeface="微软雅黑"/>
+              </a:rPr>
+              <a:t/>
+            </a:r>
+          </a:p>
+          <a:p xmlns:a="http://schemas.openxmlformats.org/drawingml/2006/main">
+            <a:r>
+              <a:rPr sz="1200" b="0">
+                <a:solidFill>
+                  <a:srgbClr val="24292F"/>
+                </a:solidFill>
+                <a:latin typeface="微软雅黑"/>
+                <a:ea typeface="微软雅黑"/>
+                <a:cs typeface="微软雅黑"/>
+              </a:rPr>
+              <a:t>学生动作：</a:t>
+            </a:r>
+          </a:p>
+          <a:p xmlns:a="http://schemas.openxmlformats.org/drawingml/2006/main">
+            <a:r>
+              <a:rPr sz="1200" b="0">
+                <a:solidFill>
+                  <a:srgbClr val="24292F"/>
+                </a:solidFill>
+                <a:latin typeface="微软雅黑"/>
+                <a:ea typeface="微软雅黑"/>
+                <a:cs typeface="微软雅黑"/>
+              </a:rPr>
+              <a:t>圈出过宽配置的第一处风险</a:t>
+            </a:r>
+          </a:p>
+          <a:p xmlns:a="http://schemas.openxmlformats.org/drawingml/2006/main">
+            <a:r>
+              <a:rPr sz="1200" b="0">
+                <a:solidFill>
+                  <a:srgbClr val="24292F"/>
+                </a:solidFill>
+                <a:latin typeface="微软雅黑"/>
+                <a:ea typeface="微软雅黑"/>
+                <a:cs typeface="微软雅黑"/>
+              </a:rPr>
+              <a:t/>
+            </a:r>
+          </a:p>
+          <a:p xmlns:a="http://schemas.openxmlformats.org/drawingml/2006/main">
+            <a:r>
+              <a:rPr sz="1200" b="0">
+                <a:solidFill>
+                  <a:srgbClr val="24292F"/>
+                </a:solidFill>
+                <a:latin typeface="微软雅黑"/>
+                <a:ea typeface="微软雅黑"/>
+                <a:cs typeface="微软雅黑"/>
+              </a:rPr>
+              <a:t>来源与边界：</a:t>
+            </a:r>
+          </a:p>
+          <a:p xmlns:a="http://schemas.openxmlformats.org/drawingml/2006/main">
+            <a:r>
+              <a:rPr sz="1200" b="0">
+                <a:solidFill>
+                  <a:srgbClr val="24292F"/>
+                </a:solidFill>
+                <a:latin typeface="微软雅黑"/>
+                <a:ea typeface="微软雅黑"/>
+                <a:cs typeface="微软雅黑"/>
+              </a:rPr>
+              <a:t>/Users/bright/Projects/courses/graduate/lessons/lesson-02/handout.md</a:t>
+            </a:r>
+          </a:p>
+          <a:p xmlns:a="http://schemas.openxmlformats.org/drawingml/2006/main">
+            <a:r>
+              <a:rPr sz="1200" b="0">
+                <a:solidFill>
+                  <a:srgbClr val="24292F"/>
+                </a:solidFill>
+                <a:latin typeface="微软雅黑"/>
+                <a:ea typeface="微软雅黑"/>
+                <a:cs typeface="微软雅黑"/>
+              </a:rPr>
+              <a:t/>
+            </a:r>
+          </a:p>
+          <a:p xmlns:a="http://schemas.openxmlformats.org/drawingml/2006/main">
+            <a:r>
+              <a:rPr sz="1200" b="0">
+                <a:solidFill>
+                  <a:srgbClr val="24292F"/>
+                </a:solidFill>
+                <a:latin typeface="微软雅黑"/>
+                <a:ea typeface="微软雅黑"/>
+                <a:cs typeface="微软雅黑"/>
+              </a:rPr>
               <a:t>[Sources]</a:t>
             </a:r>
           </a:p>
@@ -1825,7 +3008,33 @@
                 <a:ea typeface="微软雅黑"/>
                 <a:cs typeface="微软雅黑"/>
               </a:rPr>
-              <a:t>- lessons/lesson-02/handout.md</a:t>
+              <a:t/>
+            </a:r>
+          </a:p>
+          <a:p xmlns:a="http://schemas.openxmlformats.org/drawingml/2006/main">
+            <a:r>
+              <a:rPr sz="1200" b="0">
+                <a:solidFill>
+                  <a:srgbClr val="24292F"/>
+                </a:solidFill>
+                <a:latin typeface="微软雅黑"/>
+                <a:ea typeface="微软雅黑"/>
+                <a:cs typeface="微软雅黑"/>
+              </a:rPr>
+              <a:t>- 本课 handout.md 与 slides.md</a:t>
+            </a:r>
+          </a:p>
+          <a:p xmlns:a="http://schemas.openxmlformats.org/drawingml/2006/main">
+            <a:r>
+              <a:rPr sz="1200" b="0">
+                <a:solidFill>
+                  <a:srgbClr val="24292F"/>
+                </a:solidFill>
+                <a:latin typeface="微软雅黑"/>
+                <a:ea typeface="微软雅黑"/>
+                <a:cs typeface="微软雅黑"/>
+              </a:rPr>
+              <a:t/>
             </a:r>
           </a:p>
           <a:p xmlns:a="http://schemas.openxmlformats.org/drawingml/2006/main">
@@ -1916,33 +3125,20 @@
                 <a:ea typeface="微软雅黑"/>
                 <a:cs typeface="微软雅黑"/>
               </a:rPr>
-              <a:t>页面任务：保留工件追踪概念</a:t>
-            </a:r>
-          </a:p>
-          <a:p xmlns:a="http://schemas.openxmlformats.org/drawingml/2006/main">
-            <a:r>
-              <a:rPr sz="1200" b="0">
-                <a:solidFill>
-                  <a:srgbClr val="24292F"/>
-                </a:solidFill>
-                <a:latin typeface="微软雅黑"/>
-                <a:ea typeface="微软雅黑"/>
-                <a:cs typeface="微软雅黑"/>
-              </a:rPr>
-              <a:t>教师讲述：课堂不要求学生再填第四张表；只建立状态语义。</a:t>
-            </a:r>
-          </a:p>
-          <a:p xmlns:a="http://schemas.openxmlformats.org/drawingml/2006/main">
-            <a:r>
-              <a:rPr sz="1200" b="0">
-                <a:solidFill>
-                  <a:srgbClr val="24292F"/>
-                </a:solidFill>
-                <a:latin typeface="微软雅黑"/>
-                <a:ea typeface="微软雅黑"/>
-                <a:cs typeface="微软雅黑"/>
-              </a:rPr>
-              <a:t>学生动作：判断“写完了”是否足以进入 stable</a:t>
+              <a:t>页面：P17 工件状态与证据成熟度</a:t>
+            </a:r>
+          </a:p>
+          <a:p xmlns:a="http://schemas.openxmlformats.org/drawingml/2006/main">
+            <a:r>
+              <a:rPr sz="1200" b="0">
+                <a:solidFill>
+                  <a:srgbClr val="24292F"/>
+                </a:solidFill>
+                <a:latin typeface="微软雅黑"/>
+                <a:ea typeface="微软雅黑"/>
+                <a:cs typeface="微软雅黑"/>
+              </a:rPr>
+              <a:t/>
             </a:r>
           </a:p>
           <a:p xmlns:a="http://schemas.openxmlformats.org/drawingml/2006/main">
@@ -1968,32 +3164,6 @@
                 <a:ea typeface="微软雅黑"/>
                 <a:cs typeface="微软雅黑"/>
               </a:rPr>
-              <a:t>屏显中的课堂构造案例不代表实测结果。</a:t>
-            </a:r>
-          </a:p>
-          <a:p xmlns:a="http://schemas.openxmlformats.org/drawingml/2006/main">
-            <a:r>
-              <a:rPr sz="1200" b="0">
-                <a:solidFill>
-                  <a:srgbClr val="24292F"/>
-                </a:solidFill>
-                <a:latin typeface="微软雅黑"/>
-                <a:ea typeface="微软雅黑"/>
-                <a:cs typeface="微软雅黑"/>
-              </a:rPr>
-              <a:t>核验日期：2026-09-15。</a:t>
-            </a:r>
-          </a:p>
-          <a:p xmlns:a="http://schemas.openxmlformats.org/drawingml/2006/main">
-            <a:r>
-              <a:rPr sz="1200" b="0">
-                <a:solidFill>
-                  <a:srgbClr val="24292F"/>
-                </a:solidFill>
-                <a:latin typeface="微软雅黑"/>
-                <a:ea typeface="微软雅黑"/>
-                <a:cs typeface="微软雅黑"/>
-              </a:rPr>
               <a:t/>
             </a:r>
           </a:p>
@@ -2007,6 +3177,162 @@
                 <a:ea typeface="微软雅黑"/>
                 <a:cs typeface="微软雅黑"/>
               </a:rPr>
+              <a:t>屏显核对：</a:t>
+            </a:r>
+          </a:p>
+          <a:p xmlns:a="http://schemas.openxmlformats.org/drawingml/2006/main">
+            <a:r>
+              <a:rPr sz="1200" b="0">
+                <a:solidFill>
+                  <a:srgbClr val="24292F"/>
+                </a:solidFill>
+                <a:latin typeface="微软雅黑"/>
+                <a:ea typeface="微软雅黑"/>
+                <a:cs typeface="微软雅黑"/>
+              </a:rPr>
+              <a:t>draft；review；approved；stable；草稿与待查缺口；已有依据 / 进入复核；关键决策获批 / 边界与理由已记录；至少两项独立证据 / 边界可追溯；发现冲突或条件变化；回到适当状态；状态可以回退</a:t>
+            </a:r>
+          </a:p>
+          <a:p xmlns:a="http://schemas.openxmlformats.org/drawingml/2006/main">
+            <a:r>
+              <a:rPr sz="1200" b="0">
+                <a:solidFill>
+                  <a:srgbClr val="24292F"/>
+                </a:solidFill>
+                <a:latin typeface="微软雅黑"/>
+                <a:ea typeface="微软雅黑"/>
+                <a:cs typeface="微软雅黑"/>
+              </a:rPr>
+              <a:t/>
+            </a:r>
+          </a:p>
+          <a:p xmlns:a="http://schemas.openxmlformats.org/drawingml/2006/main">
+            <a:r>
+              <a:rPr sz="1200" b="0">
+                <a:solidFill>
+                  <a:srgbClr val="24292F"/>
+                </a:solidFill>
+                <a:latin typeface="微软雅黑"/>
+                <a:ea typeface="微软雅黑"/>
+                <a:cs typeface="微软雅黑"/>
+              </a:rPr>
+              <a:t>教师讲述：</a:t>
+            </a:r>
+          </a:p>
+          <a:p xmlns:a="http://schemas.openxmlformats.org/drawingml/2006/main">
+            <a:r>
+              <a:rPr sz="1200" b="0">
+                <a:solidFill>
+                  <a:srgbClr val="24292F"/>
+                </a:solidFill>
+                <a:latin typeface="微软雅黑"/>
+                <a:ea typeface="微软雅黑"/>
+                <a:cs typeface="微软雅黑"/>
+              </a:rPr>
+              <a:t>课堂不要求学生再填第四张表；只建立状态语义。</a:t>
+            </a:r>
+          </a:p>
+          <a:p xmlns:a="http://schemas.openxmlformats.org/drawingml/2006/main">
+            <a:r>
+              <a:rPr sz="1200" b="0">
+                <a:solidFill>
+                  <a:srgbClr val="24292F"/>
+                </a:solidFill>
+                <a:latin typeface="微软雅黑"/>
+                <a:ea typeface="微软雅黑"/>
+                <a:cs typeface="微软雅黑"/>
+              </a:rPr>
+              <a:t/>
+            </a:r>
+          </a:p>
+          <a:p xmlns:a="http://schemas.openxmlformats.org/drawingml/2006/main">
+            <a:r>
+              <a:rPr sz="1200" b="0">
+                <a:solidFill>
+                  <a:srgbClr val="24292F"/>
+                </a:solidFill>
+                <a:latin typeface="微软雅黑"/>
+                <a:ea typeface="微软雅黑"/>
+                <a:cs typeface="微软雅黑"/>
+              </a:rPr>
+              <a:t>学生动作：</a:t>
+            </a:r>
+          </a:p>
+          <a:p xmlns:a="http://schemas.openxmlformats.org/drawingml/2006/main">
+            <a:r>
+              <a:rPr sz="1200" b="0">
+                <a:solidFill>
+                  <a:srgbClr val="24292F"/>
+                </a:solidFill>
+                <a:latin typeface="微软雅黑"/>
+                <a:ea typeface="微软雅黑"/>
+                <a:cs typeface="微软雅黑"/>
+              </a:rPr>
+              <a:t>判断“写完了”是否足以进入 stable</a:t>
+            </a:r>
+          </a:p>
+          <a:p xmlns:a="http://schemas.openxmlformats.org/drawingml/2006/main">
+            <a:r>
+              <a:rPr sz="1200" b="0">
+                <a:solidFill>
+                  <a:srgbClr val="24292F"/>
+                </a:solidFill>
+                <a:latin typeface="微软雅黑"/>
+                <a:ea typeface="微软雅黑"/>
+                <a:cs typeface="微软雅黑"/>
+              </a:rPr>
+              <a:t/>
+            </a:r>
+          </a:p>
+          <a:p xmlns:a="http://schemas.openxmlformats.org/drawingml/2006/main">
+            <a:r>
+              <a:rPr sz="1200" b="0">
+                <a:solidFill>
+                  <a:srgbClr val="24292F"/>
+                </a:solidFill>
+                <a:latin typeface="微软雅黑"/>
+                <a:ea typeface="微软雅黑"/>
+                <a:cs typeface="微软雅黑"/>
+              </a:rPr>
+              <a:t>来源与边界：</a:t>
+            </a:r>
+          </a:p>
+          <a:p xmlns:a="http://schemas.openxmlformats.org/drawingml/2006/main">
+            <a:r>
+              <a:rPr sz="1200" b="0">
+                <a:solidFill>
+                  <a:srgbClr val="24292F"/>
+                </a:solidFill>
+                <a:latin typeface="微软雅黑"/>
+                <a:ea typeface="微软雅黑"/>
+                <a:cs typeface="微软雅黑"/>
+              </a:rPr>
+              <a:t>/Users/bright/Projects/courses/graduate/lessons/lesson-02/handout.md</a:t>
+            </a:r>
+          </a:p>
+          <a:p xmlns:a="http://schemas.openxmlformats.org/drawingml/2006/main">
+            <a:r>
+              <a:rPr sz="1200" b="0">
+                <a:solidFill>
+                  <a:srgbClr val="24292F"/>
+                </a:solidFill>
+                <a:latin typeface="微软雅黑"/>
+                <a:ea typeface="微软雅黑"/>
+                <a:cs typeface="微软雅黑"/>
+              </a:rPr>
+              <a:t/>
+            </a:r>
+          </a:p>
+          <a:p xmlns:a="http://schemas.openxmlformats.org/drawingml/2006/main">
+            <a:r>
+              <a:rPr sz="1200" b="0">
+                <a:solidFill>
+                  <a:srgbClr val="24292F"/>
+                </a:solidFill>
+                <a:latin typeface="微软雅黑"/>
+                <a:ea typeface="微软雅黑"/>
+                <a:cs typeface="微软雅黑"/>
+              </a:rPr>
               <a:t>[Sources]</a:t>
             </a:r>
           </a:p>
@@ -2020,7 +3346,33 @@
                 <a:ea typeface="微软雅黑"/>
                 <a:cs typeface="微软雅黑"/>
               </a:rPr>
-              <a:t>- lessons/lesson-02/handout.md</a:t>
+              <a:t/>
+            </a:r>
+          </a:p>
+          <a:p xmlns:a="http://schemas.openxmlformats.org/drawingml/2006/main">
+            <a:r>
+              <a:rPr sz="1200" b="0">
+                <a:solidFill>
+                  <a:srgbClr val="24292F"/>
+                </a:solidFill>
+                <a:latin typeface="微软雅黑"/>
+                <a:ea typeface="微软雅黑"/>
+                <a:cs typeface="微软雅黑"/>
+              </a:rPr>
+              <a:t>- 本课 handout.md 与 slides.md</a:t>
+            </a:r>
+          </a:p>
+          <a:p xmlns:a="http://schemas.openxmlformats.org/drawingml/2006/main">
+            <a:r>
+              <a:rPr sz="1200" b="0">
+                <a:solidFill>
+                  <a:srgbClr val="24292F"/>
+                </a:solidFill>
+                <a:latin typeface="微软雅黑"/>
+                <a:ea typeface="微软雅黑"/>
+                <a:cs typeface="微软雅黑"/>
+              </a:rPr>
+              <a:t/>
             </a:r>
           </a:p>
           <a:p xmlns:a="http://schemas.openxmlformats.org/drawingml/2006/main">
@@ -2111,33 +3463,20 @@
                 <a:ea typeface="微软雅黑"/>
                 <a:cs typeface="微软雅黑"/>
               </a:rPr>
-              <a:t>页面任务：用单一生命周期实例替代干表</a:t>
-            </a:r>
-          </a:p>
-          <a:p xmlns:a="http://schemas.openxmlformats.org/drawingml/2006/main">
-            <a:r>
-              <a:rPr sz="1200" b="0">
-                <a:solidFill>
-                  <a:srgbClr val="24292F"/>
-                </a:solidFill>
-                <a:latin typeface="微软雅黑"/>
-                <a:ea typeface="微软雅黑"/>
-                <a:cs typeface="微软雅黑"/>
-              </a:rPr>
-              <a:t>教师讲述：同一 evidence-map.md 贯穿四状态，说明新增证据和下游用途。</a:t>
-            </a:r>
-          </a:p>
-          <a:p xmlns:a="http://schemas.openxmlformats.org/drawingml/2006/main">
-            <a:r>
-              <a:rPr sz="1200" b="0">
-                <a:solidFill>
-                  <a:srgbClr val="24292F"/>
-                </a:solidFill>
-                <a:latin typeface="微软雅黑"/>
-                <a:ea typeface="微软雅黑"/>
-                <a:cs typeface="微软雅黑"/>
-              </a:rPr>
-              <a:t>学生动作：指出哪次迁移最需要人工确认</a:t>
+              <a:t>页面：P18 一份证据地图的状态迁移</a:t>
+            </a:r>
+          </a:p>
+          <a:p xmlns:a="http://schemas.openxmlformats.org/drawingml/2006/main">
+            <a:r>
+              <a:rPr sz="1200" b="0">
+                <a:solidFill>
+                  <a:srgbClr val="24292F"/>
+                </a:solidFill>
+                <a:latin typeface="微软雅黑"/>
+                <a:ea typeface="微软雅黑"/>
+                <a:cs typeface="微软雅黑"/>
+              </a:rPr>
+              <a:t/>
             </a:r>
           </a:p>
           <a:p xmlns:a="http://schemas.openxmlformats.org/drawingml/2006/main">
@@ -2163,32 +3502,6 @@
                 <a:ea typeface="微软雅黑"/>
                 <a:cs typeface="微软雅黑"/>
               </a:rPr>
-              <a:t>屏显中的课堂构造案例不代表实测结果。</a:t>
-            </a:r>
-          </a:p>
-          <a:p xmlns:a="http://schemas.openxmlformats.org/drawingml/2006/main">
-            <a:r>
-              <a:rPr sz="1200" b="0">
-                <a:solidFill>
-                  <a:srgbClr val="24292F"/>
-                </a:solidFill>
-                <a:latin typeface="微软雅黑"/>
-                <a:ea typeface="微软雅黑"/>
-                <a:cs typeface="微软雅黑"/>
-              </a:rPr>
-              <a:t>核验日期：2026-09-15。</a:t>
-            </a:r>
-          </a:p>
-          <a:p xmlns:a="http://schemas.openxmlformats.org/drawingml/2006/main">
-            <a:r>
-              <a:rPr sz="1200" b="0">
-                <a:solidFill>
-                  <a:srgbClr val="24292F"/>
-                </a:solidFill>
-                <a:latin typeface="微软雅黑"/>
-                <a:ea typeface="微软雅黑"/>
-                <a:cs typeface="微软雅黑"/>
-              </a:rPr>
               <a:t/>
             </a:r>
           </a:p>
@@ -2202,6 +3515,162 @@
                 <a:ea typeface="微软雅黑"/>
                 <a:cs typeface="微软雅黑"/>
               </a:rPr>
+              <a:t>屏显核对：</a:t>
+            </a:r>
+          </a:p>
+          <a:p xmlns:a="http://schemas.openxmlformats.org/drawingml/2006/main">
+            <a:r>
+              <a:rPr sz="1200" b="0">
+                <a:solidFill>
+                  <a:srgbClr val="24292F"/>
+                </a:solidFill>
+                <a:latin typeface="微软雅黑"/>
+                <a:ea typeface="微软雅黑"/>
+                <a:cs typeface="微软雅黑"/>
+              </a:rPr>
+              <a:t>一个工件如何改变状态：必须记录依据</a:t>
+            </a:r>
+          </a:p>
+          <a:p xmlns:a="http://schemas.openxmlformats.org/drawingml/2006/main">
+            <a:r>
+              <a:rPr sz="1200" b="0">
+                <a:solidFill>
+                  <a:srgbClr val="24292F"/>
+                </a:solidFill>
+                <a:latin typeface="微软雅黑"/>
+                <a:ea typeface="微软雅黑"/>
+                <a:cs typeface="微软雅黑"/>
+              </a:rPr>
+              <a:t/>
+            </a:r>
+          </a:p>
+          <a:p xmlns:a="http://schemas.openxmlformats.org/drawingml/2006/main">
+            <a:r>
+              <a:rPr sz="1200" b="0">
+                <a:solidFill>
+                  <a:srgbClr val="24292F"/>
+                </a:solidFill>
+                <a:latin typeface="微软雅黑"/>
+                <a:ea typeface="微软雅黑"/>
+                <a:cs typeface="微软雅黑"/>
+              </a:rPr>
+              <a:t>教师讲述：</a:t>
+            </a:r>
+          </a:p>
+          <a:p xmlns:a="http://schemas.openxmlformats.org/drawingml/2006/main">
+            <a:r>
+              <a:rPr sz="1200" b="0">
+                <a:solidFill>
+                  <a:srgbClr val="24292F"/>
+                </a:solidFill>
+                <a:latin typeface="微软雅黑"/>
+                <a:ea typeface="微软雅黑"/>
+                <a:cs typeface="微软雅黑"/>
+              </a:rPr>
+              <a:t>同一 evidence-map.md 贯穿四状态，说明新增证据和下游用途。</a:t>
+            </a:r>
+          </a:p>
+          <a:p xmlns:a="http://schemas.openxmlformats.org/drawingml/2006/main">
+            <a:r>
+              <a:rPr sz="1200" b="0">
+                <a:solidFill>
+                  <a:srgbClr val="24292F"/>
+                </a:solidFill>
+                <a:latin typeface="微软雅黑"/>
+                <a:ea typeface="微软雅黑"/>
+                <a:cs typeface="微软雅黑"/>
+              </a:rPr>
+              <a:t/>
+            </a:r>
+          </a:p>
+          <a:p xmlns:a="http://schemas.openxmlformats.org/drawingml/2006/main">
+            <a:r>
+              <a:rPr sz="1200" b="0">
+                <a:solidFill>
+                  <a:srgbClr val="24292F"/>
+                </a:solidFill>
+                <a:latin typeface="微软雅黑"/>
+                <a:ea typeface="微软雅黑"/>
+                <a:cs typeface="微软雅黑"/>
+              </a:rPr>
+              <a:t>学生动作：</a:t>
+            </a:r>
+          </a:p>
+          <a:p xmlns:a="http://schemas.openxmlformats.org/drawingml/2006/main">
+            <a:r>
+              <a:rPr sz="1200" b="0">
+                <a:solidFill>
+                  <a:srgbClr val="24292F"/>
+                </a:solidFill>
+                <a:latin typeface="微软雅黑"/>
+                <a:ea typeface="微软雅黑"/>
+                <a:cs typeface="微软雅黑"/>
+              </a:rPr>
+              <a:t>指出哪次迁移最需要人工确认</a:t>
+            </a:r>
+          </a:p>
+          <a:p xmlns:a="http://schemas.openxmlformats.org/drawingml/2006/main">
+            <a:r>
+              <a:rPr sz="1200" b="0">
+                <a:solidFill>
+                  <a:srgbClr val="24292F"/>
+                </a:solidFill>
+                <a:latin typeface="微软雅黑"/>
+                <a:ea typeface="微软雅黑"/>
+                <a:cs typeface="微软雅黑"/>
+              </a:rPr>
+              <a:t/>
+            </a:r>
+          </a:p>
+          <a:p xmlns:a="http://schemas.openxmlformats.org/drawingml/2006/main">
+            <a:r>
+              <a:rPr sz="1200" b="0">
+                <a:solidFill>
+                  <a:srgbClr val="24292F"/>
+                </a:solidFill>
+                <a:latin typeface="微软雅黑"/>
+                <a:ea typeface="微软雅黑"/>
+                <a:cs typeface="微软雅黑"/>
+              </a:rPr>
+              <a:t>来源与边界：</a:t>
+            </a:r>
+          </a:p>
+          <a:p xmlns:a="http://schemas.openxmlformats.org/drawingml/2006/main">
+            <a:r>
+              <a:rPr sz="1200" b="0">
+                <a:solidFill>
+                  <a:srgbClr val="24292F"/>
+                </a:solidFill>
+                <a:latin typeface="微软雅黑"/>
+                <a:ea typeface="微软雅黑"/>
+                <a:cs typeface="微软雅黑"/>
+              </a:rPr>
+              <a:t>/Users/bright/Projects/courses/graduate/lessons/lesson-02/handout.md</a:t>
+            </a:r>
+          </a:p>
+          <a:p xmlns:a="http://schemas.openxmlformats.org/drawingml/2006/main">
+            <a:r>
+              <a:rPr sz="1200" b="0">
+                <a:solidFill>
+                  <a:srgbClr val="24292F"/>
+                </a:solidFill>
+                <a:latin typeface="微软雅黑"/>
+                <a:ea typeface="微软雅黑"/>
+                <a:cs typeface="微软雅黑"/>
+              </a:rPr>
+              <a:t/>
+            </a:r>
+          </a:p>
+          <a:p xmlns:a="http://schemas.openxmlformats.org/drawingml/2006/main">
+            <a:r>
+              <a:rPr sz="1200" b="0">
+                <a:solidFill>
+                  <a:srgbClr val="24292F"/>
+                </a:solidFill>
+                <a:latin typeface="微软雅黑"/>
+                <a:ea typeface="微软雅黑"/>
+                <a:cs typeface="微软雅黑"/>
+              </a:rPr>
               <a:t>[Sources]</a:t>
             </a:r>
           </a:p>
@@ -2215,7 +3684,33 @@
                 <a:ea typeface="微软雅黑"/>
                 <a:cs typeface="微软雅黑"/>
               </a:rPr>
-              <a:t>- lessons/lesson-02/handout.md</a:t>
+              <a:t/>
+            </a:r>
+          </a:p>
+          <a:p xmlns:a="http://schemas.openxmlformats.org/drawingml/2006/main">
+            <a:r>
+              <a:rPr sz="1200" b="0">
+                <a:solidFill>
+                  <a:srgbClr val="24292F"/>
+                </a:solidFill>
+                <a:latin typeface="微软雅黑"/>
+                <a:ea typeface="微软雅黑"/>
+                <a:cs typeface="微软雅黑"/>
+              </a:rPr>
+              <a:t>- 本课 handout.md 与 slides.md</a:t>
+            </a:r>
+          </a:p>
+          <a:p xmlns:a="http://schemas.openxmlformats.org/drawingml/2006/main">
+            <a:r>
+              <a:rPr sz="1200" b="0">
+                <a:solidFill>
+                  <a:srgbClr val="24292F"/>
+                </a:solidFill>
+                <a:latin typeface="微软雅黑"/>
+                <a:ea typeface="微软雅黑"/>
+                <a:cs typeface="微软雅黑"/>
+              </a:rPr>
+              <a:t/>
             </a:r>
           </a:p>
           <a:p xmlns:a="http://schemas.openxmlformats.org/drawingml/2006/main">
@@ -2306,33 +3801,20 @@
                 <a:ea typeface="微软雅黑"/>
                 <a:cs typeface="微软雅黑"/>
               </a:rPr>
-              <a:t>页面任务：建立最低日志标准</a:t>
-            </a:r>
-          </a:p>
-          <a:p xmlns:a="http://schemas.openxmlformats.org/drawingml/2006/main">
-            <a:r>
-              <a:rPr sz="1200" b="0">
-                <a:solidFill>
-                  <a:srgbClr val="24292F"/>
-                </a:solidFill>
-                <a:latin typeface="微软雅黑"/>
-                <a:ea typeface="微软雅黑"/>
-                <a:cs typeface="微软雅黑"/>
-              </a:rPr>
-              <a:t>教师讲述：只保留课堂需要的五个问题。</a:t>
-            </a:r>
-          </a:p>
-          <a:p xmlns:a="http://schemas.openxmlformats.org/drawingml/2006/main">
-            <a:r>
-              <a:rPr sz="1200" b="0">
-                <a:solidFill>
-                  <a:srgbClr val="24292F"/>
-                </a:solidFill>
-                <a:latin typeface="微软雅黑"/>
-                <a:ea typeface="微软雅黑"/>
-                <a:cs typeface="微软雅黑"/>
-              </a:rPr>
-              <a:t>学生动作：补写一条缺失字段</a:t>
+              <a:t>页面：P19 一条 AI 使用记录应说明什么</a:t>
+            </a:r>
+          </a:p>
+          <a:p xmlns:a="http://schemas.openxmlformats.org/drawingml/2006/main">
+            <a:r>
+              <a:rPr sz="1200" b="0">
+                <a:solidFill>
+                  <a:srgbClr val="24292F"/>
+                </a:solidFill>
+                <a:latin typeface="微软雅黑"/>
+                <a:ea typeface="微软雅黑"/>
+                <a:cs typeface="微软雅黑"/>
+              </a:rPr>
+              <a:t/>
             </a:r>
           </a:p>
           <a:p xmlns:a="http://schemas.openxmlformats.org/drawingml/2006/main">
@@ -2358,32 +3840,6 @@
                 <a:ea typeface="微软雅黑"/>
                 <a:cs typeface="微软雅黑"/>
               </a:rPr>
-              <a:t>屏显中的课堂构造案例不代表实测结果。</a:t>
-            </a:r>
-          </a:p>
-          <a:p xmlns:a="http://schemas.openxmlformats.org/drawingml/2006/main">
-            <a:r>
-              <a:rPr sz="1200" b="0">
-                <a:solidFill>
-                  <a:srgbClr val="24292F"/>
-                </a:solidFill>
-                <a:latin typeface="微软雅黑"/>
-                <a:ea typeface="微软雅黑"/>
-                <a:cs typeface="微软雅黑"/>
-              </a:rPr>
-              <a:t>核验日期：2026-09-15。</a:t>
-            </a:r>
-          </a:p>
-          <a:p xmlns:a="http://schemas.openxmlformats.org/drawingml/2006/main">
-            <a:r>
-              <a:rPr sz="1200" b="0">
-                <a:solidFill>
-                  <a:srgbClr val="24292F"/>
-                </a:solidFill>
-                <a:latin typeface="微软雅黑"/>
-                <a:ea typeface="微软雅黑"/>
-                <a:cs typeface="微软雅黑"/>
-              </a:rPr>
               <a:t/>
             </a:r>
           </a:p>
@@ -2397,6 +3853,162 @@
                 <a:ea typeface="微软雅黑"/>
                 <a:cs typeface="微软雅黑"/>
               </a:rPr>
+              <a:t>屏显核对：</a:t>
+            </a:r>
+          </a:p>
+          <a:p xmlns:a="http://schemas.openxmlformats.org/drawingml/2006/main">
+            <a:r>
+              <a:rPr sz="1200" b="0">
+                <a:solidFill>
+                  <a:srgbClr val="24292F"/>
+                </a:solidFill>
+                <a:latin typeface="微软雅黑"/>
+                <a:ea typeface="微软雅黑"/>
+                <a:cs typeface="微软雅黑"/>
+              </a:rPr>
+              <a:t>只写“已人工核验”没有信息；必须写核验对象和方法。</a:t>
+            </a:r>
+          </a:p>
+          <a:p xmlns:a="http://schemas.openxmlformats.org/drawingml/2006/main">
+            <a:r>
+              <a:rPr sz="1200" b="0">
+                <a:solidFill>
+                  <a:srgbClr val="24292F"/>
+                </a:solidFill>
+                <a:latin typeface="微软雅黑"/>
+                <a:ea typeface="微软雅黑"/>
+                <a:cs typeface="微软雅黑"/>
+              </a:rPr>
+              <a:t/>
+            </a:r>
+          </a:p>
+          <a:p xmlns:a="http://schemas.openxmlformats.org/drawingml/2006/main">
+            <a:r>
+              <a:rPr sz="1200" b="0">
+                <a:solidFill>
+                  <a:srgbClr val="24292F"/>
+                </a:solidFill>
+                <a:latin typeface="微软雅黑"/>
+                <a:ea typeface="微软雅黑"/>
+                <a:cs typeface="微软雅黑"/>
+              </a:rPr>
+              <a:t>教师讲述：</a:t>
+            </a:r>
+          </a:p>
+          <a:p xmlns:a="http://schemas.openxmlformats.org/drawingml/2006/main">
+            <a:r>
+              <a:rPr sz="1200" b="0">
+                <a:solidFill>
+                  <a:srgbClr val="24292F"/>
+                </a:solidFill>
+                <a:latin typeface="微软雅黑"/>
+                <a:ea typeface="微软雅黑"/>
+                <a:cs typeface="微软雅黑"/>
+              </a:rPr>
+              <a:t>只保留课堂需要的五个问题。</a:t>
+            </a:r>
+          </a:p>
+          <a:p xmlns:a="http://schemas.openxmlformats.org/drawingml/2006/main">
+            <a:r>
+              <a:rPr sz="1200" b="0">
+                <a:solidFill>
+                  <a:srgbClr val="24292F"/>
+                </a:solidFill>
+                <a:latin typeface="微软雅黑"/>
+                <a:ea typeface="微软雅黑"/>
+                <a:cs typeface="微软雅黑"/>
+              </a:rPr>
+              <a:t/>
+            </a:r>
+          </a:p>
+          <a:p xmlns:a="http://schemas.openxmlformats.org/drawingml/2006/main">
+            <a:r>
+              <a:rPr sz="1200" b="0">
+                <a:solidFill>
+                  <a:srgbClr val="24292F"/>
+                </a:solidFill>
+                <a:latin typeface="微软雅黑"/>
+                <a:ea typeface="微软雅黑"/>
+                <a:cs typeface="微软雅黑"/>
+              </a:rPr>
+              <a:t>学生动作：</a:t>
+            </a:r>
+          </a:p>
+          <a:p xmlns:a="http://schemas.openxmlformats.org/drawingml/2006/main">
+            <a:r>
+              <a:rPr sz="1200" b="0">
+                <a:solidFill>
+                  <a:srgbClr val="24292F"/>
+                </a:solidFill>
+                <a:latin typeface="微软雅黑"/>
+                <a:ea typeface="微软雅黑"/>
+                <a:cs typeface="微软雅黑"/>
+              </a:rPr>
+              <a:t>补写一条缺失字段</a:t>
+            </a:r>
+          </a:p>
+          <a:p xmlns:a="http://schemas.openxmlformats.org/drawingml/2006/main">
+            <a:r>
+              <a:rPr sz="1200" b="0">
+                <a:solidFill>
+                  <a:srgbClr val="24292F"/>
+                </a:solidFill>
+                <a:latin typeface="微软雅黑"/>
+                <a:ea typeface="微软雅黑"/>
+                <a:cs typeface="微软雅黑"/>
+              </a:rPr>
+              <a:t/>
+            </a:r>
+          </a:p>
+          <a:p xmlns:a="http://schemas.openxmlformats.org/drawingml/2006/main">
+            <a:r>
+              <a:rPr sz="1200" b="0">
+                <a:solidFill>
+                  <a:srgbClr val="24292F"/>
+                </a:solidFill>
+                <a:latin typeface="微软雅黑"/>
+                <a:ea typeface="微软雅黑"/>
+                <a:cs typeface="微软雅黑"/>
+              </a:rPr>
+              <a:t>来源与边界：</a:t>
+            </a:r>
+          </a:p>
+          <a:p xmlns:a="http://schemas.openxmlformats.org/drawingml/2006/main">
+            <a:r>
+              <a:rPr sz="1200" b="0">
+                <a:solidFill>
+                  <a:srgbClr val="24292F"/>
+                </a:solidFill>
+                <a:latin typeface="微软雅黑"/>
+                <a:ea typeface="微软雅黑"/>
+                <a:cs typeface="微软雅黑"/>
+              </a:rPr>
+              <a:t>/Users/bright/Projects/courses/graduate/lessons/lesson-02/handout.md</a:t>
+            </a:r>
+          </a:p>
+          <a:p xmlns:a="http://schemas.openxmlformats.org/drawingml/2006/main">
+            <a:r>
+              <a:rPr sz="1200" b="0">
+                <a:solidFill>
+                  <a:srgbClr val="24292F"/>
+                </a:solidFill>
+                <a:latin typeface="微软雅黑"/>
+                <a:ea typeface="微软雅黑"/>
+                <a:cs typeface="微软雅黑"/>
+              </a:rPr>
+              <a:t/>
+            </a:r>
+          </a:p>
+          <a:p xmlns:a="http://schemas.openxmlformats.org/drawingml/2006/main">
+            <a:r>
+              <a:rPr sz="1200" b="0">
+                <a:solidFill>
+                  <a:srgbClr val="24292F"/>
+                </a:solidFill>
+                <a:latin typeface="微软雅黑"/>
+                <a:ea typeface="微软雅黑"/>
+                <a:cs typeface="微软雅黑"/>
+              </a:rPr>
               <a:t>[Sources]</a:t>
             </a:r>
           </a:p>
@@ -2410,7 +4022,33 @@
                 <a:ea typeface="微软雅黑"/>
                 <a:cs typeface="微软雅黑"/>
               </a:rPr>
-              <a:t>- lessons/lesson-02/handout.md</a:t>
+              <a:t/>
+            </a:r>
+          </a:p>
+          <a:p xmlns:a="http://schemas.openxmlformats.org/drawingml/2006/main">
+            <a:r>
+              <a:rPr sz="1200" b="0">
+                <a:solidFill>
+                  <a:srgbClr val="24292F"/>
+                </a:solidFill>
+                <a:latin typeface="微软雅黑"/>
+                <a:ea typeface="微软雅黑"/>
+                <a:cs typeface="微软雅黑"/>
+              </a:rPr>
+              <a:t>- 本课 handout.md 与 slides.md</a:t>
+            </a:r>
+          </a:p>
+          <a:p xmlns:a="http://schemas.openxmlformats.org/drawingml/2006/main">
+            <a:r>
+              <a:rPr sz="1200" b="0">
+                <a:solidFill>
+                  <a:srgbClr val="24292F"/>
+                </a:solidFill>
+                <a:latin typeface="微软雅黑"/>
+                <a:ea typeface="微软雅黑"/>
+                <a:cs typeface="微软雅黑"/>
+              </a:rPr>
+              <a:t/>
             </a:r>
           </a:p>
           <a:p xmlns:a="http://schemas.openxmlformats.org/drawingml/2006/main">
@@ -2501,33 +4139,20 @@
                 <a:ea typeface="微软雅黑"/>
                 <a:cs typeface="微软雅黑"/>
               </a:rPr>
-              <a:t>页面任务：从已知闭环引出伦理与权限</a:t>
-            </a:r>
-          </a:p>
-          <a:p xmlns:a="http://schemas.openxmlformats.org/drawingml/2006/main">
-            <a:r>
-              <a:rPr sz="1200" b="0">
-                <a:solidFill>
-                  <a:srgbClr val="24292F"/>
-                </a:solidFill>
-                <a:latin typeface="微软雅黑"/>
-                <a:ea typeface="微软雅黑"/>
-                <a:cs typeface="微软雅黑"/>
-              </a:rPr>
-              <a:t>教师讲述：不重复八阶段，只指出记录中的缺口。</a:t>
-            </a:r>
-          </a:p>
-          <a:p xmlns:a="http://schemas.openxmlformats.org/drawingml/2006/main">
-            <a:r>
-              <a:rPr sz="1200" b="0">
-                <a:solidFill>
-                  <a:srgbClr val="24292F"/>
-                </a:solidFill>
-                <a:latin typeface="微软雅黑"/>
-                <a:ea typeface="微软雅黑"/>
-                <a:cs typeface="微软雅黑"/>
-              </a:rPr>
-              <a:t>学生动作：指出自己日志最缺的一项</a:t>
+              <a:t>页面：P02 从 diff 与日志到材料、动作和责任</a:t>
+            </a:r>
+          </a:p>
+          <a:p xmlns:a="http://schemas.openxmlformats.org/drawingml/2006/main">
+            <a:r>
+              <a:rPr sz="1200" b="0">
+                <a:solidFill>
+                  <a:srgbClr val="24292F"/>
+                </a:solidFill>
+                <a:latin typeface="微软雅黑"/>
+                <a:ea typeface="微软雅黑"/>
+                <a:cs typeface="微软雅黑"/>
+              </a:rPr>
+              <a:t/>
             </a:r>
           </a:p>
           <a:p xmlns:a="http://schemas.openxmlformats.org/drawingml/2006/main">
@@ -2553,32 +4178,6 @@
                 <a:ea typeface="微软雅黑"/>
                 <a:cs typeface="微软雅黑"/>
               </a:rPr>
-              <a:t>屏显中的课堂构造案例不代表实测结果。</a:t>
-            </a:r>
-          </a:p>
-          <a:p xmlns:a="http://schemas.openxmlformats.org/drawingml/2006/main">
-            <a:r>
-              <a:rPr sz="1200" b="0">
-                <a:solidFill>
-                  <a:srgbClr val="24292F"/>
-                </a:solidFill>
-                <a:latin typeface="微软雅黑"/>
-                <a:ea typeface="微软雅黑"/>
-                <a:cs typeface="微软雅黑"/>
-              </a:rPr>
-              <a:t>核验日期：2026-09-15。</a:t>
-            </a:r>
-          </a:p>
-          <a:p xmlns:a="http://schemas.openxmlformats.org/drawingml/2006/main">
-            <a:r>
-              <a:rPr sz="1200" b="0">
-                <a:solidFill>
-                  <a:srgbClr val="24292F"/>
-                </a:solidFill>
-                <a:latin typeface="微软雅黑"/>
-                <a:ea typeface="微软雅黑"/>
-                <a:cs typeface="微软雅黑"/>
-              </a:rPr>
               <a:t/>
             </a:r>
           </a:p>
@@ -2592,6 +4191,305 @@
                 <a:ea typeface="微软雅黑"/>
                 <a:cs typeface="微软雅黑"/>
               </a:rPr>
+              <a:t>屏显核对：</a:t>
+            </a:r>
+          </a:p>
+          <a:p xmlns:a="http://schemas.openxmlformats.org/drawingml/2006/main">
+            <a:r>
+              <a:rPr sz="1200" b="0">
+                <a:solidFill>
+                  <a:srgbClr val="24292F"/>
+                </a:solidFill>
+                <a:latin typeface="微软雅黑"/>
+                <a:ea typeface="微软雅黑"/>
+                <a:cs typeface="微软雅黑"/>
+              </a:rPr>
+              <a:t>第 1 课的记录，还需要补什么？；材料；输入是否获得授权，来源是什么？；动作；只读、写入、执行，还是对外发送？；确认；哪一步需要暂停，由谁决定继续？；责任；实际发生了什么，由谁核验和承担？</a:t>
+            </a:r>
+          </a:p>
+          <a:p xmlns:a="http://schemas.openxmlformats.org/drawingml/2006/main">
+            <a:r>
+              <a:rPr sz="1200" b="0">
+                <a:solidFill>
+                  <a:srgbClr val="24292F"/>
+                </a:solidFill>
+                <a:latin typeface="微软雅黑"/>
+                <a:ea typeface="微软雅黑"/>
+                <a:cs typeface="微软雅黑"/>
+              </a:rPr>
+              <a:t/>
+            </a:r>
+          </a:p>
+          <a:p xmlns:a="http://schemas.openxmlformats.org/drawingml/2006/main">
+            <a:r>
+              <a:rPr sz="1200" b="0">
+                <a:solidFill>
+                  <a:srgbClr val="24292F"/>
+                </a:solidFill>
+                <a:latin typeface="微软雅黑"/>
+                <a:ea typeface="微软雅黑"/>
+                <a:cs typeface="微软雅黑"/>
+              </a:rPr>
+              <a:t>教师讲述：</a:t>
+            </a:r>
+          </a:p>
+          <a:p xmlns:a="http://schemas.openxmlformats.org/drawingml/2006/main">
+            <a:r>
+              <a:rPr sz="1200" b="0">
+                <a:solidFill>
+                  <a:srgbClr val="24292F"/>
+                </a:solidFill>
+                <a:latin typeface="微软雅黑"/>
+                <a:ea typeface="微软雅黑"/>
+                <a:cs typeface="微软雅黑"/>
+              </a:rPr>
+              <a:t>不重复八阶段，只指出记录中的缺口。</a:t>
+            </a:r>
+          </a:p>
+          <a:p xmlns:a="http://schemas.openxmlformats.org/drawingml/2006/main">
+            <a:r>
+              <a:rPr sz="1200" b="0">
+                <a:solidFill>
+                  <a:srgbClr val="24292F"/>
+                </a:solidFill>
+                <a:latin typeface="微软雅黑"/>
+                <a:ea typeface="微软雅黑"/>
+                <a:cs typeface="微软雅黑"/>
+              </a:rPr>
+              <a:t/>
+            </a:r>
+          </a:p>
+          <a:p xmlns:a="http://schemas.openxmlformats.org/drawingml/2006/main">
+            <a:r>
+              <a:rPr sz="1200" b="0">
+                <a:solidFill>
+                  <a:srgbClr val="24292F"/>
+                </a:solidFill>
+                <a:latin typeface="微软雅黑"/>
+                <a:ea typeface="微软雅黑"/>
+                <a:cs typeface="微软雅黑"/>
+              </a:rPr>
+              <a:t>学生动作：</a:t>
+            </a:r>
+          </a:p>
+          <a:p xmlns:a="http://schemas.openxmlformats.org/drawingml/2006/main">
+            <a:r>
+              <a:rPr sz="1200" b="0">
+                <a:solidFill>
+                  <a:srgbClr val="24292F"/>
+                </a:solidFill>
+                <a:latin typeface="微软雅黑"/>
+                <a:ea typeface="微软雅黑"/>
+                <a:cs typeface="微软雅黑"/>
+              </a:rPr>
+              <a:t>指出自己日志最缺的一项</a:t>
+            </a:r>
+          </a:p>
+          <a:p xmlns:a="http://schemas.openxmlformats.org/drawingml/2006/main">
+            <a:r>
+              <a:rPr sz="1200" b="0">
+                <a:solidFill>
+                  <a:srgbClr val="24292F"/>
+                </a:solidFill>
+                <a:latin typeface="微软雅黑"/>
+                <a:ea typeface="微软雅黑"/>
+                <a:cs typeface="微软雅黑"/>
+              </a:rPr>
+              <a:t/>
+            </a:r>
+          </a:p>
+          <a:p xmlns:a="http://schemas.openxmlformats.org/drawingml/2006/main">
+            <a:r>
+              <a:rPr sz="1200" b="0">
+                <a:solidFill>
+                  <a:srgbClr val="24292F"/>
+                </a:solidFill>
+                <a:latin typeface="微软雅黑"/>
+                <a:ea typeface="微软雅黑"/>
+                <a:cs typeface="微软雅黑"/>
+              </a:rPr>
+              <a:t>本课板书、诊断与串词：</a:t>
+            </a:r>
+          </a:p>
+          <a:p xmlns:a="http://schemas.openxmlformats.org/drawingml/2006/main">
+            <a:r>
+              <a:rPr sz="1200" b="0">
+                <a:solidFill>
+                  <a:srgbClr val="24292F"/>
+                </a:solidFill>
+                <a:latin typeface="微软雅黑"/>
+                <a:ea typeface="微软雅黑"/>
+                <a:cs typeface="微软雅黑"/>
+              </a:rPr>
+              <a:t>本节替换同类口头提示，不增加既有时段。开场诊断嵌入现有开场/回顾，后续再沿原实践时段操作。</a:t>
+            </a:r>
+          </a:p>
+          <a:p xmlns:a="http://schemas.openxmlformats.org/drawingml/2006/main">
+            <a:r>
+              <a:rPr sz="1200" b="0">
+                <a:solidFill>
+                  <a:srgbClr val="24292F"/>
+                </a:solidFill>
+                <a:latin typeface="微软雅黑"/>
+                <a:ea typeface="微软雅黑"/>
+                <a:cs typeface="微软雅黑"/>
+              </a:rPr>
+              <a:t/>
+            </a:r>
+          </a:p>
+          <a:p xmlns:a="http://schemas.openxmlformats.org/drawingml/2006/main">
+            <a:r>
+              <a:rPr sz="1200" b="0">
+                <a:solidFill>
+                  <a:srgbClr val="24292F"/>
+                </a:solidFill>
+                <a:latin typeface="微软雅黑"/>
+                <a:ea typeface="微软雅黑"/>
+                <a:cs typeface="微软雅黑"/>
+              </a:rPr>
+              <a:t>- **板书主线**：来源真实 / 证据角色 / 主张方向 / 工件成熟度。</a:t>
+            </a:r>
+          </a:p>
+          <a:p xmlns:a="http://schemas.openxmlformats.org/drawingml/2006/main">
+            <a:r>
+              <a:rPr sz="1200" b="0">
+                <a:solidFill>
+                  <a:srgbClr val="24292F"/>
+                </a:solidFill>
+                <a:latin typeface="微软雅黑"/>
+                <a:ea typeface="微软雅黑"/>
+                <a:cs typeface="微软雅黑"/>
+              </a:rPr>
+              <a:t>- **诊断问题**：一条已核验存在的论文，是否足以把我们的结论标stable？</a:t>
+            </a:r>
+          </a:p>
+          <a:p xmlns:a="http://schemas.openxmlformats.org/drawingml/2006/main">
+            <a:r>
+              <a:rPr sz="1200" b="0">
+                <a:solidFill>
+                  <a:srgbClr val="24292F"/>
+                </a:solidFill>
+                <a:latin typeface="微软雅黑"/>
+                <a:ea typeface="微软雅黑"/>
+                <a:cs typeface="微软雅黑"/>
+              </a:rPr>
+              <a:t>- **预期回答**：不够；还要核对内容、支持方向与证据强度。</a:t>
+            </a:r>
+          </a:p>
+          <a:p xmlns:a="http://schemas.openxmlformats.org/drawingml/2006/main">
+            <a:r>
+              <a:rPr sz="1200" b="0">
+                <a:solidFill>
+                  <a:srgbClr val="24292F"/>
+                </a:solidFill>
+                <a:latin typeface="微软雅黑"/>
+                <a:ea typeface="微软雅黑"/>
+                <a:cs typeface="微软雅黑"/>
+              </a:rPr>
+              <a:t>- **常见误答后的追问**：若把pending等同不可引用，解释可引用并明确未决范围，不能写成稳定结论。</a:t>
+            </a:r>
+          </a:p>
+          <a:p xmlns:a="http://schemas.openxmlformats.org/drawingml/2006/main">
+            <a:r>
+              <a:rPr sz="1200" b="0">
+                <a:solidFill>
+                  <a:srgbClr val="24292F"/>
+                </a:solidFill>
+                <a:latin typeface="微软雅黑"/>
+                <a:ea typeface="微软雅黑"/>
+                <a:cs typeface="微软雅黑"/>
+              </a:rPr>
+              <a:t>- **过渡串词**：“现在把四个判断放到实际工件，再检查工具权限与伦理边界。”</a:t>
+            </a:r>
+          </a:p>
+          <a:p xmlns:a="http://schemas.openxmlformats.org/drawingml/2006/main">
+            <a:r>
+              <a:rPr sz="1200" b="0">
+                <a:solidFill>
+                  <a:srgbClr val="24292F"/>
+                </a:solidFill>
+                <a:latin typeface="微软雅黑"/>
+                <a:ea typeface="微软雅黑"/>
+                <a:cs typeface="微软雅黑"/>
+              </a:rPr>
+              <a:t>- **当堂最小产出**：一项工具契约、一条实际工件状态和一个人工审核点。</a:t>
+            </a:r>
+          </a:p>
+          <a:p xmlns:a="http://schemas.openxmlformats.org/drawingml/2006/main">
+            <a:r>
+              <a:rPr sz="1200" b="0">
+                <a:solidFill>
+                  <a:srgbClr val="24292F"/>
+                </a:solidFill>
+                <a:latin typeface="微软雅黑"/>
+                <a:ea typeface="微软雅黑"/>
+                <a:cs typeface="微软雅黑"/>
+              </a:rPr>
+              <a:t>- **退出记录**：写“已完成的动作、本人项目仍缺的证据/工件、下次补齐位置”。使用教师包时标明课堂方法练习，不能据此宣称本人研究门通过；正式提交课次仍为第 6、9、13、16 课。</a:t>
+            </a:r>
+          </a:p>
+          <a:p xmlns:a="http://schemas.openxmlformats.org/drawingml/2006/main">
+            <a:r>
+              <a:rPr sz="1200" b="0">
+                <a:solidFill>
+                  <a:srgbClr val="24292F"/>
+                </a:solidFill>
+                <a:latin typeface="微软雅黑"/>
+                <a:ea typeface="微软雅黑"/>
+                <a:cs typeface="微软雅黑"/>
+              </a:rPr>
+              <a:t/>
+            </a:r>
+          </a:p>
+          <a:p xmlns:a="http://schemas.openxmlformats.org/drawingml/2006/main">
+            <a:r>
+              <a:rPr sz="1200" b="0">
+                <a:solidFill>
+                  <a:srgbClr val="24292F"/>
+                </a:solidFill>
+                <a:latin typeface="微软雅黑"/>
+                <a:ea typeface="微软雅黑"/>
+                <a:cs typeface="微软雅黑"/>
+              </a:rPr>
+              <a:t>来源与边界：</a:t>
+            </a:r>
+          </a:p>
+          <a:p xmlns:a="http://schemas.openxmlformats.org/drawingml/2006/main">
+            <a:r>
+              <a:rPr sz="1200" b="0">
+                <a:solidFill>
+                  <a:srgbClr val="24292F"/>
+                </a:solidFill>
+                <a:latin typeface="微软雅黑"/>
+                <a:ea typeface="微软雅黑"/>
+                <a:cs typeface="微软雅黑"/>
+              </a:rPr>
+              <a:t>/Users/bright/Projects/courses/graduate/lessons/lesson-02/handout.md</a:t>
+            </a:r>
+          </a:p>
+          <a:p xmlns:a="http://schemas.openxmlformats.org/drawingml/2006/main">
+            <a:r>
+              <a:rPr sz="1200" b="0">
+                <a:solidFill>
+                  <a:srgbClr val="24292F"/>
+                </a:solidFill>
+                <a:latin typeface="微软雅黑"/>
+                <a:ea typeface="微软雅黑"/>
+                <a:cs typeface="微软雅黑"/>
+              </a:rPr>
+              <a:t/>
+            </a:r>
+          </a:p>
+          <a:p xmlns:a="http://schemas.openxmlformats.org/drawingml/2006/main">
+            <a:r>
+              <a:rPr sz="1200" b="0">
+                <a:solidFill>
+                  <a:srgbClr val="24292F"/>
+                </a:solidFill>
+                <a:latin typeface="微软雅黑"/>
+                <a:ea typeface="微软雅黑"/>
+                <a:cs typeface="微软雅黑"/>
+              </a:rPr>
               <a:t>[Sources]</a:t>
             </a:r>
           </a:p>
@@ -2605,7 +4503,33 @@
                 <a:ea typeface="微软雅黑"/>
                 <a:cs typeface="微软雅黑"/>
               </a:rPr>
-              <a:t>- lessons/lesson-02/handout.md</a:t>
+              <a:t/>
+            </a:r>
+          </a:p>
+          <a:p xmlns:a="http://schemas.openxmlformats.org/drawingml/2006/main">
+            <a:r>
+              <a:rPr sz="1200" b="0">
+                <a:solidFill>
+                  <a:srgbClr val="24292F"/>
+                </a:solidFill>
+                <a:latin typeface="微软雅黑"/>
+                <a:ea typeface="微软雅黑"/>
+                <a:cs typeface="微软雅黑"/>
+              </a:rPr>
+              <a:t>- 本课 handout.md 与 slides.md</a:t>
+            </a:r>
+          </a:p>
+          <a:p xmlns:a="http://schemas.openxmlformats.org/drawingml/2006/main">
+            <a:r>
+              <a:rPr sz="1200" b="0">
+                <a:solidFill>
+                  <a:srgbClr val="24292F"/>
+                </a:solidFill>
+                <a:latin typeface="微软雅黑"/>
+                <a:ea typeface="微软雅黑"/>
+                <a:cs typeface="微软雅黑"/>
+              </a:rPr>
+              <a:t/>
             </a:r>
           </a:p>
           <a:p xmlns:a="http://schemas.openxmlformats.org/drawingml/2006/main">
@@ -2696,33 +4620,20 @@
                 <a:ea typeface="微软雅黑"/>
                 <a:cs typeface="微软雅黑"/>
               </a:rPr>
-              <a:t>页面任务：说明演示与学生实践分工</a:t>
-            </a:r>
-          </a:p>
-          <a:p xmlns:a="http://schemas.openxmlformats.org/drawingml/2006/main">
-            <a:r>
-              <a:rPr sz="1200" b="0">
-                <a:solidFill>
-                  <a:srgbClr val="24292F"/>
-                </a:solidFill>
-                <a:latin typeface="微软雅黑"/>
-                <a:ea typeface="微软雅黑"/>
-                <a:cs typeface="微软雅黑"/>
-              </a:rPr>
-              <a:t>教师讲述：从 P03 的虚构未公开合作稿继续，不更换案例。用抽象问题或经授权公开版本完成替代路径，不教 OpenCode 菜单。</a:t>
-            </a:r>
-          </a:p>
-          <a:p xmlns:a="http://schemas.openxmlformats.org/drawingml/2006/main">
-            <a:r>
-              <a:rPr sz="1200" b="0">
-                <a:solidFill>
-                  <a:srgbClr val="24292F"/>
-                </a:solidFill>
-                <a:latin typeface="微软雅黑"/>
-                <a:ea typeface="微软雅黑"/>
-                <a:cs typeface="微软雅黑"/>
-              </a:rPr>
-              <a:t>学生动作：预测哪一步必须暂停确认</a:t>
+              <a:t>页面：P20 教师演示：风险与权限如何落地</a:t>
+            </a:r>
+          </a:p>
+          <a:p xmlns:a="http://schemas.openxmlformats.org/drawingml/2006/main">
+            <a:r>
+              <a:rPr sz="1200" b="0">
+                <a:solidFill>
+                  <a:srgbClr val="24292F"/>
+                </a:solidFill>
+                <a:latin typeface="微软雅黑"/>
+                <a:ea typeface="微软雅黑"/>
+                <a:cs typeface="微软雅黑"/>
+              </a:rPr>
+              <a:t/>
             </a:r>
           </a:p>
           <a:p xmlns:a="http://schemas.openxmlformats.org/drawingml/2006/main">
@@ -2748,32 +4659,6 @@
                 <a:ea typeface="微软雅黑"/>
                 <a:cs typeface="微软雅黑"/>
               </a:rPr>
-              <a:t>屏显中的课堂构造案例不代表实测结果。</a:t>
-            </a:r>
-          </a:p>
-          <a:p xmlns:a="http://schemas.openxmlformats.org/drawingml/2006/main">
-            <a:r>
-              <a:rPr sz="1200" b="0">
-                <a:solidFill>
-                  <a:srgbClr val="24292F"/>
-                </a:solidFill>
-                <a:latin typeface="微软雅黑"/>
-                <a:ea typeface="微软雅黑"/>
-                <a:cs typeface="微软雅黑"/>
-              </a:rPr>
-              <a:t>核验日期：2026-09-15。</a:t>
-            </a:r>
-          </a:p>
-          <a:p xmlns:a="http://schemas.openxmlformats.org/drawingml/2006/main">
-            <a:r>
-              <a:rPr sz="1200" b="0">
-                <a:solidFill>
-                  <a:srgbClr val="24292F"/>
-                </a:solidFill>
-                <a:latin typeface="微软雅黑"/>
-                <a:ea typeface="微软雅黑"/>
-                <a:cs typeface="微软雅黑"/>
-              </a:rPr>
               <a:t/>
             </a:r>
           </a:p>
@@ -2787,6 +4672,162 @@
                 <a:ea typeface="微软雅黑"/>
                 <a:cs typeface="微软雅黑"/>
               </a:rPr>
+              <a:t>屏显核对：</a:t>
+            </a:r>
+          </a:p>
+          <a:p xmlns:a="http://schemas.openxmlformats.org/drawingml/2006/main">
+            <a:r>
+              <a:rPr sz="1200" b="0">
+                <a:solidFill>
+                  <a:srgbClr val="24292F"/>
+                </a:solidFill>
+                <a:latin typeface="微软雅黑"/>
+                <a:ea typeface="微软雅黑"/>
+                <a:cs typeface="微软雅黑"/>
+              </a:rPr>
+              <a:t>教师演示 · 同一未公开合作稿案例；选择替代输入；只读边界审查；人工确认写回；核对三件工件；原稿不对 Agent 开放 / 改用抽象问题；检查过宽权限 / 与缺失的确认点；明确三份文件 / 及各自修改范围；风险卡、权限行 / 使用记录相互一致</a:t>
+            </a:r>
+          </a:p>
+          <a:p xmlns:a="http://schemas.openxmlformats.org/drawingml/2006/main">
+            <a:r>
+              <a:rPr sz="1200" b="0">
+                <a:solidFill>
+                  <a:srgbClr val="24292F"/>
+                </a:solidFill>
+                <a:latin typeface="微软雅黑"/>
+                <a:ea typeface="微软雅黑"/>
+                <a:cs typeface="微软雅黑"/>
+              </a:rPr>
+              <a:t/>
+            </a:r>
+          </a:p>
+          <a:p xmlns:a="http://schemas.openxmlformats.org/drawingml/2006/main">
+            <a:r>
+              <a:rPr sz="1200" b="0">
+                <a:solidFill>
+                  <a:srgbClr val="24292F"/>
+                </a:solidFill>
+                <a:latin typeface="微软雅黑"/>
+                <a:ea typeface="微软雅黑"/>
+                <a:cs typeface="微软雅黑"/>
+              </a:rPr>
+              <a:t>教师讲述：</a:t>
+            </a:r>
+          </a:p>
+          <a:p xmlns:a="http://schemas.openxmlformats.org/drawingml/2006/main">
+            <a:r>
+              <a:rPr sz="1200" b="0">
+                <a:solidFill>
+                  <a:srgbClr val="24292F"/>
+                </a:solidFill>
+                <a:latin typeface="微软雅黑"/>
+                <a:ea typeface="微软雅黑"/>
+                <a:cs typeface="微软雅黑"/>
+              </a:rPr>
+              <a:t>从 P03 的虚构未公开合作稿继续，不更换案例。用抽象问题或经授权公开版本完成替代路径，不教 OpenCode 菜单。</a:t>
+            </a:r>
+          </a:p>
+          <a:p xmlns:a="http://schemas.openxmlformats.org/drawingml/2006/main">
+            <a:r>
+              <a:rPr sz="1200" b="0">
+                <a:solidFill>
+                  <a:srgbClr val="24292F"/>
+                </a:solidFill>
+                <a:latin typeface="微软雅黑"/>
+                <a:ea typeface="微软雅黑"/>
+                <a:cs typeface="微软雅黑"/>
+              </a:rPr>
+              <a:t/>
+            </a:r>
+          </a:p>
+          <a:p xmlns:a="http://schemas.openxmlformats.org/drawingml/2006/main">
+            <a:r>
+              <a:rPr sz="1200" b="0">
+                <a:solidFill>
+                  <a:srgbClr val="24292F"/>
+                </a:solidFill>
+                <a:latin typeface="微软雅黑"/>
+                <a:ea typeface="微软雅黑"/>
+                <a:cs typeface="微软雅黑"/>
+              </a:rPr>
+              <a:t>学生动作：</a:t>
+            </a:r>
+          </a:p>
+          <a:p xmlns:a="http://schemas.openxmlformats.org/drawingml/2006/main">
+            <a:r>
+              <a:rPr sz="1200" b="0">
+                <a:solidFill>
+                  <a:srgbClr val="24292F"/>
+                </a:solidFill>
+                <a:latin typeface="微软雅黑"/>
+                <a:ea typeface="微软雅黑"/>
+                <a:cs typeface="微软雅黑"/>
+              </a:rPr>
+              <a:t>预测哪一步必须暂停确认</a:t>
+            </a:r>
+          </a:p>
+          <a:p xmlns:a="http://schemas.openxmlformats.org/drawingml/2006/main">
+            <a:r>
+              <a:rPr sz="1200" b="0">
+                <a:solidFill>
+                  <a:srgbClr val="24292F"/>
+                </a:solidFill>
+                <a:latin typeface="微软雅黑"/>
+                <a:ea typeface="微软雅黑"/>
+                <a:cs typeface="微软雅黑"/>
+              </a:rPr>
+              <a:t/>
+            </a:r>
+          </a:p>
+          <a:p xmlns:a="http://schemas.openxmlformats.org/drawingml/2006/main">
+            <a:r>
+              <a:rPr sz="1200" b="0">
+                <a:solidFill>
+                  <a:srgbClr val="24292F"/>
+                </a:solidFill>
+                <a:latin typeface="微软雅黑"/>
+                <a:ea typeface="微软雅黑"/>
+                <a:cs typeface="微软雅黑"/>
+              </a:rPr>
+              <a:t>来源与边界：</a:t>
+            </a:r>
+          </a:p>
+          <a:p xmlns:a="http://schemas.openxmlformats.org/drawingml/2006/main">
+            <a:r>
+              <a:rPr sz="1200" b="0">
+                <a:solidFill>
+                  <a:srgbClr val="24292F"/>
+                </a:solidFill>
+                <a:latin typeface="微软雅黑"/>
+                <a:ea typeface="微软雅黑"/>
+                <a:cs typeface="微软雅黑"/>
+              </a:rPr>
+              <a:t>/Users/bright/Projects/courses/graduate/lessons/lesson-02/handout.md</a:t>
+            </a:r>
+          </a:p>
+          <a:p xmlns:a="http://schemas.openxmlformats.org/drawingml/2006/main">
+            <a:r>
+              <a:rPr sz="1200" b="0">
+                <a:solidFill>
+                  <a:srgbClr val="24292F"/>
+                </a:solidFill>
+                <a:latin typeface="微软雅黑"/>
+                <a:ea typeface="微软雅黑"/>
+                <a:cs typeface="微软雅黑"/>
+              </a:rPr>
+              <a:t/>
+            </a:r>
+          </a:p>
+          <a:p xmlns:a="http://schemas.openxmlformats.org/drawingml/2006/main">
+            <a:r>
+              <a:rPr sz="1200" b="0">
+                <a:solidFill>
+                  <a:srgbClr val="24292F"/>
+                </a:solidFill>
+                <a:latin typeface="微软雅黑"/>
+                <a:ea typeface="微软雅黑"/>
+                <a:cs typeface="微软雅黑"/>
+              </a:rPr>
               <a:t>[Sources]</a:t>
             </a:r>
           </a:p>
@@ -2800,7 +4841,33 @@
                 <a:ea typeface="微软雅黑"/>
                 <a:cs typeface="微软雅黑"/>
               </a:rPr>
-              <a:t>- lessons/lesson-02/handout.md</a:t>
+              <a:t/>
+            </a:r>
+          </a:p>
+          <a:p xmlns:a="http://schemas.openxmlformats.org/drawingml/2006/main">
+            <a:r>
+              <a:rPr sz="1200" b="0">
+                <a:solidFill>
+                  <a:srgbClr val="24292F"/>
+                </a:solidFill>
+                <a:latin typeface="微软雅黑"/>
+                <a:ea typeface="微软雅黑"/>
+                <a:cs typeface="微软雅黑"/>
+              </a:rPr>
+              <a:t>- 本课 handout.md 与 slides.md</a:t>
+            </a:r>
+          </a:p>
+          <a:p xmlns:a="http://schemas.openxmlformats.org/drawingml/2006/main">
+            <a:r>
+              <a:rPr sz="1200" b="0">
+                <a:solidFill>
+                  <a:srgbClr val="24292F"/>
+                </a:solidFill>
+                <a:latin typeface="微软雅黑"/>
+                <a:ea typeface="微软雅黑"/>
+                <a:cs typeface="微软雅黑"/>
+              </a:rPr>
+              <a:t/>
             </a:r>
           </a:p>
           <a:p xmlns:a="http://schemas.openxmlformats.org/drawingml/2006/main">
@@ -2891,33 +4958,20 @@
                 <a:ea typeface="微软雅黑"/>
                 <a:cs typeface="微软雅黑"/>
               </a:rPr>
-              <a:t>页面任务：教师演示只读检查</a:t>
-            </a:r>
-          </a:p>
-          <a:p xmlns:a="http://schemas.openxmlformats.org/drawingml/2006/main">
-            <a:r>
-              <a:rPr sz="1200" b="0">
-                <a:solidFill>
-                  <a:srgbClr val="24292F"/>
-                </a:solidFill>
-                <a:latin typeface="微软雅黑"/>
-                <a:ea typeface="微软雅黑"/>
-                <a:cs typeface="微软雅黑"/>
-              </a:rPr>
-              <a:t>教师讲述：让 Agent 只读权限矩阵，指出一处过宽或缺失，不允许写。</a:t>
-            </a:r>
-          </a:p>
-          <a:p xmlns:a="http://schemas.openxmlformats.org/drawingml/2006/main">
-            <a:r>
-              <a:rPr sz="1200" b="0">
-                <a:solidFill>
-                  <a:srgbClr val="24292F"/>
-                </a:solidFill>
-                <a:latin typeface="微软雅黑"/>
-                <a:ea typeface="微软雅黑"/>
-                <a:cs typeface="微软雅黑"/>
-              </a:rPr>
-              <a:t>学生动作：判断建议是收窄还是扩大权限</a:t>
+              <a:t>页面：P21 第一轮：只读边界审查</a:t>
+            </a:r>
+          </a:p>
+          <a:p xmlns:a="http://schemas.openxmlformats.org/drawingml/2006/main">
+            <a:r>
+              <a:rPr sz="1200" b="0">
+                <a:solidFill>
+                  <a:srgbClr val="24292F"/>
+                </a:solidFill>
+                <a:latin typeface="微软雅黑"/>
+                <a:ea typeface="微软雅黑"/>
+                <a:cs typeface="微软雅黑"/>
+              </a:rPr>
+              <a:t/>
             </a:r>
           </a:p>
           <a:p xmlns:a="http://schemas.openxmlformats.org/drawingml/2006/main">
@@ -2943,32 +4997,6 @@
                 <a:ea typeface="微软雅黑"/>
                 <a:cs typeface="微软雅黑"/>
               </a:rPr>
-              <a:t>屏显中的课堂构造案例不代表实测结果。</a:t>
-            </a:r>
-          </a:p>
-          <a:p xmlns:a="http://schemas.openxmlformats.org/drawingml/2006/main">
-            <a:r>
-              <a:rPr sz="1200" b="0">
-                <a:solidFill>
-                  <a:srgbClr val="24292F"/>
-                </a:solidFill>
-                <a:latin typeface="微软雅黑"/>
-                <a:ea typeface="微软雅黑"/>
-                <a:cs typeface="微软雅黑"/>
-              </a:rPr>
-              <a:t>核验日期：2026-09-15。</a:t>
-            </a:r>
-          </a:p>
-          <a:p xmlns:a="http://schemas.openxmlformats.org/drawingml/2006/main">
-            <a:r>
-              <a:rPr sz="1200" b="0">
-                <a:solidFill>
-                  <a:srgbClr val="24292F"/>
-                </a:solidFill>
-                <a:latin typeface="微软雅黑"/>
-                <a:ea typeface="微软雅黑"/>
-                <a:cs typeface="微软雅黑"/>
-              </a:rPr>
               <a:t/>
             </a:r>
           </a:p>
@@ -2982,6 +5010,162 @@
                 <a:ea typeface="微软雅黑"/>
                 <a:cs typeface="微软雅黑"/>
               </a:rPr>
+              <a:t>屏显核对：</a:t>
+            </a:r>
+          </a:p>
+          <a:p xmlns:a="http://schemas.openxmlformats.org/drawingml/2006/main">
+            <a:r>
+              <a:rPr sz="1200" b="0">
+                <a:solidFill>
+                  <a:srgbClr val="24292F"/>
+                </a:solidFill>
+                <a:latin typeface="微软雅黑"/>
+                <a:ea typeface="微软雅黑"/>
+                <a:cs typeface="微软雅黑"/>
+              </a:rPr>
+              <a:t>教师演示 · 任务契约；第一轮；READ    agent-permissions.md；TASK    指出一处过宽或缺失权限；WRITE   none；NETWORK off；RETURN  建议、风险与最小替代动作；STOP    等待人工确认；研究者检查；建议收窄了范围， / 还是隐含扩大了 / 读写与外发权限？</a:t>
+            </a:r>
+          </a:p>
+          <a:p xmlns:a="http://schemas.openxmlformats.org/drawingml/2006/main">
+            <a:r>
+              <a:rPr sz="1200" b="0">
+                <a:solidFill>
+                  <a:srgbClr val="24292F"/>
+                </a:solidFill>
+                <a:latin typeface="微软雅黑"/>
+                <a:ea typeface="微软雅黑"/>
+                <a:cs typeface="微软雅黑"/>
+              </a:rPr>
+              <a:t/>
+            </a:r>
+          </a:p>
+          <a:p xmlns:a="http://schemas.openxmlformats.org/drawingml/2006/main">
+            <a:r>
+              <a:rPr sz="1200" b="0">
+                <a:solidFill>
+                  <a:srgbClr val="24292F"/>
+                </a:solidFill>
+                <a:latin typeface="微软雅黑"/>
+                <a:ea typeface="微软雅黑"/>
+                <a:cs typeface="微软雅黑"/>
+              </a:rPr>
+              <a:t>教师讲述：</a:t>
+            </a:r>
+          </a:p>
+          <a:p xmlns:a="http://schemas.openxmlformats.org/drawingml/2006/main">
+            <a:r>
+              <a:rPr sz="1200" b="0">
+                <a:solidFill>
+                  <a:srgbClr val="24292F"/>
+                </a:solidFill>
+                <a:latin typeface="微软雅黑"/>
+                <a:ea typeface="微软雅黑"/>
+                <a:cs typeface="微软雅黑"/>
+              </a:rPr>
+              <a:t>让 Agent 只读权限矩阵，指出一处过宽或缺失，不允许写。</a:t>
+            </a:r>
+          </a:p>
+          <a:p xmlns:a="http://schemas.openxmlformats.org/drawingml/2006/main">
+            <a:r>
+              <a:rPr sz="1200" b="0">
+                <a:solidFill>
+                  <a:srgbClr val="24292F"/>
+                </a:solidFill>
+                <a:latin typeface="微软雅黑"/>
+                <a:ea typeface="微软雅黑"/>
+                <a:cs typeface="微软雅黑"/>
+              </a:rPr>
+              <a:t/>
+            </a:r>
+          </a:p>
+          <a:p xmlns:a="http://schemas.openxmlformats.org/drawingml/2006/main">
+            <a:r>
+              <a:rPr sz="1200" b="0">
+                <a:solidFill>
+                  <a:srgbClr val="24292F"/>
+                </a:solidFill>
+                <a:latin typeface="微软雅黑"/>
+                <a:ea typeface="微软雅黑"/>
+                <a:cs typeface="微软雅黑"/>
+              </a:rPr>
+              <a:t>学生动作：</a:t>
+            </a:r>
+          </a:p>
+          <a:p xmlns:a="http://schemas.openxmlformats.org/drawingml/2006/main">
+            <a:r>
+              <a:rPr sz="1200" b="0">
+                <a:solidFill>
+                  <a:srgbClr val="24292F"/>
+                </a:solidFill>
+                <a:latin typeface="微软雅黑"/>
+                <a:ea typeface="微软雅黑"/>
+                <a:cs typeface="微软雅黑"/>
+              </a:rPr>
+              <a:t>判断建议是收窄还是扩大权限</a:t>
+            </a:r>
+          </a:p>
+          <a:p xmlns:a="http://schemas.openxmlformats.org/drawingml/2006/main">
+            <a:r>
+              <a:rPr sz="1200" b="0">
+                <a:solidFill>
+                  <a:srgbClr val="24292F"/>
+                </a:solidFill>
+                <a:latin typeface="微软雅黑"/>
+                <a:ea typeface="微软雅黑"/>
+                <a:cs typeface="微软雅黑"/>
+              </a:rPr>
+              <a:t/>
+            </a:r>
+          </a:p>
+          <a:p xmlns:a="http://schemas.openxmlformats.org/drawingml/2006/main">
+            <a:r>
+              <a:rPr sz="1200" b="0">
+                <a:solidFill>
+                  <a:srgbClr val="24292F"/>
+                </a:solidFill>
+                <a:latin typeface="微软雅黑"/>
+                <a:ea typeface="微软雅黑"/>
+                <a:cs typeface="微软雅黑"/>
+              </a:rPr>
+              <a:t>来源与边界：</a:t>
+            </a:r>
+          </a:p>
+          <a:p xmlns:a="http://schemas.openxmlformats.org/drawingml/2006/main">
+            <a:r>
+              <a:rPr sz="1200" b="0">
+                <a:solidFill>
+                  <a:srgbClr val="24292F"/>
+                </a:solidFill>
+                <a:latin typeface="微软雅黑"/>
+                <a:ea typeface="微软雅黑"/>
+                <a:cs typeface="微软雅黑"/>
+              </a:rPr>
+              <a:t>/Users/bright/Projects/courses/graduate/lessons/lesson-02/handout.md</a:t>
+            </a:r>
+          </a:p>
+          <a:p xmlns:a="http://schemas.openxmlformats.org/drawingml/2006/main">
+            <a:r>
+              <a:rPr sz="1200" b="0">
+                <a:solidFill>
+                  <a:srgbClr val="24292F"/>
+                </a:solidFill>
+                <a:latin typeface="微软雅黑"/>
+                <a:ea typeface="微软雅黑"/>
+                <a:cs typeface="微软雅黑"/>
+              </a:rPr>
+              <a:t/>
+            </a:r>
+          </a:p>
+          <a:p xmlns:a="http://schemas.openxmlformats.org/drawingml/2006/main">
+            <a:r>
+              <a:rPr sz="1200" b="0">
+                <a:solidFill>
+                  <a:srgbClr val="24292F"/>
+                </a:solidFill>
+                <a:latin typeface="微软雅黑"/>
+                <a:ea typeface="微软雅黑"/>
+                <a:cs typeface="微软雅黑"/>
+              </a:rPr>
               <a:t>[Sources]</a:t>
             </a:r>
           </a:p>
@@ -2995,7 +5179,33 @@
                 <a:ea typeface="微软雅黑"/>
                 <a:cs typeface="微软雅黑"/>
               </a:rPr>
-              <a:t>- lessons/lesson-02/handout.md</a:t>
+              <a:t/>
+            </a:r>
+          </a:p>
+          <a:p xmlns:a="http://schemas.openxmlformats.org/drawingml/2006/main">
+            <a:r>
+              <a:rPr sz="1200" b="0">
+                <a:solidFill>
+                  <a:srgbClr val="24292F"/>
+                </a:solidFill>
+                <a:latin typeface="微软雅黑"/>
+                <a:ea typeface="微软雅黑"/>
+                <a:cs typeface="微软雅黑"/>
+              </a:rPr>
+              <a:t>- 本课 handout.md 与 slides.md</a:t>
+            </a:r>
+          </a:p>
+          <a:p xmlns:a="http://schemas.openxmlformats.org/drawingml/2006/main">
+            <a:r>
+              <a:rPr sz="1200" b="0">
+                <a:solidFill>
+                  <a:srgbClr val="24292F"/>
+                </a:solidFill>
+                <a:latin typeface="微软雅黑"/>
+                <a:ea typeface="微软雅黑"/>
+                <a:cs typeface="微软雅黑"/>
+              </a:rPr>
+              <a:t/>
             </a:r>
           </a:p>
           <a:p xmlns:a="http://schemas.openxmlformats.org/drawingml/2006/main">
@@ -3086,33 +5296,20 @@
                 <a:ea typeface="微软雅黑"/>
                 <a:cs typeface="微软雅黑"/>
               </a:rPr>
-              <a:t>页面任务：教师演示有限写回</a:t>
-            </a:r>
-          </a:p>
-          <a:p xmlns:a="http://schemas.openxmlformats.org/drawingml/2006/main">
-            <a:r>
-              <a:rPr sz="1200" b="0">
-                <a:solidFill>
-                  <a:srgbClr val="24292F"/>
-                </a:solidFill>
-                <a:latin typeface="微软雅黑"/>
-                <a:ea typeface="微软雅黑"/>
-                <a:cs typeface="微软雅黑"/>
-              </a:rPr>
-              <a:t>教师讲述：风险卡写清原稿为何不外发；权限行只授权替代输入；日志记录原稿未发送与实际核验。不在课堂演示额外工件追踪填表。</a:t>
-            </a:r>
-          </a:p>
-          <a:p xmlns:a="http://schemas.openxmlformats.org/drawingml/2006/main">
-            <a:r>
-              <a:rPr sz="1200" b="0">
-                <a:solidFill>
-                  <a:srgbClr val="24292F"/>
-                </a:solidFill>
-                <a:latin typeface="微软雅黑"/>
-                <a:ea typeface="微软雅黑"/>
-                <a:cs typeface="微软雅黑"/>
-              </a:rPr>
-              <a:t>学生动作：检查实际修改文件是否超出三项</a:t>
+              <a:t>页面：P22 第二轮：批准后的三处写回</a:t>
+            </a:r>
+          </a:p>
+          <a:p xmlns:a="http://schemas.openxmlformats.org/drawingml/2006/main">
+            <a:r>
+              <a:rPr sz="1200" b="0">
+                <a:solidFill>
+                  <a:srgbClr val="24292F"/>
+                </a:solidFill>
+                <a:latin typeface="微软雅黑"/>
+                <a:ea typeface="微软雅黑"/>
+                <a:cs typeface="微软雅黑"/>
+              </a:rPr>
+              <a:t/>
             </a:r>
           </a:p>
           <a:p xmlns:a="http://schemas.openxmlformats.org/drawingml/2006/main">
@@ -3138,32 +5335,6 @@
                 <a:ea typeface="微软雅黑"/>
                 <a:cs typeface="微软雅黑"/>
               </a:rPr>
-              <a:t>屏显中的课堂构造案例不代表实测结果。</a:t>
-            </a:r>
-          </a:p>
-          <a:p xmlns:a="http://schemas.openxmlformats.org/drawingml/2006/main">
-            <a:r>
-              <a:rPr sz="1200" b="0">
-                <a:solidFill>
-                  <a:srgbClr val="24292F"/>
-                </a:solidFill>
-                <a:latin typeface="微软雅黑"/>
-                <a:ea typeface="微软雅黑"/>
-                <a:cs typeface="微软雅黑"/>
-              </a:rPr>
-              <a:t>核验日期：2026-09-15。</a:t>
-            </a:r>
-          </a:p>
-          <a:p xmlns:a="http://schemas.openxmlformats.org/drawingml/2006/main">
-            <a:r>
-              <a:rPr sz="1200" b="0">
-                <a:solidFill>
-                  <a:srgbClr val="24292F"/>
-                </a:solidFill>
-                <a:latin typeface="微软雅黑"/>
-                <a:ea typeface="微软雅黑"/>
-                <a:cs typeface="微软雅黑"/>
-              </a:rPr>
               <a:t/>
             </a:r>
           </a:p>
@@ -3177,6 +5348,162 @@
                 <a:ea typeface="微软雅黑"/>
                 <a:cs typeface="微软雅黑"/>
               </a:rPr>
+              <a:t>屏显核对：</a:t>
+            </a:r>
+          </a:p>
+          <a:p xmlns:a="http://schemas.openxmlformats.org/drawingml/2006/main">
+            <a:r>
+              <a:rPr sz="1200" b="0">
+                <a:solidFill>
+                  <a:srgbClr val="24292F"/>
+                </a:solidFill>
+                <a:latin typeface="微软雅黑"/>
+                <a:ea typeface="微软雅黑"/>
+                <a:cs typeface="微软雅黑"/>
+              </a:rPr>
+              <a:t>教师演示 · 任务契约；第二轮：只写回获批范围；WRITE   agent-permissions.md 一行；ethics-and-compliance.md 风险卡；ai-usage-log.md 一条记录；KEEP    问题、指标与工件状态；NETWORK off；AFTER   展示实际 diff；确认点；文件 / 段落 / 修改范围</a:t>
+            </a:r>
+          </a:p>
+          <a:p xmlns:a="http://schemas.openxmlformats.org/drawingml/2006/main">
+            <a:r>
+              <a:rPr sz="1200" b="0">
+                <a:solidFill>
+                  <a:srgbClr val="24292F"/>
+                </a:solidFill>
+                <a:latin typeface="微软雅黑"/>
+                <a:ea typeface="微软雅黑"/>
+                <a:cs typeface="微软雅黑"/>
+              </a:rPr>
+              <a:t/>
+            </a:r>
+          </a:p>
+          <a:p xmlns:a="http://schemas.openxmlformats.org/drawingml/2006/main">
+            <a:r>
+              <a:rPr sz="1200" b="0">
+                <a:solidFill>
+                  <a:srgbClr val="24292F"/>
+                </a:solidFill>
+                <a:latin typeface="微软雅黑"/>
+                <a:ea typeface="微软雅黑"/>
+                <a:cs typeface="微软雅黑"/>
+              </a:rPr>
+              <a:t>教师讲述：</a:t>
+            </a:r>
+          </a:p>
+          <a:p xmlns:a="http://schemas.openxmlformats.org/drawingml/2006/main">
+            <a:r>
+              <a:rPr sz="1200" b="0">
+                <a:solidFill>
+                  <a:srgbClr val="24292F"/>
+                </a:solidFill>
+                <a:latin typeface="微软雅黑"/>
+                <a:ea typeface="微软雅黑"/>
+                <a:cs typeface="微软雅黑"/>
+              </a:rPr>
+              <a:t>风险卡写清原稿为何不外发；权限行只授权替代输入；日志记录原稿未发送与实际核验。不在课堂演示额外工件追踪填表。</a:t>
+            </a:r>
+          </a:p>
+          <a:p xmlns:a="http://schemas.openxmlformats.org/drawingml/2006/main">
+            <a:r>
+              <a:rPr sz="1200" b="0">
+                <a:solidFill>
+                  <a:srgbClr val="24292F"/>
+                </a:solidFill>
+                <a:latin typeface="微软雅黑"/>
+                <a:ea typeface="微软雅黑"/>
+                <a:cs typeface="微软雅黑"/>
+              </a:rPr>
+              <a:t/>
+            </a:r>
+          </a:p>
+          <a:p xmlns:a="http://schemas.openxmlformats.org/drawingml/2006/main">
+            <a:r>
+              <a:rPr sz="1200" b="0">
+                <a:solidFill>
+                  <a:srgbClr val="24292F"/>
+                </a:solidFill>
+                <a:latin typeface="微软雅黑"/>
+                <a:ea typeface="微软雅黑"/>
+                <a:cs typeface="微软雅黑"/>
+              </a:rPr>
+              <a:t>学生动作：</a:t>
+            </a:r>
+          </a:p>
+          <a:p xmlns:a="http://schemas.openxmlformats.org/drawingml/2006/main">
+            <a:r>
+              <a:rPr sz="1200" b="0">
+                <a:solidFill>
+                  <a:srgbClr val="24292F"/>
+                </a:solidFill>
+                <a:latin typeface="微软雅黑"/>
+                <a:ea typeface="微软雅黑"/>
+                <a:cs typeface="微软雅黑"/>
+              </a:rPr>
+              <a:t>检查实际修改文件是否超出三项</a:t>
+            </a:r>
+          </a:p>
+          <a:p xmlns:a="http://schemas.openxmlformats.org/drawingml/2006/main">
+            <a:r>
+              <a:rPr sz="1200" b="0">
+                <a:solidFill>
+                  <a:srgbClr val="24292F"/>
+                </a:solidFill>
+                <a:latin typeface="微软雅黑"/>
+                <a:ea typeface="微软雅黑"/>
+                <a:cs typeface="微软雅黑"/>
+              </a:rPr>
+              <a:t/>
+            </a:r>
+          </a:p>
+          <a:p xmlns:a="http://schemas.openxmlformats.org/drawingml/2006/main">
+            <a:r>
+              <a:rPr sz="1200" b="0">
+                <a:solidFill>
+                  <a:srgbClr val="24292F"/>
+                </a:solidFill>
+                <a:latin typeface="微软雅黑"/>
+                <a:ea typeface="微软雅黑"/>
+                <a:cs typeface="微软雅黑"/>
+              </a:rPr>
+              <a:t>来源与边界：</a:t>
+            </a:r>
+          </a:p>
+          <a:p xmlns:a="http://schemas.openxmlformats.org/drawingml/2006/main">
+            <a:r>
+              <a:rPr sz="1200" b="0">
+                <a:solidFill>
+                  <a:srgbClr val="24292F"/>
+                </a:solidFill>
+                <a:latin typeface="微软雅黑"/>
+                <a:ea typeface="微软雅黑"/>
+                <a:cs typeface="微软雅黑"/>
+              </a:rPr>
+              <a:t>/Users/bright/Projects/courses/graduate/lessons/lesson-02/handout.md</a:t>
+            </a:r>
+          </a:p>
+          <a:p xmlns:a="http://schemas.openxmlformats.org/drawingml/2006/main">
+            <a:r>
+              <a:rPr sz="1200" b="0">
+                <a:solidFill>
+                  <a:srgbClr val="24292F"/>
+                </a:solidFill>
+                <a:latin typeface="微软雅黑"/>
+                <a:ea typeface="微软雅黑"/>
+                <a:cs typeface="微软雅黑"/>
+              </a:rPr>
+              <a:t/>
+            </a:r>
+          </a:p>
+          <a:p xmlns:a="http://schemas.openxmlformats.org/drawingml/2006/main">
+            <a:r>
+              <a:rPr sz="1200" b="0">
+                <a:solidFill>
+                  <a:srgbClr val="24292F"/>
+                </a:solidFill>
+                <a:latin typeface="微软雅黑"/>
+                <a:ea typeface="微软雅黑"/>
+                <a:cs typeface="微软雅黑"/>
+              </a:rPr>
               <a:t>[Sources]</a:t>
             </a:r>
           </a:p>
@@ -3190,7 +5517,33 @@
                 <a:ea typeface="微软雅黑"/>
                 <a:cs typeface="微软雅黑"/>
               </a:rPr>
-              <a:t>- lessons/lesson-02/handout.md</a:t>
+              <a:t/>
+            </a:r>
+          </a:p>
+          <a:p xmlns:a="http://schemas.openxmlformats.org/drawingml/2006/main">
+            <a:r>
+              <a:rPr sz="1200" b="0">
+                <a:solidFill>
+                  <a:srgbClr val="24292F"/>
+                </a:solidFill>
+                <a:latin typeface="微软雅黑"/>
+                <a:ea typeface="微软雅黑"/>
+                <a:cs typeface="微软雅黑"/>
+              </a:rPr>
+              <a:t>- 本课 handout.md 与 slides.md</a:t>
+            </a:r>
+          </a:p>
+          <a:p xmlns:a="http://schemas.openxmlformats.org/drawingml/2006/main">
+            <a:r>
+              <a:rPr sz="1200" b="0">
+                <a:solidFill>
+                  <a:srgbClr val="24292F"/>
+                </a:solidFill>
+                <a:latin typeface="微软雅黑"/>
+                <a:ea typeface="微软雅黑"/>
+                <a:cs typeface="微软雅黑"/>
+              </a:rPr>
+              <a:t/>
             </a:r>
           </a:p>
           <a:p xmlns:a="http://schemas.openxmlformats.org/drawingml/2006/main">
@@ -3281,7 +5634,7 @@
                 <a:ea typeface="微软雅黑"/>
                 <a:cs typeface="微软雅黑"/>
               </a:rPr>
-              <a:t>长时间停留页。学生用自己的低风险动作替换右侧虚构示例；第一段先确定权限一行，中点点评后补风险卡、只读边界审查与使用记录。权限六字段、风险卡五字段与日志全部字段以课堂材料包为准，右侧是关键内容摘要，不是删减后的提交模板。无模型时手工审查，AI 使用记录如实写未执行；当堂不新增工件追踪表。完成后临时结对检查三件工件是否对应同一输入与动作。</a:t>
+              <a:t>页面：P23 个人实践：完成一条低风险动作记录</a:t>
             </a:r>
           </a:p>
           <a:p xmlns:a="http://schemas.openxmlformats.org/drawingml/2006/main">
@@ -3307,6 +5660,188 @@
                 <a:ea typeface="微软雅黑"/>
                 <a:cs typeface="微软雅黑"/>
               </a:rPr>
+              <a:t>讲义位置：§九、classroom-pack</a:t>
+            </a:r>
+          </a:p>
+          <a:p xmlns:a="http://schemas.openxmlformats.org/drawingml/2006/main">
+            <a:r>
+              <a:rPr sz="1200" b="0">
+                <a:solidFill>
+                  <a:srgbClr val="24292F"/>
+                </a:solidFill>
+                <a:latin typeface="微软雅黑"/>
+                <a:ea typeface="微软雅黑"/>
+                <a:cs typeface="微软雅黑"/>
+              </a:rPr>
+              <a:t/>
+            </a:r>
+          </a:p>
+          <a:p xmlns:a="http://schemas.openxmlformats.org/drawingml/2006/main">
+            <a:r>
+              <a:rPr sz="1200" b="0">
+                <a:solidFill>
+                  <a:srgbClr val="24292F"/>
+                </a:solidFill>
+                <a:latin typeface="微软雅黑"/>
+                <a:ea typeface="微软雅黑"/>
+                <a:cs typeface="微软雅黑"/>
+              </a:rPr>
+              <a:t>屏显核对：</a:t>
+            </a:r>
+          </a:p>
+          <a:p xmlns:a="http://schemas.openxmlformats.org/drawingml/2006/main">
+            <a:r>
+              <a:rPr sz="1200" b="0">
+                <a:solidFill>
+                  <a:srgbClr val="24292F"/>
+                </a:solidFill>
+                <a:latin typeface="微软雅黑"/>
+                <a:ea typeface="微软雅黑"/>
+                <a:cs typeface="微软雅黑"/>
+              </a:rPr>
+              <a:t>选一个低风险科研动作；写清材料边界 / 与写回范围。；第一段：权限一行；中点点评后：风险卡、 / 只读审查与使用记录；保存到个人项目；agent-permissions.md / ethics-and-compliance.md / ai-usage-log.md；课堂构造完成示例；权限行；只读人工抽象问题与获准公开摘要； / 写回三份文件前，确认具体段落。；风险卡；原稿外发会暴露合作内容。 / 改用抽象问题，由作者核查边界。；使用记录；写明实际输入、采用理由与核验方法。 / 未调用模型时如实记录“未执行”。；完成标志：三件工件相互一致，能解释一次具体动作</a:t>
+            </a:r>
+          </a:p>
+          <a:p xmlns:a="http://schemas.openxmlformats.org/drawingml/2006/main">
+            <a:r>
+              <a:rPr sz="1200" b="0">
+                <a:solidFill>
+                  <a:srgbClr val="24292F"/>
+                </a:solidFill>
+                <a:latin typeface="微软雅黑"/>
+                <a:ea typeface="微软雅黑"/>
+                <a:cs typeface="微软雅黑"/>
+              </a:rPr>
+              <a:t/>
+            </a:r>
+          </a:p>
+          <a:p xmlns:a="http://schemas.openxmlformats.org/drawingml/2006/main">
+            <a:r>
+              <a:rPr sz="1200" b="0">
+                <a:solidFill>
+                  <a:srgbClr val="24292F"/>
+                </a:solidFill>
+                <a:latin typeface="微软雅黑"/>
+                <a:ea typeface="微软雅黑"/>
+                <a:cs typeface="微软雅黑"/>
+              </a:rPr>
+              <a:t>教师讲述：</a:t>
+            </a:r>
+          </a:p>
+          <a:p xmlns:a="http://schemas.openxmlformats.org/drawingml/2006/main">
+            <a:r>
+              <a:rPr sz="1200" b="0">
+                <a:solidFill>
+                  <a:srgbClr val="24292F"/>
+                </a:solidFill>
+                <a:latin typeface="微软雅黑"/>
+                <a:ea typeface="微软雅黑"/>
+                <a:cs typeface="微软雅黑"/>
+              </a:rPr>
+              <a:t>第一段先写权限一行；中点点评后完成风险卡、只读审查和日志。</a:t>
+            </a:r>
+          </a:p>
+          <a:p xmlns:a="http://schemas.openxmlformats.org/drawingml/2006/main">
+            <a:r>
+              <a:rPr sz="1200" b="0">
+                <a:solidFill>
+                  <a:srgbClr val="24292F"/>
+                </a:solidFill>
+                <a:latin typeface="微软雅黑"/>
+                <a:ea typeface="微软雅黑"/>
+                <a:cs typeface="微软雅黑"/>
+              </a:rPr>
+              <a:t/>
+            </a:r>
+          </a:p>
+          <a:p xmlns:a="http://schemas.openxmlformats.org/drawingml/2006/main">
+            <a:r>
+              <a:rPr sz="1200" b="0">
+                <a:solidFill>
+                  <a:srgbClr val="24292F"/>
+                </a:solidFill>
+                <a:latin typeface="微软雅黑"/>
+                <a:ea typeface="微软雅黑"/>
+                <a:cs typeface="微软雅黑"/>
+              </a:rPr>
+              <a:t>学生动作：</a:t>
+            </a:r>
+          </a:p>
+          <a:p xmlns:a="http://schemas.openxmlformats.org/drawingml/2006/main">
+            <a:r>
+              <a:rPr sz="1200" b="0">
+                <a:solidFill>
+                  <a:srgbClr val="24292F"/>
+                </a:solidFill>
+                <a:latin typeface="微软雅黑"/>
+                <a:ea typeface="微软雅黑"/>
+                <a:cs typeface="微软雅黑"/>
+              </a:rPr>
+              <a:t>独立完成三件工件；无模型时手工审查</a:t>
+            </a:r>
+          </a:p>
+          <a:p xmlns:a="http://schemas.openxmlformats.org/drawingml/2006/main">
+            <a:r>
+              <a:rPr sz="1200" b="0">
+                <a:solidFill>
+                  <a:srgbClr val="24292F"/>
+                </a:solidFill>
+                <a:latin typeface="微软雅黑"/>
+                <a:ea typeface="微软雅黑"/>
+                <a:cs typeface="微软雅黑"/>
+              </a:rPr>
+              <a:t/>
+            </a:r>
+          </a:p>
+          <a:p xmlns:a="http://schemas.openxmlformats.org/drawingml/2006/main">
+            <a:r>
+              <a:rPr sz="1200" b="0">
+                <a:solidFill>
+                  <a:srgbClr val="24292F"/>
+                </a:solidFill>
+                <a:latin typeface="微软雅黑"/>
+                <a:ea typeface="微软雅黑"/>
+                <a:cs typeface="微软雅黑"/>
+              </a:rPr>
+              <a:t>来源与边界：</a:t>
+            </a:r>
+          </a:p>
+          <a:p xmlns:a="http://schemas.openxmlformats.org/drawingml/2006/main">
+            <a:r>
+              <a:rPr sz="1200" b="0">
+                <a:solidFill>
+                  <a:srgbClr val="24292F"/>
+                </a:solidFill>
+                <a:latin typeface="微软雅黑"/>
+                <a:ea typeface="微软雅黑"/>
+                <a:cs typeface="微软雅黑"/>
+              </a:rPr>
+              <a:t>/Users/bright/Projects/courses/graduate/lessons/lesson-02/handout.md</a:t>
+            </a:r>
+          </a:p>
+          <a:p xmlns:a="http://schemas.openxmlformats.org/drawingml/2006/main">
+            <a:r>
+              <a:rPr sz="1200" b="0">
+                <a:solidFill>
+                  <a:srgbClr val="24292F"/>
+                </a:solidFill>
+                <a:latin typeface="微软雅黑"/>
+                <a:ea typeface="微软雅黑"/>
+                <a:cs typeface="微软雅黑"/>
+              </a:rPr>
+              <a:t/>
+            </a:r>
+          </a:p>
+          <a:p xmlns:a="http://schemas.openxmlformats.org/drawingml/2006/main">
+            <a:r>
+              <a:rPr sz="1200" b="0">
+                <a:solidFill>
+                  <a:srgbClr val="24292F"/>
+                </a:solidFill>
+                <a:latin typeface="微软雅黑"/>
+                <a:ea typeface="微软雅黑"/>
+                <a:cs typeface="微软雅黑"/>
+              </a:rPr>
               <a:t>[Sources]</a:t>
             </a:r>
           </a:p>
@@ -3320,46 +5855,33 @@
                 <a:ea typeface="微软雅黑"/>
                 <a:cs typeface="微软雅黑"/>
               </a:rPr>
-              <a:t>- lessons/lesson-02/classroom-pack.md</a:t>
-            </a:r>
-          </a:p>
-          <a:p xmlns:a="http://schemas.openxmlformats.org/drawingml/2006/main">
-            <a:r>
-              <a:rPr sz="1200" b="0">
-                <a:solidFill>
-                  <a:srgbClr val="24292F"/>
-                </a:solidFill>
-                <a:latin typeface="微软雅黑"/>
-                <a:ea typeface="微软雅黑"/>
-                <a:cs typeface="微软雅黑"/>
-              </a:rPr>
-              <a:t>- lessons/lesson-02/handout.md §九</a:t>
-            </a:r>
-          </a:p>
-          <a:p xmlns:a="http://schemas.openxmlformats.org/drawingml/2006/main">
-            <a:r>
-              <a:rPr sz="1200" b="0">
-                <a:solidFill>
-                  <a:srgbClr val="24292F"/>
-                </a:solidFill>
-                <a:latin typeface="微软雅黑"/>
-                <a:ea typeface="微软雅黑"/>
-                <a:cs typeface="微软雅黑"/>
-              </a:rPr>
-              <a:t>- course/starter-template.md §6、§8</a:t>
-            </a:r>
-          </a:p>
-          <a:p xmlns:a="http://schemas.openxmlformats.org/drawingml/2006/main">
-            <a:r>
-              <a:rPr sz="1200" b="0">
-                <a:solidFill>
-                  <a:srgbClr val="24292F"/>
-                </a:solidFill>
-                <a:latin typeface="微软雅黑"/>
-                <a:ea typeface="微软雅黑"/>
-                <a:cs typeface="微软雅黑"/>
-              </a:rPr>
-              <a:t>- lessons/lesson-02/slides.md P23</a:t>
+              <a:t/>
+            </a:r>
+          </a:p>
+          <a:p xmlns:a="http://schemas.openxmlformats.org/drawingml/2006/main">
+            <a:r>
+              <a:rPr sz="1200" b="0">
+                <a:solidFill>
+                  <a:srgbClr val="24292F"/>
+                </a:solidFill>
+                <a:latin typeface="微软雅黑"/>
+                <a:ea typeface="微软雅黑"/>
+                <a:cs typeface="微软雅黑"/>
+              </a:rPr>
+              <a:t>- 本课 handout.md 与 slides.md</a:t>
+            </a:r>
+          </a:p>
+          <a:p xmlns:a="http://schemas.openxmlformats.org/drawingml/2006/main">
+            <a:r>
+              <a:rPr sz="1200" b="0">
+                <a:solidFill>
+                  <a:srgbClr val="24292F"/>
+                </a:solidFill>
+                <a:latin typeface="微软雅黑"/>
+                <a:ea typeface="微软雅黑"/>
+                <a:cs typeface="微软雅黑"/>
+              </a:rPr>
+              <a:t/>
             </a:r>
           </a:p>
           <a:p xmlns:a="http://schemas.openxmlformats.org/drawingml/2006/main">
@@ -3450,33 +5972,20 @@
                 <a:ea typeface="微软雅黑"/>
                 <a:cs typeface="微软雅黑"/>
               </a:rPr>
-              <a:t>页面任务：互查三件最小工件</a:t>
-            </a:r>
-          </a:p>
-          <a:p xmlns:a="http://schemas.openxmlformats.org/drawingml/2006/main">
-            <a:r>
-              <a:rPr sz="1200" b="0">
-                <a:solidFill>
-                  <a:srgbClr val="24292F"/>
-                </a:solidFill>
-                <a:latin typeface="微软雅黑"/>
-                <a:ea typeface="微软雅黑"/>
-                <a:cs typeface="微软雅黑"/>
-              </a:rPr>
-              <a:t>教师讲述：结对不形成固定组，互查不替代作者决定。</a:t>
-            </a:r>
-          </a:p>
-          <a:p xmlns:a="http://schemas.openxmlformats.org/drawingml/2006/main">
-            <a:r>
-              <a:rPr sz="1200" b="0">
-                <a:solidFill>
-                  <a:srgbClr val="24292F"/>
-                </a:solidFill>
-                <a:latin typeface="微软雅黑"/>
-                <a:ea typeface="微软雅黑"/>
-                <a:cs typeface="微软雅黑"/>
-              </a:rPr>
-              <a:t>学生动作：交换三件工件并提出一个可操作修改</a:t>
+              <a:t>页面：P24 临时结对：三件工件是否一致</a:t>
+            </a:r>
+          </a:p>
+          <a:p xmlns:a="http://schemas.openxmlformats.org/drawingml/2006/main">
+            <a:r>
+              <a:rPr sz="1200" b="0">
+                <a:solidFill>
+                  <a:srgbClr val="24292F"/>
+                </a:solidFill>
+                <a:latin typeface="微软雅黑"/>
+                <a:ea typeface="微软雅黑"/>
+                <a:cs typeface="微软雅黑"/>
+              </a:rPr>
+              <a:t/>
             </a:r>
           </a:p>
           <a:p xmlns:a="http://schemas.openxmlformats.org/drawingml/2006/main">
@@ -3502,32 +6011,6 @@
                 <a:ea typeface="微软雅黑"/>
                 <a:cs typeface="微软雅黑"/>
               </a:rPr>
-              <a:t>屏显中的课堂构造案例不代表实测结果。</a:t>
-            </a:r>
-          </a:p>
-          <a:p xmlns:a="http://schemas.openxmlformats.org/drawingml/2006/main">
-            <a:r>
-              <a:rPr sz="1200" b="0">
-                <a:solidFill>
-                  <a:srgbClr val="24292F"/>
-                </a:solidFill>
-                <a:latin typeface="微软雅黑"/>
-                <a:ea typeface="微软雅黑"/>
-                <a:cs typeface="微软雅黑"/>
-              </a:rPr>
-              <a:t>核验日期：2026-09-15。</a:t>
-            </a:r>
-          </a:p>
-          <a:p xmlns:a="http://schemas.openxmlformats.org/drawingml/2006/main">
-            <a:r>
-              <a:rPr sz="1200" b="0">
-                <a:solidFill>
-                  <a:srgbClr val="24292F"/>
-                </a:solidFill>
-                <a:latin typeface="微软雅黑"/>
-                <a:ea typeface="微软雅黑"/>
-                <a:cs typeface="微软雅黑"/>
-              </a:rPr>
               <a:t/>
             </a:r>
           </a:p>
@@ -3541,6 +6024,162 @@
                 <a:ea typeface="微软雅黑"/>
                 <a:cs typeface="微软雅黑"/>
               </a:rPr>
+              <a:t>屏显核对：</a:t>
+            </a:r>
+          </a:p>
+          <a:p xmlns:a="http://schemas.openxmlformats.org/drawingml/2006/main">
+            <a:r>
+              <a:rPr sz="1200" b="0">
+                <a:solidFill>
+                  <a:srgbClr val="24292F"/>
+                </a:solidFill>
+                <a:latin typeface="微软雅黑"/>
+                <a:ea typeface="微软雅黑"/>
+                <a:cs typeface="微软雅黑"/>
+              </a:rPr>
+              <a:t>把风险卡、权限行和使用记录放在一起；同一输入；三处写的材料对象和授权状态是否一致？；同一动作；权限允许的范围是否覆盖实际行动？；可操作确认；能否明确何时停下、由谁确认什么？；作者决定；记录采纳、修改或拒绝，以及理由。</a:t>
+            </a:r>
+          </a:p>
+          <a:p xmlns:a="http://schemas.openxmlformats.org/drawingml/2006/main">
+            <a:r>
+              <a:rPr sz="1200" b="0">
+                <a:solidFill>
+                  <a:srgbClr val="24292F"/>
+                </a:solidFill>
+                <a:latin typeface="微软雅黑"/>
+                <a:ea typeface="微软雅黑"/>
+                <a:cs typeface="微软雅黑"/>
+              </a:rPr>
+              <a:t/>
+            </a:r>
+          </a:p>
+          <a:p xmlns:a="http://schemas.openxmlformats.org/drawingml/2006/main">
+            <a:r>
+              <a:rPr sz="1200" b="0">
+                <a:solidFill>
+                  <a:srgbClr val="24292F"/>
+                </a:solidFill>
+                <a:latin typeface="微软雅黑"/>
+                <a:ea typeface="微软雅黑"/>
+                <a:cs typeface="微软雅黑"/>
+              </a:rPr>
+              <a:t>教师讲述：</a:t>
+            </a:r>
+          </a:p>
+          <a:p xmlns:a="http://schemas.openxmlformats.org/drawingml/2006/main">
+            <a:r>
+              <a:rPr sz="1200" b="0">
+                <a:solidFill>
+                  <a:srgbClr val="24292F"/>
+                </a:solidFill>
+                <a:latin typeface="微软雅黑"/>
+                <a:ea typeface="微软雅黑"/>
+                <a:cs typeface="微软雅黑"/>
+              </a:rPr>
+              <a:t>结对不形成固定组，互查不替代作者决定。</a:t>
+            </a:r>
+          </a:p>
+          <a:p xmlns:a="http://schemas.openxmlformats.org/drawingml/2006/main">
+            <a:r>
+              <a:rPr sz="1200" b="0">
+                <a:solidFill>
+                  <a:srgbClr val="24292F"/>
+                </a:solidFill>
+                <a:latin typeface="微软雅黑"/>
+                <a:ea typeface="微软雅黑"/>
+                <a:cs typeface="微软雅黑"/>
+              </a:rPr>
+              <a:t/>
+            </a:r>
+          </a:p>
+          <a:p xmlns:a="http://schemas.openxmlformats.org/drawingml/2006/main">
+            <a:r>
+              <a:rPr sz="1200" b="0">
+                <a:solidFill>
+                  <a:srgbClr val="24292F"/>
+                </a:solidFill>
+                <a:latin typeface="微软雅黑"/>
+                <a:ea typeface="微软雅黑"/>
+                <a:cs typeface="微软雅黑"/>
+              </a:rPr>
+              <a:t>学生动作：</a:t>
+            </a:r>
+          </a:p>
+          <a:p xmlns:a="http://schemas.openxmlformats.org/drawingml/2006/main">
+            <a:r>
+              <a:rPr sz="1200" b="0">
+                <a:solidFill>
+                  <a:srgbClr val="24292F"/>
+                </a:solidFill>
+                <a:latin typeface="微软雅黑"/>
+                <a:ea typeface="微软雅黑"/>
+                <a:cs typeface="微软雅黑"/>
+              </a:rPr>
+              <a:t>交换三件工件并提出一个可操作修改</a:t>
+            </a:r>
+          </a:p>
+          <a:p xmlns:a="http://schemas.openxmlformats.org/drawingml/2006/main">
+            <a:r>
+              <a:rPr sz="1200" b="0">
+                <a:solidFill>
+                  <a:srgbClr val="24292F"/>
+                </a:solidFill>
+                <a:latin typeface="微软雅黑"/>
+                <a:ea typeface="微软雅黑"/>
+                <a:cs typeface="微软雅黑"/>
+              </a:rPr>
+              <a:t/>
+            </a:r>
+          </a:p>
+          <a:p xmlns:a="http://schemas.openxmlformats.org/drawingml/2006/main">
+            <a:r>
+              <a:rPr sz="1200" b="0">
+                <a:solidFill>
+                  <a:srgbClr val="24292F"/>
+                </a:solidFill>
+                <a:latin typeface="微软雅黑"/>
+                <a:ea typeface="微软雅黑"/>
+                <a:cs typeface="微软雅黑"/>
+              </a:rPr>
+              <a:t>来源与边界：</a:t>
+            </a:r>
+          </a:p>
+          <a:p xmlns:a="http://schemas.openxmlformats.org/drawingml/2006/main">
+            <a:r>
+              <a:rPr sz="1200" b="0">
+                <a:solidFill>
+                  <a:srgbClr val="24292F"/>
+                </a:solidFill>
+                <a:latin typeface="微软雅黑"/>
+                <a:ea typeface="微软雅黑"/>
+                <a:cs typeface="微软雅黑"/>
+              </a:rPr>
+              <a:t>/Users/bright/Projects/courses/graduate/course/syllabus.md</a:t>
+            </a:r>
+          </a:p>
+          <a:p xmlns:a="http://schemas.openxmlformats.org/drawingml/2006/main">
+            <a:r>
+              <a:rPr sz="1200" b="0">
+                <a:solidFill>
+                  <a:srgbClr val="24292F"/>
+                </a:solidFill>
+                <a:latin typeface="微软雅黑"/>
+                <a:ea typeface="微软雅黑"/>
+                <a:cs typeface="微软雅黑"/>
+              </a:rPr>
+              <a:t/>
+            </a:r>
+          </a:p>
+          <a:p xmlns:a="http://schemas.openxmlformats.org/drawingml/2006/main">
+            <a:r>
+              <a:rPr sz="1200" b="0">
+                <a:solidFill>
+                  <a:srgbClr val="24292F"/>
+                </a:solidFill>
+                <a:latin typeface="微软雅黑"/>
+                <a:ea typeface="微软雅黑"/>
+                <a:cs typeface="微软雅黑"/>
+              </a:rPr>
               <a:t>[Sources]</a:t>
             </a:r>
           </a:p>
@@ -3554,7 +6193,33 @@
                 <a:ea typeface="微软雅黑"/>
                 <a:cs typeface="微软雅黑"/>
               </a:rPr>
-              <a:t>- course/syllabus.md</a:t>
+              <a:t/>
+            </a:r>
+          </a:p>
+          <a:p xmlns:a="http://schemas.openxmlformats.org/drawingml/2006/main">
+            <a:r>
+              <a:rPr sz="1200" b="0">
+                <a:solidFill>
+                  <a:srgbClr val="24292F"/>
+                </a:solidFill>
+                <a:latin typeface="微软雅黑"/>
+                <a:ea typeface="微软雅黑"/>
+                <a:cs typeface="微软雅黑"/>
+              </a:rPr>
+              <a:t>- 本课 handout.md 与 slides.md</a:t>
+            </a:r>
+          </a:p>
+          <a:p xmlns:a="http://schemas.openxmlformats.org/drawingml/2006/main">
+            <a:r>
+              <a:rPr sz="1200" b="0">
+                <a:solidFill>
+                  <a:srgbClr val="24292F"/>
+                </a:solidFill>
+                <a:latin typeface="微软雅黑"/>
+                <a:ea typeface="微软雅黑"/>
+                <a:cs typeface="微软雅黑"/>
+              </a:rPr>
+              <a:t/>
             </a:r>
           </a:p>
           <a:p xmlns:a="http://schemas.openxmlformats.org/drawingml/2006/main">
@@ -3645,33 +6310,20 @@
                 <a:ea typeface="微软雅黑"/>
                 <a:cs typeface="微软雅黑"/>
               </a:rPr>
-              <a:t>页面任务：收束多框架为一个循环</a:t>
-            </a:r>
-          </a:p>
-          <a:p xmlns:a="http://schemas.openxmlformats.org/drawingml/2006/main">
-            <a:r>
-              <a:rPr sz="1200" b="0">
-                <a:solidFill>
-                  <a:srgbClr val="24292F"/>
-                </a:solidFill>
-                <a:latin typeface="微软雅黑"/>
-                <a:ea typeface="微软雅黑"/>
-                <a:cs typeface="微软雅黑"/>
-              </a:rPr>
-              <a:t>教师讲述：解释对象卡、五条件与三档处置在闭环中的位置，不再并列为多套 contract。</a:t>
-            </a:r>
-          </a:p>
-          <a:p xmlns:a="http://schemas.openxmlformats.org/drawingml/2006/main">
-            <a:r>
-              <a:rPr sz="1200" b="0">
-                <a:solidFill>
-                  <a:srgbClr val="24292F"/>
-                </a:solidFill>
-                <a:latin typeface="微软雅黑"/>
-                <a:ea typeface="微软雅黑"/>
-                <a:cs typeface="微软雅黑"/>
-              </a:rPr>
-              <a:t>学生动作：复述循环并指认自己的三个工件</a:t>
+              <a:t>页面：P25 本讲知识点总结</a:t>
+            </a:r>
+          </a:p>
+          <a:p xmlns:a="http://schemas.openxmlformats.org/drawingml/2006/main">
+            <a:r>
+              <a:rPr sz="1200" b="0">
+                <a:solidFill>
+                  <a:srgbClr val="24292F"/>
+                </a:solidFill>
+                <a:latin typeface="微软雅黑"/>
+                <a:ea typeface="微软雅黑"/>
+                <a:cs typeface="微软雅黑"/>
+              </a:rPr>
+              <a:t/>
             </a:r>
           </a:p>
           <a:p xmlns:a="http://schemas.openxmlformats.org/drawingml/2006/main">
@@ -3697,32 +6349,6 @@
                 <a:ea typeface="微软雅黑"/>
                 <a:cs typeface="微软雅黑"/>
               </a:rPr>
-              <a:t>屏显中的课堂构造案例不代表实测结果。</a:t>
-            </a:r>
-          </a:p>
-          <a:p xmlns:a="http://schemas.openxmlformats.org/drawingml/2006/main">
-            <a:r>
-              <a:rPr sz="1200" b="0">
-                <a:solidFill>
-                  <a:srgbClr val="24292F"/>
-                </a:solidFill>
-                <a:latin typeface="微软雅黑"/>
-                <a:ea typeface="微软雅黑"/>
-                <a:cs typeface="微软雅黑"/>
-              </a:rPr>
-              <a:t>核验日期：2026-09-15。</a:t>
-            </a:r>
-          </a:p>
-          <a:p xmlns:a="http://schemas.openxmlformats.org/drawingml/2006/main">
-            <a:r>
-              <a:rPr sz="1200" b="0">
-                <a:solidFill>
-                  <a:srgbClr val="24292F"/>
-                </a:solidFill>
-                <a:latin typeface="微软雅黑"/>
-                <a:ea typeface="微软雅黑"/>
-                <a:cs typeface="微软雅黑"/>
-              </a:rPr>
               <a:t/>
             </a:r>
           </a:p>
@@ -3736,6 +6362,162 @@
                 <a:ea typeface="微软雅黑"/>
                 <a:cs typeface="微软雅黑"/>
               </a:rPr>
+              <a:t>屏显核对：</a:t>
+            </a:r>
+          </a:p>
+          <a:p xmlns:a="http://schemas.openxmlformats.org/drawingml/2006/main">
+            <a:r>
+              <a:rPr sz="1200" b="0">
+                <a:solidFill>
+                  <a:srgbClr val="24292F"/>
+                </a:solidFill>
+                <a:latin typeface="微软雅黑"/>
+                <a:ea typeface="微软雅黑"/>
+                <a:cs typeface="微软雅黑"/>
+              </a:rPr>
+              <a:t>给一个具体动作留下完整的约束与记录；风险卡；权限一行；受限执行；使用记录；为什么需要控制？；什么范围可执行？；每一步检查边界；实际做了什么？；研究者对材料、决定与最终使用承担责任。</a:t>
+            </a:r>
+          </a:p>
+          <a:p xmlns:a="http://schemas.openxmlformats.org/drawingml/2006/main">
+            <a:r>
+              <a:rPr sz="1200" b="0">
+                <a:solidFill>
+                  <a:srgbClr val="24292F"/>
+                </a:solidFill>
+                <a:latin typeface="微软雅黑"/>
+                <a:ea typeface="微软雅黑"/>
+                <a:cs typeface="微软雅黑"/>
+              </a:rPr>
+              <a:t/>
+            </a:r>
+          </a:p>
+          <a:p xmlns:a="http://schemas.openxmlformats.org/drawingml/2006/main">
+            <a:r>
+              <a:rPr sz="1200" b="0">
+                <a:solidFill>
+                  <a:srgbClr val="24292F"/>
+                </a:solidFill>
+                <a:latin typeface="微软雅黑"/>
+                <a:ea typeface="微软雅黑"/>
+                <a:cs typeface="微软雅黑"/>
+              </a:rPr>
+              <a:t>教师讲述：</a:t>
+            </a:r>
+          </a:p>
+          <a:p xmlns:a="http://schemas.openxmlformats.org/drawingml/2006/main">
+            <a:r>
+              <a:rPr sz="1200" b="0">
+                <a:solidFill>
+                  <a:srgbClr val="24292F"/>
+                </a:solidFill>
+                <a:latin typeface="微软雅黑"/>
+                <a:ea typeface="微软雅黑"/>
+                <a:cs typeface="微软雅黑"/>
+              </a:rPr>
+              <a:t>解释对象卡、五条件与三档处置在闭环中的位置，不再并列为多套 contract。</a:t>
+            </a:r>
+          </a:p>
+          <a:p xmlns:a="http://schemas.openxmlformats.org/drawingml/2006/main">
+            <a:r>
+              <a:rPr sz="1200" b="0">
+                <a:solidFill>
+                  <a:srgbClr val="24292F"/>
+                </a:solidFill>
+                <a:latin typeface="微软雅黑"/>
+                <a:ea typeface="微软雅黑"/>
+                <a:cs typeface="微软雅黑"/>
+              </a:rPr>
+              <a:t/>
+            </a:r>
+          </a:p>
+          <a:p xmlns:a="http://schemas.openxmlformats.org/drawingml/2006/main">
+            <a:r>
+              <a:rPr sz="1200" b="0">
+                <a:solidFill>
+                  <a:srgbClr val="24292F"/>
+                </a:solidFill>
+                <a:latin typeface="微软雅黑"/>
+                <a:ea typeface="微软雅黑"/>
+                <a:cs typeface="微软雅黑"/>
+              </a:rPr>
+              <a:t>学生动作：</a:t>
+            </a:r>
+          </a:p>
+          <a:p xmlns:a="http://schemas.openxmlformats.org/drawingml/2006/main">
+            <a:r>
+              <a:rPr sz="1200" b="0">
+                <a:solidFill>
+                  <a:srgbClr val="24292F"/>
+                </a:solidFill>
+                <a:latin typeface="微软雅黑"/>
+                <a:ea typeface="微软雅黑"/>
+                <a:cs typeface="微软雅黑"/>
+              </a:rPr>
+              <a:t>复述循环并指认自己的三个工件</a:t>
+            </a:r>
+          </a:p>
+          <a:p xmlns:a="http://schemas.openxmlformats.org/drawingml/2006/main">
+            <a:r>
+              <a:rPr sz="1200" b="0">
+                <a:solidFill>
+                  <a:srgbClr val="24292F"/>
+                </a:solidFill>
+                <a:latin typeface="微软雅黑"/>
+                <a:ea typeface="微软雅黑"/>
+                <a:cs typeface="微软雅黑"/>
+              </a:rPr>
+              <a:t/>
+            </a:r>
+          </a:p>
+          <a:p xmlns:a="http://schemas.openxmlformats.org/drawingml/2006/main">
+            <a:r>
+              <a:rPr sz="1200" b="0">
+                <a:solidFill>
+                  <a:srgbClr val="24292F"/>
+                </a:solidFill>
+                <a:latin typeface="微软雅黑"/>
+                <a:ea typeface="微软雅黑"/>
+                <a:cs typeface="微软雅黑"/>
+              </a:rPr>
+              <a:t>来源与边界：</a:t>
+            </a:r>
+          </a:p>
+          <a:p xmlns:a="http://schemas.openxmlformats.org/drawingml/2006/main">
+            <a:r>
+              <a:rPr sz="1200" b="0">
+                <a:solidFill>
+                  <a:srgbClr val="24292F"/>
+                </a:solidFill>
+                <a:latin typeface="微软雅黑"/>
+                <a:ea typeface="微软雅黑"/>
+                <a:cs typeface="微软雅黑"/>
+              </a:rPr>
+              <a:t>/Users/bright/Projects/courses/graduate/lessons/lesson-02/handout.md</a:t>
+            </a:r>
+          </a:p>
+          <a:p xmlns:a="http://schemas.openxmlformats.org/drawingml/2006/main">
+            <a:r>
+              <a:rPr sz="1200" b="0">
+                <a:solidFill>
+                  <a:srgbClr val="24292F"/>
+                </a:solidFill>
+                <a:latin typeface="微软雅黑"/>
+                <a:ea typeface="微软雅黑"/>
+                <a:cs typeface="微软雅黑"/>
+              </a:rPr>
+              <a:t/>
+            </a:r>
+          </a:p>
+          <a:p xmlns:a="http://schemas.openxmlformats.org/drawingml/2006/main">
+            <a:r>
+              <a:rPr sz="1200" b="0">
+                <a:solidFill>
+                  <a:srgbClr val="24292F"/>
+                </a:solidFill>
+                <a:latin typeface="微软雅黑"/>
+                <a:ea typeface="微软雅黑"/>
+                <a:cs typeface="微软雅黑"/>
+              </a:rPr>
               <a:t>[Sources]</a:t>
             </a:r>
           </a:p>
@@ -3749,7 +6531,33 @@
                 <a:ea typeface="微软雅黑"/>
                 <a:cs typeface="微软雅黑"/>
               </a:rPr>
-              <a:t>- lessons/lesson-02/handout.md</a:t>
+              <a:t/>
+            </a:r>
+          </a:p>
+          <a:p xmlns:a="http://schemas.openxmlformats.org/drawingml/2006/main">
+            <a:r>
+              <a:rPr sz="1200" b="0">
+                <a:solidFill>
+                  <a:srgbClr val="24292F"/>
+                </a:solidFill>
+                <a:latin typeface="微软雅黑"/>
+                <a:ea typeface="微软雅黑"/>
+                <a:cs typeface="微软雅黑"/>
+              </a:rPr>
+              <a:t>- 本课 handout.md 与 slides.md</a:t>
+            </a:r>
+          </a:p>
+          <a:p xmlns:a="http://schemas.openxmlformats.org/drawingml/2006/main">
+            <a:r>
+              <a:rPr sz="1200" b="0">
+                <a:solidFill>
+                  <a:srgbClr val="24292F"/>
+                </a:solidFill>
+                <a:latin typeface="微软雅黑"/>
+                <a:ea typeface="微软雅黑"/>
+                <a:cs typeface="微软雅黑"/>
+              </a:rPr>
+              <a:t/>
             </a:r>
           </a:p>
           <a:p xmlns:a="http://schemas.openxmlformats.org/drawingml/2006/main">
@@ -3840,33 +6648,20 @@
                 <a:ea typeface="微软雅黑"/>
                 <a:cs typeface="微软雅黑"/>
               </a:rPr>
-              <a:t>页面任务：明确课后与下一课接口</a:t>
-            </a:r>
-          </a:p>
-          <a:p xmlns:a="http://schemas.openxmlformats.org/drawingml/2006/main">
-            <a:r>
-              <a:rPr sz="1200" b="0">
-                <a:solidFill>
-                  <a:srgbClr val="24292F"/>
-                </a:solidFill>
-                <a:latin typeface="微软雅黑"/>
-                <a:ea typeface="微软雅黑"/>
-                <a:cs typeface="微软雅黑"/>
-              </a:rPr>
-              <a:t>教师讲述：当堂只验收风险卡、权限一行和使用记录；课后沿用它们更新工件追踪，不正式提交；第 6 课问题门再检查完整项目版本。</a:t>
-            </a:r>
-          </a:p>
-          <a:p xmlns:a="http://schemas.openxmlformats.org/drawingml/2006/main">
-            <a:r>
-              <a:rPr sz="1200" b="0">
-                <a:solidFill>
-                  <a:srgbClr val="24292F"/>
-                </a:solidFill>
-                <a:latin typeface="微软雅黑"/>
-                <a:ea typeface="微软雅黑"/>
-                <a:cs typeface="微软雅黑"/>
-              </a:rPr>
-              <a:t>学生动作：记录一个进入第 3 课的公开检索问题</a:t>
+              <a:t>页面：P26 课后回写与第 3 课准备</a:t>
+            </a:r>
+          </a:p>
+          <a:p xmlns:a="http://schemas.openxmlformats.org/drawingml/2006/main">
+            <a:r>
+              <a:rPr sz="1200" b="0">
+                <a:solidFill>
+                  <a:srgbClr val="24292F"/>
+                </a:solidFill>
+                <a:latin typeface="微软雅黑"/>
+                <a:ea typeface="微软雅黑"/>
+                <a:cs typeface="微软雅黑"/>
+              </a:rPr>
+              <a:t/>
             </a:r>
           </a:p>
           <a:p xmlns:a="http://schemas.openxmlformats.org/drawingml/2006/main">
@@ -3892,32 +6687,6 @@
                 <a:ea typeface="微软雅黑"/>
                 <a:cs typeface="微软雅黑"/>
               </a:rPr>
-              <a:t>屏显中的课堂构造案例不代表实测结果。</a:t>
-            </a:r>
-          </a:p>
-          <a:p xmlns:a="http://schemas.openxmlformats.org/drawingml/2006/main">
-            <a:r>
-              <a:rPr sz="1200" b="0">
-                <a:solidFill>
-                  <a:srgbClr val="24292F"/>
-                </a:solidFill>
-                <a:latin typeface="微软雅黑"/>
-                <a:ea typeface="微软雅黑"/>
-                <a:cs typeface="微软雅黑"/>
-              </a:rPr>
-              <a:t>核验日期：2026-09-15。</a:t>
-            </a:r>
-          </a:p>
-          <a:p xmlns:a="http://schemas.openxmlformats.org/drawingml/2006/main">
-            <a:r>
-              <a:rPr sz="1200" b="0">
-                <a:solidFill>
-                  <a:srgbClr val="24292F"/>
-                </a:solidFill>
-                <a:latin typeface="微软雅黑"/>
-                <a:ea typeface="微软雅黑"/>
-                <a:cs typeface="微软雅黑"/>
-              </a:rPr>
               <a:t/>
             </a:r>
           </a:p>
@@ -3931,6 +6700,162 @@
                 <a:ea typeface="微软雅黑"/>
                 <a:cs typeface="微软雅黑"/>
               </a:rPr>
+              <a:t>屏显核对：</a:t>
+            </a:r>
+          </a:p>
+          <a:p xmlns:a="http://schemas.openxmlformats.org/drawingml/2006/main">
+            <a:r>
+              <a:rPr sz="1200" b="0">
+                <a:solidFill>
+                  <a:srgbClr val="24292F"/>
+                </a:solidFill>
+                <a:latin typeface="微软雅黑"/>
+                <a:ea typeface="微软雅黑"/>
+                <a:cs typeface="微软雅黑"/>
+              </a:rPr>
+              <a:t>继续完善；按个人项目补齐材料边界、确认点和禁止项。；补工件追踪；为早期工件标状态，保留支持状态的依据。；准备公开检索；带着一个研究问题和一组候选关键词进入第 3 课。；持续更新同一个人项目，累积第 6 课问题门的证据。</a:t>
+            </a:r>
+          </a:p>
+          <a:p xmlns:a="http://schemas.openxmlformats.org/drawingml/2006/main">
+            <a:r>
+              <a:rPr sz="1200" b="0">
+                <a:solidFill>
+                  <a:srgbClr val="24292F"/>
+                </a:solidFill>
+                <a:latin typeface="微软雅黑"/>
+                <a:ea typeface="微软雅黑"/>
+                <a:cs typeface="微软雅黑"/>
+              </a:rPr>
+              <a:t/>
+            </a:r>
+          </a:p>
+          <a:p xmlns:a="http://schemas.openxmlformats.org/drawingml/2006/main">
+            <a:r>
+              <a:rPr sz="1200" b="0">
+                <a:solidFill>
+                  <a:srgbClr val="24292F"/>
+                </a:solidFill>
+                <a:latin typeface="微软雅黑"/>
+                <a:ea typeface="微软雅黑"/>
+                <a:cs typeface="微软雅黑"/>
+              </a:rPr>
+              <a:t>教师讲述：</a:t>
+            </a:r>
+          </a:p>
+          <a:p xmlns:a="http://schemas.openxmlformats.org/drawingml/2006/main">
+            <a:r>
+              <a:rPr sz="1200" b="0">
+                <a:solidFill>
+                  <a:srgbClr val="24292F"/>
+                </a:solidFill>
+                <a:latin typeface="微软雅黑"/>
+                <a:ea typeface="微软雅黑"/>
+                <a:cs typeface="微软雅黑"/>
+              </a:rPr>
+              <a:t>当堂只验收风险卡、权限一行和使用记录；课后沿用它们更新工件追踪，不正式提交；第 6 课问题门再检查完整项目版本。</a:t>
+            </a:r>
+          </a:p>
+          <a:p xmlns:a="http://schemas.openxmlformats.org/drawingml/2006/main">
+            <a:r>
+              <a:rPr sz="1200" b="0">
+                <a:solidFill>
+                  <a:srgbClr val="24292F"/>
+                </a:solidFill>
+                <a:latin typeface="微软雅黑"/>
+                <a:ea typeface="微软雅黑"/>
+                <a:cs typeface="微软雅黑"/>
+              </a:rPr>
+              <a:t/>
+            </a:r>
+          </a:p>
+          <a:p xmlns:a="http://schemas.openxmlformats.org/drawingml/2006/main">
+            <a:r>
+              <a:rPr sz="1200" b="0">
+                <a:solidFill>
+                  <a:srgbClr val="24292F"/>
+                </a:solidFill>
+                <a:latin typeface="微软雅黑"/>
+                <a:ea typeface="微软雅黑"/>
+                <a:cs typeface="微软雅黑"/>
+              </a:rPr>
+              <a:t>学生动作：</a:t>
+            </a:r>
+          </a:p>
+          <a:p xmlns:a="http://schemas.openxmlformats.org/drawingml/2006/main">
+            <a:r>
+              <a:rPr sz="1200" b="0">
+                <a:solidFill>
+                  <a:srgbClr val="24292F"/>
+                </a:solidFill>
+                <a:latin typeface="微软雅黑"/>
+                <a:ea typeface="微软雅黑"/>
+                <a:cs typeface="微软雅黑"/>
+              </a:rPr>
+              <a:t>记录一个进入第 3 课的公开检索问题</a:t>
+            </a:r>
+          </a:p>
+          <a:p xmlns:a="http://schemas.openxmlformats.org/drawingml/2006/main">
+            <a:r>
+              <a:rPr sz="1200" b="0">
+                <a:solidFill>
+                  <a:srgbClr val="24292F"/>
+                </a:solidFill>
+                <a:latin typeface="微软雅黑"/>
+                <a:ea typeface="微软雅黑"/>
+                <a:cs typeface="微软雅黑"/>
+              </a:rPr>
+              <a:t/>
+            </a:r>
+          </a:p>
+          <a:p xmlns:a="http://schemas.openxmlformats.org/drawingml/2006/main">
+            <a:r>
+              <a:rPr sz="1200" b="0">
+                <a:solidFill>
+                  <a:srgbClr val="24292F"/>
+                </a:solidFill>
+                <a:latin typeface="微软雅黑"/>
+                <a:ea typeface="微软雅黑"/>
+                <a:cs typeface="微软雅黑"/>
+              </a:rPr>
+              <a:t>来源与边界：</a:t>
+            </a:r>
+          </a:p>
+          <a:p xmlns:a="http://schemas.openxmlformats.org/drawingml/2006/main">
+            <a:r>
+              <a:rPr sz="1200" b="0">
+                <a:solidFill>
+                  <a:srgbClr val="24292F"/>
+                </a:solidFill>
+                <a:latin typeface="微软雅黑"/>
+                <a:ea typeface="微软雅黑"/>
+                <a:cs typeface="微软雅黑"/>
+              </a:rPr>
+              <a:t>/Users/bright/Projects/courses/graduate/lessons/lesson-02/handout.md；/Users/bright/Projects/courses/graduate/course/syllabus.md</a:t>
+            </a:r>
+          </a:p>
+          <a:p xmlns:a="http://schemas.openxmlformats.org/drawingml/2006/main">
+            <a:r>
+              <a:rPr sz="1200" b="0">
+                <a:solidFill>
+                  <a:srgbClr val="24292F"/>
+                </a:solidFill>
+                <a:latin typeface="微软雅黑"/>
+                <a:ea typeface="微软雅黑"/>
+                <a:cs typeface="微软雅黑"/>
+              </a:rPr>
+              <a:t/>
+            </a:r>
+          </a:p>
+          <a:p xmlns:a="http://schemas.openxmlformats.org/drawingml/2006/main">
+            <a:r>
+              <a:rPr sz="1200" b="0">
+                <a:solidFill>
+                  <a:srgbClr val="24292F"/>
+                </a:solidFill>
+                <a:latin typeface="微软雅黑"/>
+                <a:ea typeface="微软雅黑"/>
+                <a:cs typeface="微软雅黑"/>
+              </a:rPr>
               <a:t>[Sources]</a:t>
             </a:r>
           </a:p>
@@ -3944,20 +6869,33 @@
                 <a:ea typeface="微软雅黑"/>
                 <a:cs typeface="微软雅黑"/>
               </a:rPr>
-              <a:t>- lessons/lesson-02/handout.md</a:t>
-            </a:r>
-          </a:p>
-          <a:p xmlns:a="http://schemas.openxmlformats.org/drawingml/2006/main">
-            <a:r>
-              <a:rPr sz="1200" b="0">
-                <a:solidFill>
-                  <a:srgbClr val="24292F"/>
-                </a:solidFill>
-                <a:latin typeface="微软雅黑"/>
-                <a:ea typeface="微软雅黑"/>
-                <a:cs typeface="微软雅黑"/>
-              </a:rPr>
-              <a:t>- course/syllabus.md</a:t>
+              <a:t/>
+            </a:r>
+          </a:p>
+          <a:p xmlns:a="http://schemas.openxmlformats.org/drawingml/2006/main">
+            <a:r>
+              <a:rPr sz="1200" b="0">
+                <a:solidFill>
+                  <a:srgbClr val="24292F"/>
+                </a:solidFill>
+                <a:latin typeface="微软雅黑"/>
+                <a:ea typeface="微软雅黑"/>
+                <a:cs typeface="微软雅黑"/>
+              </a:rPr>
+              <a:t>- 本课 handout.md 与 slides.md</a:t>
+            </a:r>
+          </a:p>
+          <a:p xmlns:a="http://schemas.openxmlformats.org/drawingml/2006/main">
+            <a:r>
+              <a:rPr sz="1200" b="0">
+                <a:solidFill>
+                  <a:srgbClr val="24292F"/>
+                </a:solidFill>
+                <a:latin typeface="微软雅黑"/>
+                <a:ea typeface="微软雅黑"/>
+                <a:cs typeface="微软雅黑"/>
+              </a:rPr>
+              <a:t/>
             </a:r>
           </a:p>
           <a:p xmlns:a="http://schemas.openxmlformats.org/drawingml/2006/main">
@@ -4048,33 +6986,20 @@
                 <a:ea typeface="微软雅黑"/>
                 <a:cs typeface="微软雅黑"/>
               </a:rPr>
-              <a:t>页面任务：训练理由表达而非从众</a:t>
-            </a:r>
-          </a:p>
-          <a:p xmlns:a="http://schemas.openxmlformats.org/drawingml/2006/main">
-            <a:r>
-              <a:rPr sz="1200" b="0">
-                <a:solidFill>
-                  <a:srgbClr val="24292F"/>
-                </a:solidFill>
-                <a:latin typeface="微软雅黑"/>
-                <a:ea typeface="微软雅黑"/>
-                <a:cs typeface="微软雅黑"/>
-              </a:rPr>
-              <a:t>教师讲述：交换理由有价值，但不是组队；屏幕不出现课堂分钟。</a:t>
-            </a:r>
-          </a:p>
-          <a:p xmlns:a="http://schemas.openxmlformats.org/drawingml/2006/main">
-            <a:r>
-              <a:rPr sz="1200" b="0">
-                <a:solidFill>
-                  <a:srgbClr val="24292F"/>
-                </a:solidFill>
-                <a:latin typeface="微软雅黑"/>
-                <a:ea typeface="微软雅黑"/>
-                <a:cs typeface="微软雅黑"/>
-              </a:rPr>
-              <a:t>学生动作：个人选择允许/有条件允许/禁止，再临时结对陈述理由</a:t>
+              <a:t>页面：P03 这份合作稿可以交给外部模型吗？</a:t>
+            </a:r>
+          </a:p>
+          <a:p xmlns:a="http://schemas.openxmlformats.org/drawingml/2006/main">
+            <a:r>
+              <a:rPr sz="1200" b="0">
+                <a:solidFill>
+                  <a:srgbClr val="24292F"/>
+                </a:solidFill>
+                <a:latin typeface="微软雅黑"/>
+                <a:ea typeface="微软雅黑"/>
+                <a:cs typeface="微软雅黑"/>
+              </a:rPr>
+              <a:t/>
             </a:r>
           </a:p>
           <a:p xmlns:a="http://schemas.openxmlformats.org/drawingml/2006/main">
@@ -4100,32 +7025,6 @@
                 <a:ea typeface="微软雅黑"/>
                 <a:cs typeface="微软雅黑"/>
               </a:rPr>
-              <a:t>屏显中的课堂构造案例不代表实测结果。</a:t>
-            </a:r>
-          </a:p>
-          <a:p xmlns:a="http://schemas.openxmlformats.org/drawingml/2006/main">
-            <a:r>
-              <a:rPr sz="1200" b="0">
-                <a:solidFill>
-                  <a:srgbClr val="24292F"/>
-                </a:solidFill>
-                <a:latin typeface="微软雅黑"/>
-                <a:ea typeface="微软雅黑"/>
-                <a:cs typeface="微软雅黑"/>
-              </a:rPr>
-              <a:t>核验日期：2026-09-15。</a:t>
-            </a:r>
-          </a:p>
-          <a:p xmlns:a="http://schemas.openxmlformats.org/drawingml/2006/main">
-            <a:r>
-              <a:rPr sz="1200" b="0">
-                <a:solidFill>
-                  <a:srgbClr val="24292F"/>
-                </a:solidFill>
-                <a:latin typeface="微软雅黑"/>
-                <a:ea typeface="微软雅黑"/>
-                <a:cs typeface="微软雅黑"/>
-              </a:rPr>
               <a:t/>
             </a:r>
           </a:p>
@@ -4139,6 +7038,162 @@
                 <a:ea typeface="微软雅黑"/>
                 <a:cs typeface="微软雅黑"/>
               </a:rPr>
+              <a:t>屏显核对：</a:t>
+            </a:r>
+          </a:p>
+          <a:p xmlns:a="http://schemas.openxmlformats.org/drawingml/2006/main">
+            <a:r>
+              <a:rPr sz="1200" b="0">
+                <a:solidFill>
+                  <a:srgbClr val="24292F"/>
+                </a:solidFill>
+                <a:latin typeface="微软雅黑"/>
+                <a:ea typeface="微软雅黑"/>
+                <a:cs typeface="微软雅黑"/>
+              </a:rPr>
+              <a:t>课堂构造案例；你有一份未公开的合作稿， / 想交给个人账户下的外部模型， / 帮助梳理相关研究。；没有共同作者授权记录，也没有核对平台条款。；允许；有条件允许；禁止；先作判断，再说明决定性条件。</a:t>
+            </a:r>
+          </a:p>
+          <a:p xmlns:a="http://schemas.openxmlformats.org/drawingml/2006/main">
+            <a:r>
+              <a:rPr sz="1200" b="0">
+                <a:solidFill>
+                  <a:srgbClr val="24292F"/>
+                </a:solidFill>
+                <a:latin typeface="微软雅黑"/>
+                <a:ea typeface="微软雅黑"/>
+                <a:cs typeface="微软雅黑"/>
+              </a:rPr>
+              <a:t/>
+            </a:r>
+          </a:p>
+          <a:p xmlns:a="http://schemas.openxmlformats.org/drawingml/2006/main">
+            <a:r>
+              <a:rPr sz="1200" b="0">
+                <a:solidFill>
+                  <a:srgbClr val="24292F"/>
+                </a:solidFill>
+                <a:latin typeface="微软雅黑"/>
+                <a:ea typeface="微软雅黑"/>
+                <a:cs typeface="微软雅黑"/>
+              </a:rPr>
+              <a:t>教师讲述：</a:t>
+            </a:r>
+          </a:p>
+          <a:p xmlns:a="http://schemas.openxmlformats.org/drawingml/2006/main">
+            <a:r>
+              <a:rPr sz="1200" b="0">
+                <a:solidFill>
+                  <a:srgbClr val="24292F"/>
+                </a:solidFill>
+                <a:latin typeface="微软雅黑"/>
+                <a:ea typeface="微软雅黑"/>
+                <a:cs typeface="微软雅黑"/>
+              </a:rPr>
+              <a:t>就当前信息，不可上传原稿：缺共同作者授权和平台条款核对。“有条件允许”只描述补齐条件后的新情境，不表示现在可先发。完成判断后切换到公开构造材料，继续示范风险卡与授权边界。</a:t>
+            </a:r>
+          </a:p>
+          <a:p xmlns:a="http://schemas.openxmlformats.org/drawingml/2006/main">
+            <a:r>
+              <a:rPr sz="1200" b="0">
+                <a:solidFill>
+                  <a:srgbClr val="24292F"/>
+                </a:solidFill>
+                <a:latin typeface="微软雅黑"/>
+                <a:ea typeface="微软雅黑"/>
+                <a:cs typeface="微软雅黑"/>
+              </a:rPr>
+              <a:t/>
+            </a:r>
+          </a:p>
+          <a:p xmlns:a="http://schemas.openxmlformats.org/drawingml/2006/main">
+            <a:r>
+              <a:rPr sz="1200" b="0">
+                <a:solidFill>
+                  <a:srgbClr val="24292F"/>
+                </a:solidFill>
+                <a:latin typeface="微软雅黑"/>
+                <a:ea typeface="微软雅黑"/>
+                <a:cs typeface="微软雅黑"/>
+              </a:rPr>
+              <a:t>学生动作：</a:t>
+            </a:r>
+          </a:p>
+          <a:p xmlns:a="http://schemas.openxmlformats.org/drawingml/2006/main">
+            <a:r>
+              <a:rPr sz="1200" b="0">
+                <a:solidFill>
+                  <a:srgbClr val="24292F"/>
+                </a:solidFill>
+                <a:latin typeface="微软雅黑"/>
+                <a:ea typeface="微软雅黑"/>
+                <a:cs typeface="微软雅黑"/>
+              </a:rPr>
+              <a:t>个人选择允许/有条件允许/禁止，再临时结对陈述理由</a:t>
+            </a:r>
+          </a:p>
+          <a:p xmlns:a="http://schemas.openxmlformats.org/drawingml/2006/main">
+            <a:r>
+              <a:rPr sz="1200" b="0">
+                <a:solidFill>
+                  <a:srgbClr val="24292F"/>
+                </a:solidFill>
+                <a:latin typeface="微软雅黑"/>
+                <a:ea typeface="微软雅黑"/>
+                <a:cs typeface="微软雅黑"/>
+              </a:rPr>
+              <a:t/>
+            </a:r>
+          </a:p>
+          <a:p xmlns:a="http://schemas.openxmlformats.org/drawingml/2006/main">
+            <a:r>
+              <a:rPr sz="1200" b="0">
+                <a:solidFill>
+                  <a:srgbClr val="24292F"/>
+                </a:solidFill>
+                <a:latin typeface="微软雅黑"/>
+                <a:ea typeface="微软雅黑"/>
+                <a:cs typeface="微软雅黑"/>
+              </a:rPr>
+              <a:t>来源与边界：</a:t>
+            </a:r>
+          </a:p>
+          <a:p xmlns:a="http://schemas.openxmlformats.org/drawingml/2006/main">
+            <a:r>
+              <a:rPr sz="1200" b="0">
+                <a:solidFill>
+                  <a:srgbClr val="24292F"/>
+                </a:solidFill>
+                <a:latin typeface="微软雅黑"/>
+                <a:ea typeface="微软雅黑"/>
+                <a:cs typeface="微软雅黑"/>
+              </a:rPr>
+              <a:t>/Users/bright/Projects/courses/graduate/lessons/lesson-02/handout.md</a:t>
+            </a:r>
+          </a:p>
+          <a:p xmlns:a="http://schemas.openxmlformats.org/drawingml/2006/main">
+            <a:r>
+              <a:rPr sz="1200" b="0">
+                <a:solidFill>
+                  <a:srgbClr val="24292F"/>
+                </a:solidFill>
+                <a:latin typeface="微软雅黑"/>
+                <a:ea typeface="微软雅黑"/>
+                <a:cs typeface="微软雅黑"/>
+              </a:rPr>
+              <a:t/>
+            </a:r>
+          </a:p>
+          <a:p xmlns:a="http://schemas.openxmlformats.org/drawingml/2006/main">
+            <a:r>
+              <a:rPr sz="1200" b="0">
+                <a:solidFill>
+                  <a:srgbClr val="24292F"/>
+                </a:solidFill>
+                <a:latin typeface="微软雅黑"/>
+                <a:ea typeface="微软雅黑"/>
+                <a:cs typeface="微软雅黑"/>
+              </a:rPr>
               <a:t>[Sources]</a:t>
             </a:r>
           </a:p>
@@ -4152,7 +7207,33 @@
                 <a:ea typeface="微软雅黑"/>
                 <a:cs typeface="微软雅黑"/>
               </a:rPr>
-              <a:t>- lessons/lesson-02/handout.md</a:t>
+              <a:t/>
+            </a:r>
+          </a:p>
+          <a:p xmlns:a="http://schemas.openxmlformats.org/drawingml/2006/main">
+            <a:r>
+              <a:rPr sz="1200" b="0">
+                <a:solidFill>
+                  <a:srgbClr val="24292F"/>
+                </a:solidFill>
+                <a:latin typeface="微软雅黑"/>
+                <a:ea typeface="微软雅黑"/>
+                <a:cs typeface="微软雅黑"/>
+              </a:rPr>
+              <a:t>- 本课 handout.md 与 slides.md</a:t>
+            </a:r>
+          </a:p>
+          <a:p xmlns:a="http://schemas.openxmlformats.org/drawingml/2006/main">
+            <a:r>
+              <a:rPr sz="1200" b="0">
+                <a:solidFill>
+                  <a:srgbClr val="24292F"/>
+                </a:solidFill>
+                <a:latin typeface="微软雅黑"/>
+                <a:ea typeface="微软雅黑"/>
+                <a:cs typeface="微软雅黑"/>
+              </a:rPr>
+              <a:t/>
             </a:r>
           </a:p>
           <a:p xmlns:a="http://schemas.openxmlformats.org/drawingml/2006/main">
@@ -4243,7 +7324,7 @@
                 <a:ea typeface="微软雅黑"/>
                 <a:cs typeface="微软雅黑"/>
               </a:rPr>
-              <a:t>NASEM (2017), Fostering Integrity in Research, Highlights p.1 六项核心价值。原始报告截图用于来源识别，六项中文价值由可编辑文本呈现。DOI: 10.17226/21896。开放获取不等于可任意重发图片，本课件供课堂使用，对外发布前复核图像复用条款。</a:t>
+              <a:t>页面：P04 科研诚信的六项价值</a:t>
             </a:r>
           </a:p>
           <a:p xmlns:a="http://schemas.openxmlformats.org/drawingml/2006/main">
@@ -4269,6 +7350,188 @@
                 <a:ea typeface="微软雅黑"/>
                 <a:cs typeface="微软雅黑"/>
               </a:rPr>
+              <a:t>讲义位置：§一</a:t>
+            </a:r>
+          </a:p>
+          <a:p xmlns:a="http://schemas.openxmlformats.org/drawingml/2006/main">
+            <a:r>
+              <a:rPr sz="1200" b="0">
+                <a:solidFill>
+                  <a:srgbClr val="24292F"/>
+                </a:solidFill>
+                <a:latin typeface="微软雅黑"/>
+                <a:ea typeface="微软雅黑"/>
+                <a:cs typeface="微软雅黑"/>
+              </a:rPr>
+              <a:t/>
+            </a:r>
+          </a:p>
+          <a:p xmlns:a="http://schemas.openxmlformats.org/drawingml/2006/main">
+            <a:r>
+              <a:rPr sz="1200" b="0">
+                <a:solidFill>
+                  <a:srgbClr val="24292F"/>
+                </a:solidFill>
+                <a:latin typeface="微软雅黑"/>
+                <a:ea typeface="微软雅黑"/>
+                <a:cs typeface="微软雅黑"/>
+              </a:rPr>
+              <a:t>屏显核对：</a:t>
+            </a:r>
+          </a:p>
+          <a:p xmlns:a="http://schemas.openxmlformats.org/drawingml/2006/main">
+            <a:r>
+              <a:rPr sz="1200" b="0">
+                <a:solidFill>
+                  <a:srgbClr val="24292F"/>
+                </a:solidFill>
+                <a:latin typeface="微软雅黑"/>
+                <a:ea typeface="微软雅黑"/>
+                <a:cs typeface="微软雅黑"/>
+              </a:rPr>
+              <a:t>NASEM · Fostering Integrity in Research · 2017；客观；objectivity；诚实；honesty；开放；openness；公平；fairness；问责；accountability；守护责任；stewardship；一次 Agent 动作，可能损害其中哪项价值？</a:t>
+            </a:r>
+          </a:p>
+          <a:p xmlns:a="http://schemas.openxmlformats.org/drawingml/2006/main">
+            <a:r>
+              <a:rPr sz="1200" b="0">
+                <a:solidFill>
+                  <a:srgbClr val="24292F"/>
+                </a:solidFill>
+                <a:latin typeface="微软雅黑"/>
+                <a:ea typeface="微软雅黑"/>
+                <a:cs typeface="微软雅黑"/>
+              </a:rPr>
+              <a:t/>
+            </a:r>
+          </a:p>
+          <a:p xmlns:a="http://schemas.openxmlformats.org/drawingml/2006/main">
+            <a:r>
+              <a:rPr sz="1200" b="0">
+                <a:solidFill>
+                  <a:srgbClr val="24292F"/>
+                </a:solidFill>
+                <a:latin typeface="微软雅黑"/>
+                <a:ea typeface="微软雅黑"/>
+                <a:cs typeface="微软雅黑"/>
+              </a:rPr>
+              <a:t>教师讲述：</a:t>
+            </a:r>
+          </a:p>
+          <a:p xmlns:a="http://schemas.openxmlformats.org/drawingml/2006/main">
+            <a:r>
+              <a:rPr sz="1200" b="0">
+                <a:solidFill>
+                  <a:srgbClr val="24292F"/>
+                </a:solidFill>
+                <a:latin typeface="微软雅黑"/>
+                <a:ea typeface="微软雅黑"/>
+                <a:cs typeface="微软雅黑"/>
+              </a:rPr>
+              <a:t>让学生先看原始文件，再用六项中文标签总结。</a:t>
+            </a:r>
+          </a:p>
+          <a:p xmlns:a="http://schemas.openxmlformats.org/drawingml/2006/main">
+            <a:r>
+              <a:rPr sz="1200" b="0">
+                <a:solidFill>
+                  <a:srgbClr val="24292F"/>
+                </a:solidFill>
+                <a:latin typeface="微软雅黑"/>
+                <a:ea typeface="微软雅黑"/>
+                <a:cs typeface="微软雅黑"/>
+              </a:rPr>
+              <a:t/>
+            </a:r>
+          </a:p>
+          <a:p xmlns:a="http://schemas.openxmlformats.org/drawingml/2006/main">
+            <a:r>
+              <a:rPr sz="1200" b="0">
+                <a:solidFill>
+                  <a:srgbClr val="24292F"/>
+                </a:solidFill>
+                <a:latin typeface="微软雅黑"/>
+                <a:ea typeface="微软雅黑"/>
+                <a:cs typeface="微软雅黑"/>
+              </a:rPr>
+              <a:t>学生动作：</a:t>
+            </a:r>
+          </a:p>
+          <a:p xmlns:a="http://schemas.openxmlformats.org/drawingml/2006/main">
+            <a:r>
+              <a:rPr sz="1200" b="0">
+                <a:solidFill>
+                  <a:srgbClr val="24292F"/>
+                </a:solidFill>
+                <a:latin typeface="微软雅黑"/>
+                <a:ea typeface="微软雅黑"/>
+                <a:cs typeface="微软雅黑"/>
+              </a:rPr>
+              <a:t>指出 Agent 动作可能损害哪项价值</a:t>
+            </a:r>
+          </a:p>
+          <a:p xmlns:a="http://schemas.openxmlformats.org/drawingml/2006/main">
+            <a:r>
+              <a:rPr sz="1200" b="0">
+                <a:solidFill>
+                  <a:srgbClr val="24292F"/>
+                </a:solidFill>
+                <a:latin typeface="微软雅黑"/>
+                <a:ea typeface="微软雅黑"/>
+                <a:cs typeface="微软雅黑"/>
+              </a:rPr>
+              <a:t/>
+            </a:r>
+          </a:p>
+          <a:p xmlns:a="http://schemas.openxmlformats.org/drawingml/2006/main">
+            <a:r>
+              <a:rPr sz="1200" b="0">
+                <a:solidFill>
+                  <a:srgbClr val="24292F"/>
+                </a:solidFill>
+                <a:latin typeface="微软雅黑"/>
+                <a:ea typeface="微软雅黑"/>
+                <a:cs typeface="微软雅黑"/>
+              </a:rPr>
+              <a:t>来源与边界：</a:t>
+            </a:r>
+          </a:p>
+          <a:p xmlns:a="http://schemas.openxmlformats.org/drawingml/2006/main">
+            <a:r>
+              <a:rPr sz="1200" b="0">
+                <a:solidFill>
+                  <a:srgbClr val="24292F"/>
+                </a:solidFill>
+                <a:latin typeface="微软雅黑"/>
+                <a:ea typeface="微软雅黑"/>
+                <a:cs typeface="微软雅黑"/>
+              </a:rPr>
+              <a:t>https://doi.org/10.17226/21896</a:t>
+            </a:r>
+          </a:p>
+          <a:p xmlns:a="http://schemas.openxmlformats.org/drawingml/2006/main">
+            <a:r>
+              <a:rPr sz="1200" b="0">
+                <a:solidFill>
+                  <a:srgbClr val="24292F"/>
+                </a:solidFill>
+                <a:latin typeface="微软雅黑"/>
+                <a:ea typeface="微软雅黑"/>
+                <a:cs typeface="微软雅黑"/>
+              </a:rPr>
+              <a:t/>
+            </a:r>
+          </a:p>
+          <a:p xmlns:a="http://schemas.openxmlformats.org/drawingml/2006/main">
+            <a:r>
+              <a:rPr sz="1200" b="0">
+                <a:solidFill>
+                  <a:srgbClr val="24292F"/>
+                </a:solidFill>
+                <a:latin typeface="微软雅黑"/>
+                <a:ea typeface="微软雅黑"/>
+                <a:cs typeface="微软雅黑"/>
+              </a:rPr>
               <a:t>[Sources]</a:t>
             </a:r>
           </a:p>
@@ -4282,7 +7545,59 @@
                 <a:ea typeface="微软雅黑"/>
                 <a:cs typeface="微软雅黑"/>
               </a:rPr>
+              <a:t/>
+            </a:r>
+          </a:p>
+          <a:p xmlns:a="http://schemas.openxmlformats.org/drawingml/2006/main">
+            <a:r>
+              <a:rPr sz="1200" b="0">
+                <a:solidFill>
+                  <a:srgbClr val="24292F"/>
+                </a:solidFill>
+                <a:latin typeface="微软雅黑"/>
+                <a:ea typeface="微软雅黑"/>
+                <a:cs typeface="微软雅黑"/>
+              </a:rPr>
               <a:t>- https://doi.org/10.17226/21896</a:t>
+            </a:r>
+          </a:p>
+          <a:p xmlns:a="http://schemas.openxmlformats.org/drawingml/2006/main">
+            <a:r>
+              <a:rPr sz="1200" b="0">
+                <a:solidFill>
+                  <a:srgbClr val="24292F"/>
+                </a:solidFill>
+                <a:latin typeface="微软雅黑"/>
+                <a:ea typeface="微软雅黑"/>
+                <a:cs typeface="微软雅黑"/>
+              </a:rPr>
+              <a:t/>
+            </a:r>
+          </a:p>
+          <a:p xmlns:a="http://schemas.openxmlformats.org/drawingml/2006/main">
+            <a:r>
+              <a:rPr sz="1200" b="0">
+                <a:solidFill>
+                  <a:srgbClr val="24292F"/>
+                </a:solidFill>
+                <a:latin typeface="微软雅黑"/>
+                <a:ea typeface="微软雅黑"/>
+                <a:cs typeface="微软雅黑"/>
+              </a:rPr>
+              <a:t>- 本课 handout.md 与 slides.md</a:t>
+            </a:r>
+          </a:p>
+          <a:p xmlns:a="http://schemas.openxmlformats.org/drawingml/2006/main">
+            <a:r>
+              <a:rPr sz="1200" b="0">
+                <a:solidFill>
+                  <a:srgbClr val="24292F"/>
+                </a:solidFill>
+                <a:latin typeface="微软雅黑"/>
+                <a:ea typeface="微软雅黑"/>
+                <a:cs typeface="微软雅黑"/>
+              </a:rPr>
+              <a:t/>
             </a:r>
           </a:p>
           <a:p xmlns:a="http://schemas.openxmlformats.org/drawingml/2006/main">
@@ -4373,7 +7688,7 @@
                 <a:ea typeface="微软雅黑"/>
                 <a:cs typeface="微软雅黑"/>
               </a:rPr>
-              <a:t>左：中国科学院《关于在科研活动中规范使用人工智能技术的诚信提醒》，2024-09-10 发布。右：上海交通大学《关于在教育教学中使用 AI 的规范（试行版）》第六条，原文四类为禁止使用、有限使用、鼓励使用、开放使用。两项来源分别覆盖科研活动和教育教学场景，不构造层级隶属关系。原始截图为来源身份定位，屏显短名不是正式文献题名；详细原文见来源。课件课堂引用，发布前按学校要求复核。核验日期：2026-09-15。</a:t>
+              <a:t>页面：P05 中科院与交大的制度依据</a:t>
             </a:r>
           </a:p>
           <a:p xmlns:a="http://schemas.openxmlformats.org/drawingml/2006/main">
@@ -4399,6 +7714,188 @@
                 <a:ea typeface="微软雅黑"/>
                 <a:cs typeface="微软雅黑"/>
               </a:rPr>
+              <a:t>讲义位置：§一、§二</a:t>
+            </a:r>
+          </a:p>
+          <a:p xmlns:a="http://schemas.openxmlformats.org/drawingml/2006/main">
+            <a:r>
+              <a:rPr sz="1200" b="0">
+                <a:solidFill>
+                  <a:srgbClr val="24292F"/>
+                </a:solidFill>
+                <a:latin typeface="微软雅黑"/>
+                <a:ea typeface="微软雅黑"/>
+                <a:cs typeface="微软雅黑"/>
+              </a:rPr>
+              <a:t/>
+            </a:r>
+          </a:p>
+          <a:p xmlns:a="http://schemas.openxmlformats.org/drawingml/2006/main">
+            <a:r>
+              <a:rPr sz="1200" b="0">
+                <a:solidFill>
+                  <a:srgbClr val="24292F"/>
+                </a:solidFill>
+                <a:latin typeface="微软雅黑"/>
+                <a:ea typeface="微软雅黑"/>
+                <a:cs typeface="微软雅黑"/>
+              </a:rPr>
+              <a:t>屏显核对：</a:t>
+            </a:r>
+          </a:p>
+          <a:p xmlns:a="http://schemas.openxmlformats.org/drawingml/2006/main">
+            <a:r>
+              <a:rPr sz="1200" b="0">
+                <a:solidFill>
+                  <a:srgbClr val="24292F"/>
+                </a:solidFill>
+                <a:latin typeface="微软雅黑"/>
+                <a:ea typeface="微软雅黑"/>
+                <a:cs typeface="微软雅黑"/>
+              </a:rPr>
+              <a:t>中国科学院 · 2024；上海交通大学 · 试行版；《科研活动 AI 诚信提醒》；《教育教学中使用 AI 的规范》；科研活动中的诚信要求；核验与披露 AI 使用 / 保护数据和未公开材料；教育教学场景的分类治理；禁止使用 / 有限使用 / 鼓励使用 / 开放使用</a:t>
+            </a:r>
+          </a:p>
+          <a:p xmlns:a="http://schemas.openxmlformats.org/drawingml/2006/main">
+            <a:r>
+              <a:rPr sz="1200" b="0">
+                <a:solidFill>
+                  <a:srgbClr val="24292F"/>
+                </a:solidFill>
+                <a:latin typeface="微软雅黑"/>
+                <a:ea typeface="微软雅黑"/>
+                <a:cs typeface="微软雅黑"/>
+              </a:rPr>
+              <a:t/>
+            </a:r>
+          </a:p>
+          <a:p xmlns:a="http://schemas.openxmlformats.org/drawingml/2006/main">
+            <a:r>
+              <a:rPr sz="1200" b="0">
+                <a:solidFill>
+                  <a:srgbClr val="24292F"/>
+                </a:solidFill>
+                <a:latin typeface="微软雅黑"/>
+                <a:ea typeface="微软雅黑"/>
+                <a:cs typeface="微软雅黑"/>
+              </a:rPr>
+              <a:t>教师讲述：</a:t>
+            </a:r>
+          </a:p>
+          <a:p xmlns:a="http://schemas.openxmlformats.org/drawingml/2006/main">
+            <a:r>
+              <a:rPr sz="1200" b="0">
+                <a:solidFill>
+                  <a:srgbClr val="24292F"/>
+                </a:solidFill>
+                <a:latin typeface="微软雅黑"/>
+                <a:ea typeface="微软雅黑"/>
+                <a:cs typeface="微软雅黑"/>
+              </a:rPr>
+              <a:t>左右等宽，避免视觉上暗示上下级从属。</a:t>
+            </a:r>
+          </a:p>
+          <a:p xmlns:a="http://schemas.openxmlformats.org/drawingml/2006/main">
+            <a:r>
+              <a:rPr sz="1200" b="0">
+                <a:solidFill>
+                  <a:srgbClr val="24292F"/>
+                </a:solidFill>
+                <a:latin typeface="微软雅黑"/>
+                <a:ea typeface="微软雅黑"/>
+                <a:cs typeface="微软雅黑"/>
+              </a:rPr>
+              <a:t/>
+            </a:r>
+          </a:p>
+          <a:p xmlns:a="http://schemas.openxmlformats.org/drawingml/2006/main">
+            <a:r>
+              <a:rPr sz="1200" b="0">
+                <a:solidFill>
+                  <a:srgbClr val="24292F"/>
+                </a:solidFill>
+                <a:latin typeface="微软雅黑"/>
+                <a:ea typeface="微软雅黑"/>
+                <a:cs typeface="微软雅黑"/>
+              </a:rPr>
+              <a:t>学生动作：</a:t>
+            </a:r>
+          </a:p>
+          <a:p xmlns:a="http://schemas.openxmlformats.org/drawingml/2006/main">
+            <a:r>
+              <a:rPr sz="1200" b="0">
+                <a:solidFill>
+                  <a:srgbClr val="24292F"/>
+                </a:solidFill>
+                <a:latin typeface="微软雅黑"/>
+                <a:ea typeface="微软雅黑"/>
+                <a:cs typeface="微软雅黑"/>
+              </a:rPr>
+              <a:t>分别说出两项来源对当前案例提供什么</a:t>
+            </a:r>
+          </a:p>
+          <a:p xmlns:a="http://schemas.openxmlformats.org/drawingml/2006/main">
+            <a:r>
+              <a:rPr sz="1200" b="0">
+                <a:solidFill>
+                  <a:srgbClr val="24292F"/>
+                </a:solidFill>
+                <a:latin typeface="微软雅黑"/>
+                <a:ea typeface="微软雅黑"/>
+                <a:cs typeface="微软雅黑"/>
+              </a:rPr>
+              <a:t/>
+            </a:r>
+          </a:p>
+          <a:p xmlns:a="http://schemas.openxmlformats.org/drawingml/2006/main">
+            <a:r>
+              <a:rPr sz="1200" b="0">
+                <a:solidFill>
+                  <a:srgbClr val="24292F"/>
+                </a:solidFill>
+                <a:latin typeface="微软雅黑"/>
+                <a:ea typeface="微软雅黑"/>
+                <a:cs typeface="微软雅黑"/>
+              </a:rPr>
+              <a:t>来源与边界：</a:t>
+            </a:r>
+          </a:p>
+          <a:p xmlns:a="http://schemas.openxmlformats.org/drawingml/2006/main">
+            <a:r>
+              <a:rPr sz="1200" b="0">
+                <a:solidFill>
+                  <a:srgbClr val="24292F"/>
+                </a:solidFill>
+                <a:latin typeface="微软雅黑"/>
+                <a:ea typeface="微软雅黑"/>
+                <a:cs typeface="微软雅黑"/>
+              </a:rPr>
+              <a:t>https://www.cas.cn/sygz/202409/t20240910_5031186.shtml；https://soo.sjtu.edu.cn/upload/file/20250217/20250217162021.pdf</a:t>
+            </a:r>
+          </a:p>
+          <a:p xmlns:a="http://schemas.openxmlformats.org/drawingml/2006/main">
+            <a:r>
+              <a:rPr sz="1200" b="0">
+                <a:solidFill>
+                  <a:srgbClr val="24292F"/>
+                </a:solidFill>
+                <a:latin typeface="微软雅黑"/>
+                <a:ea typeface="微软雅黑"/>
+                <a:cs typeface="微软雅黑"/>
+              </a:rPr>
+              <a:t/>
+            </a:r>
+          </a:p>
+          <a:p xmlns:a="http://schemas.openxmlformats.org/drawingml/2006/main">
+            <a:r>
+              <a:rPr sz="1200" b="0">
+                <a:solidFill>
+                  <a:srgbClr val="24292F"/>
+                </a:solidFill>
+                <a:latin typeface="微软雅黑"/>
+                <a:ea typeface="微软雅黑"/>
+                <a:cs typeface="微软雅黑"/>
+              </a:rPr>
               <a:t>[Sources]</a:t>
             </a:r>
           </a:p>
@@ -4412,6 +7909,19 @@
                 <a:ea typeface="微软雅黑"/>
                 <a:cs typeface="微软雅黑"/>
               </a:rPr>
+              <a:t/>
+            </a:r>
+          </a:p>
+          <a:p xmlns:a="http://schemas.openxmlformats.org/drawingml/2006/main">
+            <a:r>
+              <a:rPr sz="1200" b="0">
+                <a:solidFill>
+                  <a:srgbClr val="24292F"/>
+                </a:solidFill>
+                <a:latin typeface="微软雅黑"/>
+                <a:ea typeface="微软雅黑"/>
+                <a:cs typeface="微软雅黑"/>
+              </a:rPr>
               <a:t>- https://www.cas.cn/sygz/202409/t20240910_5031186.shtml</a:t>
             </a:r>
           </a:p>
@@ -4425,7 +7935,59 @@
                 <a:ea typeface="微软雅黑"/>
                 <a:cs typeface="微软雅黑"/>
               </a:rPr>
+              <a:t/>
+            </a:r>
+          </a:p>
+          <a:p xmlns:a="http://schemas.openxmlformats.org/drawingml/2006/main">
+            <a:r>
+              <a:rPr sz="1200" b="0">
+                <a:solidFill>
+                  <a:srgbClr val="24292F"/>
+                </a:solidFill>
+                <a:latin typeface="微软雅黑"/>
+                <a:ea typeface="微软雅黑"/>
+                <a:cs typeface="微软雅黑"/>
+              </a:rPr>
               <a:t>- https://soo.sjtu.edu.cn/upload/file/20250217/20250217162021.pdf</a:t>
+            </a:r>
+          </a:p>
+          <a:p xmlns:a="http://schemas.openxmlformats.org/drawingml/2006/main">
+            <a:r>
+              <a:rPr sz="1200" b="0">
+                <a:solidFill>
+                  <a:srgbClr val="24292F"/>
+                </a:solidFill>
+                <a:latin typeface="微软雅黑"/>
+                <a:ea typeface="微软雅黑"/>
+                <a:cs typeface="微软雅黑"/>
+              </a:rPr>
+              <a:t/>
+            </a:r>
+          </a:p>
+          <a:p xmlns:a="http://schemas.openxmlformats.org/drawingml/2006/main">
+            <a:r>
+              <a:rPr sz="1200" b="0">
+                <a:solidFill>
+                  <a:srgbClr val="24292F"/>
+                </a:solidFill>
+                <a:latin typeface="微软雅黑"/>
+                <a:ea typeface="微软雅黑"/>
+                <a:cs typeface="微软雅黑"/>
+              </a:rPr>
+              <a:t>- 本课 handout.md 与 slides.md</a:t>
+            </a:r>
+          </a:p>
+          <a:p xmlns:a="http://schemas.openxmlformats.org/drawingml/2006/main">
+            <a:r>
+              <a:rPr sz="1200" b="0">
+                <a:solidFill>
+                  <a:srgbClr val="24292F"/>
+                </a:solidFill>
+                <a:latin typeface="微软雅黑"/>
+                <a:ea typeface="微软雅黑"/>
+                <a:cs typeface="微软雅黑"/>
+              </a:rPr>
+              <a:t/>
             </a:r>
           </a:p>
           <a:p xmlns:a="http://schemas.openxmlformats.org/drawingml/2006/main">
@@ -4516,33 +8078,20 @@
                 <a:ea typeface="微软雅黑"/>
                 <a:cs typeface="微软雅黑"/>
               </a:rPr>
-              <a:t>页面任务：用具体对照解释风险组合</a:t>
-            </a:r>
-          </a:p>
-          <a:p xmlns:a="http://schemas.openxmlformats.org/drawingml/2006/main">
-            <a:r>
-              <a:rPr sz="1200" b="0">
-                <a:solidFill>
-                  <a:srgbClr val="24292F"/>
-                </a:solidFill>
-                <a:latin typeface="微软雅黑"/>
-                <a:ea typeface="微软雅黑"/>
-                <a:cs typeface="微软雅黑"/>
-              </a:rPr>
-              <a:t>教师讲述：不讨论工具品牌好坏，只比较对象和动作。</a:t>
-            </a:r>
-          </a:p>
-          <a:p xmlns:a="http://schemas.openxmlformats.org/drawingml/2006/main">
-            <a:r>
-              <a:rPr sz="1200" b="0">
-                <a:solidFill>
-                  <a:srgbClr val="24292F"/>
-                </a:solidFill>
-                <a:latin typeface="微软雅黑"/>
-                <a:ea typeface="微软雅黑"/>
-                <a:cs typeface="微软雅黑"/>
-              </a:rPr>
-              <a:t>学生动作：解释两个案例的决定性差异</a:t>
+              <a:t>页面：P06 风险判断：对象、动作与环境</a:t>
+            </a:r>
+          </a:p>
+          <a:p xmlns:a="http://schemas.openxmlformats.org/drawingml/2006/main">
+            <a:r>
+              <a:rPr sz="1200" b="0">
+                <a:solidFill>
+                  <a:srgbClr val="24292F"/>
+                </a:solidFill>
+                <a:latin typeface="微软雅黑"/>
+                <a:ea typeface="微软雅黑"/>
+                <a:cs typeface="微软雅黑"/>
+              </a:rPr>
+              <a:t/>
             </a:r>
           </a:p>
           <a:p xmlns:a="http://schemas.openxmlformats.org/drawingml/2006/main">
@@ -4568,32 +8117,6 @@
                 <a:ea typeface="微软雅黑"/>
                 <a:cs typeface="微软雅黑"/>
               </a:rPr>
-              <a:t>屏显中的课堂构造案例不代表实测结果。</a:t>
-            </a:r>
-          </a:p>
-          <a:p xmlns:a="http://schemas.openxmlformats.org/drawingml/2006/main">
-            <a:r>
-              <a:rPr sz="1200" b="0">
-                <a:solidFill>
-                  <a:srgbClr val="24292F"/>
-                </a:solidFill>
-                <a:latin typeface="微软雅黑"/>
-                <a:ea typeface="微软雅黑"/>
-                <a:cs typeface="微软雅黑"/>
-              </a:rPr>
-              <a:t>核验日期：2026-09-15。</a:t>
-            </a:r>
-          </a:p>
-          <a:p xmlns:a="http://schemas.openxmlformats.org/drawingml/2006/main">
-            <a:r>
-              <a:rPr sz="1200" b="0">
-                <a:solidFill>
-                  <a:srgbClr val="24292F"/>
-                </a:solidFill>
-                <a:latin typeface="微软雅黑"/>
-                <a:ea typeface="微软雅黑"/>
-                <a:cs typeface="微软雅黑"/>
-              </a:rPr>
               <a:t/>
             </a:r>
           </a:p>
@@ -4607,6 +8130,162 @@
                 <a:ea typeface="微软雅黑"/>
                 <a:cs typeface="微软雅黑"/>
               </a:rPr>
+              <a:t>屏显核对：</a:t>
+            </a:r>
+          </a:p>
+          <a:p xmlns:a="http://schemas.openxmlformats.org/drawingml/2006/main">
+            <a:r>
+              <a:rPr sz="1200" b="0">
+                <a:solidFill>
+                  <a:srgbClr val="24292F"/>
+                </a:solidFill>
+                <a:latin typeface="微软雅黑"/>
+                <a:ea typeface="微软雅黑"/>
+                <a:cs typeface="微软雅黑"/>
+              </a:rPr>
+              <a:t>同一合作稿案例 · 输入不同，判断随之改变；获准公开摘要；生成候选检索词；回到原文核验；原稿的经授权替代输入；未授权合作原稿；停止外发；个人外部模型 / 当前无材料发送授权</a:t>
+            </a:r>
+          </a:p>
+          <a:p xmlns:a="http://schemas.openxmlformats.org/drawingml/2006/main">
+            <a:r>
+              <a:rPr sz="1200" b="0">
+                <a:solidFill>
+                  <a:srgbClr val="24292F"/>
+                </a:solidFill>
+                <a:latin typeface="微软雅黑"/>
+                <a:ea typeface="微软雅黑"/>
+                <a:cs typeface="微软雅黑"/>
+              </a:rPr>
+              <a:t/>
+            </a:r>
+          </a:p>
+          <a:p xmlns:a="http://schemas.openxmlformats.org/drawingml/2006/main">
+            <a:r>
+              <a:rPr sz="1200" b="0">
+                <a:solidFill>
+                  <a:srgbClr val="24292F"/>
+                </a:solidFill>
+                <a:latin typeface="微软雅黑"/>
+                <a:ea typeface="微软雅黑"/>
+                <a:cs typeface="微软雅黑"/>
+              </a:rPr>
+              <a:t>教师讲述：</a:t>
+            </a:r>
+          </a:p>
+          <a:p xmlns:a="http://schemas.openxmlformats.org/drawingml/2006/main">
+            <a:r>
+              <a:rPr sz="1200" b="0">
+                <a:solidFill>
+                  <a:srgbClr val="24292F"/>
+                </a:solidFill>
+                <a:latin typeface="微软雅黑"/>
+                <a:ea typeface="微软雅黑"/>
+                <a:cs typeface="微软雅黑"/>
+              </a:rPr>
+              <a:t>不讨论工具品牌好坏，只比较对象和动作。</a:t>
+            </a:r>
+          </a:p>
+          <a:p xmlns:a="http://schemas.openxmlformats.org/drawingml/2006/main">
+            <a:r>
+              <a:rPr sz="1200" b="0">
+                <a:solidFill>
+                  <a:srgbClr val="24292F"/>
+                </a:solidFill>
+                <a:latin typeface="微软雅黑"/>
+                <a:ea typeface="微软雅黑"/>
+                <a:cs typeface="微软雅黑"/>
+              </a:rPr>
+              <a:t/>
+            </a:r>
+          </a:p>
+          <a:p xmlns:a="http://schemas.openxmlformats.org/drawingml/2006/main">
+            <a:r>
+              <a:rPr sz="1200" b="0">
+                <a:solidFill>
+                  <a:srgbClr val="24292F"/>
+                </a:solidFill>
+                <a:latin typeface="微软雅黑"/>
+                <a:ea typeface="微软雅黑"/>
+                <a:cs typeface="微软雅黑"/>
+              </a:rPr>
+              <a:t>学生动作：</a:t>
+            </a:r>
+          </a:p>
+          <a:p xmlns:a="http://schemas.openxmlformats.org/drawingml/2006/main">
+            <a:r>
+              <a:rPr sz="1200" b="0">
+                <a:solidFill>
+                  <a:srgbClr val="24292F"/>
+                </a:solidFill>
+                <a:latin typeface="微软雅黑"/>
+                <a:ea typeface="微软雅黑"/>
+                <a:cs typeface="微软雅黑"/>
+              </a:rPr>
+              <a:t>解释两个案例的决定性差异</a:t>
+            </a:r>
+          </a:p>
+          <a:p xmlns:a="http://schemas.openxmlformats.org/drawingml/2006/main">
+            <a:r>
+              <a:rPr sz="1200" b="0">
+                <a:solidFill>
+                  <a:srgbClr val="24292F"/>
+                </a:solidFill>
+                <a:latin typeface="微软雅黑"/>
+                <a:ea typeface="微软雅黑"/>
+                <a:cs typeface="微软雅黑"/>
+              </a:rPr>
+              <a:t/>
+            </a:r>
+          </a:p>
+          <a:p xmlns:a="http://schemas.openxmlformats.org/drawingml/2006/main">
+            <a:r>
+              <a:rPr sz="1200" b="0">
+                <a:solidFill>
+                  <a:srgbClr val="24292F"/>
+                </a:solidFill>
+                <a:latin typeface="微软雅黑"/>
+                <a:ea typeface="微软雅黑"/>
+                <a:cs typeface="微软雅黑"/>
+              </a:rPr>
+              <a:t>来源与边界：</a:t>
+            </a:r>
+          </a:p>
+          <a:p xmlns:a="http://schemas.openxmlformats.org/drawingml/2006/main">
+            <a:r>
+              <a:rPr sz="1200" b="0">
+                <a:solidFill>
+                  <a:srgbClr val="24292F"/>
+                </a:solidFill>
+                <a:latin typeface="微软雅黑"/>
+                <a:ea typeface="微软雅黑"/>
+                <a:cs typeface="微软雅黑"/>
+              </a:rPr>
+              <a:t>/Users/bright/Projects/courses/graduate/lessons/lesson-02/handout.md</a:t>
+            </a:r>
+          </a:p>
+          <a:p xmlns:a="http://schemas.openxmlformats.org/drawingml/2006/main">
+            <a:r>
+              <a:rPr sz="1200" b="0">
+                <a:solidFill>
+                  <a:srgbClr val="24292F"/>
+                </a:solidFill>
+                <a:latin typeface="微软雅黑"/>
+                <a:ea typeface="微软雅黑"/>
+                <a:cs typeface="微软雅黑"/>
+              </a:rPr>
+              <a:t/>
+            </a:r>
+          </a:p>
+          <a:p xmlns:a="http://schemas.openxmlformats.org/drawingml/2006/main">
+            <a:r>
+              <a:rPr sz="1200" b="0">
+                <a:solidFill>
+                  <a:srgbClr val="24292F"/>
+                </a:solidFill>
+                <a:latin typeface="微软雅黑"/>
+                <a:ea typeface="微软雅黑"/>
+                <a:cs typeface="微软雅黑"/>
+              </a:rPr>
               <a:t>[Sources]</a:t>
             </a:r>
           </a:p>
@@ -4620,7 +8299,33 @@
                 <a:ea typeface="微软雅黑"/>
                 <a:cs typeface="微软雅黑"/>
               </a:rPr>
-              <a:t>- lessons/lesson-02/handout.md</a:t>
+              <a:t/>
+            </a:r>
+          </a:p>
+          <a:p xmlns:a="http://schemas.openxmlformats.org/drawingml/2006/main">
+            <a:r>
+              <a:rPr sz="1200" b="0">
+                <a:solidFill>
+                  <a:srgbClr val="24292F"/>
+                </a:solidFill>
+                <a:latin typeface="微软雅黑"/>
+                <a:ea typeface="微软雅黑"/>
+                <a:cs typeface="微软雅黑"/>
+              </a:rPr>
+              <a:t>- 本课 handout.md 与 slides.md</a:t>
+            </a:r>
+          </a:p>
+          <a:p xmlns:a="http://schemas.openxmlformats.org/drawingml/2006/main">
+            <a:r>
+              <a:rPr sz="1200" b="0">
+                <a:solidFill>
+                  <a:srgbClr val="24292F"/>
+                </a:solidFill>
+                <a:latin typeface="微软雅黑"/>
+                <a:ea typeface="微软雅黑"/>
+                <a:cs typeface="微软雅黑"/>
+              </a:rPr>
+              <a:t/>
             </a:r>
           </a:p>
           <a:p xmlns:a="http://schemas.openxmlformats.org/drawingml/2006/main">
@@ -4711,33 +8416,20 @@
                 <a:ea typeface="微软雅黑"/>
                 <a:cs typeface="微软雅黑"/>
               </a:rPr>
-              <a:t>页面任务：保留可操作支架并用完整示例</a:t>
-            </a:r>
-          </a:p>
-          <a:p xmlns:a="http://schemas.openxmlformats.org/drawingml/2006/main">
-            <a:r>
-              <a:rPr sz="1200" b="0">
-                <a:solidFill>
-                  <a:srgbClr val="24292F"/>
-                </a:solidFill>
-                <a:latin typeface="微软雅黑"/>
-                <a:ea typeface="微软雅黑"/>
-                <a:cs typeface="微软雅黑"/>
-              </a:rPr>
-              <a:t>教师讲述：不要展示空白机构表格；用 P3 案例示范。</a:t>
-            </a:r>
-          </a:p>
-          <a:p xmlns:a="http://schemas.openxmlformats.org/drawingml/2006/main">
-            <a:r>
-              <a:rPr sz="1200" b="0">
-                <a:solidFill>
-                  <a:srgbClr val="24292F"/>
-                </a:solidFill>
-                <a:latin typeface="微软雅黑"/>
-                <a:ea typeface="微软雅黑"/>
-                <a:cs typeface="微软雅黑"/>
-              </a:rPr>
-              <a:t>学生动作：找出控制字段是否可检查</a:t>
+              <a:t>页面：P07 一张可检查的风险记录</a:t>
+            </a:r>
+          </a:p>
+          <a:p xmlns:a="http://schemas.openxmlformats.org/drawingml/2006/main">
+            <a:r>
+              <a:rPr sz="1200" b="0">
+                <a:solidFill>
+                  <a:srgbClr val="24292F"/>
+                </a:solidFill>
+                <a:latin typeface="微软雅黑"/>
+                <a:ea typeface="微软雅黑"/>
+                <a:cs typeface="微软雅黑"/>
+              </a:rPr>
+              <a:t/>
             </a:r>
           </a:p>
           <a:p xmlns:a="http://schemas.openxmlformats.org/drawingml/2006/main">
@@ -4763,32 +8455,6 @@
                 <a:ea typeface="微软雅黑"/>
                 <a:cs typeface="微软雅黑"/>
               </a:rPr>
-              <a:t>屏显中的课堂构造案例不代表实测结果。</a:t>
-            </a:r>
-          </a:p>
-          <a:p xmlns:a="http://schemas.openxmlformats.org/drawingml/2006/main">
-            <a:r>
-              <a:rPr sz="1200" b="0">
-                <a:solidFill>
-                  <a:srgbClr val="24292F"/>
-                </a:solidFill>
-                <a:latin typeface="微软雅黑"/>
-                <a:ea typeface="微软雅黑"/>
-                <a:cs typeface="微软雅黑"/>
-              </a:rPr>
-              <a:t>核验日期：2026-09-15。</a:t>
-            </a:r>
-          </a:p>
-          <a:p xmlns:a="http://schemas.openxmlformats.org/drawingml/2006/main">
-            <a:r>
-              <a:rPr sz="1200" b="0">
-                <a:solidFill>
-                  <a:srgbClr val="24292F"/>
-                </a:solidFill>
-                <a:latin typeface="微软雅黑"/>
-                <a:ea typeface="微软雅黑"/>
-                <a:cs typeface="微软雅黑"/>
-              </a:rPr>
               <a:t/>
             </a:r>
           </a:p>
@@ -4802,6 +8468,162 @@
                 <a:ea typeface="微软雅黑"/>
                 <a:cs typeface="微软雅黑"/>
               </a:rPr>
+              <a:t>屏显核对：</a:t>
+            </a:r>
+          </a:p>
+          <a:p xmlns:a="http://schemas.openxmlformats.org/drawingml/2006/main">
+            <a:r>
+              <a:rPr sz="1200" b="0">
+                <a:solidFill>
+                  <a:srgbClr val="24292F"/>
+                </a:solidFill>
+                <a:latin typeface="微软雅黑"/>
+                <a:ea typeface="微软雅黑"/>
+                <a:cs typeface="微软雅黑"/>
+              </a:rPr>
+              <a:t>只写“注意伦理”不可执行；控制必须能被检查。</a:t>
+            </a:r>
+          </a:p>
+          <a:p xmlns:a="http://schemas.openxmlformats.org/drawingml/2006/main">
+            <a:r>
+              <a:rPr sz="1200" b="0">
+                <a:solidFill>
+                  <a:srgbClr val="24292F"/>
+                </a:solidFill>
+                <a:latin typeface="微软雅黑"/>
+                <a:ea typeface="微软雅黑"/>
+                <a:cs typeface="微软雅黑"/>
+              </a:rPr>
+              <a:t/>
+            </a:r>
+          </a:p>
+          <a:p xmlns:a="http://schemas.openxmlformats.org/drawingml/2006/main">
+            <a:r>
+              <a:rPr sz="1200" b="0">
+                <a:solidFill>
+                  <a:srgbClr val="24292F"/>
+                </a:solidFill>
+                <a:latin typeface="微软雅黑"/>
+                <a:ea typeface="微软雅黑"/>
+                <a:cs typeface="微软雅黑"/>
+              </a:rPr>
+              <a:t>教师讲述：</a:t>
+            </a:r>
+          </a:p>
+          <a:p xmlns:a="http://schemas.openxmlformats.org/drawingml/2006/main">
+            <a:r>
+              <a:rPr sz="1200" b="0">
+                <a:solidFill>
+                  <a:srgbClr val="24292F"/>
+                </a:solidFill>
+                <a:latin typeface="微软雅黑"/>
+                <a:ea typeface="微软雅黑"/>
+                <a:cs typeface="微软雅黑"/>
+              </a:rPr>
+              <a:t>不要展示空白机构表格；用 P3 案例示范。</a:t>
+            </a:r>
+          </a:p>
+          <a:p xmlns:a="http://schemas.openxmlformats.org/drawingml/2006/main">
+            <a:r>
+              <a:rPr sz="1200" b="0">
+                <a:solidFill>
+                  <a:srgbClr val="24292F"/>
+                </a:solidFill>
+                <a:latin typeface="微软雅黑"/>
+                <a:ea typeface="微软雅黑"/>
+                <a:cs typeface="微软雅黑"/>
+              </a:rPr>
+              <a:t/>
+            </a:r>
+          </a:p>
+          <a:p xmlns:a="http://schemas.openxmlformats.org/drawingml/2006/main">
+            <a:r>
+              <a:rPr sz="1200" b="0">
+                <a:solidFill>
+                  <a:srgbClr val="24292F"/>
+                </a:solidFill>
+                <a:latin typeface="微软雅黑"/>
+                <a:ea typeface="微软雅黑"/>
+                <a:cs typeface="微软雅黑"/>
+              </a:rPr>
+              <a:t>学生动作：</a:t>
+            </a:r>
+          </a:p>
+          <a:p xmlns:a="http://schemas.openxmlformats.org/drawingml/2006/main">
+            <a:r>
+              <a:rPr sz="1200" b="0">
+                <a:solidFill>
+                  <a:srgbClr val="24292F"/>
+                </a:solidFill>
+                <a:latin typeface="微软雅黑"/>
+                <a:ea typeface="微软雅黑"/>
+                <a:cs typeface="微软雅黑"/>
+              </a:rPr>
+              <a:t>找出控制字段是否可检查</a:t>
+            </a:r>
+          </a:p>
+          <a:p xmlns:a="http://schemas.openxmlformats.org/drawingml/2006/main">
+            <a:r>
+              <a:rPr sz="1200" b="0">
+                <a:solidFill>
+                  <a:srgbClr val="24292F"/>
+                </a:solidFill>
+                <a:latin typeface="微软雅黑"/>
+                <a:ea typeface="微软雅黑"/>
+                <a:cs typeface="微软雅黑"/>
+              </a:rPr>
+              <a:t/>
+            </a:r>
+          </a:p>
+          <a:p xmlns:a="http://schemas.openxmlformats.org/drawingml/2006/main">
+            <a:r>
+              <a:rPr sz="1200" b="0">
+                <a:solidFill>
+                  <a:srgbClr val="24292F"/>
+                </a:solidFill>
+                <a:latin typeface="微软雅黑"/>
+                <a:ea typeface="微软雅黑"/>
+                <a:cs typeface="微软雅黑"/>
+              </a:rPr>
+              <a:t>来源与边界：</a:t>
+            </a:r>
+          </a:p>
+          <a:p xmlns:a="http://schemas.openxmlformats.org/drawingml/2006/main">
+            <a:r>
+              <a:rPr sz="1200" b="0">
+                <a:solidFill>
+                  <a:srgbClr val="24292F"/>
+                </a:solidFill>
+                <a:latin typeface="微软雅黑"/>
+                <a:ea typeface="微软雅黑"/>
+                <a:cs typeface="微软雅黑"/>
+              </a:rPr>
+              <a:t>/Users/bright/Projects/courses/graduate/lessons/lesson-02/handout.md</a:t>
+            </a:r>
+          </a:p>
+          <a:p xmlns:a="http://schemas.openxmlformats.org/drawingml/2006/main">
+            <a:r>
+              <a:rPr sz="1200" b="0">
+                <a:solidFill>
+                  <a:srgbClr val="24292F"/>
+                </a:solidFill>
+                <a:latin typeface="微软雅黑"/>
+                <a:ea typeface="微软雅黑"/>
+                <a:cs typeface="微软雅黑"/>
+              </a:rPr>
+              <a:t/>
+            </a:r>
+          </a:p>
+          <a:p xmlns:a="http://schemas.openxmlformats.org/drawingml/2006/main">
+            <a:r>
+              <a:rPr sz="1200" b="0">
+                <a:solidFill>
+                  <a:srgbClr val="24292F"/>
+                </a:solidFill>
+                <a:latin typeface="微软雅黑"/>
+                <a:ea typeface="微软雅黑"/>
+                <a:cs typeface="微软雅黑"/>
+              </a:rPr>
               <a:t>[Sources]</a:t>
             </a:r>
           </a:p>
@@ -4815,7 +8637,33 @@
                 <a:ea typeface="微软雅黑"/>
                 <a:cs typeface="微软雅黑"/>
               </a:rPr>
-              <a:t>- lessons/lesson-02/handout.md</a:t>
+              <a:t/>
+            </a:r>
+          </a:p>
+          <a:p xmlns:a="http://schemas.openxmlformats.org/drawingml/2006/main">
+            <a:r>
+              <a:rPr sz="1200" b="0">
+                <a:solidFill>
+                  <a:srgbClr val="24292F"/>
+                </a:solidFill>
+                <a:latin typeface="微软雅黑"/>
+                <a:ea typeface="微软雅黑"/>
+                <a:cs typeface="微软雅黑"/>
+              </a:rPr>
+              <a:t>- 本课 handout.md 与 slides.md</a:t>
+            </a:r>
+          </a:p>
+          <a:p xmlns:a="http://schemas.openxmlformats.org/drawingml/2006/main">
+            <a:r>
+              <a:rPr sz="1200" b="0">
+                <a:solidFill>
+                  <a:srgbClr val="24292F"/>
+                </a:solidFill>
+                <a:latin typeface="微软雅黑"/>
+                <a:ea typeface="微软雅黑"/>
+                <a:cs typeface="微软雅黑"/>
+              </a:rPr>
+              <a:t/>
             </a:r>
           </a:p>
           <a:p xmlns:a="http://schemas.openxmlformats.org/drawingml/2006/main">
@@ -4906,33 +8754,20 @@
                 <a:ea typeface="微软雅黑"/>
                 <a:cs typeface="微软雅黑"/>
               </a:rPr>
-              <a:t>页面任务：把定义落到微案例</a:t>
-            </a:r>
-          </a:p>
-          <a:p xmlns:a="http://schemas.openxmlformats.org/drawingml/2006/main">
-            <a:r>
-              <a:rPr sz="1200" b="0">
-                <a:solidFill>
-                  <a:srgbClr val="24292F"/>
-                </a:solidFill>
-                <a:latin typeface="微软雅黑"/>
-                <a:ea typeface="微软雅黑"/>
-                <a:cs typeface="微软雅黑"/>
-              </a:rPr>
-              <a:t>教师讲述：有条件允许不是模糊中间态。</a:t>
-            </a:r>
-          </a:p>
-          <a:p xmlns:a="http://schemas.openxmlformats.org/drawingml/2006/main">
-            <a:r>
-              <a:rPr sz="1200" b="0">
-                <a:solidFill>
-                  <a:srgbClr val="24292F"/>
-                </a:solidFill>
-                <a:latin typeface="微软雅黑"/>
-                <a:ea typeface="微软雅黑"/>
-                <a:cs typeface="微软雅黑"/>
-              </a:rPr>
-              <a:t>学生动作：为自己的一个动作选择处置并说理由</a:t>
+              <a:t>页面：P08 允许、有条件允许与禁止</a:t>
+            </a:r>
+          </a:p>
+          <a:p xmlns:a="http://schemas.openxmlformats.org/drawingml/2006/main">
+            <a:r>
+              <a:rPr sz="1200" b="0">
+                <a:solidFill>
+                  <a:srgbClr val="24292F"/>
+                </a:solidFill>
+                <a:latin typeface="微软雅黑"/>
+                <a:ea typeface="微软雅黑"/>
+                <a:cs typeface="微软雅黑"/>
+              </a:rPr>
+              <a:t/>
             </a:r>
           </a:p>
           <a:p xmlns:a="http://schemas.openxmlformats.org/drawingml/2006/main">
@@ -4958,32 +8793,6 @@
                 <a:ea typeface="微软雅黑"/>
                 <a:cs typeface="微软雅黑"/>
               </a:rPr>
-              <a:t>屏显中的课堂构造案例不代表实测结果。</a:t>
-            </a:r>
-          </a:p>
-          <a:p xmlns:a="http://schemas.openxmlformats.org/drawingml/2006/main">
-            <a:r>
-              <a:rPr sz="1200" b="0">
-                <a:solidFill>
-                  <a:srgbClr val="24292F"/>
-                </a:solidFill>
-                <a:latin typeface="微软雅黑"/>
-                <a:ea typeface="微软雅黑"/>
-                <a:cs typeface="微软雅黑"/>
-              </a:rPr>
-              <a:t>核验日期：2026-09-15。</a:t>
-            </a:r>
-          </a:p>
-          <a:p xmlns:a="http://schemas.openxmlformats.org/drawingml/2006/main">
-            <a:r>
-              <a:rPr sz="1200" b="0">
-                <a:solidFill>
-                  <a:srgbClr val="24292F"/>
-                </a:solidFill>
-                <a:latin typeface="微软雅黑"/>
-                <a:ea typeface="微软雅黑"/>
-                <a:cs typeface="微软雅黑"/>
-              </a:rPr>
               <a:t/>
             </a:r>
           </a:p>
@@ -4997,6 +8806,162 @@
                 <a:ea typeface="微软雅黑"/>
                 <a:cs typeface="微软雅黑"/>
               </a:rPr>
+              <a:t>屏显核对：</a:t>
+            </a:r>
+          </a:p>
+          <a:p xmlns:a="http://schemas.openxmlformats.org/drawingml/2006/main">
+            <a:r>
+              <a:rPr sz="1200" b="0">
+                <a:solidFill>
+                  <a:srgbClr val="24292F"/>
+                </a:solidFill>
+                <a:latin typeface="微软雅黑"/>
+                <a:ea typeface="微软雅黑"/>
+                <a:cs typeface="微软雅黑"/>
+              </a:rPr>
+              <a:t>处置结论必须跟着具体对象、动作、条件和责任人。</a:t>
+            </a:r>
+          </a:p>
+          <a:p xmlns:a="http://schemas.openxmlformats.org/drawingml/2006/main">
+            <a:r>
+              <a:rPr sz="1200" b="0">
+                <a:solidFill>
+                  <a:srgbClr val="24292F"/>
+                </a:solidFill>
+                <a:latin typeface="微软雅黑"/>
+                <a:ea typeface="微软雅黑"/>
+                <a:cs typeface="微软雅黑"/>
+              </a:rPr>
+              <a:t/>
+            </a:r>
+          </a:p>
+          <a:p xmlns:a="http://schemas.openxmlformats.org/drawingml/2006/main">
+            <a:r>
+              <a:rPr sz="1200" b="0">
+                <a:solidFill>
+                  <a:srgbClr val="24292F"/>
+                </a:solidFill>
+                <a:latin typeface="微软雅黑"/>
+                <a:ea typeface="微软雅黑"/>
+                <a:cs typeface="微软雅黑"/>
+              </a:rPr>
+              <a:t>教师讲述：</a:t>
+            </a:r>
+          </a:p>
+          <a:p xmlns:a="http://schemas.openxmlformats.org/drawingml/2006/main">
+            <a:r>
+              <a:rPr sz="1200" b="0">
+                <a:solidFill>
+                  <a:srgbClr val="24292F"/>
+                </a:solidFill>
+                <a:latin typeface="微软雅黑"/>
+                <a:ea typeface="微软雅黑"/>
+                <a:cs typeface="微软雅黑"/>
+              </a:rPr>
+              <a:t>有条件允许不是模糊中间态。</a:t>
+            </a:r>
+          </a:p>
+          <a:p xmlns:a="http://schemas.openxmlformats.org/drawingml/2006/main">
+            <a:r>
+              <a:rPr sz="1200" b="0">
+                <a:solidFill>
+                  <a:srgbClr val="24292F"/>
+                </a:solidFill>
+                <a:latin typeface="微软雅黑"/>
+                <a:ea typeface="微软雅黑"/>
+                <a:cs typeface="微软雅黑"/>
+              </a:rPr>
+              <a:t/>
+            </a:r>
+          </a:p>
+          <a:p xmlns:a="http://schemas.openxmlformats.org/drawingml/2006/main">
+            <a:r>
+              <a:rPr sz="1200" b="0">
+                <a:solidFill>
+                  <a:srgbClr val="24292F"/>
+                </a:solidFill>
+                <a:latin typeface="微软雅黑"/>
+                <a:ea typeface="微软雅黑"/>
+                <a:cs typeface="微软雅黑"/>
+              </a:rPr>
+              <a:t>学生动作：</a:t>
+            </a:r>
+          </a:p>
+          <a:p xmlns:a="http://schemas.openxmlformats.org/drawingml/2006/main">
+            <a:r>
+              <a:rPr sz="1200" b="0">
+                <a:solidFill>
+                  <a:srgbClr val="24292F"/>
+                </a:solidFill>
+                <a:latin typeface="微软雅黑"/>
+                <a:ea typeface="微软雅黑"/>
+                <a:cs typeface="微软雅黑"/>
+              </a:rPr>
+              <a:t>为自己的一个动作选择处置并说理由</a:t>
+            </a:r>
+          </a:p>
+          <a:p xmlns:a="http://schemas.openxmlformats.org/drawingml/2006/main">
+            <a:r>
+              <a:rPr sz="1200" b="0">
+                <a:solidFill>
+                  <a:srgbClr val="24292F"/>
+                </a:solidFill>
+                <a:latin typeface="微软雅黑"/>
+                <a:ea typeface="微软雅黑"/>
+                <a:cs typeface="微软雅黑"/>
+              </a:rPr>
+              <a:t/>
+            </a:r>
+          </a:p>
+          <a:p xmlns:a="http://schemas.openxmlformats.org/drawingml/2006/main">
+            <a:r>
+              <a:rPr sz="1200" b="0">
+                <a:solidFill>
+                  <a:srgbClr val="24292F"/>
+                </a:solidFill>
+                <a:latin typeface="微软雅黑"/>
+                <a:ea typeface="微软雅黑"/>
+                <a:cs typeface="微软雅黑"/>
+              </a:rPr>
+              <a:t>来源与边界：</a:t>
+            </a:r>
+          </a:p>
+          <a:p xmlns:a="http://schemas.openxmlformats.org/drawingml/2006/main">
+            <a:r>
+              <a:rPr sz="1200" b="0">
+                <a:solidFill>
+                  <a:srgbClr val="24292F"/>
+                </a:solidFill>
+                <a:latin typeface="微软雅黑"/>
+                <a:ea typeface="微软雅黑"/>
+                <a:cs typeface="微软雅黑"/>
+              </a:rPr>
+              <a:t>/Users/bright/Projects/courses/graduate/lessons/lesson-02/handout.md</a:t>
+            </a:r>
+          </a:p>
+          <a:p xmlns:a="http://schemas.openxmlformats.org/drawingml/2006/main">
+            <a:r>
+              <a:rPr sz="1200" b="0">
+                <a:solidFill>
+                  <a:srgbClr val="24292F"/>
+                </a:solidFill>
+                <a:latin typeface="微软雅黑"/>
+                <a:ea typeface="微软雅黑"/>
+                <a:cs typeface="微软雅黑"/>
+              </a:rPr>
+              <a:t/>
+            </a:r>
+          </a:p>
+          <a:p xmlns:a="http://schemas.openxmlformats.org/drawingml/2006/main">
+            <a:r>
+              <a:rPr sz="1200" b="0">
+                <a:solidFill>
+                  <a:srgbClr val="24292F"/>
+                </a:solidFill>
+                <a:latin typeface="微软雅黑"/>
+                <a:ea typeface="微软雅黑"/>
+                <a:cs typeface="微软雅黑"/>
+              </a:rPr>
               <a:t>[Sources]</a:t>
             </a:r>
           </a:p>
@@ -5010,7 +8975,33 @@
                 <a:ea typeface="微软雅黑"/>
                 <a:cs typeface="微软雅黑"/>
               </a:rPr>
-              <a:t>- lessons/lesson-02/handout.md</a:t>
+              <a:t/>
+            </a:r>
+          </a:p>
+          <a:p xmlns:a="http://schemas.openxmlformats.org/drawingml/2006/main">
+            <a:r>
+              <a:rPr sz="1200" b="0">
+                <a:solidFill>
+                  <a:srgbClr val="24292F"/>
+                </a:solidFill>
+                <a:latin typeface="微软雅黑"/>
+                <a:ea typeface="微软雅黑"/>
+                <a:cs typeface="微软雅黑"/>
+              </a:rPr>
+              <a:t>- 本课 handout.md 与 slides.md</a:t>
+            </a:r>
+          </a:p>
+          <a:p xmlns:a="http://schemas.openxmlformats.org/drawingml/2006/main">
+            <a:r>
+              <a:rPr sz="1200" b="0">
+                <a:solidFill>
+                  <a:srgbClr val="24292F"/>
+                </a:solidFill>
+                <a:latin typeface="微软雅黑"/>
+                <a:ea typeface="微软雅黑"/>
+                <a:cs typeface="微软雅黑"/>
+              </a:rPr>
+              <a:t/>
             </a:r>
           </a:p>
           <a:p xmlns:a="http://schemas.openxmlformats.org/drawingml/2006/main">
@@ -5101,33 +9092,20 @@
                 <a:ea typeface="微软雅黑"/>
                 <a:cs typeface="微软雅黑"/>
               </a:rPr>
-              <a:t>页面任务：给出现实可执行的发送前路径</a:t>
-            </a:r>
-          </a:p>
-          <a:p xmlns:a="http://schemas.openxmlformats.org/drawingml/2006/main">
-            <a:r>
-              <a:rPr sz="1200" b="0">
-                <a:solidFill>
-                  <a:srgbClr val="24292F"/>
-                </a:solidFill>
-                <a:latin typeface="微软雅黑"/>
-                <a:ea typeface="微软雅黑"/>
-                <a:cs typeface="微软雅黑"/>
-              </a:rPr>
-              <a:t>教师讲述：学生课程任务运行更严格：公开、虚构或经授权脱敏材料。</a:t>
-            </a:r>
-          </a:p>
-          <a:p xmlns:a="http://schemas.openxmlformats.org/drawingml/2006/main">
-            <a:r>
-              <a:rPr sz="1200" b="0">
-                <a:solidFill>
-                  <a:srgbClr val="24292F"/>
-                </a:solidFill>
-                <a:latin typeface="微软雅黑"/>
-                <a:ea typeface="微软雅黑"/>
-                <a:cs typeface="微软雅黑"/>
-              </a:rPr>
-              <a:t>学生动作：判断当前案例卡在哪个条件</a:t>
+              <a:t>页面：P09 发送未公开材料前的五项检查</a:t>
+            </a:r>
+          </a:p>
+          <a:p xmlns:a="http://schemas.openxmlformats.org/drawingml/2006/main">
+            <a:r>
+              <a:rPr sz="1200" b="0">
+                <a:solidFill>
+                  <a:srgbClr val="24292F"/>
+                </a:solidFill>
+                <a:latin typeface="微软雅黑"/>
+                <a:ea typeface="微软雅黑"/>
+                <a:cs typeface="微软雅黑"/>
+              </a:rPr>
+              <a:t/>
             </a:r>
           </a:p>
           <a:p xmlns:a="http://schemas.openxmlformats.org/drawingml/2006/main">
@@ -5153,32 +9131,6 @@
                 <a:ea typeface="微软雅黑"/>
                 <a:cs typeface="微软雅黑"/>
               </a:rPr>
-              <a:t>屏显中的课堂构造案例不代表实测结果。</a:t>
-            </a:r>
-          </a:p>
-          <a:p xmlns:a="http://schemas.openxmlformats.org/drawingml/2006/main">
-            <a:r>
-              <a:rPr sz="1200" b="0">
-                <a:solidFill>
-                  <a:srgbClr val="24292F"/>
-                </a:solidFill>
-                <a:latin typeface="微软雅黑"/>
-                <a:ea typeface="微软雅黑"/>
-                <a:cs typeface="微软雅黑"/>
-              </a:rPr>
-              <a:t>核验日期：2026-09-15。</a:t>
-            </a:r>
-          </a:p>
-          <a:p xmlns:a="http://schemas.openxmlformats.org/drawingml/2006/main">
-            <a:r>
-              <a:rPr sz="1200" b="0">
-                <a:solidFill>
-                  <a:srgbClr val="24292F"/>
-                </a:solidFill>
-                <a:latin typeface="微软雅黑"/>
-                <a:ea typeface="微软雅黑"/>
-                <a:cs typeface="微软雅黑"/>
-              </a:rPr>
               <a:t/>
             </a:r>
           </a:p>
@@ -5192,6 +9144,162 @@
                 <a:ea typeface="微软雅黑"/>
                 <a:cs typeface="微软雅黑"/>
               </a:rPr>
+              <a:t>屏显核对：</a:t>
+            </a:r>
+          </a:p>
+          <a:p xmlns:a="http://schemas.openxmlformats.org/drawingml/2006/main">
+            <a:r>
+              <a:rPr sz="1200" b="0">
+                <a:solidFill>
+                  <a:srgbClr val="24292F"/>
+                </a:solidFill>
+                <a:latin typeface="微软雅黑"/>
+                <a:ea typeface="微软雅黑"/>
+                <a:cs typeface="微软雅黑"/>
+              </a:rPr>
+              <a:t>材料身份；作者工作稿，还是负有保密义务的评审稿？；权利与同意；共同作者、数据主体及权利方是否同意？；适用规则；机构、项目、期刊是否提出更严格要求？；使用环境；存储、训练使用与访问权限是否可接受？；最小必要；能否改用抽象问题或更少的获准片段？；课内练习使用公开、课堂构造或已授权脱敏材料。</a:t>
+            </a:r>
+          </a:p>
+          <a:p xmlns:a="http://schemas.openxmlformats.org/drawingml/2006/main">
+            <a:r>
+              <a:rPr sz="1200" b="0">
+                <a:solidFill>
+                  <a:srgbClr val="24292F"/>
+                </a:solidFill>
+                <a:latin typeface="微软雅黑"/>
+                <a:ea typeface="微软雅黑"/>
+                <a:cs typeface="微软雅黑"/>
+              </a:rPr>
+              <a:t/>
+            </a:r>
+          </a:p>
+          <a:p xmlns:a="http://schemas.openxmlformats.org/drawingml/2006/main">
+            <a:r>
+              <a:rPr sz="1200" b="0">
+                <a:solidFill>
+                  <a:srgbClr val="24292F"/>
+                </a:solidFill>
+                <a:latin typeface="微软雅黑"/>
+                <a:ea typeface="微软雅黑"/>
+                <a:cs typeface="微软雅黑"/>
+              </a:rPr>
+              <a:t>教师讲述：</a:t>
+            </a:r>
+          </a:p>
+          <a:p xmlns:a="http://schemas.openxmlformats.org/drawingml/2006/main">
+            <a:r>
+              <a:rPr sz="1200" b="0">
+                <a:solidFill>
+                  <a:srgbClr val="24292F"/>
+                </a:solidFill>
+                <a:latin typeface="微软雅黑"/>
+                <a:ea typeface="微软雅黑"/>
+                <a:cs typeface="微软雅黑"/>
+              </a:rPr>
+              <a:t>学生课程任务运行更严格：公开、虚构或经授权脱敏材料。</a:t>
+            </a:r>
+          </a:p>
+          <a:p xmlns:a="http://schemas.openxmlformats.org/drawingml/2006/main">
+            <a:r>
+              <a:rPr sz="1200" b="0">
+                <a:solidFill>
+                  <a:srgbClr val="24292F"/>
+                </a:solidFill>
+                <a:latin typeface="微软雅黑"/>
+                <a:ea typeface="微软雅黑"/>
+                <a:cs typeface="微软雅黑"/>
+              </a:rPr>
+              <a:t/>
+            </a:r>
+          </a:p>
+          <a:p xmlns:a="http://schemas.openxmlformats.org/drawingml/2006/main">
+            <a:r>
+              <a:rPr sz="1200" b="0">
+                <a:solidFill>
+                  <a:srgbClr val="24292F"/>
+                </a:solidFill>
+                <a:latin typeface="微软雅黑"/>
+                <a:ea typeface="微软雅黑"/>
+                <a:cs typeface="微软雅黑"/>
+              </a:rPr>
+              <a:t>学生动作：</a:t>
+            </a:r>
+          </a:p>
+          <a:p xmlns:a="http://schemas.openxmlformats.org/drawingml/2006/main">
+            <a:r>
+              <a:rPr sz="1200" b="0">
+                <a:solidFill>
+                  <a:srgbClr val="24292F"/>
+                </a:solidFill>
+                <a:latin typeface="微软雅黑"/>
+                <a:ea typeface="微软雅黑"/>
+                <a:cs typeface="微软雅黑"/>
+              </a:rPr>
+              <a:t>判断当前案例卡在哪个条件</a:t>
+            </a:r>
+          </a:p>
+          <a:p xmlns:a="http://schemas.openxmlformats.org/drawingml/2006/main">
+            <a:r>
+              <a:rPr sz="1200" b="0">
+                <a:solidFill>
+                  <a:srgbClr val="24292F"/>
+                </a:solidFill>
+                <a:latin typeface="微软雅黑"/>
+                <a:ea typeface="微软雅黑"/>
+                <a:cs typeface="微软雅黑"/>
+              </a:rPr>
+              <a:t/>
+            </a:r>
+          </a:p>
+          <a:p xmlns:a="http://schemas.openxmlformats.org/drawingml/2006/main">
+            <a:r>
+              <a:rPr sz="1200" b="0">
+                <a:solidFill>
+                  <a:srgbClr val="24292F"/>
+                </a:solidFill>
+                <a:latin typeface="微软雅黑"/>
+                <a:ea typeface="微软雅黑"/>
+                <a:cs typeface="微软雅黑"/>
+              </a:rPr>
+              <a:t>来源与边界：</a:t>
+            </a:r>
+          </a:p>
+          <a:p xmlns:a="http://schemas.openxmlformats.org/drawingml/2006/main">
+            <a:r>
+              <a:rPr sz="1200" b="0">
+                <a:solidFill>
+                  <a:srgbClr val="24292F"/>
+                </a:solidFill>
+                <a:latin typeface="微软雅黑"/>
+                <a:ea typeface="微软雅黑"/>
+                <a:cs typeface="微软雅黑"/>
+              </a:rPr>
+              <a:t>/Users/bright/Projects/courses/graduate/lessons/lesson-02/handout.md</a:t>
+            </a:r>
+          </a:p>
+          <a:p xmlns:a="http://schemas.openxmlformats.org/drawingml/2006/main">
+            <a:r>
+              <a:rPr sz="1200" b="0">
+                <a:solidFill>
+                  <a:srgbClr val="24292F"/>
+                </a:solidFill>
+                <a:latin typeface="微软雅黑"/>
+                <a:ea typeface="微软雅黑"/>
+                <a:cs typeface="微软雅黑"/>
+              </a:rPr>
+              <a:t/>
+            </a:r>
+          </a:p>
+          <a:p xmlns:a="http://schemas.openxmlformats.org/drawingml/2006/main">
+            <a:r>
+              <a:rPr sz="1200" b="0">
+                <a:solidFill>
+                  <a:srgbClr val="24292F"/>
+                </a:solidFill>
+                <a:latin typeface="微软雅黑"/>
+                <a:ea typeface="微软雅黑"/>
+                <a:cs typeface="微软雅黑"/>
+              </a:rPr>
               <a:t>[Sources]</a:t>
             </a:r>
           </a:p>
@@ -5205,7 +9313,33 @@
                 <a:ea typeface="微软雅黑"/>
                 <a:cs typeface="微软雅黑"/>
               </a:rPr>
-              <a:t>- lessons/lesson-02/handout.md</a:t>
+              <a:t/>
+            </a:r>
+          </a:p>
+          <a:p xmlns:a="http://schemas.openxmlformats.org/drawingml/2006/main">
+            <a:r>
+              <a:rPr sz="1200" b="0">
+                <a:solidFill>
+                  <a:srgbClr val="24292F"/>
+                </a:solidFill>
+                <a:latin typeface="微软雅黑"/>
+                <a:ea typeface="微软雅黑"/>
+                <a:cs typeface="微软雅黑"/>
+              </a:rPr>
+              <a:t>- 本课 handout.md 与 slides.md</a:t>
+            </a:r>
+          </a:p>
+          <a:p xmlns:a="http://schemas.openxmlformats.org/drawingml/2006/main">
+            <a:r>
+              <a:rPr sz="1200" b="0">
+                <a:solidFill>
+                  <a:srgbClr val="24292F"/>
+                </a:solidFill>
+                <a:latin typeface="微软雅黑"/>
+                <a:ea typeface="微软雅黑"/>
+                <a:cs typeface="微软雅黑"/>
+              </a:rPr>
+              <a:t/>
             </a:r>
           </a:p>
           <a:p xmlns:a="http://schemas.openxmlformats.org/drawingml/2006/main">
@@ -5269,7 +9403,7 @@
           <p:nvPr/>
         </p:nvPicPr>
         <p:blipFill>
-          <a:blip xmlns:r="http://schemas.openxmlformats.org/officeDocument/2006/relationships" xmlns:a="http://schemas.openxmlformats.org/drawingml/2006/main" r:embed="R5cd80554c1c44ed0">
+          <a:blip xmlns:r="http://schemas.openxmlformats.org/officeDocument/2006/relationships" xmlns:a="http://schemas.openxmlformats.org/drawingml/2006/main" r:embed="Rb95e6f36824c45fb">
             <a:duotone>
               <a:prstClr val="black"/>
               <a:schemeClr val="accent1">
@@ -5447,7 +9581,7 @@
           <p:nvPr/>
         </p:nvPicPr>
         <p:blipFill rotWithShape="1">
-          <a:blip xmlns:r="http://schemas.openxmlformats.org/officeDocument/2006/relationships" xmlns:a="http://schemas.openxmlformats.org/drawingml/2006/main" r:embed="R66a6b61bc6674882"/>
+          <a:blip xmlns:r="http://schemas.openxmlformats.org/officeDocument/2006/relationships" xmlns:a="http://schemas.openxmlformats.org/drawingml/2006/main" r:embed="Rd87005c11bae46ad"/>
           <a:srcRect xmlns:a="http://schemas.openxmlformats.org/drawingml/2006/main" l="74359" t="0" r="1346" b="0"/>
           <a:stretch xmlns:a="http://schemas.openxmlformats.org/drawingml/2006/main"/>
         </p:blipFill>
@@ -5470,7 +9604,7 @@
           <p:nvPr/>
         </p:nvPicPr>
         <p:blipFill rotWithShape="1">
-          <a:blip xmlns:r="http://schemas.openxmlformats.org/officeDocument/2006/relationships" xmlns:a="http://schemas.openxmlformats.org/drawingml/2006/main" r:embed="Rc0ba055ad162473c">
+          <a:blip xmlns:r="http://schemas.openxmlformats.org/officeDocument/2006/relationships" xmlns:a="http://schemas.openxmlformats.org/drawingml/2006/main" r:embed="R3708cb7ccc5849e2">
             <a:alphaModFix amt="35000"/>
           </a:blip>
           <a:srcRect xmlns:a="http://schemas.openxmlformats.org/drawingml/2006/main" l="0" t="9831" r="0" b="36385"/>
@@ -5732,7 +9866,7 @@
           <p:nvPr/>
         </p:nvPicPr>
         <p:blipFill>
-          <a:blip xmlns:r="http://schemas.openxmlformats.org/officeDocument/2006/relationships" xmlns:a="http://schemas.openxmlformats.org/drawingml/2006/main" r:embed="R3aacb582af7f45bc"/>
+          <a:blip xmlns:r="http://schemas.openxmlformats.org/officeDocument/2006/relationships" xmlns:a="http://schemas.openxmlformats.org/drawingml/2006/main" r:embed="R613d76fac84a4f81"/>
           <a:srcRect xmlns:a="http://schemas.openxmlformats.org/drawingml/2006/main" l="0" t="0" r="54251" b="0"/>
           <a:stretch xmlns:a="http://schemas.openxmlformats.org/drawingml/2006/main"/>
         </p:blipFill>
@@ -5989,7 +10123,7 @@
           <p:nvPr/>
         </p:nvPicPr>
         <p:blipFill rotWithShape="1">
-          <a:blip xmlns:r="http://schemas.openxmlformats.org/officeDocument/2006/relationships" xmlns:a="http://schemas.openxmlformats.org/drawingml/2006/main" r:embed="R37ea96befc024153"/>
+          <a:blip xmlns:r="http://schemas.openxmlformats.org/officeDocument/2006/relationships" xmlns:a="http://schemas.openxmlformats.org/drawingml/2006/main" r:embed="R6ba5ec819f464141"/>
           <a:srcRect xmlns:a="http://schemas.openxmlformats.org/drawingml/2006/main" l="0" t="0" r="1346" b="0"/>
           <a:stretch xmlns:a="http://schemas.openxmlformats.org/drawingml/2006/main"/>
         </p:blipFill>
@@ -6172,7 +10306,7 @@
           <p:nvPr/>
         </p:nvPicPr>
         <p:blipFill>
-          <a:blip xmlns:r="http://schemas.openxmlformats.org/officeDocument/2006/relationships" xmlns:a="http://schemas.openxmlformats.org/drawingml/2006/main" r:embed="R9598149032e6423c"/>
+          <a:blip xmlns:r="http://schemas.openxmlformats.org/officeDocument/2006/relationships" xmlns:a="http://schemas.openxmlformats.org/drawingml/2006/main" r:embed="Rac2ca059c2814505"/>
           <a:stretch xmlns:a="http://schemas.openxmlformats.org/drawingml/2006/main">
             <a:fillRect l="0" t="0" r="0" b="0"/>
           </a:stretch>
@@ -6268,7 +10402,7 @@
           <p:nvPr/>
         </p:nvPicPr>
         <p:blipFill>
-          <a:blip xmlns:r="http://schemas.openxmlformats.org/officeDocument/2006/relationships" xmlns:a="http://schemas.openxmlformats.org/drawingml/2006/main" r:embed="Re0fa51519a92474e">
+          <a:blip xmlns:r="http://schemas.openxmlformats.org/officeDocument/2006/relationships" xmlns:a="http://schemas.openxmlformats.org/drawingml/2006/main" r:embed="R5d6e288f70824ad6">
             <a:duotone>
               <a:prstClr val="black"/>
               <a:schemeClr val="accent1">
@@ -6435,7 +10569,7 @@
           <p:nvPr/>
         </p:nvPicPr>
         <p:blipFill rotWithShape="1">
-          <a:blip xmlns:r="http://schemas.openxmlformats.org/officeDocument/2006/relationships" xmlns:a="http://schemas.openxmlformats.org/drawingml/2006/main" r:embed="Rbac13f0509164325">
+          <a:blip xmlns:r="http://schemas.openxmlformats.org/officeDocument/2006/relationships" xmlns:a="http://schemas.openxmlformats.org/drawingml/2006/main" r:embed="R06b71ba709e84587">
             <a:alphaModFix amt="20000"/>
             <a:duotone>
               <a:schemeClr val="accent4">
@@ -6533,10 +10667,10 @@
   </p:cSld>
   <p:clrMap bg1="lt1" tx1="dk1" bg2="lt2" tx2="dk2" accent1="accent1" accent2="accent2" accent3="accent3" accent4="accent4" accent5="accent5" accent6="accent6" hlink="hlink" folHlink="folHlink"/>
   <p:sldLayoutIdLst>
-    <p:sldLayoutId xmlns:r="http://schemas.openxmlformats.org/officeDocument/2006/relationships" id="2147483649" r:id="R4678dfaa4b544336"/>
-    <p:sldLayoutId xmlns:r="http://schemas.openxmlformats.org/officeDocument/2006/relationships" id="2147483650" r:id="R4f9a37525c4343d6"/>
-    <p:sldLayoutId xmlns:r="http://schemas.openxmlformats.org/officeDocument/2006/relationships" id="2147483651" r:id="R22e05e6aca4c4000"/>
-    <p:sldLayoutId xmlns:r="http://schemas.openxmlformats.org/officeDocument/2006/relationships" id="2147483652" r:id="Rad9ceda75ccf4254"/>
+    <p:sldLayoutId xmlns:r="http://schemas.openxmlformats.org/officeDocument/2006/relationships" id="2147483649" r:id="R38779a2afc6843d5"/>
+    <p:sldLayoutId xmlns:r="http://schemas.openxmlformats.org/officeDocument/2006/relationships" id="2147483650" r:id="Rf342a359716a48fd"/>
+    <p:sldLayoutId xmlns:r="http://schemas.openxmlformats.org/officeDocument/2006/relationships" id="2147483651" r:id="R82207ab57fa246e1"/>
+    <p:sldLayoutId xmlns:r="http://schemas.openxmlformats.org/officeDocument/2006/relationships" id="2147483652" r:id="Rb16aee8243fd44d2"/>
   </p:sldLayoutIdLst>
   <p:hf hdr="0" ftr="0" dt="0"/>
   <p:txStyles>
@@ -8052,7 +12186,7 @@
       </p:sp>
       <p:graphicFrame>
         <p:nvGraphicFramePr>
-          <p:cNvPr id="8" name="native-table-450"/>
+          <p:cNvPr id="9" name="native-table-450"/>
           <p:cNvGraphicFramePr/>
           <p:nvPr/>
         </p:nvGraphicFramePr>
@@ -10309,7 +14443,7 @@
       </p:sp>
       <p:cxnSp>
         <p:nvCxnSpPr>
-          <p:cNvPr id="50" name="proposal-to-check"/>
+          <p:cNvPr id="85" name="proposal-to-check"/>
           <p:cNvCxnSpPr>
             <a:stCxn xmlns:a="http://schemas.openxmlformats.org/drawingml/2006/main" id="10" idx="3"/>
             <a:endCxn xmlns:a="http://schemas.openxmlformats.org/drawingml/2006/main" id="11" idx="1"/>
@@ -10335,7 +14469,7 @@
       </p:cxnSp>
       <p:cxnSp>
         <p:nvCxnSpPr>
-          <p:cNvPr id="51" name="check-to-execution"/>
+          <p:cNvPr id="86" name="check-to-execution"/>
           <p:cNvCxnSpPr>
             <a:stCxn xmlns:a="http://schemas.openxmlformats.org/drawingml/2006/main" id="11" idx="3"/>
             <a:endCxn xmlns:a="http://schemas.openxmlformats.org/drawingml/2006/main" id="12" idx="1"/>
@@ -10422,7 +14556,7 @@
       </p:sp>
       <p:cxnSp>
         <p:nvCxnSpPr>
-          <p:cNvPr id="53" name="execution-to-trace"/>
+          <p:cNvPr id="88" name="execution-to-trace"/>
           <p:cNvCxnSpPr>
             <a:stCxn xmlns:a="http://schemas.openxmlformats.org/drawingml/2006/main" id="12" idx="3"/>
             <a:endCxn xmlns:a="http://schemas.openxmlformats.org/drawingml/2006/main" id="13" idx="1"/>
@@ -10662,7 +14796,7 @@
       </p:sp>
       <p:cxnSp>
         <p:nvCxnSpPr>
-          <p:cNvPr id="57" name="exception-to-human"/>
+          <p:cNvPr id="92" name="exception-to-human"/>
           <p:cNvCxnSpPr>
             <a:stCxn xmlns:a="http://schemas.openxmlformats.org/drawingml/2006/main" id="11" idx="2"/>
             <a:endCxn xmlns:a="http://schemas.openxmlformats.org/drawingml/2006/main" id="20" idx="0"/>
@@ -10805,7 +14939,7 @@
       </p:sp>
       <p:cxnSp>
         <p:nvCxnSpPr>
-          <p:cNvPr id="61" name="human-to-update"/>
+          <p:cNvPr id="96" name="human-to-update"/>
           <p:cNvCxnSpPr>
             <a:stCxn xmlns:a="http://schemas.openxmlformats.org/drawingml/2006/main" id="20" idx="1"/>
             <a:endCxn xmlns:a="http://schemas.openxmlformats.org/drawingml/2006/main" id="23" idx="3"/>
@@ -10831,7 +14965,7 @@
       </p:cxnSp>
       <p:cxnSp>
         <p:nvCxnSpPr>
-          <p:cNvPr id="62" name="updated-boundary-up"/>
+          <p:cNvPr id="97" name="updated-boundary-up"/>
           <p:cNvCxnSpPr>
             <a:stCxn xmlns:a="http://schemas.openxmlformats.org/drawingml/2006/main" id="23" idx="0"/>
             <a:endCxn xmlns:a="http://schemas.openxmlformats.org/drawingml/2006/main" id="24" idx="2"/>
@@ -10857,7 +14991,7 @@
       </p:cxnSp>
       <p:cxnSp>
         <p:nvCxnSpPr>
-          <p:cNvPr id="63" name="updated-boundary-to-check"/>
+          <p:cNvPr id="98" name="updated-boundary-to-check"/>
           <p:cNvCxnSpPr>
             <a:stCxn xmlns:a="http://schemas.openxmlformats.org/drawingml/2006/main" id="24" idx="3"/>
             <a:endCxn xmlns:a="http://schemas.openxmlformats.org/drawingml/2006/main" id="11" idx="1"/>
@@ -11034,7 +15168,7 @@
       </p:sp>
       <p:cxnSp>
         <p:nvCxnSpPr>
-          <p:cNvPr id="66" name="human-denied-to-stop"/>
+          <p:cNvPr id="101" name="human-denied-to-stop"/>
           <p:cNvCxnSpPr>
             <a:stCxn xmlns:a="http://schemas.openxmlformats.org/drawingml/2006/main" id="20" idx="3"/>
             <a:endCxn xmlns:a="http://schemas.openxmlformats.org/drawingml/2006/main" id="29" idx="1"/>
@@ -11177,7 +15311,7 @@
       </p:sp>
       <p:cxnSp>
         <p:nvCxnSpPr>
-          <p:cNvPr id="70" name="trace-to-next-state"/>
+          <p:cNvPr id="105" name="trace-to-next-state"/>
           <p:cNvCxnSpPr>
             <a:stCxn xmlns:a="http://schemas.openxmlformats.org/drawingml/2006/main" id="13" idx="0"/>
             <a:endCxn xmlns:a="http://schemas.openxmlformats.org/drawingml/2006/main" id="32" idx="2"/>
@@ -11203,7 +15337,7 @@
       </p:cxnSp>
       <p:cxnSp>
         <p:nvCxnSpPr>
-          <p:cNvPr id="71" name="next-state-to-new-action"/>
+          <p:cNvPr id="106" name="next-state-to-new-action"/>
           <p:cNvCxnSpPr>
             <a:stCxn xmlns:a="http://schemas.openxmlformats.org/drawingml/2006/main" id="32" idx="1"/>
             <a:endCxn xmlns:a="http://schemas.openxmlformats.org/drawingml/2006/main" id="33" idx="3"/>
@@ -11229,7 +15363,7 @@
       </p:cxnSp>
       <p:cxnSp>
         <p:nvCxnSpPr>
-          <p:cNvPr id="72" name="new-action-to-proposal"/>
+          <p:cNvPr id="107" name="new-action-to-proposal"/>
           <p:cNvCxnSpPr>
             <a:stCxn xmlns:a="http://schemas.openxmlformats.org/drawingml/2006/main" id="33" idx="2"/>
             <a:endCxn xmlns:a="http://schemas.openxmlformats.org/drawingml/2006/main" id="10" idx="0"/>
@@ -12163,7 +16297,7 @@
       </p:sp>
       <p:graphicFrame>
         <p:nvGraphicFramePr>
-          <p:cNvPr id="13" name="one-task-six-field-permission"/>
+          <p:cNvPr id="14" name="one-task-six-field-permission"/>
           <p:cNvGraphicFramePr/>
           <p:nvPr/>
         </p:nvGraphicFramePr>
@@ -14151,7 +18285,7 @@
       </p:sp>
       <p:cxnSp>
         <p:nvCxnSpPr>
-          <p:cNvPr id="25" name="edge-494"/>
+          <p:cNvPr id="41" name="edge-494"/>
           <p:cNvCxnSpPr>
             <a:stCxn xmlns:a="http://schemas.openxmlformats.org/drawingml/2006/main" id="4" idx="3"/>
             <a:endCxn xmlns:a="http://schemas.openxmlformats.org/drawingml/2006/main" id="5" idx="1"/>
@@ -14177,7 +18311,7 @@
       </p:cxnSp>
       <p:cxnSp>
         <p:nvCxnSpPr>
-          <p:cNvPr id="26" name="edge-495"/>
+          <p:cNvPr id="42" name="edge-495"/>
           <p:cNvCxnSpPr>
             <a:stCxn xmlns:a="http://schemas.openxmlformats.org/drawingml/2006/main" id="5" idx="3"/>
             <a:endCxn xmlns:a="http://schemas.openxmlformats.org/drawingml/2006/main" id="6" idx="1"/>
@@ -14203,7 +18337,7 @@
       </p:cxnSp>
       <p:cxnSp>
         <p:nvCxnSpPr>
-          <p:cNvPr id="27" name="edge-496"/>
+          <p:cNvPr id="43" name="edge-496"/>
           <p:cNvCxnSpPr>
             <a:stCxn xmlns:a="http://schemas.openxmlformats.org/drawingml/2006/main" id="6" idx="3"/>
             <a:endCxn xmlns:a="http://schemas.openxmlformats.org/drawingml/2006/main" id="7" idx="1"/>
@@ -14680,7 +18814,7 @@
       </p:sp>
       <p:cxnSp>
         <p:nvCxnSpPr>
-          <p:cNvPr id="34" name="edge-503"/>
+          <p:cNvPr id="50" name="edge-503"/>
           <p:cNvCxnSpPr>
             <a:stCxn xmlns:a="http://schemas.openxmlformats.org/drawingml/2006/main" id="15" idx="1"/>
             <a:endCxn xmlns:a="http://schemas.openxmlformats.org/drawingml/2006/main" id="16" idx="3"/>
@@ -14950,7 +19084,7 @@
       </p:sp>
       <p:graphicFrame>
         <p:nvGraphicFramePr>
-          <p:cNvPr id="10" name="native-table-506"/>
+          <p:cNvPr id="11" name="native-table-506"/>
           <p:cNvGraphicFramePr/>
           <p:nvPr/>
         </p:nvGraphicFramePr>
@@ -15708,7 +19842,7 @@
       </p:sp>
       <p:graphicFrame>
         <p:nvGraphicFramePr>
-          <p:cNvPr id="10" name="native-table-509"/>
+          <p:cNvPr id="11" name="native-table-509"/>
           <p:cNvGraphicFramePr/>
           <p:nvPr/>
         </p:nvGraphicFramePr>
@@ -17245,7 +21379,7 @@
       </p:sp>
       <p:cxnSp>
         <p:nvCxnSpPr>
-          <p:cNvPr id="23" name="edge-516"/>
+          <p:cNvPr id="33" name="edge-516"/>
           <p:cNvCxnSpPr>
             <a:stCxn xmlns:a="http://schemas.openxmlformats.org/drawingml/2006/main" id="5" idx="3"/>
             <a:endCxn xmlns:a="http://schemas.openxmlformats.org/drawingml/2006/main" id="6" idx="1"/>
@@ -17271,7 +21405,7 @@
       </p:cxnSp>
       <p:cxnSp>
         <p:nvCxnSpPr>
-          <p:cNvPr id="24" name="edge-517"/>
+          <p:cNvPr id="34" name="edge-517"/>
           <p:cNvCxnSpPr>
             <a:stCxn xmlns:a="http://schemas.openxmlformats.org/drawingml/2006/main" id="6" idx="3"/>
             <a:endCxn xmlns:a="http://schemas.openxmlformats.org/drawingml/2006/main" id="7" idx="1"/>
@@ -17297,7 +21431,7 @@
       </p:cxnSp>
       <p:cxnSp>
         <p:nvCxnSpPr>
-          <p:cNvPr id="25" name="edge-518"/>
+          <p:cNvPr id="35" name="edge-518"/>
           <p:cNvCxnSpPr>
             <a:stCxn xmlns:a="http://schemas.openxmlformats.org/drawingml/2006/main" id="7" idx="3"/>
             <a:endCxn xmlns:a="http://schemas.openxmlformats.org/drawingml/2006/main" id="8" idx="1"/>
@@ -21766,7 +25900,7 @@
       </p:sp>
       <p:cxnSp>
         <p:nvCxnSpPr>
-          <p:cNvPr id="24" name="edge-562"/>
+          <p:cNvPr id="34" name="edge-562"/>
           <p:cNvCxnSpPr>
             <a:stCxn xmlns:a="http://schemas.openxmlformats.org/drawingml/2006/main" id="5" idx="3"/>
             <a:endCxn xmlns:a="http://schemas.openxmlformats.org/drawingml/2006/main" id="6" idx="1"/>
@@ -21792,7 +25926,7 @@
       </p:cxnSp>
       <p:cxnSp>
         <p:nvCxnSpPr>
-          <p:cNvPr id="25" name="edge-563"/>
+          <p:cNvPr id="35" name="edge-563"/>
           <p:cNvCxnSpPr>
             <a:stCxn xmlns:a="http://schemas.openxmlformats.org/drawingml/2006/main" id="6" idx="3"/>
             <a:endCxn xmlns:a="http://schemas.openxmlformats.org/drawingml/2006/main" id="7" idx="1"/>
@@ -21818,7 +25952,7 @@
       </p:cxnSp>
       <p:cxnSp>
         <p:nvCxnSpPr>
-          <p:cNvPr id="26" name="edge-564"/>
+          <p:cNvPr id="36" name="edge-564"/>
           <p:cNvCxnSpPr>
             <a:stCxn xmlns:a="http://schemas.openxmlformats.org/drawingml/2006/main" id="7" idx="3"/>
             <a:endCxn xmlns:a="http://schemas.openxmlformats.org/drawingml/2006/main" id="8" idx="1"/>
@@ -23544,14 +27678,14 @@
       </p:sp>
       <p:pic>
         <p:nvPicPr>
-          <p:cNvPr id="28" name=""/>
+          <p:cNvPr id="29" name=""/>
           <p:cNvPicPr>
             <a:picLocks xmlns:a="http://schemas.openxmlformats.org/drawingml/2006/main" noChangeAspect="1"/>
           </p:cNvPicPr>
           <p:nvPr/>
         </p:nvPicPr>
         <p:blipFill>
-          <a:blip xmlns:r="http://schemas.openxmlformats.org/officeDocument/2006/relationships" xmlns:a="http://schemas.openxmlformats.org/drawingml/2006/main" r:embed="R5f57ab8e1e184f37"/>
+          <a:blip xmlns:r="http://schemas.openxmlformats.org/officeDocument/2006/relationships" xmlns:a="http://schemas.openxmlformats.org/drawingml/2006/main" r:embed="R2977cb95786c45ca"/>
           <a:stretch xmlns:a="http://schemas.openxmlformats.org/drawingml/2006/main"/>
         </p:blipFill>
         <p:spPr>
@@ -24905,15 +29039,15 @@
       </p:sp>
       <p:pic>
         <p:nvPicPr>
-          <p:cNvPr id="20" name=""/>
+          <p:cNvPr id="22" name=""/>
           <p:cNvPicPr>
             <a:picLocks xmlns:a="http://schemas.openxmlformats.org/drawingml/2006/main" noChangeAspect="1"/>
           </p:cNvPicPr>
           <p:nvPr/>
         </p:nvPicPr>
         <p:blipFill>
-          <a:blip xmlns:r="http://schemas.openxmlformats.org/officeDocument/2006/relationships" xmlns:a="http://schemas.openxmlformats.org/drawingml/2006/main" r:embed="R9fbd3234a3c144b3"/>
-          <ns0:srcRect xmlns:ns0="http://schemas.openxmlformats.org/drawingml/2006/main" l="6400" t="29000" r="6400" b="36120"/>
+          <a:blip xmlns:r="http://schemas.openxmlformats.org/officeDocument/2006/relationships" xmlns:a="http://schemas.openxmlformats.org/drawingml/2006/main" r:embed="Rb1007a5a998c4c3f"/>
+          <a:srcRect xmlns:a="http://schemas.openxmlformats.org/drawingml/2006/main" l="6400" t="29000" r="6400" b="36120"/>
           <a:stretch xmlns:a="http://schemas.openxmlformats.org/drawingml/2006/main">
             <a:fillRect l="0" t="0" r="0" b="0"/>
           </a:stretch>
@@ -24930,15 +29064,15 @@
       </p:pic>
       <p:pic>
         <p:nvPicPr>
-          <p:cNvPr id="21" name=""/>
+          <p:cNvPr id="23" name=""/>
           <p:cNvPicPr>
             <a:picLocks xmlns:a="http://schemas.openxmlformats.org/drawingml/2006/main" noChangeAspect="1"/>
           </p:cNvPicPr>
           <p:nvPr/>
         </p:nvPicPr>
         <p:blipFill>
-          <a:blip xmlns:r="http://schemas.openxmlformats.org/officeDocument/2006/relationships" xmlns:a="http://schemas.openxmlformats.org/drawingml/2006/main" r:embed="R010ffacbc2764bed"/>
-          <ns0:srcRect xmlns:ns0="http://schemas.openxmlformats.org/drawingml/2006/main" l="11500" t="8500" r="11500" b="71100"/>
+          <a:blip xmlns:r="http://schemas.openxmlformats.org/officeDocument/2006/relationships" xmlns:a="http://schemas.openxmlformats.org/drawingml/2006/main" r:embed="Re06c08649a1842b8"/>
+          <a:srcRect xmlns:a="http://schemas.openxmlformats.org/drawingml/2006/main" l="11500" t="8500" r="11500" b="71100"/>
           <a:stretch xmlns:a="http://schemas.openxmlformats.org/drawingml/2006/main">
             <a:fillRect l="0" t="0" r="0" b="0"/>
           </a:stretch>
@@ -25625,7 +29759,7 @@
       </p:sp>
       <p:cxnSp>
         <p:nvCxnSpPr>
-          <p:cNvPr id="21" name="edge-412"/>
+          <p:cNvPr id="33" name="edge-412"/>
           <p:cNvCxnSpPr>
             <a:stCxn xmlns:a="http://schemas.openxmlformats.org/drawingml/2006/main" id="5" idx="3"/>
             <a:endCxn xmlns:a="http://schemas.openxmlformats.org/drawingml/2006/main" id="6" idx="1"/>
@@ -25651,7 +29785,7 @@
       </p:cxnSp>
       <p:cxnSp>
         <p:nvCxnSpPr>
-          <p:cNvPr id="22" name="edge-413"/>
+          <p:cNvPr id="34" name="edge-413"/>
           <p:cNvCxnSpPr>
             <a:stCxn xmlns:a="http://schemas.openxmlformats.org/drawingml/2006/main" id="6" idx="3"/>
             <a:endCxn xmlns:a="http://schemas.openxmlformats.org/drawingml/2006/main" id="7" idx="1"/>
@@ -25864,7 +29998,7 @@
       </p:sp>
       <p:cxnSp>
         <p:nvCxnSpPr>
-          <p:cNvPr id="26" name="edge-417"/>
+          <p:cNvPr id="38" name="edge-417"/>
           <p:cNvCxnSpPr>
             <a:stCxn xmlns:a="http://schemas.openxmlformats.org/drawingml/2006/main" id="11" idx="3"/>
             <a:endCxn xmlns:a="http://schemas.openxmlformats.org/drawingml/2006/main" id="12" idx="1"/>
@@ -26605,7 +30739,7 @@
       </p:sp>
       <p:graphicFrame>
         <p:nvGraphicFramePr>
-          <p:cNvPr id="8" name="native-table-421"/>
+          <p:cNvPr id="9" name="native-table-421"/>
           <p:cNvGraphicFramePr/>
           <p:nvPr/>
         </p:nvGraphicFramePr>

--- a/lessons/lesson-02/slides.pptx
+++ b/lessons/lesson-02/slides.pptx
@@ -863,7 +863,7 @@
                 <a:ea typeface="微软雅黑"/>
                 <a:cs typeface="微软雅黑"/>
               </a:rPr>
-              <a:t>避免羞辱或不切实际的追责；强调透明和按规则协调。</a:t>
+              <a:t>用虚构情境提问，不要求学生公开本人经历。先停止进一步发送、保留可核对记录，再按适用规则评估和沟通。</a:t>
             </a:r>
           </a:p>
           <a:p xmlns:a="http://schemas.openxmlformats.org/drawingml/2006/main">
@@ -902,7 +902,7 @@
                 <a:ea typeface="微软雅黑"/>
                 <a:cs typeface="微软雅黑"/>
               </a:rPr>
-              <a:t>选择恢复路径第一步</a:t>
+              <a:t>快答恢复路径的第一步</a:t>
             </a:r>
           </a:p>
           <a:p xmlns:a="http://schemas.openxmlformats.org/drawingml/2006/main">
@@ -1877,7 +1877,7 @@
                 <a:ea typeface="微软雅黑"/>
                 <a:cs typeface="微软雅黑"/>
               </a:rPr>
-              <a:t>这一页是全课唯一定义位；OpenCode 只是一个执行实例。</a:t>
+              <a:t>这一页是全课唯一定义位；Pi Agent 是课程主执行环境，OpenCode 等为备选。声明不自动成为强制限制，须由实际工具配置、权限扩展或隔离环境落实；Pi 默认没有逐次权限弹窗。</a:t>
             </a:r>
           </a:p>
           <a:p xmlns:a="http://schemas.openxmlformats.org/drawingml/2006/main">
@@ -2930,7 +2930,7 @@
                 <a:ea typeface="微软雅黑"/>
                 <a:cs typeface="微软雅黑"/>
               </a:rPr>
-              <a:t>圈出过宽配置的第一处风险</a:t>
+              <a:t>快答过宽配置的第一处风险及收窄方式</a:t>
             </a:r>
           </a:p>
           <a:p xmlns:a="http://schemas.openxmlformats.org/drawingml/2006/main">
@@ -4243,7 +4243,7 @@
                 <a:ea typeface="微软雅黑"/>
                 <a:cs typeface="微软雅黑"/>
               </a:rPr>
-              <a:t>不重复八阶段，只指出记录中的缺口。</a:t>
+              <a:t>回看第 1 课助教用 MI 课题完成的有限写回：diff 和日志说明文件发生了什么变化，材料身份、授权与外发条件仍需单独判断。这里回顾研究动作，不展示助教真实未发表材料。</a:t>
             </a:r>
           </a:p>
           <a:p xmlns:a="http://schemas.openxmlformats.org/drawingml/2006/main">
@@ -4620,7 +4620,7 @@
                 <a:ea typeface="微软雅黑"/>
                 <a:cs typeface="微软雅黑"/>
               </a:rPr>
-              <a:t>页面：P20 教师演示：风险与权限如何落地</a:t>
+              <a:t>页面：P20 助教演示：风险与权限如何落地</a:t>
             </a:r>
           </a:p>
           <a:p xmlns:a="http://schemas.openxmlformats.org/drawingml/2006/main">
@@ -4685,7 +4685,7 @@
                 <a:ea typeface="微软雅黑"/>
                 <a:cs typeface="微软雅黑"/>
               </a:rPr>
-              <a:t>教师演示 · 同一未公开合作稿案例；选择替代输入；只读边界审查；人工确认写回；核对三件工件；原稿不对 Agent 开放 / 改用抽象问题；检查过宽权限 / 与缺失的确认点；明确三份文件 / 及各自修改范围；风险卡、权限行 / 使用记录相互一致</a:t>
+              <a:t>助教演示 · 同一未公开合作稿案例；选择替代输入；只读边界审查；人工确认写回；核对三件工件；原稿不对 Agent 开放 / 改用抽象问题；检查过宽权限 / 与缺失的确认点；明确三份文件 / 及各自修改范围；风险卡、权限行 / 使用记录相互一致</a:t>
             </a:r>
           </a:p>
           <a:p xmlns:a="http://schemas.openxmlformats.org/drawingml/2006/main">
@@ -4724,7 +4724,7 @@
                 <a:ea typeface="微软雅黑"/>
                 <a:cs typeface="微软雅黑"/>
               </a:rPr>
-              <a:t>从 P03 的虚构未公开合作稿继续，不更换案例。用抽象问题或经授权公开版本完成替代路径，不教 OpenCode 菜单。</a:t>
+              <a:t>从 P03 的虚构合作稿继续。助教打开可恢复副本并操作；我来提问、判断和批准写回。上节助教以真实 MI 研究动作作示范，本节的稿件与记录均为课堂构造，不使用真实未发表材料。用抽象问题或经授权公开版本完成替代路径，不教 Pi Agent 菜单。</a:t>
             </a:r>
           </a:p>
           <a:p xmlns:a="http://schemas.openxmlformats.org/drawingml/2006/main">
@@ -5023,7 +5023,7 @@
                 <a:ea typeface="微软雅黑"/>
                 <a:cs typeface="微软雅黑"/>
               </a:rPr>
-              <a:t>教师演示 · 任务契约；第一轮；READ    agent-permissions.md；TASK    指出一处过宽或缺失权限；WRITE   none；NETWORK off；RETURN  建议、风险与最小替代动作；STOP    等待人工确认；研究者检查；建议收窄了范围， / 还是隐含扩大了 / 读写与外发权限？</a:t>
+              <a:t>助教演示 · 任务契约；第一轮；READ    agent-permissions.md；TASK    指出一处过宽或缺失权限；WRITE   none；NETWORK off；RETURN  建议、风险与最小替代动作；STOP    等待人工确认；研究者检查；建议收窄了范围， / 还是隐含扩大了 / 读写与外发权限？</a:t>
             </a:r>
           </a:p>
           <a:p xmlns:a="http://schemas.openxmlformats.org/drawingml/2006/main">
@@ -5062,7 +5062,7 @@
                 <a:ea typeface="微软雅黑"/>
                 <a:cs typeface="微软雅黑"/>
               </a:rPr>
-              <a:t>让 Agent 只读权限矩阵，指出一处过宽或缺失，不允许写。</a:t>
+              <a:t>助教展示只读检查的实际输入和返回建议后停下。请学生指出哪一项权限被收窄；若建议暗含新文件或外发权限，先拒绝并改写边界。确认当前未写文件，再进入下一页。</a:t>
             </a:r>
           </a:p>
           <a:p xmlns:a="http://schemas.openxmlformats.org/drawingml/2006/main">
@@ -5361,7 +5361,7 @@
                 <a:ea typeface="微软雅黑"/>
                 <a:cs typeface="微软雅黑"/>
               </a:rPr>
-              <a:t>教师演示 · 任务契约；第二轮：只写回获批范围；WRITE   agent-permissions.md 一行；ethics-and-compliance.md 风险卡；ai-usage-log.md 一条记录；KEEP    问题、指标与工件状态；NETWORK off；AFTER   展示实际 diff；确认点；文件 / 段落 / 修改范围</a:t>
+              <a:t>助教演示 · 任务契约；第二轮：只写回获批范围；WRITE   agent-permissions.md 一行；ethics-and-compliance.md 风险卡；ai-usage-log.md 一条记录；KEEP    问题、指标与工件状态；NETWORK off；AFTER   展示实际 diff；确认点；文件 / 段落 / 修改范围</a:t>
             </a:r>
           </a:p>
           <a:p xmlns:a="http://schemas.openxmlformats.org/drawingml/2006/main">
@@ -5400,7 +5400,7 @@
                 <a:ea typeface="微软雅黑"/>
                 <a:cs typeface="微软雅黑"/>
               </a:rPr>
-              <a:t>风险卡写清原稿为何不外发；权限行只授权替代输入；日志记录原稿未发送与实际核验。不在课堂演示额外工件追踪填表。</a:t>
+              <a:t>我明确批准三份文件的目标段落和修改范围，助教才写回。风险卡写清原稿为何不外发；权限行只授权替代输入；日志记录原稿未发送与实际核验。打开实际 diff，请学生查有无越界、三份记录是否指向同一动作；不在课堂演示额外工件追踪填表。若限制配置未在授课设备通过复演，助教改用预制 diff 并标明回放。</a:t>
             </a:r>
           </a:p>
           <a:p xmlns:a="http://schemas.openxmlformats.org/drawingml/2006/main">
@@ -5439,7 +5439,7 @@
                 <a:ea typeface="微软雅黑"/>
                 <a:cs typeface="微软雅黑"/>
               </a:rPr>
-              <a:t>检查实际修改文件是否超出三项</a:t>
+              <a:t>检查实际 diff 是否只含获批三项，指出一处人工核验依据</a:t>
             </a:r>
           </a:p>
           <a:p xmlns:a="http://schemas.openxmlformats.org/drawingml/2006/main">
@@ -7090,7 +7090,7 @@
                 <a:ea typeface="微软雅黑"/>
                 <a:cs typeface="微软雅黑"/>
               </a:rPr>
-              <a:t>就当前信息，不可上传原稿：缺共同作者授权和平台条款核对。“有条件允许”只描述补齐条件后的新情境，不表示现在可先发。完成判断后切换到公开构造材料，继续示范风险卡与授权边界。</a:t>
+              <a:t>此处开始使用与助教真实 MI 课题分开的虚构合作稿。就当前信息，不可上传原稿：缺共同作者授权和平台条款核对。“有条件允许”只描述补齐条件后的新情境，不表示现在可先发。完成判断后切换到公开构造材料，继续示范风险卡与授权边界。先让每人选一档，再请邻座互述一个决定性条件，最后收束。</a:t>
             </a:r>
           </a:p>
           <a:p xmlns:a="http://schemas.openxmlformats.org/drawingml/2006/main">
@@ -21001,7 +21001,7 @@
                 <a:ea typeface="微软雅黑"/>
                 <a:cs typeface="微软雅黑"/>
               </a:rPr>
-              <a:t>教师演示：风险与权限如何落地</a:t>
+              <a:t>助教演示：风险与权限如何落地</a:t>
             </a:r>
           </a:p>
         </p:txBody>
@@ -21112,7 +21112,7 @@
                 <a:ea typeface="微软雅黑"/>
                 <a:cs typeface="微软雅黑"/>
               </a:rPr>
-              <a:t>教师演示 · 同一未公开合作稿案例</a:t>
+              <a:t>助教演示 · 同一未公开合作稿案例</a:t>
             </a:r>
           </a:p>
         </p:txBody>
@@ -21985,7 +21985,7 @@
                 <a:ea typeface="微软雅黑"/>
                 <a:cs typeface="微软雅黑"/>
               </a:rPr>
-              <a:t>教师演示 · 任务契约</a:t>
+              <a:t>助教演示 · 任务契约</a:t>
             </a:r>
           </a:p>
         </p:txBody>
@@ -22801,7 +22801,7 @@
                 <a:ea typeface="微软雅黑"/>
                 <a:cs typeface="微软雅黑"/>
               </a:rPr>
-              <a:t>教师演示 · 任务契约</a:t>
+              <a:t>助教演示 · 任务契约</a:t>
             </a:r>
           </a:p>
         </p:txBody>

--- a/lessons/lesson-02/slides.pptx
+++ b/lessons/lesson-02/slides.pptx
@@ -369,6 +369,9 @@
             </a:r>
           </a:p>
           <a:p>
+            <a:r>
+              <a:t/>
+            </a:r>
             <a:endParaRPr sz="1200" b="0">
               <a:solidFill>
                 <a:srgbClr val="24292F"/>
@@ -388,10 +391,13 @@
                 <a:ea typeface="微软雅黑"/>
                 <a:cs typeface="微软雅黑"/>
               </a:rPr>
-              <a:t>讲义位置：导读</a:t>
-            </a:r>
-          </a:p>
-          <a:p>
+              <a:t>讲述与校准：</a:t>
+            </a:r>
+          </a:p>
+          <a:p>
+            <a:r>
+              <a:t/>
+            </a:r>
             <a:endParaRPr sz="1200" b="0">
               <a:solidFill>
                 <a:srgbClr val="24292F"/>
@@ -411,7 +417,7 @@
                 <a:ea typeface="微软雅黑"/>
                 <a:cs typeface="微软雅黑"/>
               </a:rPr>
-              <a:t>屏显核对：</a:t>
+              <a:t/>
             </a:r>
           </a:p>
           <a:p>
@@ -424,10 +430,13 @@
                 <a:ea typeface="微软雅黑"/>
                 <a:cs typeface="微软雅黑"/>
               </a:rPr>
-              <a:t>科研伦理与 Agent 边界</a:t>
-            </a:r>
-          </a:p>
-          <a:p>
+              <a:t>学生动作：</a:t>
+            </a:r>
+          </a:p>
+          <a:p>
+            <a:r>
+              <a:t>依据本页方法检查本人项目；按需参考。</a:t>
+            </a:r>
             <a:endParaRPr sz="1200" b="0">
               <a:solidFill>
                 <a:srgbClr val="24292F"/>
@@ -447,7 +456,7 @@
                 <a:ea typeface="微软雅黑"/>
                 <a:cs typeface="微软雅黑"/>
               </a:rPr>
-              <a:t>教师讲述：</a:t>
+              <a:t/>
             </a:r>
           </a:p>
           <a:p>
@@ -460,10 +469,13 @@
                 <a:ea typeface="微软雅黑"/>
                 <a:cs typeface="微软雅黑"/>
               </a:rPr>
-              <a:t>封面只承担识别。</a:t>
-            </a:r>
-          </a:p>
-          <a:p>
+              <a:t>课堂安排：按本稿下方 90 分钟教学路由安排；此页不另占独立时段。</a:t>
+            </a:r>
+          </a:p>
+          <a:p>
+            <a:r>
+              <a:t/>
+            </a:r>
             <a:endParaRPr sz="1200" b="0">
               <a:solidFill>
                 <a:srgbClr val="24292F"/>
@@ -483,7 +495,7 @@
                 <a:ea typeface="微软雅黑"/>
                 <a:cs typeface="微软雅黑"/>
               </a:rPr>
-              <a:t>学生动作：</a:t>
+              <a:t>[Sources]</a:t>
             </a:r>
           </a:p>
           <a:p>
@@ -496,10 +508,13 @@
                 <a:ea typeface="微软雅黑"/>
                 <a:cs typeface="微软雅黑"/>
               </a:rPr>
-              <a:t>进入课堂</a:t>
-            </a:r>
-          </a:p>
-          <a:p>
+              <a:t>本课 handout.md、judgment-task.md；../../course/judgment-path.md。</a:t>
+            </a:r>
+          </a:p>
+          <a:p>
+            <a:r>
+              <a:t>[/Sources]</a:t>
+            </a:r>
             <a:endParaRPr sz="1200" b="0">
               <a:solidFill>
                 <a:srgbClr val="24292F"/>
@@ -508,101 +523,6 @@
               <a:ea typeface="微软雅黑"/>
               <a:cs typeface="微软雅黑"/>
             </a:endParaRPr>
-          </a:p>
-          <a:p>
-            <a:r>
-              <a:rPr sz="1200" b="0">
-                <a:solidFill>
-                  <a:srgbClr val="24292F"/>
-                </a:solidFill>
-                <a:latin typeface="微软雅黑"/>
-                <a:ea typeface="微软雅黑"/>
-                <a:cs typeface="微软雅黑"/>
-              </a:rPr>
-              <a:t>来源与边界：</a:t>
-            </a:r>
-          </a:p>
-          <a:p>
-            <a:r>
-              <a:rPr sz="1200" b="0">
-                <a:solidFill>
-                  <a:srgbClr val="24292F"/>
-                </a:solidFill>
-                <a:latin typeface="微软雅黑"/>
-                <a:ea typeface="微软雅黑"/>
-                <a:cs typeface="微软雅黑"/>
-              </a:rPr>
-              <a:t>/Users/bright/Projects/courses/graduate/course/syllabus.md</a:t>
-            </a:r>
-          </a:p>
-          <a:p>
-            <a:endParaRPr sz="1200" b="0">
-              <a:solidFill>
-                <a:srgbClr val="24292F"/>
-              </a:solidFill>
-              <a:latin typeface="微软雅黑"/>
-              <a:ea typeface="微软雅黑"/>
-              <a:cs typeface="微软雅黑"/>
-            </a:endParaRPr>
-          </a:p>
-          <a:p>
-            <a:r>
-              <a:rPr sz="1200" b="0">
-                <a:solidFill>
-                  <a:srgbClr val="24292F"/>
-                </a:solidFill>
-                <a:latin typeface="微软雅黑"/>
-                <a:ea typeface="微软雅黑"/>
-                <a:cs typeface="微软雅黑"/>
-              </a:rPr>
-              <a:t>[Sources]</a:t>
-            </a:r>
-          </a:p>
-          <a:p>
-            <a:endParaRPr sz="1200" b="0">
-              <a:solidFill>
-                <a:srgbClr val="24292F"/>
-              </a:solidFill>
-              <a:latin typeface="微软雅黑"/>
-              <a:ea typeface="微软雅黑"/>
-              <a:cs typeface="微软雅黑"/>
-            </a:endParaRPr>
-          </a:p>
-          <a:p>
-            <a:r>
-              <a:rPr sz="1200" b="0">
-                <a:solidFill>
-                  <a:srgbClr val="24292F"/>
-                </a:solidFill>
-                <a:latin typeface="微软雅黑"/>
-                <a:ea typeface="微软雅黑"/>
-                <a:cs typeface="微软雅黑"/>
-              </a:rPr>
-              <a:t>- 本课 handout.md 与 slides.md</a:t>
-            </a:r>
-          </a:p>
-          <a:p>
-            <a:endParaRPr sz="1200" b="0">
-              <a:solidFill>
-                <a:srgbClr val="24292F"/>
-              </a:solidFill>
-              <a:latin typeface="微软雅黑"/>
-              <a:ea typeface="微软雅黑"/>
-              <a:cs typeface="微软雅黑"/>
-            </a:endParaRPr>
-          </a:p>
-          <a:p>
-            <a:r>
-              <a:rPr sz="1200" b="0">
-                <a:solidFill>
-                  <a:srgbClr val="24292F"/>
-                </a:solidFill>
-                <a:latin typeface="微软雅黑"/>
-                <a:ea typeface="微软雅黑"/>
-                <a:cs typeface="微软雅黑"/>
-              </a:rPr>
-              <a:t>[/Sources]</a:t>
-            </a:r>
           </a:p>
         </p:txBody>
       </p:sp>
@@ -690,6 +610,9 @@
             </a:r>
           </a:p>
           <a:p>
+            <a:r>
+              <a:t/>
+            </a:r>
             <a:endParaRPr sz="1200" b="0">
               <a:solidFill>
                 <a:srgbClr val="24292F"/>
@@ -698,9 +621,6 @@
               <a:ea typeface="微软雅黑"/>
               <a:cs typeface="微软雅黑"/>
             </a:endParaRPr>
-            <a:r>
-              <a:t>讲义位置：§八·案例 A</a:t>
-            </a:r>
           </a:p>
           <a:p>
             <a:r>
@@ -712,10 +632,13 @@
                 <a:ea typeface="微软雅黑"/>
                 <a:cs typeface="微软雅黑"/>
               </a:rPr>
-              <a:t>屏显核对：</a:t>
-            </a:r>
-          </a:p>
-          <a:p>
+              <a:t>讲述与校准：</a:t>
+            </a:r>
+          </a:p>
+          <a:p>
+            <a:r>
+              <a:t/>
+            </a:r>
             <a:endParaRPr sz="1200" b="0">
               <a:solidFill>
                 <a:srgbClr val="24292F"/>
@@ -724,9 +647,6 @@
               <a:ea typeface="微软雅黑"/>
               <a:cs typeface="微软雅黑"/>
             </a:endParaRPr>
-            <a:r>
-              <a:t>材料身份；作者工作稿，还是负有保密义务的评审稿？；权利与同意；共同作者、数据主体及权利方是否同意？；适用规则；机构、项目、期刊是否提出更严格要求？；使用环境；存储、训练使用与访问权限是否可接受？；最小必要；能否改用抽象问题或更少的获准片段？；课内练习使用公开、课堂构造或已授权脱敏材料。</a:t>
-            </a:r>
           </a:p>
           <a:p>
             <a:r>
@@ -738,7 +658,7 @@
                 <a:ea typeface="微软雅黑"/>
                 <a:cs typeface="微软雅黑"/>
               </a:rPr>
-              <a:t>教师讲述：</a:t>
+              <a:t/>
             </a:r>
           </a:p>
           <a:p>
@@ -751,10 +671,13 @@
                 <a:ea typeface="微软雅黑"/>
                 <a:cs typeface="微软雅黑"/>
               </a:rPr>
-              <a:t>五项检查承接 P07：先确认材料身份、内容授权和环境，再核查必要输入范围。最小必要可以是获准讨论的问题描述；抽象描述仍可能暴露核心内容。本人可自主决定分享的原创想法也可讨论，仍要核查适用规则和环境。学生课程实践沿用更严格边界：公开、课堂构造或经授权脱敏材料。</a:t>
-            </a:r>
-          </a:p>
-          <a:p>
+              <a:t>学生动作：</a:t>
+            </a:r>
+          </a:p>
+          <a:p>
+            <a:r>
+              <a:t>依据本页方法检查本人项目；按需参考。</a:t>
+            </a:r>
             <a:endParaRPr sz="1200" b="0">
               <a:solidFill>
                 <a:srgbClr val="24292F"/>
@@ -763,9 +686,6 @@
               <a:ea typeface="微软雅黑"/>
               <a:cs typeface="微软雅黑"/>
             </a:endParaRPr>
-            <a:r>
-              <a:t>学生动作：</a:t>
-            </a:r>
           </a:p>
           <a:p>
             <a:r>
@@ -777,7 +697,7 @@
                 <a:ea typeface="微软雅黑"/>
                 <a:cs typeface="微软雅黑"/>
               </a:rPr>
-              <a:t>判断当前案例卡在哪个条件</a:t>
+              <a:t/>
             </a:r>
           </a:p>
           <a:p>
@@ -790,10 +710,13 @@
                 <a:ea typeface="微软雅黑"/>
                 <a:cs typeface="微软雅黑"/>
               </a:rPr>
-              <a:t>来源与边界：</a:t>
-            </a:r>
-          </a:p>
-          <a:p>
+              <a:t>课堂安排：按本稿下方 90 分钟教学路由安排；此页不另占独立时段。</a:t>
+            </a:r>
+          </a:p>
+          <a:p>
+            <a:r>
+              <a:t/>
+            </a:r>
             <a:endParaRPr sz="1200" b="0">
               <a:solidFill>
                 <a:srgbClr val="24292F"/>
@@ -802,9 +725,6 @@
               <a:ea typeface="微软雅黑"/>
               <a:cs typeface="微软雅黑"/>
             </a:endParaRPr>
-            <a:r>
-              <a:t>/Users/bright/Projects/courses/graduate/lessons/lesson-02/handout.md</a:t>
-            </a:r>
           </a:p>
           <a:p>
             <a:r>
@@ -829,10 +749,13 @@
                 <a:ea typeface="微软雅黑"/>
                 <a:cs typeface="微软雅黑"/>
               </a:rPr>
-              <a:t>- lessons/lesson-02/handout.md</a:t>
-            </a:r>
-          </a:p>
-          <a:p>
+              <a:t>本课 handout.md、judgment-task.md；../../course/judgment-path.md。</a:t>
+            </a:r>
+          </a:p>
+          <a:p>
+            <a:r>
+              <a:t>[/Sources]</a:t>
+            </a:r>
             <a:endParaRPr sz="1200" b="0">
               <a:solidFill>
                 <a:srgbClr val="24292F"/>
@@ -841,35 +764,6 @@
               <a:ea typeface="微软雅黑"/>
               <a:cs typeface="微软雅黑"/>
             </a:endParaRPr>
-            <a:r>
-              <a:t>- lessons/lesson-02/slides.md</a:t>
-            </a:r>
-          </a:p>
-          <a:p>
-            <a:r>
-              <a:rPr sz="1200" b="0">
-                <a:solidFill>
-                  <a:srgbClr val="24292F"/>
-                </a:solidFill>
-                <a:latin typeface="微软雅黑"/>
-                <a:ea typeface="微软雅黑"/>
-                <a:cs typeface="微软雅黑"/>
-              </a:rPr>
-              <a:t>- lessons/lesson-02/classroom-pack.md</a:t>
-            </a:r>
-          </a:p>
-          <a:p>
-            <a:r>
-              <a:rPr sz="1200" b="0">
-                <a:solidFill>
-                  <a:srgbClr val="24292F"/>
-                </a:solidFill>
-                <a:latin typeface="微软雅黑"/>
-                <a:ea typeface="微软雅黑"/>
-                <a:cs typeface="微软雅黑"/>
-              </a:rPr>
-              <a:t>[/Sources]</a:t>
-            </a:r>
           </a:p>
         </p:txBody>
       </p:sp>
@@ -957,6 +851,9 @@
             </a:r>
           </a:p>
           <a:p>
+            <a:r>
+              <a:t/>
+            </a:r>
             <a:endParaRPr sz="1200" b="0">
               <a:solidFill>
                 <a:srgbClr val="24292F"/>
@@ -965,9 +862,6 @@
               <a:ea typeface="微软雅黑"/>
               <a:cs typeface="微软雅黑"/>
             </a:endParaRPr>
-            <a:r>
-              <a:t>讲义位置：§八·案例 A</a:t>
-            </a:r>
           </a:p>
           <a:p>
             <a:r>
@@ -979,10 +873,13 @@
                 <a:ea typeface="微软雅黑"/>
                 <a:cs typeface="微软雅黑"/>
               </a:rPr>
-              <a:t>屏显核对：</a:t>
-            </a:r>
-          </a:p>
-          <a:p>
+              <a:t>讲述与校准：</a:t>
+            </a:r>
+          </a:p>
+          <a:p>
+            <a:r>
+              <a:t/>
+            </a:r>
             <a:endParaRPr sz="1200" b="0">
               <a:solidFill>
                 <a:srgbClr val="24292F"/>
@@ -991,9 +888,6 @@
               <a:ea typeface="微软雅黑"/>
               <a:cs typeface="微软雅黑"/>
             </a:endParaRPr>
-            <a:r>
-              <a:t>先停止进一步发送，保留可核对的记录；停止扩散；暂停后续发送与共享；评估范围；核对输入片段、敏感程度与接收环境；记录事实；保存工具、时间、材料范围与实际动作；按要求沟通；依机构或合作约定处理，并改用合规输入</a:t>
-            </a:r>
           </a:p>
           <a:p>
             <a:r>
@@ -1005,7 +899,7 @@
                 <a:ea typeface="微软雅黑"/>
                 <a:cs typeface="微软雅黑"/>
               </a:rPr>
-              <a:t>教师讲述：</a:t>
+              <a:t/>
             </a:r>
           </a:p>
           <a:p>
@@ -1018,10 +912,13 @@
                 <a:ea typeface="微软雅黑"/>
                 <a:cs typeface="微软雅黑"/>
               </a:rPr>
-              <a:t>延续 P04 的虚构情境，假设未获授权的原稿已经发送。先停止进一步发送、保留可核对记录，再按适用规则评估和沟通；本页不将所有未公开内容的讨论都视为事故。不要求学生公开本人经历。</a:t>
-            </a:r>
-          </a:p>
-          <a:p>
+              <a:t>学生动作：</a:t>
+            </a:r>
+          </a:p>
+          <a:p>
+            <a:r>
+              <a:t>依据本页方法检查本人项目；按需参考。</a:t>
+            </a:r>
             <a:endParaRPr sz="1200" b="0">
               <a:solidFill>
                 <a:srgbClr val="24292F"/>
@@ -1030,9 +927,6 @@
               <a:ea typeface="微软雅黑"/>
               <a:cs typeface="微软雅黑"/>
             </a:endParaRPr>
-            <a:r>
-              <a:t>学生动作：</a:t>
-            </a:r>
           </a:p>
           <a:p>
             <a:r>
@@ -1044,7 +938,7 @@
                 <a:ea typeface="微软雅黑"/>
                 <a:cs typeface="微软雅黑"/>
               </a:rPr>
-              <a:t>快答恢复路径的第一步</a:t>
+              <a:t/>
             </a:r>
           </a:p>
           <a:p>
@@ -1057,10 +951,13 @@
                 <a:ea typeface="微软雅黑"/>
                 <a:cs typeface="微软雅黑"/>
               </a:rPr>
-              <a:t>来源与边界：</a:t>
-            </a:r>
-          </a:p>
-          <a:p>
+              <a:t>课堂安排：按本稿下方 90 分钟教学路由安排；此页不另占独立时段。</a:t>
+            </a:r>
+          </a:p>
+          <a:p>
+            <a:r>
+              <a:t/>
+            </a:r>
             <a:endParaRPr sz="1200" b="0">
               <a:solidFill>
                 <a:srgbClr val="24292F"/>
@@ -1069,9 +966,6 @@
               <a:ea typeface="微软雅黑"/>
               <a:cs typeface="微软雅黑"/>
             </a:endParaRPr>
-            <a:r>
-              <a:t>/Users/bright/Projects/courses/graduate/lessons/lesson-02/handout.md</a:t>
-            </a:r>
           </a:p>
           <a:p>
             <a:r>
@@ -1096,10 +990,13 @@
                 <a:ea typeface="微软雅黑"/>
                 <a:cs typeface="微软雅黑"/>
               </a:rPr>
-              <a:t>- lessons/lesson-02/handout.md</a:t>
-            </a:r>
-          </a:p>
-          <a:p>
+              <a:t>本课 handout.md、judgment-task.md；../../course/judgment-path.md。</a:t>
+            </a:r>
+          </a:p>
+          <a:p>
+            <a:r>
+              <a:t>[/Sources]</a:t>
+            </a:r>
             <a:endParaRPr sz="1200" b="0">
               <a:solidFill>
                 <a:srgbClr val="24292F"/>
@@ -1108,35 +1005,6 @@
               <a:ea typeface="微软雅黑"/>
               <a:cs typeface="微软雅黑"/>
             </a:endParaRPr>
-            <a:r>
-              <a:t>- lessons/lesson-02/slides.md</a:t>
-            </a:r>
-          </a:p>
-          <a:p>
-            <a:r>
-              <a:rPr sz="1200" b="0">
-                <a:solidFill>
-                  <a:srgbClr val="24292F"/>
-                </a:solidFill>
-                <a:latin typeface="微软雅黑"/>
-                <a:ea typeface="微软雅黑"/>
-                <a:cs typeface="微软雅黑"/>
-              </a:rPr>
-              <a:t>- lessons/lesson-02/classroom-pack.md</a:t>
-            </a:r>
-          </a:p>
-          <a:p>
-            <a:r>
-              <a:rPr sz="1200" b="0">
-                <a:solidFill>
-                  <a:srgbClr val="24292F"/>
-                </a:solidFill>
-                <a:latin typeface="微软雅黑"/>
-                <a:ea typeface="微软雅黑"/>
-                <a:cs typeface="微软雅黑"/>
-              </a:rPr>
-              <a:t>[/Sources]</a:t>
-            </a:r>
           </a:p>
         </p:txBody>
       </p:sp>
@@ -1224,6 +1092,9 @@
             </a:r>
           </a:p>
           <a:p>
+            <a:r>
+              <a:t/>
+            </a:r>
             <a:endParaRPr sz="1200" b="0">
               <a:solidFill>
                 <a:srgbClr val="24292F"/>
@@ -1232,9 +1103,6 @@
               <a:ea typeface="微软雅黑"/>
               <a:cs typeface="微软雅黑"/>
             </a:endParaRPr>
-            <a:r>
-              <a:t>讲义位置：§八·案例 B</a:t>
-            </a:r>
           </a:p>
           <a:p>
             <a:r>
@@ -1246,10 +1114,13 @@
                 <a:ea typeface="微软雅黑"/>
                 <a:cs typeface="微软雅黑"/>
               </a:rPr>
-              <a:t>屏显核对：</a:t>
-            </a:r>
-          </a:p>
-          <a:p>
+              <a:t>讲述与校准：</a:t>
+            </a:r>
+          </a:p>
+          <a:p>
+            <a:r>
+              <a:t/>
+            </a:r>
             <a:endParaRPr sz="1200" b="0">
               <a:solidFill>
                 <a:srgbClr val="24292F"/>
@@ -1258,9 +1129,6 @@
               <a:ea typeface="微软雅黑"/>
               <a:cs typeface="微软雅黑"/>
             </a:endParaRPr>
-            <a:r>
-              <a:t>模拟数据可以测试方法，不能冒充经验事实</a:t>
-            </a:r>
           </a:p>
           <a:p>
             <a:r>
@@ -1272,7 +1140,7 @@
                 <a:ea typeface="微软雅黑"/>
                 <a:cs typeface="微软雅黑"/>
               </a:rPr>
-              <a:t>教师讲述：</a:t>
+              <a:t/>
             </a:r>
           </a:p>
           <a:p>
@@ -1285,10 +1153,13 @@
                 <a:ea typeface="微软雅黑"/>
                 <a:cs typeface="微软雅黑"/>
               </a:rPr>
-              <a:t>先明确转场：前面检查材料能否输入及其处理环境，现在把同一判断方法迁移到证据真实性。使用案例 B 的模拟数据和真实观测比较，区分材料身份、用途与能够支持的结论；这不是合作稿案例的下一操作步骤。</a:t>
-            </a:r>
-          </a:p>
-          <a:p>
+              <a:t>学生动作：</a:t>
+            </a:r>
+          </a:p>
+          <a:p>
+            <a:r>
+              <a:t>依据本页方法检查本人项目；按需参考。</a:t>
+            </a:r>
             <a:endParaRPr sz="1200" b="0">
               <a:solidFill>
                 <a:srgbClr val="24292F"/>
@@ -1297,9 +1168,6 @@
               <a:ea typeface="微软雅黑"/>
               <a:cs typeface="微软雅黑"/>
             </a:endParaRPr>
-            <a:r>
-              <a:t>学生动作：</a:t>
-            </a:r>
           </a:p>
           <a:p>
             <a:r>
@@ -1311,7 +1179,7 @@
                 <a:ea typeface="微软雅黑"/>
                 <a:cs typeface="微软雅黑"/>
               </a:rPr>
-              <a:t>判断一句结论是否越界</a:t>
+              <a:t/>
             </a:r>
           </a:p>
           <a:p>
@@ -1324,10 +1192,13 @@
                 <a:ea typeface="微软雅黑"/>
                 <a:cs typeface="微软雅黑"/>
               </a:rPr>
-              <a:t>来源与边界：</a:t>
-            </a:r>
-          </a:p>
-          <a:p>
+              <a:t>课堂安排：按本稿下方 90 分钟教学路由安排；此页不另占独立时段。</a:t>
+            </a:r>
+          </a:p>
+          <a:p>
+            <a:r>
+              <a:t/>
+            </a:r>
             <a:endParaRPr sz="1200" b="0">
               <a:solidFill>
                 <a:srgbClr val="24292F"/>
@@ -1336,9 +1207,6 @@
               <a:ea typeface="微软雅黑"/>
               <a:cs typeface="微软雅黑"/>
             </a:endParaRPr>
-            <a:r>
-              <a:t>/Users/bright/Projects/courses/graduate/lessons/lesson-02/handout.md</a:t>
-            </a:r>
           </a:p>
           <a:p>
             <a:r>
@@ -1363,10 +1231,13 @@
                 <a:ea typeface="微软雅黑"/>
                 <a:cs typeface="微软雅黑"/>
               </a:rPr>
-              <a:t>- lessons/lesson-02/handout.md</a:t>
-            </a:r>
-          </a:p>
-          <a:p>
+              <a:t>本课 handout.md、judgment-task.md；../../course/judgment-path.md。</a:t>
+            </a:r>
+          </a:p>
+          <a:p>
+            <a:r>
+              <a:t>[/Sources]</a:t>
+            </a:r>
             <a:endParaRPr sz="1200" b="0">
               <a:solidFill>
                 <a:srgbClr val="24292F"/>
@@ -1375,35 +1246,6 @@
               <a:ea typeface="微软雅黑"/>
               <a:cs typeface="微软雅黑"/>
             </a:endParaRPr>
-            <a:r>
-              <a:t>- lessons/lesson-02/slides.md</a:t>
-            </a:r>
-          </a:p>
-          <a:p>
-            <a:r>
-              <a:rPr sz="1200" b="0">
-                <a:solidFill>
-                  <a:srgbClr val="24292F"/>
-                </a:solidFill>
-                <a:latin typeface="微软雅黑"/>
-                <a:ea typeface="微软雅黑"/>
-                <a:cs typeface="微软雅黑"/>
-              </a:rPr>
-              <a:t>- lessons/lesson-02/classroom-pack.md</a:t>
-            </a:r>
-          </a:p>
-          <a:p>
-            <a:r>
-              <a:rPr sz="1200" b="0">
-                <a:solidFill>
-                  <a:srgbClr val="24292F"/>
-                </a:solidFill>
-                <a:latin typeface="微软雅黑"/>
-                <a:ea typeface="微软雅黑"/>
-                <a:cs typeface="微软雅黑"/>
-              </a:rPr>
-              <a:t>[/Sources]</a:t>
-            </a:r>
           </a:p>
         </p:txBody>
       </p:sp>
@@ -1491,6 +1333,9 @@
             </a:r>
           </a:p>
           <a:p>
+            <a:r>
+              <a:t/>
+            </a:r>
             <a:endParaRPr sz="1200" b="0">
               <a:solidFill>
                 <a:srgbClr val="24292F"/>
@@ -1510,10 +1355,13 @@
                 <a:ea typeface="微软雅黑"/>
                 <a:cs typeface="微软雅黑"/>
               </a:rPr>
-              <a:t>讲义位置：§四、§八·案例 C</a:t>
-            </a:r>
-          </a:p>
-          <a:p>
+              <a:t>讲述与校准：</a:t>
+            </a:r>
+          </a:p>
+          <a:p>
+            <a:r>
+              <a:t/>
+            </a:r>
             <a:endParaRPr sz="1200" b="0">
               <a:solidFill>
                 <a:srgbClr val="24292F"/>
@@ -1533,7 +1381,7 @@
                 <a:ea typeface="微软雅黑"/>
                 <a:cs typeface="微软雅黑"/>
               </a:rPr>
-              <a:t>屏显核对：</a:t>
+              <a:t/>
             </a:r>
           </a:p>
           <a:p>
@@ -1546,10 +1394,13 @@
                 <a:ea typeface="微软雅黑"/>
                 <a:cs typeface="微软雅黑"/>
               </a:rPr>
-              <a:t>课堂构造的失败情境：看到结果后更换主指标；只有一句“同意修改”；旧协议被覆盖 / 更换理由没有留下 / 只报告新指标的好结果；可核对的协议修订；保留；原主指标与原结果；说明；变更动机和适用范围；写回；新旧协议差异与批准记录；报告；区分原定分析与事后分析</a:t>
-            </a:r>
-          </a:p>
-          <a:p>
+              <a:t>学生动作：</a:t>
+            </a:r>
+          </a:p>
+          <a:p>
+            <a:r>
+              <a:t>依据本页方法检查本人项目；按需参考。</a:t>
+            </a:r>
             <a:endParaRPr sz="1200" b="0">
               <a:solidFill>
                 <a:srgbClr val="24292F"/>
@@ -1569,7 +1420,7 @@
                 <a:ea typeface="微软雅黑"/>
                 <a:cs typeface="微软雅黑"/>
               </a:rPr>
-              <a:t>教师讲述：</a:t>
+              <a:t/>
             </a:r>
           </a:p>
           <a:p>
@@ -1582,10 +1433,13 @@
                 <a:ea typeface="微软雅黑"/>
                 <a:cs typeface="微软雅黑"/>
               </a:rPr>
-              <a:t>指标变更必须变成版本化文件和 diff，而非口头点击。</a:t>
-            </a:r>
-          </a:p>
-          <a:p>
+              <a:t>课堂安排：按本稿下方 90 分钟教学路由安排；此页不另占独立时段。</a:t>
+            </a:r>
+          </a:p>
+          <a:p>
+            <a:r>
+              <a:t/>
+            </a:r>
             <a:endParaRPr sz="1200" b="0">
               <a:solidFill>
                 <a:srgbClr val="24292F"/>
@@ -1605,7 +1459,7 @@
                 <a:ea typeface="微软雅黑"/>
                 <a:cs typeface="微软雅黑"/>
               </a:rPr>
-              <a:t>学生动作：</a:t>
+              <a:t>[Sources]</a:t>
             </a:r>
           </a:p>
           <a:p>
@@ -1618,10 +1472,13 @@
                 <a:ea typeface="微软雅黑"/>
                 <a:cs typeface="微软雅黑"/>
               </a:rPr>
-              <a:t>指出审批流程还缺什么</a:t>
-            </a:r>
-          </a:p>
-          <a:p>
+              <a:t>本课 handout.md、judgment-task.md；../../course/judgment-path.md。</a:t>
+            </a:r>
+          </a:p>
+          <a:p>
+            <a:r>
+              <a:t>[/Sources]</a:t>
+            </a:r>
             <a:endParaRPr sz="1200" b="0">
               <a:solidFill>
                 <a:srgbClr val="24292F"/>
@@ -1630,101 +1487,6 @@
               <a:ea typeface="微软雅黑"/>
               <a:cs typeface="微软雅黑"/>
             </a:endParaRPr>
-          </a:p>
-          <a:p>
-            <a:r>
-              <a:rPr sz="1200" b="0">
-                <a:solidFill>
-                  <a:srgbClr val="24292F"/>
-                </a:solidFill>
-                <a:latin typeface="微软雅黑"/>
-                <a:ea typeface="微软雅黑"/>
-                <a:cs typeface="微软雅黑"/>
-              </a:rPr>
-              <a:t>来源与边界：</a:t>
-            </a:r>
-          </a:p>
-          <a:p>
-            <a:r>
-              <a:rPr sz="1200" b="0">
-                <a:solidFill>
-                  <a:srgbClr val="24292F"/>
-                </a:solidFill>
-                <a:latin typeface="微软雅黑"/>
-                <a:ea typeface="微软雅黑"/>
-                <a:cs typeface="微软雅黑"/>
-              </a:rPr>
-              <a:t>/Users/bright/Projects/courses/graduate/lessons/lesson-02/handout.md</a:t>
-            </a:r>
-          </a:p>
-          <a:p>
-            <a:endParaRPr sz="1200" b="0">
-              <a:solidFill>
-                <a:srgbClr val="24292F"/>
-              </a:solidFill>
-              <a:latin typeface="微软雅黑"/>
-              <a:ea typeface="微软雅黑"/>
-              <a:cs typeface="微软雅黑"/>
-            </a:endParaRPr>
-          </a:p>
-          <a:p>
-            <a:r>
-              <a:rPr sz="1200" b="0">
-                <a:solidFill>
-                  <a:srgbClr val="24292F"/>
-                </a:solidFill>
-                <a:latin typeface="微软雅黑"/>
-                <a:ea typeface="微软雅黑"/>
-                <a:cs typeface="微软雅黑"/>
-              </a:rPr>
-              <a:t>[Sources]</a:t>
-            </a:r>
-          </a:p>
-          <a:p>
-            <a:endParaRPr sz="1200" b="0">
-              <a:solidFill>
-                <a:srgbClr val="24292F"/>
-              </a:solidFill>
-              <a:latin typeface="微软雅黑"/>
-              <a:ea typeface="微软雅黑"/>
-              <a:cs typeface="微软雅黑"/>
-            </a:endParaRPr>
-          </a:p>
-          <a:p>
-            <a:r>
-              <a:rPr sz="1200" b="0">
-                <a:solidFill>
-                  <a:srgbClr val="24292F"/>
-                </a:solidFill>
-                <a:latin typeface="微软雅黑"/>
-                <a:ea typeface="微软雅黑"/>
-                <a:cs typeface="微软雅黑"/>
-              </a:rPr>
-              <a:t>- 本课 handout.md 与 slides.md</a:t>
-            </a:r>
-          </a:p>
-          <a:p>
-            <a:endParaRPr sz="1200" b="0">
-              <a:solidFill>
-                <a:srgbClr val="24292F"/>
-              </a:solidFill>
-              <a:latin typeface="微软雅黑"/>
-              <a:ea typeface="微软雅黑"/>
-              <a:cs typeface="微软雅黑"/>
-            </a:endParaRPr>
-          </a:p>
-          <a:p>
-            <a:r>
-              <a:rPr sz="1200" b="0">
-                <a:solidFill>
-                  <a:srgbClr val="24292F"/>
-                </a:solidFill>
-                <a:latin typeface="微软雅黑"/>
-                <a:ea typeface="微软雅黑"/>
-                <a:cs typeface="微软雅黑"/>
-              </a:rPr>
-              <a:t>[/Sources]</a:t>
-            </a:r>
           </a:p>
         </p:txBody>
       </p:sp>
@@ -1812,6 +1574,9 @@
             </a:r>
           </a:p>
           <a:p>
+            <a:r>
+              <a:t/>
+            </a:r>
             <a:endParaRPr sz="1200" b="0">
               <a:solidFill>
                 <a:srgbClr val="24292F"/>
@@ -1831,10 +1596,13 @@
                 <a:ea typeface="微软雅黑"/>
                 <a:cs typeface="微软雅黑"/>
               </a:rPr>
-              <a:t>讲义位置：§四、§五</a:t>
-            </a:r>
-          </a:p>
-          <a:p>
+              <a:t>讲述与校准：</a:t>
+            </a:r>
+          </a:p>
+          <a:p>
+            <a:r>
+              <a:t/>
+            </a:r>
             <a:endParaRPr sz="1200" b="0">
               <a:solidFill>
                 <a:srgbClr val="24292F"/>
@@ -1854,7 +1622,7 @@
                 <a:ea typeface="微软雅黑"/>
                 <a:cs typeface="微软雅黑"/>
               </a:rPr>
-              <a:t>屏显核对：</a:t>
+              <a:t/>
             </a:r>
           </a:p>
           <a:p>
@@ -1867,10 +1635,13 @@
                 <a:ea typeface="微软雅黑"/>
                 <a:cs typeface="微软雅黑"/>
               </a:rPr>
-              <a:t>研究协议；目标、指标、停止条件；任务权限；可读、可写、可执行；研究者声明边界；动作提议；边界检查；受限执行；实际 trace；满足条件；按获批范围行动；diff、日志 / 与外部状态；人工确认例外；超出当前边界；获批：更新边界 / 并重新检查；停止；未获批准；下一动作仍经检查</a:t>
-            </a:r>
-          </a:p>
-          <a:p>
+              <a:t>学生动作：</a:t>
+            </a:r>
+          </a:p>
+          <a:p>
+            <a:r>
+              <a:t>依据本页方法检查本人项目；按需参考。</a:t>
+            </a:r>
             <a:endParaRPr sz="1200" b="0">
               <a:solidFill>
                 <a:srgbClr val="24292F"/>
@@ -1890,7 +1661,7 @@
                 <a:ea typeface="微软雅黑"/>
                 <a:cs typeface="微软雅黑"/>
               </a:rPr>
-              <a:t>教师讲述：</a:t>
+              <a:t/>
             </a:r>
           </a:p>
           <a:p>
@@ -1903,10 +1674,13 @@
                 <a:ea typeface="微软雅黑"/>
                 <a:cs typeface="微软雅黑"/>
               </a:rPr>
-              <a:t>这一页是全课唯一定义位；Pi Agent 是课程主执行环境，OpenCode 等为备选。声明不自动成为强制限制，须由实际工具配置、权限扩展或隔离环境落实；Pi 默认没有逐次权限弹窗。</a:t>
-            </a:r>
-          </a:p>
-          <a:p>
+              <a:t>课堂安排：按本稿下方 90 分钟教学路由安排；此页不另占独立时段。</a:t>
+            </a:r>
+          </a:p>
+          <a:p>
+            <a:r>
+              <a:t/>
+            </a:r>
             <a:endParaRPr sz="1200" b="0">
               <a:solidFill>
                 <a:srgbClr val="24292F"/>
@@ -1926,7 +1700,7 @@
                 <a:ea typeface="微软雅黑"/>
                 <a:cs typeface="微软雅黑"/>
               </a:rPr>
-              <a:t>学生动作：</a:t>
+              <a:t>[Sources]</a:t>
             </a:r>
           </a:p>
           <a:p>
@@ -1939,10 +1713,13 @@
                 <a:ea typeface="微软雅黑"/>
                 <a:cs typeface="微软雅黑"/>
               </a:rPr>
-              <a:t>用一句话解释 harness</a:t>
-            </a:r>
-          </a:p>
-          <a:p>
+              <a:t>本课 handout.md、judgment-task.md；../../course/judgment-path.md。</a:t>
+            </a:r>
+          </a:p>
+          <a:p>
+            <a:r>
+              <a:t>[/Sources]</a:t>
+            </a:r>
             <a:endParaRPr sz="1200" b="0">
               <a:solidFill>
                 <a:srgbClr val="24292F"/>
@@ -1951,101 +1728,6 @@
               <a:ea typeface="微软雅黑"/>
               <a:cs typeface="微软雅黑"/>
             </a:endParaRPr>
-          </a:p>
-          <a:p>
-            <a:r>
-              <a:rPr sz="1200" b="0">
-                <a:solidFill>
-                  <a:srgbClr val="24292F"/>
-                </a:solidFill>
-                <a:latin typeface="微软雅黑"/>
-                <a:ea typeface="微软雅黑"/>
-                <a:cs typeface="微软雅黑"/>
-              </a:rPr>
-              <a:t>来源与边界：</a:t>
-            </a:r>
-          </a:p>
-          <a:p>
-            <a:r>
-              <a:rPr sz="1200" b="0">
-                <a:solidFill>
-                  <a:srgbClr val="24292F"/>
-                </a:solidFill>
-                <a:latin typeface="微软雅黑"/>
-                <a:ea typeface="微软雅黑"/>
-                <a:cs typeface="微软雅黑"/>
-              </a:rPr>
-              <a:t>/Users/bright/Projects/courses/graduate/lessons/lesson-02/handout.md</a:t>
-            </a:r>
-          </a:p>
-          <a:p>
-            <a:endParaRPr sz="1200" b="0">
-              <a:solidFill>
-                <a:srgbClr val="24292F"/>
-              </a:solidFill>
-              <a:latin typeface="微软雅黑"/>
-              <a:ea typeface="微软雅黑"/>
-              <a:cs typeface="微软雅黑"/>
-            </a:endParaRPr>
-          </a:p>
-          <a:p>
-            <a:r>
-              <a:rPr sz="1200" b="0">
-                <a:solidFill>
-                  <a:srgbClr val="24292F"/>
-                </a:solidFill>
-                <a:latin typeface="微软雅黑"/>
-                <a:ea typeface="微软雅黑"/>
-                <a:cs typeface="微软雅黑"/>
-              </a:rPr>
-              <a:t>[Sources]</a:t>
-            </a:r>
-          </a:p>
-          <a:p>
-            <a:endParaRPr sz="1200" b="0">
-              <a:solidFill>
-                <a:srgbClr val="24292F"/>
-              </a:solidFill>
-              <a:latin typeface="微软雅黑"/>
-              <a:ea typeface="微软雅黑"/>
-              <a:cs typeface="微软雅黑"/>
-            </a:endParaRPr>
-          </a:p>
-          <a:p>
-            <a:r>
-              <a:rPr sz="1200" b="0">
-                <a:solidFill>
-                  <a:srgbClr val="24292F"/>
-                </a:solidFill>
-                <a:latin typeface="微软雅黑"/>
-                <a:ea typeface="微软雅黑"/>
-                <a:cs typeface="微软雅黑"/>
-              </a:rPr>
-              <a:t>- 本课 handout.md 与 slides.md</a:t>
-            </a:r>
-          </a:p>
-          <a:p>
-            <a:endParaRPr sz="1200" b="0">
-              <a:solidFill>
-                <a:srgbClr val="24292F"/>
-              </a:solidFill>
-              <a:latin typeface="微软雅黑"/>
-              <a:ea typeface="微软雅黑"/>
-              <a:cs typeface="微软雅黑"/>
-            </a:endParaRPr>
-          </a:p>
-          <a:p>
-            <a:r>
-              <a:rPr sz="1200" b="0">
-                <a:solidFill>
-                  <a:srgbClr val="24292F"/>
-                </a:solidFill>
-                <a:latin typeface="微软雅黑"/>
-                <a:ea typeface="微软雅黑"/>
-                <a:cs typeface="微软雅黑"/>
-              </a:rPr>
-              <a:t>[/Sources]</a:t>
-            </a:r>
           </a:p>
         </p:txBody>
       </p:sp>
@@ -2133,6 +1815,9 @@
             </a:r>
           </a:p>
           <a:p>
+            <a:r>
+              <a:t/>
+            </a:r>
             <a:endParaRPr sz="1200" b="0">
               <a:solidFill>
                 <a:srgbClr val="24292F"/>
@@ -2152,10 +1837,13 @@
                 <a:ea typeface="微软雅黑"/>
                 <a:cs typeface="微软雅黑"/>
               </a:rPr>
-              <a:t>讲义位置：§四</a:t>
-            </a:r>
-          </a:p>
-          <a:p>
+              <a:t>讲述与校准：</a:t>
+            </a:r>
+          </a:p>
+          <a:p>
+            <a:r>
+              <a:t/>
+            </a:r>
             <a:endParaRPr sz="1200" b="0">
               <a:solidFill>
                 <a:srgbClr val="24292F"/>
@@ -2175,7 +1863,7 @@
                 <a:ea typeface="微软雅黑"/>
                 <a:cs typeface="微软雅黑"/>
               </a:rPr>
-              <a:t>屏显核对：</a:t>
+              <a:t/>
             </a:r>
           </a:p>
           <a:p>
@@ -2188,10 +1876,13 @@
                 <a:ea typeface="微软雅黑"/>
                 <a:cs typeface="微软雅黑"/>
               </a:rPr>
-              <a:t>默认拒绝；没有明确授权的动作 / 先停在检查点。；例如：联网、外发、额外写入；最小权限；为当前任务开放 / 刚好足够的范围。；具体到文件、段落与动作；任务或动作变化后，重新检查授权。</a:t>
-            </a:r>
-          </a:p>
-          <a:p>
+              <a:t>学生动作：</a:t>
+            </a:r>
+          </a:p>
+          <a:p>
+            <a:r>
+              <a:t>依据本页方法检查本人项目；按需参考。</a:t>
+            </a:r>
             <a:endParaRPr sz="1200" b="0">
               <a:solidFill>
                 <a:srgbClr val="24292F"/>
@@ -2211,7 +1902,7 @@
                 <a:ea typeface="微软雅黑"/>
                 <a:cs typeface="微软雅黑"/>
               </a:rPr>
-              <a:t>教师讲述：</a:t>
+              <a:t/>
             </a:r>
           </a:p>
           <a:p>
@@ -2224,10 +1915,13 @@
                 <a:ea typeface="微软雅黑"/>
                 <a:cs typeface="微软雅黑"/>
               </a:rPr>
-              <a:t>另外两项原则放到备注与讲义，不在首屏并列四张卡。</a:t>
-            </a:r>
-          </a:p>
-          <a:p>
+              <a:t>课堂安排：按本稿下方 90 分钟教学路由安排；此页不另占独立时段。</a:t>
+            </a:r>
+          </a:p>
+          <a:p>
+            <a:r>
+              <a:t/>
+            </a:r>
             <a:endParaRPr sz="1200" b="0">
               <a:solidFill>
                 <a:srgbClr val="24292F"/>
@@ -2247,7 +1941,7 @@
                 <a:ea typeface="微软雅黑"/>
                 <a:cs typeface="微软雅黑"/>
               </a:rPr>
-              <a:t>学生动作：</a:t>
+              <a:t>[Sources]</a:t>
             </a:r>
           </a:p>
           <a:p>
@@ -2260,10 +1954,13 @@
                 <a:ea typeface="微软雅黑"/>
                 <a:cs typeface="微软雅黑"/>
               </a:rPr>
-              <a:t>将一个过宽权限收窄</a:t>
-            </a:r>
-          </a:p>
-          <a:p>
+              <a:t>本课 handout.md、judgment-task.md；../../course/judgment-path.md。</a:t>
+            </a:r>
+          </a:p>
+          <a:p>
+            <a:r>
+              <a:t>[/Sources]</a:t>
+            </a:r>
             <a:endParaRPr sz="1200" b="0">
               <a:solidFill>
                 <a:srgbClr val="24292F"/>
@@ -2272,101 +1969,6 @@
               <a:ea typeface="微软雅黑"/>
               <a:cs typeface="微软雅黑"/>
             </a:endParaRPr>
-          </a:p>
-          <a:p>
-            <a:r>
-              <a:rPr sz="1200" b="0">
-                <a:solidFill>
-                  <a:srgbClr val="24292F"/>
-                </a:solidFill>
-                <a:latin typeface="微软雅黑"/>
-                <a:ea typeface="微软雅黑"/>
-                <a:cs typeface="微软雅黑"/>
-              </a:rPr>
-              <a:t>来源与边界：</a:t>
-            </a:r>
-          </a:p>
-          <a:p>
-            <a:r>
-              <a:rPr sz="1200" b="0">
-                <a:solidFill>
-                  <a:srgbClr val="24292F"/>
-                </a:solidFill>
-                <a:latin typeface="微软雅黑"/>
-                <a:ea typeface="微软雅黑"/>
-                <a:cs typeface="微软雅黑"/>
-              </a:rPr>
-              <a:t>/Users/bright/Projects/courses/graduate/lessons/lesson-02/handout.md</a:t>
-            </a:r>
-          </a:p>
-          <a:p>
-            <a:endParaRPr sz="1200" b="0">
-              <a:solidFill>
-                <a:srgbClr val="24292F"/>
-              </a:solidFill>
-              <a:latin typeface="微软雅黑"/>
-              <a:ea typeface="微软雅黑"/>
-              <a:cs typeface="微软雅黑"/>
-            </a:endParaRPr>
-          </a:p>
-          <a:p>
-            <a:r>
-              <a:rPr sz="1200" b="0">
-                <a:solidFill>
-                  <a:srgbClr val="24292F"/>
-                </a:solidFill>
-                <a:latin typeface="微软雅黑"/>
-                <a:ea typeface="微软雅黑"/>
-                <a:cs typeface="微软雅黑"/>
-              </a:rPr>
-              <a:t>[Sources]</a:t>
-            </a:r>
-          </a:p>
-          <a:p>
-            <a:endParaRPr sz="1200" b="0">
-              <a:solidFill>
-                <a:srgbClr val="24292F"/>
-              </a:solidFill>
-              <a:latin typeface="微软雅黑"/>
-              <a:ea typeface="微软雅黑"/>
-              <a:cs typeface="微软雅黑"/>
-            </a:endParaRPr>
-          </a:p>
-          <a:p>
-            <a:r>
-              <a:rPr sz="1200" b="0">
-                <a:solidFill>
-                  <a:srgbClr val="24292F"/>
-                </a:solidFill>
-                <a:latin typeface="微软雅黑"/>
-                <a:ea typeface="微软雅黑"/>
-                <a:cs typeface="微软雅黑"/>
-              </a:rPr>
-              <a:t>- 本课 handout.md 与 slides.md</a:t>
-            </a:r>
-          </a:p>
-          <a:p>
-            <a:endParaRPr sz="1200" b="0">
-              <a:solidFill>
-                <a:srgbClr val="24292F"/>
-              </a:solidFill>
-              <a:latin typeface="微软雅黑"/>
-              <a:ea typeface="微软雅黑"/>
-              <a:cs typeface="微软雅黑"/>
-            </a:endParaRPr>
-          </a:p>
-          <a:p>
-            <a:r>
-              <a:rPr sz="1200" b="0">
-                <a:solidFill>
-                  <a:srgbClr val="24292F"/>
-                </a:solidFill>
-                <a:latin typeface="微软雅黑"/>
-                <a:ea typeface="微软雅黑"/>
-                <a:cs typeface="微软雅黑"/>
-              </a:rPr>
-              <a:t>[/Sources]</a:t>
-            </a:r>
           </a:p>
         </p:txBody>
       </p:sp>
@@ -2454,6 +2056,9 @@
             </a:r>
           </a:p>
           <a:p>
+            <a:r>
+              <a:t/>
+            </a:r>
             <a:endParaRPr sz="1200" b="0">
               <a:solidFill>
                 <a:srgbClr val="24292F"/>
@@ -2462,9 +2067,6 @@
               <a:ea typeface="微软雅黑"/>
               <a:cs typeface="微软雅黑"/>
             </a:endParaRPr>
-            <a:r>
-              <a:t>讲义位置：§五</a:t>
-            </a:r>
           </a:p>
           <a:p>
             <a:r>
@@ -2476,10 +2078,13 @@
                 <a:ea typeface="微软雅黑"/>
                 <a:cs typeface="微软雅黑"/>
               </a:rPr>
-              <a:t>屏显核对：</a:t>
-            </a:r>
-          </a:p>
-          <a:p>
+              <a:t>讲述与校准：</a:t>
+            </a:r>
+          </a:p>
+          <a:p>
+            <a:r>
+              <a:t/>
+            </a:r>
             <a:endParaRPr sz="1200" b="0">
               <a:solidFill>
                 <a:srgbClr val="24292F"/>
@@ -2488,9 +2093,6 @@
               <a:ea typeface="微软雅黑"/>
               <a:cs typeface="微软雅黑"/>
             </a:endParaRPr>
-            <a:r>
-              <a:t>课堂构造案例：输入获准，处理环境条件已确认。对象或能力：合作稿的替代输入；只读范围：获准讨论的问题描述；可写范围：权限一行、风险卡、使用记录；是否允许执行：本次不运行命令、不联网；人工确认点：写回前确认文件、段落与范围；禁止事项：读取或外发原稿、改问题或指标。</a:t>
-            </a:r>
           </a:p>
           <a:p>
             <a:r>
@@ -2502,7 +2104,7 @@
                 <a:ea typeface="微软雅黑"/>
                 <a:cs typeface="微软雅黑"/>
               </a:rPr>
-              <a:t>教师讲述：</a:t>
+              <a:t/>
             </a:r>
           </a:p>
           <a:p>
@@ -2515,10 +2117,13 @@
                 <a:ea typeface="微软雅黑"/>
                 <a:cs typeface="微软雅黑"/>
               </a:rPr>
-              <a:t>这一行落实 P07 条件满足后的路径，课堂构造示例假设问题描述获准、处理环境符合要求，真实任务须先核实，不能靠填表自称获准。授权具体到这次输入和三件工件的写回范围。本页不运行命令、不联网，指不进行额外命令和网络操作；模型服务本身的内容传输、存储和训练规则仍须在运行前核查。</a:t>
-            </a:r>
-          </a:p>
-          <a:p>
+              <a:t>学生动作：</a:t>
+            </a:r>
+          </a:p>
+          <a:p>
+            <a:r>
+              <a:t>依据本页方法检查本人项目；按需参考。</a:t>
+            </a:r>
             <a:endParaRPr sz="1200" b="0">
               <a:solidFill>
                 <a:srgbClr val="24292F"/>
@@ -2527,9 +2132,6 @@
               <a:ea typeface="微软雅黑"/>
               <a:cs typeface="微软雅黑"/>
             </a:endParaRPr>
-            <a:r>
-              <a:t>学生动作：</a:t>
-            </a:r>
           </a:p>
           <a:p>
             <a:r>
@@ -2541,7 +2143,7 @@
                 <a:ea typeface="微软雅黑"/>
                 <a:cs typeface="微软雅黑"/>
               </a:rPr>
-              <a:t>选择自己的一个科研动作填写</a:t>
+              <a:t/>
             </a:r>
           </a:p>
           <a:p>
@@ -2554,10 +2156,13 @@
                 <a:ea typeface="微软雅黑"/>
                 <a:cs typeface="微软雅黑"/>
               </a:rPr>
-              <a:t>来源与边界：</a:t>
-            </a:r>
-          </a:p>
-          <a:p>
+              <a:t>课堂安排：按本稿下方 90 分钟教学路由安排；此页不另占独立时段。</a:t>
+            </a:r>
+          </a:p>
+          <a:p>
+            <a:r>
+              <a:t/>
+            </a:r>
             <a:endParaRPr sz="1200" b="0">
               <a:solidFill>
                 <a:srgbClr val="24292F"/>
@@ -2566,9 +2171,6 @@
               <a:ea typeface="微软雅黑"/>
               <a:cs typeface="微软雅黑"/>
             </a:endParaRPr>
-            <a:r>
-              <a:t>/Users/bright/Projects/courses/graduate/lessons/lesson-02/handout.md</a:t>
-            </a:r>
           </a:p>
           <a:p>
             <a:r>
@@ -2593,10 +2195,13 @@
                 <a:ea typeface="微软雅黑"/>
                 <a:cs typeface="微软雅黑"/>
               </a:rPr>
-              <a:t>- lessons/lesson-02/handout.md</a:t>
-            </a:r>
-          </a:p>
-          <a:p>
+              <a:t>本课 handout.md、judgment-task.md；../../course/judgment-path.md。</a:t>
+            </a:r>
+          </a:p>
+          <a:p>
+            <a:r>
+              <a:t>[/Sources]</a:t>
+            </a:r>
             <a:endParaRPr sz="1200" b="0">
               <a:solidFill>
                 <a:srgbClr val="24292F"/>
@@ -2605,35 +2210,6 @@
               <a:ea typeface="微软雅黑"/>
               <a:cs typeface="微软雅黑"/>
             </a:endParaRPr>
-            <a:r>
-              <a:t>- lessons/lesson-02/slides.md</a:t>
-            </a:r>
-          </a:p>
-          <a:p>
-            <a:r>
-              <a:rPr sz="1200" b="0">
-                <a:solidFill>
-                  <a:srgbClr val="24292F"/>
-                </a:solidFill>
-                <a:latin typeface="微软雅黑"/>
-                <a:ea typeface="微软雅黑"/>
-                <a:cs typeface="微软雅黑"/>
-              </a:rPr>
-              <a:t>- lessons/lesson-02/classroom-pack.md</a:t>
-            </a:r>
-          </a:p>
-          <a:p>
-            <a:r>
-              <a:rPr sz="1200" b="0">
-                <a:solidFill>
-                  <a:srgbClr val="24292F"/>
-                </a:solidFill>
-                <a:latin typeface="微软雅黑"/>
-                <a:ea typeface="微软雅黑"/>
-                <a:cs typeface="微软雅黑"/>
-              </a:rPr>
-              <a:t>[/Sources]</a:t>
-            </a:r>
           </a:p>
         </p:txBody>
       </p:sp>
@@ -2721,6 +2297,9 @@
             </a:r>
           </a:p>
           <a:p>
+            <a:r>
+              <a:t/>
+            </a:r>
             <a:endParaRPr sz="1200" b="0">
               <a:solidFill>
                 <a:srgbClr val="24292F"/>
@@ -2740,10 +2319,13 @@
                 <a:ea typeface="微软雅黑"/>
                 <a:cs typeface="微软雅黑"/>
               </a:rPr>
-              <a:t>讲义位置：§五</a:t>
-            </a:r>
-          </a:p>
-          <a:p>
+              <a:t>讲述与校准：</a:t>
+            </a:r>
+          </a:p>
+          <a:p>
+            <a:r>
+              <a:t/>
+            </a:r>
             <a:endParaRPr sz="1200" b="0">
               <a:solidFill>
                 <a:srgbClr val="24292F"/>
@@ -2763,7 +2345,7 @@
                 <a:ea typeface="微软雅黑"/>
                 <a:cs typeface="微软雅黑"/>
               </a:rPr>
-              <a:t>屏显核对：</a:t>
+              <a:t/>
             </a:r>
           </a:p>
           <a:p>
@@ -2776,10 +2358,13 @@
                 <a:ea typeface="微软雅黑"/>
                 <a:cs typeface="微软雅黑"/>
               </a:rPr>
-              <a:t>课堂构造配置；过宽授权；READ    整个用户目录；WRITE   任意文件；RUN     任意命令；NETWORK on；CONFIRM 完成后告知；任务授权；READ    指定的公开材料；WRITE   获批文件与段落；RUN     本次不执行命令；NETWORK off；CONFIRM 写回前确认范围；先找到过宽范围，再说出怎样收窄。</a:t>
-            </a:r>
-          </a:p>
-          <a:p>
+              <a:t>学生动作：</a:t>
+            </a:r>
+          </a:p>
+          <a:p>
+            <a:r>
+              <a:t>依据本页方法检查本人项目；按需参考。</a:t>
+            </a:r>
             <a:endParaRPr sz="1200" b="0">
               <a:solidFill>
                 <a:srgbClr val="24292F"/>
@@ -2799,7 +2384,7 @@
                 <a:ea typeface="微软雅黑"/>
                 <a:cs typeface="微软雅黑"/>
               </a:rPr>
-              <a:t>教师讲述：</a:t>
+              <a:t/>
             </a:r>
           </a:p>
           <a:p>
@@ -2812,10 +2397,13 @@
                 <a:ea typeface="微软雅黑"/>
                 <a:cs typeface="微软雅黑"/>
               </a:rPr>
-              <a:t>把环境差异翻译为路径、命令、网络和确认点。</a:t>
-            </a:r>
-          </a:p>
-          <a:p>
+              <a:t>课堂安排：按本稿下方 90 分钟教学路由安排；此页不另占独立时段。</a:t>
+            </a:r>
+          </a:p>
+          <a:p>
+            <a:r>
+              <a:t/>
+            </a:r>
             <a:endParaRPr sz="1200" b="0">
               <a:solidFill>
                 <a:srgbClr val="24292F"/>
@@ -2835,7 +2423,7 @@
                 <a:ea typeface="微软雅黑"/>
                 <a:cs typeface="微软雅黑"/>
               </a:rPr>
-              <a:t>学生动作：</a:t>
+              <a:t>[Sources]</a:t>
             </a:r>
           </a:p>
           <a:p>
@@ -2848,10 +2436,13 @@
                 <a:ea typeface="微软雅黑"/>
                 <a:cs typeface="微软雅黑"/>
               </a:rPr>
-              <a:t>快答过宽配置的第一处风险及收窄方式</a:t>
-            </a:r>
-          </a:p>
-          <a:p>
+              <a:t>本课 handout.md、judgment-task.md；../../course/judgment-path.md。</a:t>
+            </a:r>
+          </a:p>
+          <a:p>
+            <a:r>
+              <a:t>[/Sources]</a:t>
+            </a:r>
             <a:endParaRPr sz="1200" b="0">
               <a:solidFill>
                 <a:srgbClr val="24292F"/>
@@ -2860,101 +2451,6 @@
               <a:ea typeface="微软雅黑"/>
               <a:cs typeface="微软雅黑"/>
             </a:endParaRPr>
-          </a:p>
-          <a:p>
-            <a:r>
-              <a:rPr sz="1200" b="0">
-                <a:solidFill>
-                  <a:srgbClr val="24292F"/>
-                </a:solidFill>
-                <a:latin typeface="微软雅黑"/>
-                <a:ea typeface="微软雅黑"/>
-                <a:cs typeface="微软雅黑"/>
-              </a:rPr>
-              <a:t>来源与边界：</a:t>
-            </a:r>
-          </a:p>
-          <a:p>
-            <a:r>
-              <a:rPr sz="1200" b="0">
-                <a:solidFill>
-                  <a:srgbClr val="24292F"/>
-                </a:solidFill>
-                <a:latin typeface="微软雅黑"/>
-                <a:ea typeface="微软雅黑"/>
-                <a:cs typeface="微软雅黑"/>
-              </a:rPr>
-              <a:t>/Users/bright/Projects/courses/graduate/lessons/lesson-02/handout.md</a:t>
-            </a:r>
-          </a:p>
-          <a:p>
-            <a:endParaRPr sz="1200" b="0">
-              <a:solidFill>
-                <a:srgbClr val="24292F"/>
-              </a:solidFill>
-              <a:latin typeface="微软雅黑"/>
-              <a:ea typeface="微软雅黑"/>
-              <a:cs typeface="微软雅黑"/>
-            </a:endParaRPr>
-          </a:p>
-          <a:p>
-            <a:r>
-              <a:rPr sz="1200" b="0">
-                <a:solidFill>
-                  <a:srgbClr val="24292F"/>
-                </a:solidFill>
-                <a:latin typeface="微软雅黑"/>
-                <a:ea typeface="微软雅黑"/>
-                <a:cs typeface="微软雅黑"/>
-              </a:rPr>
-              <a:t>[Sources]</a:t>
-            </a:r>
-          </a:p>
-          <a:p>
-            <a:endParaRPr sz="1200" b="0">
-              <a:solidFill>
-                <a:srgbClr val="24292F"/>
-              </a:solidFill>
-              <a:latin typeface="微软雅黑"/>
-              <a:ea typeface="微软雅黑"/>
-              <a:cs typeface="微软雅黑"/>
-            </a:endParaRPr>
-          </a:p>
-          <a:p>
-            <a:r>
-              <a:rPr sz="1200" b="0">
-                <a:solidFill>
-                  <a:srgbClr val="24292F"/>
-                </a:solidFill>
-                <a:latin typeface="微软雅黑"/>
-                <a:ea typeface="微软雅黑"/>
-                <a:cs typeface="微软雅黑"/>
-              </a:rPr>
-              <a:t>- 本课 handout.md 与 slides.md</a:t>
-            </a:r>
-          </a:p>
-          <a:p>
-            <a:endParaRPr sz="1200" b="0">
-              <a:solidFill>
-                <a:srgbClr val="24292F"/>
-              </a:solidFill>
-              <a:latin typeface="微软雅黑"/>
-              <a:ea typeface="微软雅黑"/>
-              <a:cs typeface="微软雅黑"/>
-            </a:endParaRPr>
-          </a:p>
-          <a:p>
-            <a:r>
-              <a:rPr sz="1200" b="0">
-                <a:solidFill>
-                  <a:srgbClr val="24292F"/>
-                </a:solidFill>
-                <a:latin typeface="微软雅黑"/>
-                <a:ea typeface="微软雅黑"/>
-                <a:cs typeface="微软雅黑"/>
-              </a:rPr>
-              <a:t>[/Sources]</a:t>
-            </a:r>
           </a:p>
         </p:txBody>
       </p:sp>
@@ -3042,6 +2538,9 @@
             </a:r>
           </a:p>
           <a:p>
+            <a:r>
+              <a:t/>
+            </a:r>
             <a:endParaRPr sz="1200" b="0">
               <a:solidFill>
                 <a:srgbClr val="24292F"/>
@@ -3061,10 +2560,13 @@
                 <a:ea typeface="微软雅黑"/>
                 <a:cs typeface="微软雅黑"/>
               </a:rPr>
-              <a:t>讲义位置：§六</a:t>
-            </a:r>
-          </a:p>
-          <a:p>
+              <a:t>讲述与校准：</a:t>
+            </a:r>
+          </a:p>
+          <a:p>
+            <a:r>
+              <a:t/>
+            </a:r>
             <a:endParaRPr sz="1200" b="0">
               <a:solidFill>
                 <a:srgbClr val="24292F"/>
@@ -3084,7 +2586,7 @@
                 <a:ea typeface="微软雅黑"/>
                 <a:cs typeface="微软雅黑"/>
               </a:rPr>
-              <a:t>屏显核对：</a:t>
+              <a:t/>
             </a:r>
           </a:p>
           <a:p>
@@ -3097,10 +2599,13 @@
                 <a:ea typeface="微软雅黑"/>
                 <a:cs typeface="微软雅黑"/>
               </a:rPr>
-              <a:t>draft；review；approved；stable；草稿与待查缺口；已有依据 / 进入复核；关键决策获批 / 边界与理由已记录；至少两项独立证据 / 边界可追溯；发现冲突或条件变化；回到适当状态；状态可以回退</a:t>
-            </a:r>
-          </a:p>
-          <a:p>
+              <a:t>学生动作：</a:t>
+            </a:r>
+          </a:p>
+          <a:p>
+            <a:r>
+              <a:t>依据本页方法检查本人项目；按需参考。</a:t>
+            </a:r>
             <a:endParaRPr sz="1200" b="0">
               <a:solidFill>
                 <a:srgbClr val="24292F"/>
@@ -3120,7 +2625,7 @@
                 <a:ea typeface="微软雅黑"/>
                 <a:cs typeface="微软雅黑"/>
               </a:rPr>
-              <a:t>教师讲述：</a:t>
+              <a:t/>
             </a:r>
           </a:p>
           <a:p>
@@ -3133,10 +2638,13 @@
                 <a:ea typeface="微软雅黑"/>
                 <a:cs typeface="微软雅黑"/>
               </a:rPr>
-              <a:t>课堂不要求学生再填第四张表；只建立状态语义。</a:t>
-            </a:r>
-          </a:p>
-          <a:p>
+              <a:t>课堂安排：按本稿下方 90 分钟教学路由安排；此页不另占独立时段。</a:t>
+            </a:r>
+          </a:p>
+          <a:p>
+            <a:r>
+              <a:t/>
+            </a:r>
             <a:endParaRPr sz="1200" b="0">
               <a:solidFill>
                 <a:srgbClr val="24292F"/>
@@ -3156,7 +2664,7 @@
                 <a:ea typeface="微软雅黑"/>
                 <a:cs typeface="微软雅黑"/>
               </a:rPr>
-              <a:t>学生动作：</a:t>
+              <a:t>[Sources]</a:t>
             </a:r>
           </a:p>
           <a:p>
@@ -3169,10 +2677,13 @@
                 <a:ea typeface="微软雅黑"/>
                 <a:cs typeface="微软雅黑"/>
               </a:rPr>
-              <a:t>判断“写完了”是否足以进入 stable</a:t>
-            </a:r>
-          </a:p>
-          <a:p>
+              <a:t>本课 handout.md、judgment-task.md；../../course/judgment-path.md。</a:t>
+            </a:r>
+          </a:p>
+          <a:p>
+            <a:r>
+              <a:t>[/Sources]</a:t>
+            </a:r>
             <a:endParaRPr sz="1200" b="0">
               <a:solidFill>
                 <a:srgbClr val="24292F"/>
@@ -3181,101 +2692,6 @@
               <a:ea typeface="微软雅黑"/>
               <a:cs typeface="微软雅黑"/>
             </a:endParaRPr>
-          </a:p>
-          <a:p>
-            <a:r>
-              <a:rPr sz="1200" b="0">
-                <a:solidFill>
-                  <a:srgbClr val="24292F"/>
-                </a:solidFill>
-                <a:latin typeface="微软雅黑"/>
-                <a:ea typeface="微软雅黑"/>
-                <a:cs typeface="微软雅黑"/>
-              </a:rPr>
-              <a:t>来源与边界：</a:t>
-            </a:r>
-          </a:p>
-          <a:p>
-            <a:r>
-              <a:rPr sz="1200" b="0">
-                <a:solidFill>
-                  <a:srgbClr val="24292F"/>
-                </a:solidFill>
-                <a:latin typeface="微软雅黑"/>
-                <a:ea typeface="微软雅黑"/>
-                <a:cs typeface="微软雅黑"/>
-              </a:rPr>
-              <a:t>/Users/bright/Projects/courses/graduate/lessons/lesson-02/handout.md</a:t>
-            </a:r>
-          </a:p>
-          <a:p>
-            <a:endParaRPr sz="1200" b="0">
-              <a:solidFill>
-                <a:srgbClr val="24292F"/>
-              </a:solidFill>
-              <a:latin typeface="微软雅黑"/>
-              <a:ea typeface="微软雅黑"/>
-              <a:cs typeface="微软雅黑"/>
-            </a:endParaRPr>
-          </a:p>
-          <a:p>
-            <a:r>
-              <a:rPr sz="1200" b="0">
-                <a:solidFill>
-                  <a:srgbClr val="24292F"/>
-                </a:solidFill>
-                <a:latin typeface="微软雅黑"/>
-                <a:ea typeface="微软雅黑"/>
-                <a:cs typeface="微软雅黑"/>
-              </a:rPr>
-              <a:t>[Sources]</a:t>
-            </a:r>
-          </a:p>
-          <a:p>
-            <a:endParaRPr sz="1200" b="0">
-              <a:solidFill>
-                <a:srgbClr val="24292F"/>
-              </a:solidFill>
-              <a:latin typeface="微软雅黑"/>
-              <a:ea typeface="微软雅黑"/>
-              <a:cs typeface="微软雅黑"/>
-            </a:endParaRPr>
-          </a:p>
-          <a:p>
-            <a:r>
-              <a:rPr sz="1200" b="0">
-                <a:solidFill>
-                  <a:srgbClr val="24292F"/>
-                </a:solidFill>
-                <a:latin typeface="微软雅黑"/>
-                <a:ea typeface="微软雅黑"/>
-                <a:cs typeface="微软雅黑"/>
-              </a:rPr>
-              <a:t>- 本课 handout.md 与 slides.md</a:t>
-            </a:r>
-          </a:p>
-          <a:p>
-            <a:endParaRPr sz="1200" b="0">
-              <a:solidFill>
-                <a:srgbClr val="24292F"/>
-              </a:solidFill>
-              <a:latin typeface="微软雅黑"/>
-              <a:ea typeface="微软雅黑"/>
-              <a:cs typeface="微软雅黑"/>
-            </a:endParaRPr>
-          </a:p>
-          <a:p>
-            <a:r>
-              <a:rPr sz="1200" b="0">
-                <a:solidFill>
-                  <a:srgbClr val="24292F"/>
-                </a:solidFill>
-                <a:latin typeface="微软雅黑"/>
-                <a:ea typeface="微软雅黑"/>
-                <a:cs typeface="微软雅黑"/>
-              </a:rPr>
-              <a:t>[/Sources]</a:t>
-            </a:r>
           </a:p>
         </p:txBody>
       </p:sp>
@@ -3363,6 +2779,9 @@
             </a:r>
           </a:p>
           <a:p>
+            <a:r>
+              <a:t/>
+            </a:r>
             <a:endParaRPr sz="1200" b="0">
               <a:solidFill>
                 <a:srgbClr val="24292F"/>
@@ -3382,10 +2801,13 @@
                 <a:ea typeface="微软雅黑"/>
                 <a:cs typeface="微软雅黑"/>
               </a:rPr>
-              <a:t>讲义位置：§六</a:t>
-            </a:r>
-          </a:p>
-          <a:p>
+              <a:t>讲述与校准：</a:t>
+            </a:r>
+          </a:p>
+          <a:p>
+            <a:r>
+              <a:t/>
+            </a:r>
             <a:endParaRPr sz="1200" b="0">
               <a:solidFill>
                 <a:srgbClr val="24292F"/>
@@ -3405,7 +2827,7 @@
                 <a:ea typeface="微软雅黑"/>
                 <a:cs typeface="微软雅黑"/>
               </a:rPr>
-              <a:t>屏显核对：</a:t>
+              <a:t/>
             </a:r>
           </a:p>
           <a:p>
@@ -3418,10 +2840,13 @@
                 <a:ea typeface="微软雅黑"/>
                 <a:cs typeface="微软雅黑"/>
               </a:rPr>
-              <a:t>一个工件如何改变状态：必须记录依据</a:t>
-            </a:r>
-          </a:p>
-          <a:p>
+              <a:t>学生动作：</a:t>
+            </a:r>
+          </a:p>
+          <a:p>
+            <a:r>
+              <a:t>依据本页方法检查本人项目；按需参考。</a:t>
+            </a:r>
             <a:endParaRPr sz="1200" b="0">
               <a:solidFill>
                 <a:srgbClr val="24292F"/>
@@ -3441,7 +2866,7 @@
                 <a:ea typeface="微软雅黑"/>
                 <a:cs typeface="微软雅黑"/>
               </a:rPr>
-              <a:t>教师讲述：</a:t>
+              <a:t/>
             </a:r>
           </a:p>
           <a:p>
@@ -3454,10 +2879,13 @@
                 <a:ea typeface="微软雅黑"/>
                 <a:cs typeface="微软雅黑"/>
               </a:rPr>
-              <a:t>同一 evidence-map.md 贯穿四状态，说明新增证据和下游用途。</a:t>
-            </a:r>
-          </a:p>
-          <a:p>
+              <a:t>课堂安排：按本稿下方 90 分钟教学路由安排；此页不另占独立时段。</a:t>
+            </a:r>
+          </a:p>
+          <a:p>
+            <a:r>
+              <a:t/>
+            </a:r>
             <a:endParaRPr sz="1200" b="0">
               <a:solidFill>
                 <a:srgbClr val="24292F"/>
@@ -3477,7 +2905,7 @@
                 <a:ea typeface="微软雅黑"/>
                 <a:cs typeface="微软雅黑"/>
               </a:rPr>
-              <a:t>学生动作：</a:t>
+              <a:t>[Sources]</a:t>
             </a:r>
           </a:p>
           <a:p>
@@ -3490,10 +2918,13 @@
                 <a:ea typeface="微软雅黑"/>
                 <a:cs typeface="微软雅黑"/>
               </a:rPr>
-              <a:t>指出哪次迁移最需要人工确认</a:t>
-            </a:r>
-          </a:p>
-          <a:p>
+              <a:t>本课 handout.md、judgment-task.md；../../course/judgment-path.md。</a:t>
+            </a:r>
+          </a:p>
+          <a:p>
+            <a:r>
+              <a:t>[/Sources]</a:t>
+            </a:r>
             <a:endParaRPr sz="1200" b="0">
               <a:solidFill>
                 <a:srgbClr val="24292F"/>
@@ -3502,101 +2933,6 @@
               <a:ea typeface="微软雅黑"/>
               <a:cs typeface="微软雅黑"/>
             </a:endParaRPr>
-          </a:p>
-          <a:p>
-            <a:r>
-              <a:rPr sz="1200" b="0">
-                <a:solidFill>
-                  <a:srgbClr val="24292F"/>
-                </a:solidFill>
-                <a:latin typeface="微软雅黑"/>
-                <a:ea typeface="微软雅黑"/>
-                <a:cs typeface="微软雅黑"/>
-              </a:rPr>
-              <a:t>来源与边界：</a:t>
-            </a:r>
-          </a:p>
-          <a:p>
-            <a:r>
-              <a:rPr sz="1200" b="0">
-                <a:solidFill>
-                  <a:srgbClr val="24292F"/>
-                </a:solidFill>
-                <a:latin typeface="微软雅黑"/>
-                <a:ea typeface="微软雅黑"/>
-                <a:cs typeface="微软雅黑"/>
-              </a:rPr>
-              <a:t>/Users/bright/Projects/courses/graduate/lessons/lesson-02/handout.md</a:t>
-            </a:r>
-          </a:p>
-          <a:p>
-            <a:endParaRPr sz="1200" b="0">
-              <a:solidFill>
-                <a:srgbClr val="24292F"/>
-              </a:solidFill>
-              <a:latin typeface="微软雅黑"/>
-              <a:ea typeface="微软雅黑"/>
-              <a:cs typeface="微软雅黑"/>
-            </a:endParaRPr>
-          </a:p>
-          <a:p>
-            <a:r>
-              <a:rPr sz="1200" b="0">
-                <a:solidFill>
-                  <a:srgbClr val="24292F"/>
-                </a:solidFill>
-                <a:latin typeface="微软雅黑"/>
-                <a:ea typeface="微软雅黑"/>
-                <a:cs typeface="微软雅黑"/>
-              </a:rPr>
-              <a:t>[Sources]</a:t>
-            </a:r>
-          </a:p>
-          <a:p>
-            <a:endParaRPr sz="1200" b="0">
-              <a:solidFill>
-                <a:srgbClr val="24292F"/>
-              </a:solidFill>
-              <a:latin typeface="微软雅黑"/>
-              <a:ea typeface="微软雅黑"/>
-              <a:cs typeface="微软雅黑"/>
-            </a:endParaRPr>
-          </a:p>
-          <a:p>
-            <a:r>
-              <a:rPr sz="1200" b="0">
-                <a:solidFill>
-                  <a:srgbClr val="24292F"/>
-                </a:solidFill>
-                <a:latin typeface="微软雅黑"/>
-                <a:ea typeface="微软雅黑"/>
-                <a:cs typeface="微软雅黑"/>
-              </a:rPr>
-              <a:t>- 本课 handout.md 与 slides.md</a:t>
-            </a:r>
-          </a:p>
-          <a:p>
-            <a:endParaRPr sz="1200" b="0">
-              <a:solidFill>
-                <a:srgbClr val="24292F"/>
-              </a:solidFill>
-              <a:latin typeface="微软雅黑"/>
-              <a:ea typeface="微软雅黑"/>
-              <a:cs typeface="微软雅黑"/>
-            </a:endParaRPr>
-          </a:p>
-          <a:p>
-            <a:r>
-              <a:rPr sz="1200" b="0">
-                <a:solidFill>
-                  <a:srgbClr val="24292F"/>
-                </a:solidFill>
-                <a:latin typeface="微软雅黑"/>
-                <a:ea typeface="微软雅黑"/>
-                <a:cs typeface="微软雅黑"/>
-              </a:rPr>
-              <a:t>[/Sources]</a:t>
-            </a:r>
           </a:p>
         </p:txBody>
       </p:sp>
@@ -3672,111 +3008,73 @@
           <a:lstStyle/>
           <a:p>
             <a:r>
-              <a:rPr lang="zh-CN"/>
               <a:t>页面：P02 第 1 讲回顾：知识与产物</a:t>
             </a:r>
           </a:p>
           <a:p>
-            <a:endParaRPr lang="zh-CN"/>
-          </a:p>
-          <a:p>
-            <a:r>
-              <a:rPr lang="zh-CN"/>
-              <a:t>屏显核对：</a:t>
-            </a:r>
-          </a:p>
-          <a:p>
-            <a:r>
-              <a:rPr lang="zh-CN"/>
-              <a:t>把 AI 建议变成可检查的项目修改；知识点；核验输出与结论成立条件；由研究者决定采纳、修改或拒绝；用八阶段定位动作与下一步；核心产物；一处人工认可的问题修改；与修改对应的 diff；一条含理由与核验的使用记录；当前不确定性及其阶段位置；打开第 1 讲修改与日志样例</a:t>
-            </a:r>
-          </a:p>
-          <a:p>
-            <a:endParaRPr lang="zh-CN"/>
-          </a:p>
-          <a:p>
-            <a:r>
-              <a:rPr lang="zh-CN"/>
-              <a:t>教师讲述：</a:t>
-            </a:r>
-          </a:p>
-          <a:p>
-            <a:r>
-              <a:rPr lang="zh-CN"/>
-              <a:t>上节课我们用阅读卡案例，把“阅读卡能消除摘要遗漏”改成了有对象、有对照、等待验证的问题。Agent 提出建议，由研究者决定怎样修改；实际 diff、使用记录和阶段位置共同留下检查依据。请对照自己的四项产物；需要时打开材料包看课堂构造的预期 diff 与日志空表。样例不代表本人已执行，也不代表效果已经成立。接下来检查这些记录中的材料与权限边界。</a:t>
-            </a:r>
-          </a:p>
-          <a:p>
-            <a:endParaRPr lang="zh-CN"/>
-          </a:p>
-          <a:p>
-            <a:r>
-              <a:rPr lang="zh-CN"/>
+            <a:r>
+              <a:t/>
+            </a:r>
+            <a:endParaRPr/>
+          </a:p>
+          <a:p>
+            <a:r>
+              <a:t>讲述与校准：</a:t>
+            </a:r>
+          </a:p>
+          <a:p>
+            <a:r>
+              <a:t/>
+            </a:r>
+          </a:p>
+          <a:p>
+            <a:r>
+              <a:t/>
+            </a:r>
+            <a:endParaRPr/>
+          </a:p>
+          <a:p>
+            <a:r>
               <a:t>学生动作：</a:t>
             </a:r>
           </a:p>
           <a:p>
             <a:r>
-              <a:rPr lang="zh-CN"/>
-              <a:t>对照自己的项目指出一项已有产物；需要时打开材料包</a:t>
-            </a:r>
-          </a:p>
-          <a:p>
-            <a:endParaRPr lang="zh-CN"/>
-          </a:p>
-          <a:p>
-            <a:r>
-              <a:rPr lang="zh-CN"/>
-              <a:t>讲义位置：导读；第 1 课课堂材料包</a:t>
-            </a:r>
-          </a:p>
-          <a:p>
-            <a:endParaRPr lang="zh-CN"/>
-          </a:p>
-          <a:p>
-            <a:r>
-              <a:rPr lang="zh-CN"/>
-              <a:t>来源与边界：</a:t>
-            </a:r>
-          </a:p>
-          <a:p>
-            <a:r>
-              <a:rPr lang="zh-CN"/>
-              <a:t>第 1 课 slides.md P33–P35 与 classroom-pack.md；https://jinyh.github.io/ai4research/lessons/lesson-01/classroom-pack/。网页样例为课堂构造的预期 diff 与日志空表，不冒充实际执行记录。</a:t>
-            </a:r>
-          </a:p>
-          <a:p>
-            <a:endParaRPr lang="zh-CN"/>
-          </a:p>
-          <a:p>
-            <a:r>
-              <a:rPr lang="zh-CN"/>
+              <a:t>依据本页方法检查本人项目；按需参考。</a:t>
+            </a:r>
+          </a:p>
+          <a:p>
+            <a:r>
+              <a:t/>
+            </a:r>
+            <a:endParaRPr/>
+          </a:p>
+          <a:p>
+            <a:r>
+              <a:t>课堂安排：按本稿下方 90 分钟教学路由安排；此页不另占独立时段。</a:t>
+            </a:r>
+          </a:p>
+          <a:p>
+            <a:r>
+              <a:t/>
+            </a:r>
+          </a:p>
+          <a:p>
+            <a:r>
               <a:t>[Sources]</a:t>
             </a:r>
-          </a:p>
-          <a:p>
-            <a:r>
-              <a:rPr lang="zh-CN"/>
-              <a:t>- lessons/lesson-01/slides.md P33–P35</a:t>
-            </a:r>
-          </a:p>
-          <a:p>
-            <a:r>
-              <a:rPr lang="zh-CN"/>
-              <a:t>- lessons/lesson-01/classroom-pack.md</a:t>
-            </a:r>
-          </a:p>
-          <a:p>
-            <a:r>
-              <a:rPr lang="zh-CN"/>
-              <a:t>- lessons/lesson-02/slides.md 与 teaching-plan.md</a:t>
-            </a:r>
-          </a:p>
-          <a:p>
-            <a:r>
-              <a:rPr lang="zh-CN"/>
+            <a:endParaRPr/>
+          </a:p>
+          <a:p>
+            <a:r>
+              <a:t>本课 handout.md、judgment-task.md；../../course/judgment-path.md。</a:t>
+            </a:r>
+          </a:p>
+          <a:p>
+            <a:r>
               <a:t>[/Sources]</a:t>
             </a:r>
+            <a:endParaRPr/>
           </a:p>
         </p:txBody>
       </p:sp>
@@ -3864,6 +3162,9 @@
             </a:r>
           </a:p>
           <a:p>
+            <a:r>
+              <a:t/>
+            </a:r>
             <a:endParaRPr sz="1200" b="0">
               <a:solidFill>
                 <a:srgbClr val="24292F"/>
@@ -3872,9 +3173,6 @@
               <a:ea typeface="微软雅黑"/>
               <a:cs typeface="微软雅黑"/>
             </a:endParaRPr>
-            <a:r>
-              <a:t>讲义位置：§七</a:t>
-            </a:r>
           </a:p>
           <a:p>
             <a:r>
@@ -3886,10 +3184,13 @@
                 <a:ea typeface="微软雅黑"/>
                 <a:cs typeface="微软雅黑"/>
               </a:rPr>
-              <a:t>屏显核对：</a:t>
-            </a:r>
-          </a:p>
-          <a:p>
+              <a:t>讲述与校准：</a:t>
+            </a:r>
+          </a:p>
+          <a:p>
+            <a:r>
+              <a:t/>
+            </a:r>
             <a:endParaRPr sz="1200" b="0">
               <a:solidFill>
                 <a:srgbClr val="24292F"/>
@@ -3898,9 +3199,6 @@
               <a:ea typeface="微软雅黑"/>
               <a:cs typeface="微软雅黑"/>
             </a:endParaRPr>
-            <a:r>
-              <a:t>只写“已人工核验”没有信息；必须写核验对象和方法。</a:t>
-            </a:r>
           </a:p>
           <a:p>
             <a:r>
@@ -3912,7 +3210,7 @@
                 <a:ea typeface="微软雅黑"/>
                 <a:cs typeface="微软雅黑"/>
               </a:rPr>
-              <a:t>教师讲述：</a:t>
+              <a:t/>
             </a:r>
           </a:p>
           <a:p>
@@ -3925,10 +3223,13 @@
                 <a:ea typeface="微软雅黑"/>
                 <a:cs typeface="微软雅黑"/>
               </a:rPr>
-              <a:t>保留候选检索词这条具体日志，示例中的人工抽象问题已经按 P07 核查输入授权与处理环境。生成检索词是 AI 辅助研究的一个可记录动作；讨论原创问题或机制假设也可按同样字段记录实际输入、输出用途、人的决定与核验方法。未调用模型时记录未执行与实际人工检查，不填假想结果。</a:t>
-            </a:r>
-          </a:p>
-          <a:p>
+              <a:t>学生动作：</a:t>
+            </a:r>
+          </a:p>
+          <a:p>
+            <a:r>
+              <a:t>依据本页方法检查本人项目；按需参考。</a:t>
+            </a:r>
             <a:endParaRPr sz="1200" b="0">
               <a:solidFill>
                 <a:srgbClr val="24292F"/>
@@ -3937,9 +3238,6 @@
               <a:ea typeface="微软雅黑"/>
               <a:cs typeface="微软雅黑"/>
             </a:endParaRPr>
-            <a:r>
-              <a:t>学生动作：</a:t>
-            </a:r>
           </a:p>
           <a:p>
             <a:r>
@@ -3951,7 +3249,7 @@
                 <a:ea typeface="微软雅黑"/>
                 <a:cs typeface="微软雅黑"/>
               </a:rPr>
-              <a:t>补写一条缺失字段</a:t>
+              <a:t/>
             </a:r>
           </a:p>
           <a:p>
@@ -3964,10 +3262,13 @@
                 <a:ea typeface="微软雅黑"/>
                 <a:cs typeface="微软雅黑"/>
               </a:rPr>
-              <a:t>来源与边界：</a:t>
-            </a:r>
-          </a:p>
-          <a:p>
+              <a:t>课堂安排：按本稿下方 90 分钟教学路由安排；此页不另占独立时段。</a:t>
+            </a:r>
+          </a:p>
+          <a:p>
+            <a:r>
+              <a:t/>
+            </a:r>
             <a:endParaRPr sz="1200" b="0">
               <a:solidFill>
                 <a:srgbClr val="24292F"/>
@@ -3976,9 +3277,6 @@
               <a:ea typeface="微软雅黑"/>
               <a:cs typeface="微软雅黑"/>
             </a:endParaRPr>
-            <a:r>
-              <a:t>/Users/bright/Projects/courses/graduate/lessons/lesson-02/handout.md</a:t>
-            </a:r>
           </a:p>
           <a:p>
             <a:r>
@@ -4003,10 +3301,13 @@
                 <a:ea typeface="微软雅黑"/>
                 <a:cs typeface="微软雅黑"/>
               </a:rPr>
-              <a:t>- lessons/lesson-02/handout.md</a:t>
-            </a:r>
-          </a:p>
-          <a:p>
+              <a:t>本课 handout.md、judgment-task.md；../../course/judgment-path.md。</a:t>
+            </a:r>
+          </a:p>
+          <a:p>
+            <a:r>
+              <a:t>[/Sources]</a:t>
+            </a:r>
             <a:endParaRPr sz="1200" b="0">
               <a:solidFill>
                 <a:srgbClr val="24292F"/>
@@ -4015,35 +3316,6 @@
               <a:ea typeface="微软雅黑"/>
               <a:cs typeface="微软雅黑"/>
             </a:endParaRPr>
-            <a:r>
-              <a:t>- lessons/lesson-02/slides.md</a:t>
-            </a:r>
-          </a:p>
-          <a:p>
-            <a:r>
-              <a:rPr sz="1200" b="0">
-                <a:solidFill>
-                  <a:srgbClr val="24292F"/>
-                </a:solidFill>
-                <a:latin typeface="微软雅黑"/>
-                <a:ea typeface="微软雅黑"/>
-                <a:cs typeface="微软雅黑"/>
-              </a:rPr>
-              <a:t>- lessons/lesson-02/classroom-pack.md</a:t>
-            </a:r>
-          </a:p>
-          <a:p>
-            <a:r>
-              <a:rPr sz="1200" b="0">
-                <a:solidFill>
-                  <a:srgbClr val="24292F"/>
-                </a:solidFill>
-                <a:latin typeface="微软雅黑"/>
-                <a:ea typeface="微软雅黑"/>
-                <a:cs typeface="微软雅黑"/>
-              </a:rPr>
-              <a:t>[/Sources]</a:t>
-            </a:r>
           </a:p>
         </p:txBody>
       </p:sp>
@@ -4131,6 +3403,9 @@
             </a:r>
           </a:p>
           <a:p>
+            <a:r>
+              <a:t/>
+            </a:r>
             <a:endParaRPr sz="1200" b="0">
               <a:solidFill>
                 <a:srgbClr val="24292F"/>
@@ -4139,9 +3414,6 @@
               <a:ea typeface="微软雅黑"/>
               <a:cs typeface="微软雅黑"/>
             </a:endParaRPr>
-            <a:r>
-              <a:t>讲义位置：§四–§七</a:t>
-            </a:r>
           </a:p>
           <a:p>
             <a:r>
@@ -4153,10 +3425,13 @@
                 <a:ea typeface="微软雅黑"/>
                 <a:cs typeface="微软雅黑"/>
               </a:rPr>
-              <a:t>屏显核对：</a:t>
-            </a:r>
-          </a:p>
-          <a:p>
+              <a:t>讲述与校准：</a:t>
+            </a:r>
+          </a:p>
+          <a:p>
+            <a:r>
+              <a:t/>
+            </a:r>
             <a:endParaRPr sz="1200" b="0">
               <a:solidFill>
                 <a:srgbClr val="24292F"/>
@@ -4165,9 +3440,6 @@
               <a:ea typeface="微软雅黑"/>
               <a:cs typeface="微软雅黑"/>
             </a:endParaRPr>
-            <a:r>
-              <a:t>助教演示 · 同一未公开合作稿案例；输入与环境；只读边界审查；人工确认写回；核对三件工件；仅用获准问题描述 / 处理环境已确认；检查过宽权限 / 与缺失的确认点；明确三份文件 / 及各自修改范围；风险卡、权限行 / 使用记录相互一致</a:t>
-            </a:r>
           </a:p>
           <a:p>
             <a:r>
@@ -4179,7 +3451,7 @@
                 <a:ea typeface="微软雅黑"/>
                 <a:cs typeface="微软雅黑"/>
               </a:rPr>
-              <a:t>教师讲述：</a:t>
+              <a:t/>
             </a:r>
           </a:p>
           <a:p>
@@ -4192,10 +3464,13 @@
                 <a:ea typeface="微软雅黑"/>
                 <a:cs typeface="微软雅黑"/>
               </a:rPr>
-              <a:t>从 P04/P07 的虚构合作稿继续。助教打开可恢复副本并操作；我来提问、判断和批准写回。演示假设可讨论的问题描述和处理环境已确认，原稿仍不对 Agent 开放；这些条件必须在真实任务运行前核查。上节的阅读卡有限写回作口头衔接，本节把同一输入与环境条件落实到风险卡、权限行和使用记录。</a:t>
-            </a:r>
-          </a:p>
-          <a:p>
+              <a:t>学生动作：</a:t>
+            </a:r>
+          </a:p>
+          <a:p>
+            <a:r>
+              <a:t>依据本页方法检查本人项目；按需参考。</a:t>
+            </a:r>
             <a:endParaRPr sz="1200" b="0">
               <a:solidFill>
                 <a:srgbClr val="24292F"/>
@@ -4204,9 +3479,6 @@
               <a:ea typeface="微软雅黑"/>
               <a:cs typeface="微软雅黑"/>
             </a:endParaRPr>
-            <a:r>
-              <a:t>学生动作：</a:t>
-            </a:r>
           </a:p>
           <a:p>
             <a:r>
@@ -4218,7 +3490,7 @@
                 <a:ea typeface="微软雅黑"/>
                 <a:cs typeface="微软雅黑"/>
               </a:rPr>
-              <a:t>预测哪一步必须暂停确认</a:t>
+              <a:t/>
             </a:r>
           </a:p>
           <a:p>
@@ -4231,10 +3503,13 @@
                 <a:ea typeface="微软雅黑"/>
                 <a:cs typeface="微软雅黑"/>
               </a:rPr>
-              <a:t>来源与边界：</a:t>
-            </a:r>
-          </a:p>
-          <a:p>
+              <a:t>课堂安排：按本稿下方 90 分钟教学路由安排；此页不另占独立时段。</a:t>
+            </a:r>
+          </a:p>
+          <a:p>
+            <a:r>
+              <a:t/>
+            </a:r>
             <a:endParaRPr sz="1200" b="0">
               <a:solidFill>
                 <a:srgbClr val="24292F"/>
@@ -4243,9 +3518,6 @@
               <a:ea typeface="微软雅黑"/>
               <a:cs typeface="微软雅黑"/>
             </a:endParaRPr>
-            <a:r>
-              <a:t>/Users/bright/Projects/courses/graduate/lessons/lesson-02/handout.md</a:t>
-            </a:r>
           </a:p>
           <a:p>
             <a:r>
@@ -4270,10 +3542,13 @@
                 <a:ea typeface="微软雅黑"/>
                 <a:cs typeface="微软雅黑"/>
               </a:rPr>
-              <a:t>- lessons/lesson-02/handout.md</a:t>
-            </a:r>
-          </a:p>
-          <a:p>
+              <a:t>本课 handout.md、judgment-task.md；../../course/judgment-path.md。</a:t>
+            </a:r>
+          </a:p>
+          <a:p>
+            <a:r>
+              <a:t>[/Sources]</a:t>
+            </a:r>
             <a:endParaRPr sz="1200" b="0">
               <a:solidFill>
                 <a:srgbClr val="24292F"/>
@@ -4282,35 +3557,6 @@
               <a:ea typeface="微软雅黑"/>
               <a:cs typeface="微软雅黑"/>
             </a:endParaRPr>
-            <a:r>
-              <a:t>- lessons/lesson-02/slides.md</a:t>
-            </a:r>
-          </a:p>
-          <a:p>
-            <a:r>
-              <a:rPr sz="1200" b="0">
-                <a:solidFill>
-                  <a:srgbClr val="24292F"/>
-                </a:solidFill>
-                <a:latin typeface="微软雅黑"/>
-                <a:ea typeface="微软雅黑"/>
-                <a:cs typeface="微软雅黑"/>
-              </a:rPr>
-              <a:t>- lessons/lesson-02/classroom-pack.md</a:t>
-            </a:r>
-          </a:p>
-          <a:p>
-            <a:r>
-              <a:rPr sz="1200" b="0">
-                <a:solidFill>
-                  <a:srgbClr val="24292F"/>
-                </a:solidFill>
-                <a:latin typeface="微软雅黑"/>
-                <a:ea typeface="微软雅黑"/>
-                <a:cs typeface="微软雅黑"/>
-              </a:rPr>
-              <a:t>[/Sources]</a:t>
-            </a:r>
           </a:p>
         </p:txBody>
       </p:sp>
@@ -4398,6 +3644,9 @@
             </a:r>
           </a:p>
           <a:p>
+            <a:r>
+              <a:t/>
+            </a:r>
             <a:endParaRPr sz="1200" b="0">
               <a:solidFill>
                 <a:srgbClr val="24292F"/>
@@ -4406,9 +3655,6 @@
               <a:ea typeface="微软雅黑"/>
               <a:cs typeface="微软雅黑"/>
             </a:endParaRPr>
-            <a:r>
-              <a:t>讲义位置：§五、§九</a:t>
-            </a:r>
           </a:p>
           <a:p>
             <a:r>
@@ -4420,10 +3666,13 @@
                 <a:ea typeface="微软雅黑"/>
                 <a:cs typeface="微软雅黑"/>
               </a:rPr>
-              <a:t>屏显核对：</a:t>
-            </a:r>
-          </a:p>
-          <a:p>
+              <a:t>讲述与校准：</a:t>
+            </a:r>
+          </a:p>
+          <a:p>
+            <a:r>
+              <a:t/>
+            </a:r>
             <a:endParaRPr sz="1200" b="0">
               <a:solidFill>
                 <a:srgbClr val="24292F"/>
@@ -4432,9 +3681,6 @@
               <a:ea typeface="微软雅黑"/>
               <a:cs typeface="微软雅黑"/>
             </a:endParaRPr>
-            <a:r>
-              <a:t>助教演示 · 任务契约；第一轮；READ    agent-permissions.md；TASK    指出一处过宽或缺失权限；WRITE   none；NETWORK off；RETURN  建议、风险与最小替代动作；STOP    等待人工确认；研究者检查；建议收窄了范围， / 还是隐含扩大了 / 读写与外发权限？</a:t>
-            </a:r>
           </a:p>
           <a:p>
             <a:r>
@@ -4446,7 +3692,7 @@
                 <a:ea typeface="微软雅黑"/>
                 <a:cs typeface="微软雅黑"/>
               </a:rPr>
-              <a:t>教师讲述：</a:t>
+              <a:t/>
             </a:r>
           </a:p>
           <a:p>
@@ -4459,10 +3705,13 @@
                 <a:ea typeface="微软雅黑"/>
                 <a:cs typeface="微软雅黑"/>
               </a:rPr>
-              <a:t>沿用 P21 已确认的虚构输入与环境，不在只读检查中新增材料权限。助教展示只读检查的实际输入和返回建议后停下。请学生指出哪一项权限被收窄；若建议暗含新文件或外发权限，先拒绝并改写边界。确认当前未写文件，再进入下一页。NETWORK off 表示不进行额外网络操作，模型后端处理条件另在运行前核查。</a:t>
-            </a:r>
-          </a:p>
-          <a:p>
+              <a:t>学生动作：</a:t>
+            </a:r>
+          </a:p>
+          <a:p>
+            <a:r>
+              <a:t>依据本页方法检查本人项目；按需参考。</a:t>
+            </a:r>
             <a:endParaRPr sz="1200" b="0">
               <a:solidFill>
                 <a:srgbClr val="24292F"/>
@@ -4471,9 +3720,6 @@
               <a:ea typeface="微软雅黑"/>
               <a:cs typeface="微软雅黑"/>
             </a:endParaRPr>
-            <a:r>
-              <a:t>学生动作：</a:t>
-            </a:r>
           </a:p>
           <a:p>
             <a:r>
@@ -4485,7 +3731,7 @@
                 <a:ea typeface="微软雅黑"/>
                 <a:cs typeface="微软雅黑"/>
               </a:rPr>
-              <a:t>判断建议是收窄还是扩大权限</a:t>
+              <a:t/>
             </a:r>
           </a:p>
           <a:p>
@@ -4498,10 +3744,13 @@
                 <a:ea typeface="微软雅黑"/>
                 <a:cs typeface="微软雅黑"/>
               </a:rPr>
-              <a:t>来源与边界：</a:t>
-            </a:r>
-          </a:p>
-          <a:p>
+              <a:t>课堂安排：按本稿下方 90 分钟教学路由安排；此页不另占独立时段。</a:t>
+            </a:r>
+          </a:p>
+          <a:p>
+            <a:r>
+              <a:t/>
+            </a:r>
             <a:endParaRPr sz="1200" b="0">
               <a:solidFill>
                 <a:srgbClr val="24292F"/>
@@ -4510,9 +3759,6 @@
               <a:ea typeface="微软雅黑"/>
               <a:cs typeface="微软雅黑"/>
             </a:endParaRPr>
-            <a:r>
-              <a:t>/Users/bright/Projects/courses/graduate/lessons/lesson-02/handout.md</a:t>
-            </a:r>
           </a:p>
           <a:p>
             <a:r>
@@ -4537,10 +3783,13 @@
                 <a:ea typeface="微软雅黑"/>
                 <a:cs typeface="微软雅黑"/>
               </a:rPr>
-              <a:t>- lessons/lesson-02/handout.md</a:t>
-            </a:r>
-          </a:p>
-          <a:p>
+              <a:t>本课 handout.md、judgment-task.md；../../course/judgment-path.md。</a:t>
+            </a:r>
+          </a:p>
+          <a:p>
+            <a:r>
+              <a:t>[/Sources]</a:t>
+            </a:r>
             <a:endParaRPr sz="1200" b="0">
               <a:solidFill>
                 <a:srgbClr val="24292F"/>
@@ -4549,35 +3798,6 @@
               <a:ea typeface="微软雅黑"/>
               <a:cs typeface="微软雅黑"/>
             </a:endParaRPr>
-            <a:r>
-              <a:t>- lessons/lesson-02/slides.md</a:t>
-            </a:r>
-          </a:p>
-          <a:p>
-            <a:r>
-              <a:rPr sz="1200" b="0">
-                <a:solidFill>
-                  <a:srgbClr val="24292F"/>
-                </a:solidFill>
-                <a:latin typeface="微软雅黑"/>
-                <a:ea typeface="微软雅黑"/>
-                <a:cs typeface="微软雅黑"/>
-              </a:rPr>
-              <a:t>- lessons/lesson-02/classroom-pack.md</a:t>
-            </a:r>
-          </a:p>
-          <a:p>
-            <a:r>
-              <a:rPr sz="1200" b="0">
-                <a:solidFill>
-                  <a:srgbClr val="24292F"/>
-                </a:solidFill>
-                <a:latin typeface="微软雅黑"/>
-                <a:ea typeface="微软雅黑"/>
-                <a:cs typeface="微软雅黑"/>
-              </a:rPr>
-              <a:t>[/Sources]</a:t>
-            </a:r>
           </a:p>
         </p:txBody>
       </p:sp>
@@ -4665,6 +3885,9 @@
             </a:r>
           </a:p>
           <a:p>
+            <a:r>
+              <a:t/>
+            </a:r>
             <a:endParaRPr sz="1200" b="0">
               <a:solidFill>
                 <a:srgbClr val="24292F"/>
@@ -4673,9 +3896,6 @@
               <a:ea typeface="微软雅黑"/>
               <a:cs typeface="微软雅黑"/>
             </a:endParaRPr>
-            <a:r>
-              <a:t>讲义位置：§九</a:t>
-            </a:r>
           </a:p>
           <a:p>
             <a:r>
@@ -4687,10 +3907,13 @@
                 <a:ea typeface="微软雅黑"/>
                 <a:cs typeface="微软雅黑"/>
               </a:rPr>
-              <a:t>屏显核对：</a:t>
-            </a:r>
-          </a:p>
-          <a:p>
+              <a:t>讲述与校准：</a:t>
+            </a:r>
+          </a:p>
+          <a:p>
+            <a:r>
+              <a:t/>
+            </a:r>
             <a:endParaRPr sz="1200" b="0">
               <a:solidFill>
                 <a:srgbClr val="24292F"/>
@@ -4699,9 +3922,6 @@
               <a:ea typeface="微软雅黑"/>
               <a:cs typeface="微软雅黑"/>
             </a:endParaRPr>
-            <a:r>
-              <a:t>助教演示 · 任务契约；第二轮：只写回获批范围；WRITE   agent-permissions.md 一行；ethics-and-compliance.md 风险卡；ai-usage-log.md 一条记录；KEEP    问题、指标与工件状态；NETWORK off；AFTER   展示实际 diff；确认点；文件 / 段落 / 修改范围</a:t>
-            </a:r>
           </a:p>
           <a:p>
             <a:r>
@@ -4713,7 +3933,7 @@
                 <a:ea typeface="微软雅黑"/>
                 <a:cs typeface="微软雅黑"/>
               </a:rPr>
-              <a:t>教师讲述：</a:t>
+              <a:t/>
             </a:r>
           </a:p>
           <a:p>
@@ -4726,10 +3946,13 @@
                 <a:ea typeface="微软雅黑"/>
                 <a:cs typeface="微软雅黑"/>
               </a:rPr>
-              <a:t>我明确批准三份文件的目标段落和修改范围，助教才写回。风险卡写清当前原稿为何不外发及继续路径的输入、环境条件；权限行只授权获准的问题描述；日志记录原稿未发送、实际输入、处理环境与人工核验。打开实际 diff，请学生查有无越界、三份记录是否指向同一动作；不在课堂演示额外工件追踪填表。若限制配置未在授课设备通过复演，助教改用预制 diff 并标明回放。</a:t>
-            </a:r>
-          </a:p>
-          <a:p>
+              <a:t>学生动作：</a:t>
+            </a:r>
+          </a:p>
+          <a:p>
+            <a:r>
+              <a:t>依据本页方法检查本人项目；按需参考。</a:t>
+            </a:r>
             <a:endParaRPr sz="1200" b="0">
               <a:solidFill>
                 <a:srgbClr val="24292F"/>
@@ -4738,9 +3961,6 @@
               <a:ea typeface="微软雅黑"/>
               <a:cs typeface="微软雅黑"/>
             </a:endParaRPr>
-            <a:r>
-              <a:t>学生动作：</a:t>
-            </a:r>
           </a:p>
           <a:p>
             <a:r>
@@ -4752,7 +3972,7 @@
                 <a:ea typeface="微软雅黑"/>
                 <a:cs typeface="微软雅黑"/>
               </a:rPr>
-              <a:t>检查实际 diff 是否只含获批三项，指出一处人工核验依据</a:t>
+              <a:t/>
             </a:r>
           </a:p>
           <a:p>
@@ -4765,10 +3985,13 @@
                 <a:ea typeface="微软雅黑"/>
                 <a:cs typeface="微软雅黑"/>
               </a:rPr>
-              <a:t>来源与边界：</a:t>
-            </a:r>
-          </a:p>
-          <a:p>
+              <a:t>课堂安排：按本稿下方 90 分钟教学路由安排；此页不另占独立时段。</a:t>
+            </a:r>
+          </a:p>
+          <a:p>
+            <a:r>
+              <a:t/>
+            </a:r>
             <a:endParaRPr sz="1200" b="0">
               <a:solidFill>
                 <a:srgbClr val="24292F"/>
@@ -4777,9 +4000,6 @@
               <a:ea typeface="微软雅黑"/>
               <a:cs typeface="微软雅黑"/>
             </a:endParaRPr>
-            <a:r>
-              <a:t>/Users/bright/Projects/courses/graduate/lessons/lesson-02/handout.md</a:t>
-            </a:r>
           </a:p>
           <a:p>
             <a:r>
@@ -4804,10 +4024,13 @@
                 <a:ea typeface="微软雅黑"/>
                 <a:cs typeface="微软雅黑"/>
               </a:rPr>
-              <a:t>- lessons/lesson-02/handout.md</a:t>
-            </a:r>
-          </a:p>
-          <a:p>
+              <a:t>本课 handout.md、judgment-task.md；../../course/judgment-path.md。</a:t>
+            </a:r>
+          </a:p>
+          <a:p>
+            <a:r>
+              <a:t>[/Sources]</a:t>
+            </a:r>
             <a:endParaRPr sz="1200" b="0">
               <a:solidFill>
                 <a:srgbClr val="24292F"/>
@@ -4816,35 +4039,6 @@
               <a:ea typeface="微软雅黑"/>
               <a:cs typeface="微软雅黑"/>
             </a:endParaRPr>
-            <a:r>
-              <a:t>- lessons/lesson-02/slides.md</a:t>
-            </a:r>
-          </a:p>
-          <a:p>
-            <a:r>
-              <a:rPr sz="1200" b="0">
-                <a:solidFill>
-                  <a:srgbClr val="24292F"/>
-                </a:solidFill>
-                <a:latin typeface="微软雅黑"/>
-                <a:ea typeface="微软雅黑"/>
-                <a:cs typeface="微软雅黑"/>
-              </a:rPr>
-              <a:t>- lessons/lesson-02/classroom-pack.md</a:t>
-            </a:r>
-          </a:p>
-          <a:p>
-            <a:r>
-              <a:rPr sz="1200" b="0">
-                <a:solidFill>
-                  <a:srgbClr val="24292F"/>
-                </a:solidFill>
-                <a:latin typeface="微软雅黑"/>
-                <a:ea typeface="微软雅黑"/>
-                <a:cs typeface="微软雅黑"/>
-              </a:rPr>
-              <a:t>[/Sources]</a:t>
-            </a:r>
           </a:p>
         </p:txBody>
       </p:sp>
@@ -4928,10 +4122,13 @@
                 <a:ea typeface="微软雅黑"/>
                 <a:cs typeface="微软雅黑"/>
               </a:rPr>
-              <a:t>页面：P24 个人实践：完成一条低风险动作记录</a:t>
-            </a:r>
-          </a:p>
-          <a:p>
+              <a:t>页面：P24 本人项目：决定、核验与回写</a:t>
+            </a:r>
+          </a:p>
+          <a:p>
+            <a:r>
+              <a:t/>
+            </a:r>
             <a:endParaRPr sz="1200" b="0">
               <a:solidFill>
                 <a:srgbClr val="24292F"/>
@@ -4940,9 +4137,6 @@
               <a:ea typeface="微软雅黑"/>
               <a:cs typeface="微软雅黑"/>
             </a:endParaRPr>
-            <a:r>
-              <a:t>讲义位置：§九、classroom-pack</a:t>
-            </a:r>
           </a:p>
           <a:p>
             <a:r>
@@ -4954,10 +4148,13 @@
                 <a:ea typeface="微软雅黑"/>
                 <a:cs typeface="微软雅黑"/>
               </a:rPr>
-              <a:t>屏显核对：</a:t>
-            </a:r>
-          </a:p>
-          <a:p>
+              <a:t>讲述与校准：</a:t>
+            </a:r>
+          </a:p>
+          <a:p>
+            <a:r>
+              <a:t>第一段作决定并查证据；中点处理共性卡点；第二段实际回写并验证。E4 超出任务读范围；E5 的 diff 不能证明前序读取合法。B 对当前契约成立。也可在动作前基于任务必要性申请单一文件读取并更新授权，不能事后扩大白名单抹平事实。network=off 只是声明时，不能推断网络隔离已实现。</a:t>
+            </a:r>
             <a:endParaRPr sz="1200" b="0">
               <a:solidFill>
                 <a:srgbClr val="24292F"/>
@@ -4966,9 +4163,6 @@
               <a:ea typeface="微软雅黑"/>
               <a:cs typeface="微软雅黑"/>
             </a:endParaRPr>
-            <a:r>
-              <a:t>选一个低风险科研动作；写清材料边界 / 与写回范围。；第一段：权限一行；中点点评后：风险卡、 / 只读审查与使用记录；保存到个人项目；agent-permissions.md / ethics-and-compliance.md / ai-usage-log.md；课堂构造完成示例；权限行；只读获准问题描述，处理环境已确认； / 写回前确认三份文件的具体段落。；风险卡；原稿外发会暴露合作内容。 / 确认获准输入与处理环境，由作者核查。；使用记录；写明实际输入、采用理由与核验方法。 / 未调用模型时如实记录“未执行”。；完成标志：三件工件相互一致，能解释一次具体动作</a:t>
-            </a:r>
           </a:p>
           <a:p>
             <a:r>
@@ -4980,7 +4174,7 @@
                 <a:ea typeface="微软雅黑"/>
                 <a:cs typeface="微软雅黑"/>
               </a:rPr>
-              <a:t>教师讲述：</a:t>
+              <a:t/>
             </a:r>
           </a:p>
           <a:p>
@@ -4993,10 +4187,13 @@
                 <a:ea typeface="微软雅黑"/>
                 <a:cs typeface="微软雅黑"/>
               </a:rPr>
-              <a:t>第一段先写权限一行，明确获准的具体问题描述和处理环境；中点点评后完成风险卡、只读审查和日志。右侧课堂构造示例假设输入与环境条件已确认，不能照抄为本人已获授权。学生仍使用公开、课堂构造或已授权脱敏材料；未调用模型时如实记录未执行。</a:t>
-            </a:r>
-          </a:p>
-          <a:p>
+              <a:t>学生动作：</a:t>
+            </a:r>
+          </a:p>
+          <a:p>
+            <a:r>
+              <a:t>给本人一个动作写清读写范围、确认点与拒绝分支，更新既有权限行、风险卡和日志。选一次允许动作和一次越界尝试检验控制。</a:t>
+            </a:r>
             <a:endParaRPr sz="1200" b="0">
               <a:solidFill>
                 <a:srgbClr val="24292F"/>
@@ -5005,9 +4202,6 @@
               <a:ea typeface="微软雅黑"/>
               <a:cs typeface="微软雅黑"/>
             </a:endParaRPr>
-            <a:r>
-              <a:t>学生动作：</a:t>
-            </a:r>
           </a:p>
           <a:p>
             <a:r>
@@ -5019,7 +4213,7 @@
                 <a:ea typeface="微软雅黑"/>
                 <a:cs typeface="微软雅黑"/>
               </a:rPr>
-              <a:t>独立完成三件工件；无模型时手工审查</a:t>
+              <a:t/>
             </a:r>
           </a:p>
           <a:p>
@@ -5032,10 +4226,13 @@
                 <a:ea typeface="微软雅黑"/>
                 <a:cs typeface="微软雅黑"/>
               </a:rPr>
-              <a:t>来源与边界：</a:t>
-            </a:r>
-          </a:p>
-          <a:p>
+              <a:t>课堂安排：按本稿下方 90 分钟教学路由安排；此页不另占独立时段。</a:t>
+            </a:r>
+          </a:p>
+          <a:p>
+            <a:r>
+              <a:t/>
+            </a:r>
             <a:endParaRPr sz="1200" b="0">
               <a:solidFill>
                 <a:srgbClr val="24292F"/>
@@ -5044,9 +4241,6 @@
               <a:ea typeface="微软雅黑"/>
               <a:cs typeface="微软雅黑"/>
             </a:endParaRPr>
-            <a:r>
-              <a:t>/Users/bright/Projects/courses/graduate/lessons/lesson-02/handout.md</a:t>
-            </a:r>
           </a:p>
           <a:p>
             <a:r>
@@ -5071,10 +4265,13 @@
                 <a:ea typeface="微软雅黑"/>
                 <a:cs typeface="微软雅黑"/>
               </a:rPr>
-              <a:t>- lessons/lesson-02/handout.md</a:t>
-            </a:r>
-          </a:p>
-          <a:p>
+              <a:t>本课 handout.md、judgment-task.md；../../course/judgment-path.md。教学构造仅用于方法判断；本人结果以实际记录为准。</a:t>
+            </a:r>
+          </a:p>
+          <a:p>
+            <a:r>
+              <a:t>[/Sources]</a:t>
+            </a:r>
             <a:endParaRPr sz="1200" b="0">
               <a:solidFill>
                 <a:srgbClr val="24292F"/>
@@ -5083,35 +4280,6 @@
               <a:ea typeface="微软雅黑"/>
               <a:cs typeface="微软雅黑"/>
             </a:endParaRPr>
-            <a:r>
-              <a:t>- lessons/lesson-02/slides.md</a:t>
-            </a:r>
-          </a:p>
-          <a:p>
-            <a:r>
-              <a:rPr sz="1200" b="0">
-                <a:solidFill>
-                  <a:srgbClr val="24292F"/>
-                </a:solidFill>
-                <a:latin typeface="微软雅黑"/>
-                <a:ea typeface="微软雅黑"/>
-                <a:cs typeface="微软雅黑"/>
-              </a:rPr>
-              <a:t>- lessons/lesson-02/classroom-pack.md</a:t>
-            </a:r>
-          </a:p>
-          <a:p>
-            <a:r>
-              <a:rPr sz="1200" b="0">
-                <a:solidFill>
-                  <a:srgbClr val="24292F"/>
-                </a:solidFill>
-                <a:latin typeface="微软雅黑"/>
-                <a:ea typeface="微软雅黑"/>
-                <a:cs typeface="微软雅黑"/>
-              </a:rPr>
-              <a:t>[/Sources]</a:t>
-            </a:r>
           </a:p>
         </p:txBody>
       </p:sp>
@@ -5199,6 +4367,9 @@
             </a:r>
           </a:p>
           <a:p>
+            <a:r>
+              <a:t/>
+            </a:r>
             <a:endParaRPr sz="1200" b="0">
               <a:solidFill>
                 <a:srgbClr val="24292F"/>
@@ -5218,10 +4389,13 @@
                 <a:ea typeface="微软雅黑"/>
                 <a:cs typeface="微软雅黑"/>
               </a:rPr>
-              <a:t>讲义位置：§九</a:t>
-            </a:r>
-          </a:p>
-          <a:p>
+              <a:t>讲述与校准：</a:t>
+            </a:r>
+          </a:p>
+          <a:p>
+            <a:r>
+              <a:t/>
+            </a:r>
             <a:endParaRPr sz="1200" b="0">
               <a:solidFill>
                 <a:srgbClr val="24292F"/>
@@ -5241,7 +4415,7 @@
                 <a:ea typeface="微软雅黑"/>
                 <a:cs typeface="微软雅黑"/>
               </a:rPr>
-              <a:t>屏显核对：</a:t>
+              <a:t/>
             </a:r>
           </a:p>
           <a:p>
@@ -5254,10 +4428,13 @@
                 <a:ea typeface="微软雅黑"/>
                 <a:cs typeface="微软雅黑"/>
               </a:rPr>
-              <a:t>把风险卡、权限行和使用记录放在一起；同一输入；三处写的材料对象和授权状态是否一致？；同一动作；权限允许的范围是否覆盖实际行动？；可操作确认；能否明确何时停下、由谁确认什么？；作者决定；记录采纳、修改或拒绝，以及理由。</a:t>
-            </a:r>
-          </a:p>
-          <a:p>
+              <a:t>学生动作：</a:t>
+            </a:r>
+          </a:p>
+          <a:p>
+            <a:r>
+              <a:t>依据本页方法检查本人项目；按需参考。</a:t>
+            </a:r>
             <a:endParaRPr sz="1200" b="0">
               <a:solidFill>
                 <a:srgbClr val="24292F"/>
@@ -5277,7 +4454,7 @@
                 <a:ea typeface="微软雅黑"/>
                 <a:cs typeface="微软雅黑"/>
               </a:rPr>
-              <a:t>教师讲述：</a:t>
+              <a:t/>
             </a:r>
           </a:p>
           <a:p>
@@ -5290,10 +4467,13 @@
                 <a:ea typeface="微软雅黑"/>
                 <a:cs typeface="微软雅黑"/>
               </a:rPr>
-              <a:t>结对不形成固定组，互查不替代作者决定。</a:t>
-            </a:r>
-          </a:p>
-          <a:p>
+              <a:t>课堂安排：按本稿下方 90 分钟教学路由安排；此页不另占独立时段。</a:t>
+            </a:r>
+          </a:p>
+          <a:p>
+            <a:r>
+              <a:t/>
+            </a:r>
             <a:endParaRPr sz="1200" b="0">
               <a:solidFill>
                 <a:srgbClr val="24292F"/>
@@ -5313,7 +4493,7 @@
                 <a:ea typeface="微软雅黑"/>
                 <a:cs typeface="微软雅黑"/>
               </a:rPr>
-              <a:t>学生动作：</a:t>
+              <a:t>[Sources]</a:t>
             </a:r>
           </a:p>
           <a:p>
@@ -5326,10 +4506,13 @@
                 <a:ea typeface="微软雅黑"/>
                 <a:cs typeface="微软雅黑"/>
               </a:rPr>
-              <a:t>交换三件工件并提出一个可操作修改</a:t>
-            </a:r>
-          </a:p>
-          <a:p>
+              <a:t>本课 handout.md、judgment-task.md；../../course/judgment-path.md。</a:t>
+            </a:r>
+          </a:p>
+          <a:p>
+            <a:r>
+              <a:t>[/Sources]</a:t>
+            </a:r>
             <a:endParaRPr sz="1200" b="0">
               <a:solidFill>
                 <a:srgbClr val="24292F"/>
@@ -5338,101 +4521,6 @@
               <a:ea typeface="微软雅黑"/>
               <a:cs typeface="微软雅黑"/>
             </a:endParaRPr>
-          </a:p>
-          <a:p>
-            <a:r>
-              <a:rPr sz="1200" b="0">
-                <a:solidFill>
-                  <a:srgbClr val="24292F"/>
-                </a:solidFill>
-                <a:latin typeface="微软雅黑"/>
-                <a:ea typeface="微软雅黑"/>
-                <a:cs typeface="微软雅黑"/>
-              </a:rPr>
-              <a:t>来源与边界：</a:t>
-            </a:r>
-          </a:p>
-          <a:p>
-            <a:r>
-              <a:rPr sz="1200" b="0">
-                <a:solidFill>
-                  <a:srgbClr val="24292F"/>
-                </a:solidFill>
-                <a:latin typeface="微软雅黑"/>
-                <a:ea typeface="微软雅黑"/>
-                <a:cs typeface="微软雅黑"/>
-              </a:rPr>
-              <a:t>/Users/bright/Projects/courses/graduate/course/syllabus.md</a:t>
-            </a:r>
-          </a:p>
-          <a:p>
-            <a:endParaRPr sz="1200" b="0">
-              <a:solidFill>
-                <a:srgbClr val="24292F"/>
-              </a:solidFill>
-              <a:latin typeface="微软雅黑"/>
-              <a:ea typeface="微软雅黑"/>
-              <a:cs typeface="微软雅黑"/>
-            </a:endParaRPr>
-          </a:p>
-          <a:p>
-            <a:r>
-              <a:rPr sz="1200" b="0">
-                <a:solidFill>
-                  <a:srgbClr val="24292F"/>
-                </a:solidFill>
-                <a:latin typeface="微软雅黑"/>
-                <a:ea typeface="微软雅黑"/>
-                <a:cs typeface="微软雅黑"/>
-              </a:rPr>
-              <a:t>[Sources]</a:t>
-            </a:r>
-          </a:p>
-          <a:p>
-            <a:endParaRPr sz="1200" b="0">
-              <a:solidFill>
-                <a:srgbClr val="24292F"/>
-              </a:solidFill>
-              <a:latin typeface="微软雅黑"/>
-              <a:ea typeface="微软雅黑"/>
-              <a:cs typeface="微软雅黑"/>
-            </a:endParaRPr>
-          </a:p>
-          <a:p>
-            <a:r>
-              <a:rPr sz="1200" b="0">
-                <a:solidFill>
-                  <a:srgbClr val="24292F"/>
-                </a:solidFill>
-                <a:latin typeface="微软雅黑"/>
-                <a:ea typeface="微软雅黑"/>
-                <a:cs typeface="微软雅黑"/>
-              </a:rPr>
-              <a:t>- 本课 handout.md 与 slides.md</a:t>
-            </a:r>
-          </a:p>
-          <a:p>
-            <a:endParaRPr sz="1200" b="0">
-              <a:solidFill>
-                <a:srgbClr val="24292F"/>
-              </a:solidFill>
-              <a:latin typeface="微软雅黑"/>
-              <a:ea typeface="微软雅黑"/>
-              <a:cs typeface="微软雅黑"/>
-            </a:endParaRPr>
-          </a:p>
-          <a:p>
-            <a:r>
-              <a:rPr sz="1200" b="0">
-                <a:solidFill>
-                  <a:srgbClr val="24292F"/>
-                </a:solidFill>
-                <a:latin typeface="微软雅黑"/>
-                <a:ea typeface="微软雅黑"/>
-                <a:cs typeface="微软雅黑"/>
-              </a:rPr>
-              <a:t>[/Sources]</a:t>
-            </a:r>
           </a:p>
         </p:txBody>
       </p:sp>
@@ -5520,6 +4608,9 @@
             </a:r>
           </a:p>
           <a:p>
+            <a:r>
+              <a:t/>
+            </a:r>
             <a:endParaRPr sz="1200" b="0">
               <a:solidFill>
                 <a:srgbClr val="24292F"/>
@@ -5539,10 +4630,13 @@
                 <a:ea typeface="微软雅黑"/>
                 <a:cs typeface="微软雅黑"/>
               </a:rPr>
-              <a:t>讲义位置：全讲</a:t>
-            </a:r>
-          </a:p>
-          <a:p>
+              <a:t>讲述与校准：</a:t>
+            </a:r>
+          </a:p>
+          <a:p>
+            <a:r>
+              <a:t/>
+            </a:r>
             <a:endParaRPr sz="1200" b="0">
               <a:solidFill>
                 <a:srgbClr val="24292F"/>
@@ -5562,7 +4656,7 @@
                 <a:ea typeface="微软雅黑"/>
                 <a:cs typeface="微软雅黑"/>
               </a:rPr>
-              <a:t>屏显核对：</a:t>
+              <a:t/>
             </a:r>
           </a:p>
           <a:p>
@@ -5575,10 +4669,13 @@
                 <a:ea typeface="微软雅黑"/>
                 <a:cs typeface="微软雅黑"/>
               </a:rPr>
-              <a:t>给一个具体动作留下完整的约束与记录；风险卡；权限一行；受限执行；使用记录；为什么需要控制？；什么范围可执行？；每一步检查边界；实际做了什么？；研究者对材料、决定与最终使用承担责任。</a:t>
-            </a:r>
-          </a:p>
-          <a:p>
+              <a:t>学生动作：</a:t>
+            </a:r>
+          </a:p>
+          <a:p>
+            <a:r>
+              <a:t>依据本页方法检查本人项目；按需参考。</a:t>
+            </a:r>
             <a:endParaRPr sz="1200" b="0">
               <a:solidFill>
                 <a:srgbClr val="24292F"/>
@@ -5598,7 +4695,7 @@
                 <a:ea typeface="微软雅黑"/>
                 <a:cs typeface="微软雅黑"/>
               </a:rPr>
-              <a:t>教师讲述：</a:t>
+              <a:t/>
             </a:r>
           </a:p>
           <a:p>
@@ -5611,10 +4708,13 @@
                 <a:ea typeface="微软雅黑"/>
                 <a:cs typeface="微软雅黑"/>
               </a:rPr>
-              <a:t>解释对象卡、五条件与三档处置在闭环中的位置，不再并列为多套 contract。</a:t>
-            </a:r>
-          </a:p>
-          <a:p>
+              <a:t>课堂安排：按本稿下方 90 分钟教学路由安排；此页不另占独立时段。</a:t>
+            </a:r>
+          </a:p>
+          <a:p>
+            <a:r>
+              <a:t/>
+            </a:r>
             <a:endParaRPr sz="1200" b="0">
               <a:solidFill>
                 <a:srgbClr val="24292F"/>
@@ -5634,7 +4734,7 @@
                 <a:ea typeface="微软雅黑"/>
                 <a:cs typeface="微软雅黑"/>
               </a:rPr>
-              <a:t>学生动作：</a:t>
+              <a:t>[Sources]</a:t>
             </a:r>
           </a:p>
           <a:p>
@@ -5647,10 +4747,13 @@
                 <a:ea typeface="微软雅黑"/>
                 <a:cs typeface="微软雅黑"/>
               </a:rPr>
-              <a:t>复述循环并指认自己的三个工件</a:t>
-            </a:r>
-          </a:p>
-          <a:p>
+              <a:t>本课 handout.md、judgment-task.md；../../course/judgment-path.md。</a:t>
+            </a:r>
+          </a:p>
+          <a:p>
+            <a:r>
+              <a:t>[/Sources]</a:t>
+            </a:r>
             <a:endParaRPr sz="1200" b="0">
               <a:solidFill>
                 <a:srgbClr val="24292F"/>
@@ -5659,101 +4762,6 @@
               <a:ea typeface="微软雅黑"/>
               <a:cs typeface="微软雅黑"/>
             </a:endParaRPr>
-          </a:p>
-          <a:p>
-            <a:r>
-              <a:rPr sz="1200" b="0">
-                <a:solidFill>
-                  <a:srgbClr val="24292F"/>
-                </a:solidFill>
-                <a:latin typeface="微软雅黑"/>
-                <a:ea typeface="微软雅黑"/>
-                <a:cs typeface="微软雅黑"/>
-              </a:rPr>
-              <a:t>来源与边界：</a:t>
-            </a:r>
-          </a:p>
-          <a:p>
-            <a:r>
-              <a:rPr sz="1200" b="0">
-                <a:solidFill>
-                  <a:srgbClr val="24292F"/>
-                </a:solidFill>
-                <a:latin typeface="微软雅黑"/>
-                <a:ea typeface="微软雅黑"/>
-                <a:cs typeface="微软雅黑"/>
-              </a:rPr>
-              <a:t>/Users/bright/Projects/courses/graduate/lessons/lesson-02/handout.md</a:t>
-            </a:r>
-          </a:p>
-          <a:p>
-            <a:endParaRPr sz="1200" b="0">
-              <a:solidFill>
-                <a:srgbClr val="24292F"/>
-              </a:solidFill>
-              <a:latin typeface="微软雅黑"/>
-              <a:ea typeface="微软雅黑"/>
-              <a:cs typeface="微软雅黑"/>
-            </a:endParaRPr>
-          </a:p>
-          <a:p>
-            <a:r>
-              <a:rPr sz="1200" b="0">
-                <a:solidFill>
-                  <a:srgbClr val="24292F"/>
-                </a:solidFill>
-                <a:latin typeface="微软雅黑"/>
-                <a:ea typeface="微软雅黑"/>
-                <a:cs typeface="微软雅黑"/>
-              </a:rPr>
-              <a:t>[Sources]</a:t>
-            </a:r>
-          </a:p>
-          <a:p>
-            <a:endParaRPr sz="1200" b="0">
-              <a:solidFill>
-                <a:srgbClr val="24292F"/>
-              </a:solidFill>
-              <a:latin typeface="微软雅黑"/>
-              <a:ea typeface="微软雅黑"/>
-              <a:cs typeface="微软雅黑"/>
-            </a:endParaRPr>
-          </a:p>
-          <a:p>
-            <a:r>
-              <a:rPr sz="1200" b="0">
-                <a:solidFill>
-                  <a:srgbClr val="24292F"/>
-                </a:solidFill>
-                <a:latin typeface="微软雅黑"/>
-                <a:ea typeface="微软雅黑"/>
-                <a:cs typeface="微软雅黑"/>
-              </a:rPr>
-              <a:t>- 本课 handout.md 与 slides.md</a:t>
-            </a:r>
-          </a:p>
-          <a:p>
-            <a:endParaRPr sz="1200" b="0">
-              <a:solidFill>
-                <a:srgbClr val="24292F"/>
-              </a:solidFill>
-              <a:latin typeface="微软雅黑"/>
-              <a:ea typeface="微软雅黑"/>
-              <a:cs typeface="微软雅黑"/>
-            </a:endParaRPr>
-          </a:p>
-          <a:p>
-            <a:r>
-              <a:rPr sz="1200" b="0">
-                <a:solidFill>
-                  <a:srgbClr val="24292F"/>
-                </a:solidFill>
-                <a:latin typeface="微软雅黑"/>
-                <a:ea typeface="微软雅黑"/>
-                <a:cs typeface="微软雅黑"/>
-              </a:rPr>
-              <a:t>[/Sources]</a:t>
-            </a:r>
           </a:p>
         </p:txBody>
       </p:sp>
@@ -5837,10 +4845,13 @@
                 <a:ea typeface="微软雅黑"/>
                 <a:cs typeface="微软雅黑"/>
               </a:rPr>
-              <a:t>页面：P27 课后回写与第 3 课准备</a:t>
-            </a:r>
-          </a:p>
-          <a:p>
+              <a:t>页面：P27 保留本课决定，准备下一课输入</a:t>
+            </a:r>
+          </a:p>
+          <a:p>
+            <a:r>
+              <a:t/>
+            </a:r>
             <a:endParaRPr sz="1200" b="0">
               <a:solidFill>
                 <a:srgbClr val="24292F"/>
@@ -5860,10 +4871,13 @@
                 <a:ea typeface="微软雅黑"/>
                 <a:cs typeface="微软雅黑"/>
               </a:rPr>
-              <a:t>讲义位置：§十</a:t>
-            </a:r>
-          </a:p>
-          <a:p>
+              <a:t>讲述与校准：</a:t>
+            </a:r>
+          </a:p>
+          <a:p>
+            <a:r>
+              <a:t>补齐边界验证记录；准备公开研究问题和检索关键词。 每课课外最多60分钟；详见讲义。</a:t>
+            </a:r>
             <a:endParaRPr sz="1200" b="0">
               <a:solidFill>
                 <a:srgbClr val="24292F"/>
@@ -5883,7 +4897,7 @@
                 <a:ea typeface="微软雅黑"/>
                 <a:cs typeface="微软雅黑"/>
               </a:rPr>
-              <a:t>屏显核对：</a:t>
+              <a:t/>
             </a:r>
           </a:p>
           <a:p>
@@ -5896,10 +4910,13 @@
                 <a:ea typeface="微软雅黑"/>
                 <a:cs typeface="微软雅黑"/>
               </a:rPr>
-              <a:t>继续完善；按个人项目补齐材料边界、确认点和禁止项。；补工件追踪；为早期工件标状态，保留支持状态的依据。；准备公开检索；带着一个研究问题和一组候选关键词进入第 3 课。；持续更新同一个人项目，累积第 6 课问题门的证据。</a:t>
-            </a:r>
-          </a:p>
-          <a:p>
+              <a:t>学生动作：</a:t>
+            </a:r>
+          </a:p>
+          <a:p>
+            <a:r>
+              <a:t>定位实际工件与下一项动作；按既定预算收口。</a:t>
+            </a:r>
             <a:endParaRPr sz="1200" b="0">
               <a:solidFill>
                 <a:srgbClr val="24292F"/>
@@ -5919,7 +4936,7 @@
                 <a:ea typeface="微软雅黑"/>
                 <a:cs typeface="微软雅黑"/>
               </a:rPr>
-              <a:t>教师讲述：</a:t>
+              <a:t/>
             </a:r>
           </a:p>
           <a:p>
@@ -5932,10 +4949,13 @@
                 <a:ea typeface="微软雅黑"/>
                 <a:cs typeface="微软雅黑"/>
               </a:rPr>
-              <a:t>当堂只验收风险卡、权限一行和使用记录；课后沿用它们更新工件追踪，不正式提交；第 6 课问题门再检查完整项目版本。</a:t>
-            </a:r>
-          </a:p>
-          <a:p>
+              <a:t>课堂安排：按本稿下方 90 分钟教学路由安排；此页不另占独立时段。</a:t>
+            </a:r>
+          </a:p>
+          <a:p>
+            <a:r>
+              <a:t/>
+            </a:r>
             <a:endParaRPr sz="1200" b="0">
               <a:solidFill>
                 <a:srgbClr val="24292F"/>
@@ -5955,7 +4975,7 @@
                 <a:ea typeface="微软雅黑"/>
                 <a:cs typeface="微软雅黑"/>
               </a:rPr>
-              <a:t>学生动作：</a:t>
+              <a:t>[Sources]</a:t>
             </a:r>
           </a:p>
           <a:p>
@@ -5968,10 +4988,13 @@
                 <a:ea typeface="微软雅黑"/>
                 <a:cs typeface="微软雅黑"/>
               </a:rPr>
-              <a:t>记录一个进入第 3 课的公开检索问题</a:t>
-            </a:r>
-          </a:p>
-          <a:p>
+              <a:t>本课 handout.md、judgment-task.md；../../course/judgment-path.md。教学构造仅用于方法判断；本人结果以实际记录为准。</a:t>
+            </a:r>
+          </a:p>
+          <a:p>
+            <a:r>
+              <a:t>[/Sources]</a:t>
+            </a:r>
             <a:endParaRPr sz="1200" b="0">
               <a:solidFill>
                 <a:srgbClr val="24292F"/>
@@ -5980,101 +5003,6 @@
               <a:ea typeface="微软雅黑"/>
               <a:cs typeface="微软雅黑"/>
             </a:endParaRPr>
-          </a:p>
-          <a:p>
-            <a:r>
-              <a:rPr sz="1200" b="0">
-                <a:solidFill>
-                  <a:srgbClr val="24292F"/>
-                </a:solidFill>
-                <a:latin typeface="微软雅黑"/>
-                <a:ea typeface="微软雅黑"/>
-                <a:cs typeface="微软雅黑"/>
-              </a:rPr>
-              <a:t>来源与边界：</a:t>
-            </a:r>
-          </a:p>
-          <a:p>
-            <a:r>
-              <a:rPr sz="1200" b="0">
-                <a:solidFill>
-                  <a:srgbClr val="24292F"/>
-                </a:solidFill>
-                <a:latin typeface="微软雅黑"/>
-                <a:ea typeface="微软雅黑"/>
-                <a:cs typeface="微软雅黑"/>
-              </a:rPr>
-              <a:t>/Users/bright/Projects/courses/graduate/lessons/lesson-02/handout.md；/Users/bright/Projects/courses/graduate/course/syllabus.md</a:t>
-            </a:r>
-          </a:p>
-          <a:p>
-            <a:endParaRPr sz="1200" b="0">
-              <a:solidFill>
-                <a:srgbClr val="24292F"/>
-              </a:solidFill>
-              <a:latin typeface="微软雅黑"/>
-              <a:ea typeface="微软雅黑"/>
-              <a:cs typeface="微软雅黑"/>
-            </a:endParaRPr>
-          </a:p>
-          <a:p>
-            <a:r>
-              <a:rPr sz="1200" b="0">
-                <a:solidFill>
-                  <a:srgbClr val="24292F"/>
-                </a:solidFill>
-                <a:latin typeface="微软雅黑"/>
-                <a:ea typeface="微软雅黑"/>
-                <a:cs typeface="微软雅黑"/>
-              </a:rPr>
-              <a:t>[Sources]</a:t>
-            </a:r>
-          </a:p>
-          <a:p>
-            <a:endParaRPr sz="1200" b="0">
-              <a:solidFill>
-                <a:srgbClr val="24292F"/>
-              </a:solidFill>
-              <a:latin typeface="微软雅黑"/>
-              <a:ea typeface="微软雅黑"/>
-              <a:cs typeface="微软雅黑"/>
-            </a:endParaRPr>
-          </a:p>
-          <a:p>
-            <a:r>
-              <a:rPr sz="1200" b="0">
-                <a:solidFill>
-                  <a:srgbClr val="24292F"/>
-                </a:solidFill>
-                <a:latin typeface="微软雅黑"/>
-                <a:ea typeface="微软雅黑"/>
-                <a:cs typeface="微软雅黑"/>
-              </a:rPr>
-              <a:t>- 本课 handout.md 与 slides.md</a:t>
-            </a:r>
-          </a:p>
-          <a:p>
-            <a:endParaRPr sz="1200" b="0">
-              <a:solidFill>
-                <a:srgbClr val="24292F"/>
-              </a:solidFill>
-              <a:latin typeface="微软雅黑"/>
-              <a:ea typeface="微软雅黑"/>
-              <a:cs typeface="微软雅黑"/>
-            </a:endParaRPr>
-          </a:p>
-          <a:p>
-            <a:r>
-              <a:rPr sz="1200" b="0">
-                <a:solidFill>
-                  <a:srgbClr val="24292F"/>
-                </a:solidFill>
-                <a:latin typeface="微软雅黑"/>
-                <a:ea typeface="微软雅黑"/>
-                <a:cs typeface="微软雅黑"/>
-              </a:rPr>
-              <a:t>[/Sources]</a:t>
-            </a:r>
           </a:p>
         </p:txBody>
       </p:sp>
@@ -6150,132 +5078,73 @@
           <a:lstStyle/>
           <a:p>
             <a:r>
-              <a:rPr lang="zh-CN"/>
               <a:t>页面：P03 从 diff 与日志到材料、动作和责任</a:t>
             </a:r>
           </a:p>
           <a:p>
-            <a:endParaRPr lang="zh-CN"/>
-          </a:p>
-          <a:p>
-            <a:r>
-              <a:rPr lang="zh-CN"/>
-              <a:t>屏显核对：</a:t>
-            </a:r>
-          </a:p>
-          <a:p>
-            <a:r>
-              <a:rPr lang="zh-CN"/>
-              <a:t>第 1 课的记录，还需要补什么？；材料；输入是否获得授权，来源是什么？；动作；只读、写入、执行，还是对外发送？；确认；哪一步需要暂停，由谁决定继续？；责任；实际发生了什么，由谁核验和承担？</a:t>
-            </a:r>
-          </a:p>
-          <a:p>
-            <a:endParaRPr lang="zh-CN"/>
-          </a:p>
-          <a:p>
-            <a:r>
-              <a:rPr lang="zh-CN"/>
-              <a:t>教师讲述：</a:t>
-            </a:r>
-          </a:p>
-          <a:p>
-            <a:r>
-              <a:rPr lang="zh-CN"/>
-              <a:t>回看第 1 课阅读卡问题的一次有限写回：diff 和日志说明文件发生了什么变化，材料身份、授权与外发条件仍需单独判断。这里沿用公开材料的课堂构造示例。</a:t>
-            </a:r>
-          </a:p>
-          <a:p>
-            <a:endParaRPr lang="zh-CN"/>
-          </a:p>
-          <a:p>
-            <a:r>
-              <a:rPr lang="zh-CN"/>
+            <a:r>
+              <a:t/>
+            </a:r>
+            <a:endParaRPr/>
+          </a:p>
+          <a:p>
+            <a:r>
+              <a:t>讲述与校准：</a:t>
+            </a:r>
+          </a:p>
+          <a:p>
+            <a:r>
+              <a:t/>
+            </a:r>
+          </a:p>
+          <a:p>
+            <a:r>
+              <a:t/>
+            </a:r>
+            <a:endParaRPr/>
+          </a:p>
+          <a:p>
+            <a:r>
               <a:t>学生动作：</a:t>
             </a:r>
           </a:p>
           <a:p>
             <a:r>
-              <a:rPr lang="zh-CN"/>
-              <a:t>指出自己日志最缺的一项</a:t>
-            </a:r>
-          </a:p>
-          <a:p>
-            <a:endParaRPr lang="zh-CN"/>
-          </a:p>
-          <a:p>
-            <a:r>
-              <a:rPr lang="zh-CN"/>
-              <a:t>讲义位置：导读</a:t>
-            </a:r>
-          </a:p>
-          <a:p>
-            <a:endParaRPr lang="zh-CN"/>
-          </a:p>
-          <a:p>
-            <a:r>
-              <a:rPr lang="zh-CN"/>
-              <a:t>来源与边界：</a:t>
-            </a:r>
-          </a:p>
-          <a:p>
-            <a:r>
-              <a:rPr lang="zh-CN"/>
-              <a:t>/Users/bright/Projects/courses/graduate/lessons/lesson-02/handout.md</a:t>
-            </a:r>
-          </a:p>
-          <a:p>
-            <a:endParaRPr lang="zh-CN"/>
-          </a:p>
-          <a:p>
-            <a:r>
-              <a:rPr lang="zh-CN"/>
-              <a:t>开场诊断：只看上一讲留下的 diff 和日志，能否判断材料是否授权、读写范围与外发条件、人工确认点和责任人？</a:t>
-            </a:r>
-          </a:p>
-          <a:p>
-            <a:r>
-              <a:rPr lang="zh-CN"/>
-              <a:t>预期回答：还需检查这些治理条件。</a:t>
-            </a:r>
-          </a:p>
-          <a:p>
-            <a:r>
-              <a:rPr lang="zh-CN"/>
-              <a:t>本课当堂最小产出：五字段风险卡一张、权限矩阵一行、AI 使用记录一条；另完成一次只读边界审查。</a:t>
-            </a:r>
-          </a:p>
-          <a:p>
-            <a:endParaRPr lang="zh-CN"/>
-          </a:p>
-          <a:p>
-            <a:r>
-              <a:rPr lang="zh-CN"/>
+              <a:t>依据本页方法检查本人项目；按需参考。</a:t>
+            </a:r>
+          </a:p>
+          <a:p>
+            <a:r>
+              <a:t/>
+            </a:r>
+            <a:endParaRPr/>
+          </a:p>
+          <a:p>
+            <a:r>
+              <a:t>课堂安排：按本稿下方 90 分钟教学路由安排；此页不另占独立时段。</a:t>
+            </a:r>
+          </a:p>
+          <a:p>
+            <a:r>
+              <a:t/>
+            </a:r>
+          </a:p>
+          <a:p>
+            <a:r>
               <a:t>[Sources]</a:t>
             </a:r>
-          </a:p>
-          <a:p>
-            <a:r>
-              <a:rPr lang="zh-CN"/>
-              <a:t>- lessons/lesson-01/slides.md P33–P35</a:t>
-            </a:r>
-          </a:p>
-          <a:p>
-            <a:r>
-              <a:rPr lang="zh-CN"/>
-              <a:t>- lessons/lesson-01/classroom-pack.md</a:t>
-            </a:r>
-          </a:p>
-          <a:p>
-            <a:r>
-              <a:rPr lang="zh-CN"/>
-              <a:t>- lessons/lesson-02/slides.md 与 teaching-plan.md</a:t>
-            </a:r>
-          </a:p>
-          <a:p>
-            <a:r>
-              <a:rPr lang="zh-CN"/>
+            <a:endParaRPr/>
+          </a:p>
+          <a:p>
+            <a:r>
+              <a:t>本课 handout.md、judgment-task.md；../../course/judgment-path.md。</a:t>
+            </a:r>
+          </a:p>
+          <a:p>
+            <a:r>
               <a:t>[/Sources]</a:t>
             </a:r>
+            <a:endParaRPr/>
           </a:p>
         </p:txBody>
       </p:sp>
@@ -6359,10 +5228,13 @@
                 <a:ea typeface="微软雅黑"/>
                 <a:cs typeface="微软雅黑"/>
               </a:rPr>
-              <a:t>页面：P04 这份合作稿可以交给外部模型吗？</a:t>
-            </a:r>
-          </a:p>
-          <a:p>
+              <a:t>页面：P04 声明与 trace 的缺口</a:t>
+            </a:r>
+          </a:p>
+          <a:p>
+            <a:r>
+              <a:t/>
+            </a:r>
             <a:endParaRPr sz="1200" b="0">
               <a:solidFill>
                 <a:srgbClr val="24292F"/>
@@ -6382,10 +5254,13 @@
                 <a:ea typeface="微软雅黑"/>
                 <a:cs typeface="微软雅黑"/>
               </a:rPr>
-              <a:t>讲义位置：§八·案例 A</a:t>
-            </a:r>
-          </a:p>
-          <a:p>
+              <a:t>讲述与校准：</a:t>
+            </a:r>
+          </a:p>
+          <a:p>
+            <a:r>
+              <a:t>先独立作答，再同伴比较；以下依据只在校准时揭示。</a:t>
+            </a:r>
             <a:endParaRPr sz="1200" b="0">
               <a:solidFill>
                 <a:srgbClr val="24292F"/>
@@ -6405,7 +5280,7 @@
                 <a:ea typeface="微软雅黑"/>
                 <a:cs typeface="微软雅黑"/>
               </a:rPr>
-              <a:t>屏显核对：</a:t>
+              <a:t/>
             </a:r>
           </a:p>
           <a:p>
@@ -6418,10 +5293,13 @@
                 <a:ea typeface="微软雅黑"/>
                 <a:cs typeface="微软雅黑"/>
               </a:rPr>
-              <a:t>课堂构造案例；你有一份未公开的合作稿， / 想交给个人账户下的外部模型， / 帮助梳理相关研究。；没有共同作者授权记录，也没有核对平台条款。；允许；有条件允许；禁止；先作判断，再说明决定性条件。</a:t>
-            </a:r>
-          </a:p>
-          <a:p>
+              <a:t>E4 超出任务读范围；E5 的 diff 不能证明前序读取合法。B 对当前契约成立。也可在动作前基于任务必要性申请单一文件读取并更新授权，不能事后扩大白名单抹平事实。network=off 只是声明时，不能推断网络隔离已实现。</a:t>
+            </a:r>
+          </a:p>
+          <a:p>
+            <a:r>
+              <a:t/>
+            </a:r>
             <a:endParaRPr sz="1200" b="0">
               <a:solidFill>
                 <a:srgbClr val="24292F"/>
@@ -6441,7 +5319,7 @@
                 <a:ea typeface="微软雅黑"/>
                 <a:cs typeface="微软雅黑"/>
               </a:rPr>
-              <a:t>教师讲述：</a:t>
+              <a:t>学生动作：</a:t>
             </a:r>
           </a:p>
           <a:p>
@@ -6454,10 +5332,13 @@
                 <a:ea typeface="微软雅黑"/>
                 <a:cs typeface="微软雅黑"/>
               </a:rPr>
-              <a:t>此处从第 1 课阅读卡动作迁移到明确标注的虚构合作稿，沿用材料、动作和人工确认的检查方法。就当前信息，不可上传原稿：缺共同作者授权和平台条款核对。“有条件允许”只描述补齐条件后的新情境，不表示现在可先发。完成判断后切换到公开构造材料，继续示范风险卡与授权边界。先让每人选一档，再请邻座互述一个决定性条件，最后收束。</a:t>
-            </a:r>
-          </a:p>
-          <a:p>
+              <a:t>先独立写决定和证据，后同伴比较；校准后再回写。</a:t>
+            </a:r>
+          </a:p>
+          <a:p>
+            <a:r>
+              <a:t/>
+            </a:r>
             <a:endParaRPr sz="1200" b="0">
               <a:solidFill>
                 <a:srgbClr val="24292F"/>
@@ -6477,7 +5358,7 @@
                 <a:ea typeface="微软雅黑"/>
                 <a:cs typeface="微软雅黑"/>
               </a:rPr>
-              <a:t>学生动作：</a:t>
+              <a:t>课堂安排：按本稿下方 90 分钟教学路由安排；此页不另占独立时段。</a:t>
             </a:r>
           </a:p>
           <a:p>
@@ -6490,10 +5371,13 @@
                 <a:ea typeface="微软雅黑"/>
                 <a:cs typeface="微软雅黑"/>
               </a:rPr>
-              <a:t>个人选择允许/有条件允许/禁止，再临时结对陈述理由</a:t>
-            </a:r>
-          </a:p>
-          <a:p>
+              <a:t/>
+            </a:r>
+          </a:p>
+          <a:p>
+            <a:r>
+              <a:t>[Sources]</a:t>
+            </a:r>
             <a:endParaRPr sz="1200" b="0">
               <a:solidFill>
                 <a:srgbClr val="24292F"/>
@@ -6513,77 +5397,8 @@
                 <a:ea typeface="微软雅黑"/>
                 <a:cs typeface="微软雅黑"/>
               </a:rPr>
-              <a:t>来源与边界：</a:t>
-            </a:r>
-          </a:p>
-          <a:p>
-            <a:r>
-              <a:rPr sz="1200" b="0">
-                <a:solidFill>
-                  <a:srgbClr val="24292F"/>
-                </a:solidFill>
-                <a:latin typeface="微软雅黑"/>
-                <a:ea typeface="微软雅黑"/>
-                <a:cs typeface="微软雅黑"/>
-              </a:rPr>
-              <a:t>/Users/bright/Projects/courses/graduate/lessons/lesson-02/handout.md</a:t>
-            </a:r>
-          </a:p>
-          <a:p>
-            <a:endParaRPr sz="1200" b="0">
-              <a:solidFill>
-                <a:srgbClr val="24292F"/>
-              </a:solidFill>
-              <a:latin typeface="微软雅黑"/>
-              <a:ea typeface="微软雅黑"/>
-              <a:cs typeface="微软雅黑"/>
-            </a:endParaRPr>
-          </a:p>
-          <a:p>
-            <a:r>
-              <a:rPr sz="1200" b="0">
-                <a:solidFill>
-                  <a:srgbClr val="24292F"/>
-                </a:solidFill>
-                <a:latin typeface="微软雅黑"/>
-                <a:ea typeface="微软雅黑"/>
-                <a:cs typeface="微软雅黑"/>
-              </a:rPr>
-              <a:t>[Sources]</a:t>
-            </a:r>
-          </a:p>
-          <a:p>
-            <a:endParaRPr sz="1200" b="0">
-              <a:solidFill>
-                <a:srgbClr val="24292F"/>
-              </a:solidFill>
-              <a:latin typeface="微软雅黑"/>
-              <a:ea typeface="微软雅黑"/>
-              <a:cs typeface="微软雅黑"/>
-            </a:endParaRPr>
-          </a:p>
-          <a:p>
-            <a:r>
-              <a:rPr sz="1200" b="0">
-                <a:solidFill>
-                  <a:srgbClr val="24292F"/>
-                </a:solidFill>
-                <a:latin typeface="微软雅黑"/>
-                <a:ea typeface="微软雅黑"/>
-                <a:cs typeface="微软雅黑"/>
-              </a:rPr>
-              <a:t>- 本课 handout.md 与 slides.md</a:t>
-            </a:r>
-          </a:p>
-          <a:p>
-            <a:endParaRPr sz="1200" b="0">
-              <a:solidFill>
-                <a:srgbClr val="24292F"/>
-              </a:solidFill>
-              <a:latin typeface="微软雅黑"/>
-              <a:ea typeface="微软雅黑"/>
-              <a:cs typeface="微软雅黑"/>
-            </a:endParaRPr>
+              <a:t>本课 handout.md、judgment-task.md；../../course/judgment-path.md。教学构造仅用于方法判断；本人结果以实际记录为准。</a:t>
+            </a:r>
           </a:p>
           <a:p>
             <a:r>
@@ -6684,6 +5499,9 @@
             </a:r>
           </a:p>
           <a:p>
+            <a:r>
+              <a:t/>
+            </a:r>
             <a:endParaRPr sz="1200" b="0">
               <a:solidFill>
                 <a:srgbClr val="24292F"/>
@@ -6703,10 +5521,13 @@
                 <a:ea typeface="微软雅黑"/>
                 <a:cs typeface="微软雅黑"/>
               </a:rPr>
-              <a:t>讲义位置：§一</a:t>
-            </a:r>
-          </a:p>
-          <a:p>
+              <a:t>讲述与校准：</a:t>
+            </a:r>
+          </a:p>
+          <a:p>
+            <a:r>
+              <a:t/>
+            </a:r>
             <a:endParaRPr sz="1200" b="0">
               <a:solidFill>
                 <a:srgbClr val="24292F"/>
@@ -6726,7 +5547,7 @@
                 <a:ea typeface="微软雅黑"/>
                 <a:cs typeface="微软雅黑"/>
               </a:rPr>
-              <a:t>屏显核对：</a:t>
+              <a:t/>
             </a:r>
           </a:p>
           <a:p>
@@ -6739,10 +5560,13 @@
                 <a:ea typeface="微软雅黑"/>
                 <a:cs typeface="微软雅黑"/>
               </a:rPr>
-              <a:t>NASEM · Fostering Integrity in Research · 2017；客观；objectivity；诚实；honesty；开放；openness；公平；fairness；问责；accountability；守护责任；stewardship；一次 Agent 动作，可能损害其中哪项价值？</a:t>
-            </a:r>
-          </a:p>
-          <a:p>
+              <a:t>学生动作：</a:t>
+            </a:r>
+          </a:p>
+          <a:p>
+            <a:r>
+              <a:t>依据本页方法检查本人项目；按需参考。</a:t>
+            </a:r>
             <a:endParaRPr sz="1200" b="0">
               <a:solidFill>
                 <a:srgbClr val="24292F"/>
@@ -6762,7 +5586,7 @@
                 <a:ea typeface="微软雅黑"/>
                 <a:cs typeface="微软雅黑"/>
               </a:rPr>
-              <a:t>教师讲述：</a:t>
+              <a:t/>
             </a:r>
           </a:p>
           <a:p>
@@ -6775,10 +5599,13 @@
                 <a:ea typeface="微软雅黑"/>
                 <a:cs typeface="微软雅黑"/>
               </a:rPr>
-              <a:t>让学生先看原始文件，再用六项中文标签总结。</a:t>
-            </a:r>
-          </a:p>
-          <a:p>
+              <a:t>课堂安排：按本稿下方 90 分钟教学路由安排；此页不另占独立时段。</a:t>
+            </a:r>
+          </a:p>
+          <a:p>
+            <a:r>
+              <a:t/>
+            </a:r>
             <a:endParaRPr sz="1200" b="0">
               <a:solidFill>
                 <a:srgbClr val="24292F"/>
@@ -6798,7 +5625,7 @@
                 <a:ea typeface="微软雅黑"/>
                 <a:cs typeface="微软雅黑"/>
               </a:rPr>
-              <a:t>学生动作：</a:t>
+              <a:t>[Sources]</a:t>
             </a:r>
           </a:p>
           <a:p>
@@ -6811,10 +5638,13 @@
                 <a:ea typeface="微软雅黑"/>
                 <a:cs typeface="微软雅黑"/>
               </a:rPr>
-              <a:t>指出 Agent 动作可能损害哪项价值</a:t>
-            </a:r>
-          </a:p>
-          <a:p>
+              <a:t>本课 handout.md、judgment-task.md；../../course/judgment-path.md。</a:t>
+            </a:r>
+          </a:p>
+          <a:p>
+            <a:r>
+              <a:t>[/Sources]</a:t>
+            </a:r>
             <a:endParaRPr sz="1200" b="0">
               <a:solidFill>
                 <a:srgbClr val="24292F"/>
@@ -6823,124 +5653,6 @@
               <a:ea typeface="微软雅黑"/>
               <a:cs typeface="微软雅黑"/>
             </a:endParaRPr>
-          </a:p>
-          <a:p>
-            <a:r>
-              <a:rPr sz="1200" b="0">
-                <a:solidFill>
-                  <a:srgbClr val="24292F"/>
-                </a:solidFill>
-                <a:latin typeface="微软雅黑"/>
-                <a:ea typeface="微软雅黑"/>
-                <a:cs typeface="微软雅黑"/>
-              </a:rPr>
-              <a:t>来源与边界：</a:t>
-            </a:r>
-          </a:p>
-          <a:p>
-            <a:r>
-              <a:rPr sz="1200" b="0">
-                <a:solidFill>
-                  <a:srgbClr val="24292F"/>
-                </a:solidFill>
-                <a:latin typeface="微软雅黑"/>
-                <a:ea typeface="微软雅黑"/>
-                <a:cs typeface="微软雅黑"/>
-              </a:rPr>
-              <a:t>https://doi.org/10.17226/21896</a:t>
-            </a:r>
-          </a:p>
-          <a:p>
-            <a:endParaRPr sz="1200" b="0">
-              <a:solidFill>
-                <a:srgbClr val="24292F"/>
-              </a:solidFill>
-              <a:latin typeface="微软雅黑"/>
-              <a:ea typeface="微软雅黑"/>
-              <a:cs typeface="微软雅黑"/>
-            </a:endParaRPr>
-          </a:p>
-          <a:p>
-            <a:r>
-              <a:rPr sz="1200" b="0">
-                <a:solidFill>
-                  <a:srgbClr val="24292F"/>
-                </a:solidFill>
-                <a:latin typeface="微软雅黑"/>
-                <a:ea typeface="微软雅黑"/>
-                <a:cs typeface="微软雅黑"/>
-              </a:rPr>
-              <a:t>[Sources]</a:t>
-            </a:r>
-          </a:p>
-          <a:p>
-            <a:endParaRPr sz="1200" b="0">
-              <a:solidFill>
-                <a:srgbClr val="24292F"/>
-              </a:solidFill>
-              <a:latin typeface="微软雅黑"/>
-              <a:ea typeface="微软雅黑"/>
-              <a:cs typeface="微软雅黑"/>
-            </a:endParaRPr>
-          </a:p>
-          <a:p>
-            <a:r>
-              <a:rPr sz="1200" b="0">
-                <a:solidFill>
-                  <a:srgbClr val="24292F"/>
-                </a:solidFill>
-                <a:latin typeface="微软雅黑"/>
-                <a:ea typeface="微软雅黑"/>
-                <a:cs typeface="微软雅黑"/>
-              </a:rPr>
-              <a:t>- https://doi.org/10.17226/21896</a:t>
-            </a:r>
-          </a:p>
-          <a:p>
-            <a:endParaRPr sz="1200" b="0">
-              <a:solidFill>
-                <a:srgbClr val="24292F"/>
-              </a:solidFill>
-              <a:latin typeface="微软雅黑"/>
-              <a:ea typeface="微软雅黑"/>
-              <a:cs typeface="微软雅黑"/>
-            </a:endParaRPr>
-          </a:p>
-          <a:p>
-            <a:r>
-              <a:rPr sz="1200" b="0">
-                <a:solidFill>
-                  <a:srgbClr val="24292F"/>
-                </a:solidFill>
-                <a:latin typeface="微软雅黑"/>
-                <a:ea typeface="微软雅黑"/>
-                <a:cs typeface="微软雅黑"/>
-              </a:rPr>
-              <a:t>- 本课 handout.md 与 slides.md</a:t>
-            </a:r>
-          </a:p>
-          <a:p>
-            <a:endParaRPr sz="1200" b="0">
-              <a:solidFill>
-                <a:srgbClr val="24292F"/>
-              </a:solidFill>
-              <a:latin typeface="微软雅黑"/>
-              <a:ea typeface="微软雅黑"/>
-              <a:cs typeface="微软雅黑"/>
-            </a:endParaRPr>
-          </a:p>
-          <a:p>
-            <a:r>
-              <a:rPr sz="1200" b="0">
-                <a:solidFill>
-                  <a:srgbClr val="24292F"/>
-                </a:solidFill>
-                <a:latin typeface="微软雅黑"/>
-                <a:ea typeface="微软雅黑"/>
-                <a:cs typeface="微软雅黑"/>
-              </a:rPr>
-              <a:t>[/Sources]</a:t>
-            </a:r>
           </a:p>
         </p:txBody>
       </p:sp>
@@ -7028,6 +5740,9 @@
             </a:r>
           </a:p>
           <a:p>
+            <a:r>
+              <a:t/>
+            </a:r>
             <a:endParaRPr sz="1200" b="0">
               <a:solidFill>
                 <a:srgbClr val="24292F"/>
@@ -7047,10 +5762,13 @@
                 <a:ea typeface="微软雅黑"/>
                 <a:cs typeface="微软雅黑"/>
               </a:rPr>
-              <a:t>讲义位置：§一、§二</a:t>
-            </a:r>
-          </a:p>
-          <a:p>
+              <a:t>讲述与校准：</a:t>
+            </a:r>
+          </a:p>
+          <a:p>
+            <a:r>
+              <a:t/>
+            </a:r>
             <a:endParaRPr sz="1200" b="0">
               <a:solidFill>
                 <a:srgbClr val="24292F"/>
@@ -7070,7 +5788,7 @@
                 <a:ea typeface="微软雅黑"/>
                 <a:cs typeface="微软雅黑"/>
               </a:rPr>
-              <a:t>屏显核对：</a:t>
+              <a:t/>
             </a:r>
           </a:p>
           <a:p>
@@ -7083,10 +5801,13 @@
                 <a:ea typeface="微软雅黑"/>
                 <a:cs typeface="微软雅黑"/>
               </a:rPr>
-              <a:t>中国科学院 · 2024；上海交通大学 · 试行版；《科研活动 AI 诚信提醒》；《教育教学中使用 AI 的规范》；科研活动中的诚信要求；核验与披露 AI 使用 / 保护数据和未公开材料；教育教学场景的分类治理；禁止使用 / 有限使用 / 鼓励使用 / 开放使用</a:t>
-            </a:r>
-          </a:p>
-          <a:p>
+              <a:t>学生动作：</a:t>
+            </a:r>
+          </a:p>
+          <a:p>
+            <a:r>
+              <a:t>依据本页方法检查本人项目；按需参考。</a:t>
+            </a:r>
             <a:endParaRPr sz="1200" b="0">
               <a:solidFill>
                 <a:srgbClr val="24292F"/>
@@ -7106,7 +5827,7 @@
                 <a:ea typeface="微软雅黑"/>
                 <a:cs typeface="微软雅黑"/>
               </a:rPr>
-              <a:t>教师讲述：</a:t>
+              <a:t/>
             </a:r>
           </a:p>
           <a:p>
@@ -7119,10 +5840,13 @@
                 <a:ea typeface="微软雅黑"/>
                 <a:cs typeface="微软雅黑"/>
               </a:rPr>
-              <a:t>左右等宽，避免视觉上暗示上下级从属。</a:t>
-            </a:r>
-          </a:p>
-          <a:p>
+              <a:t>课堂安排：按本稿下方 90 分钟教学路由安排；此页不另占独立时段。</a:t>
+            </a:r>
+          </a:p>
+          <a:p>
+            <a:r>
+              <a:t/>
+            </a:r>
             <a:endParaRPr sz="1200" b="0">
               <a:solidFill>
                 <a:srgbClr val="24292F"/>
@@ -7142,7 +5866,7 @@
                 <a:ea typeface="微软雅黑"/>
                 <a:cs typeface="微软雅黑"/>
               </a:rPr>
-              <a:t>学生动作：</a:t>
+              <a:t>[Sources]</a:t>
             </a:r>
           </a:p>
           <a:p>
@@ -7155,10 +5879,13 @@
                 <a:ea typeface="微软雅黑"/>
                 <a:cs typeface="微软雅黑"/>
               </a:rPr>
-              <a:t>分别说出两项来源对当前案例提供什么</a:t>
-            </a:r>
-          </a:p>
-          <a:p>
+              <a:t>本课 handout.md、judgment-task.md；../../course/judgment-path.md。</a:t>
+            </a:r>
+          </a:p>
+          <a:p>
+            <a:r>
+              <a:t>[/Sources]</a:t>
+            </a:r>
             <a:endParaRPr sz="1200" b="0">
               <a:solidFill>
                 <a:srgbClr val="24292F"/>
@@ -7167,147 +5894,6 @@
               <a:ea typeface="微软雅黑"/>
               <a:cs typeface="微软雅黑"/>
             </a:endParaRPr>
-          </a:p>
-          <a:p>
-            <a:r>
-              <a:rPr sz="1200" b="0">
-                <a:solidFill>
-                  <a:srgbClr val="24292F"/>
-                </a:solidFill>
-                <a:latin typeface="微软雅黑"/>
-                <a:ea typeface="微软雅黑"/>
-                <a:cs typeface="微软雅黑"/>
-              </a:rPr>
-              <a:t>来源与边界：</a:t>
-            </a:r>
-          </a:p>
-          <a:p>
-            <a:r>
-              <a:rPr sz="1200" b="0">
-                <a:solidFill>
-                  <a:srgbClr val="24292F"/>
-                </a:solidFill>
-                <a:latin typeface="微软雅黑"/>
-                <a:ea typeface="微软雅黑"/>
-                <a:cs typeface="微软雅黑"/>
-              </a:rPr>
-              <a:t>https://www.cas.cn/sygz/202409/t20240910_5031186.shtml；https://soo.sjtu.edu.cn/upload/file/20250217/20250217162021.pdf</a:t>
-            </a:r>
-          </a:p>
-          <a:p>
-            <a:endParaRPr sz="1200" b="0">
-              <a:solidFill>
-                <a:srgbClr val="24292F"/>
-              </a:solidFill>
-              <a:latin typeface="微软雅黑"/>
-              <a:ea typeface="微软雅黑"/>
-              <a:cs typeface="微软雅黑"/>
-            </a:endParaRPr>
-          </a:p>
-          <a:p>
-            <a:r>
-              <a:rPr sz="1200" b="0">
-                <a:solidFill>
-                  <a:srgbClr val="24292F"/>
-                </a:solidFill>
-                <a:latin typeface="微软雅黑"/>
-                <a:ea typeface="微软雅黑"/>
-                <a:cs typeface="微软雅黑"/>
-              </a:rPr>
-              <a:t>[Sources]</a:t>
-            </a:r>
-          </a:p>
-          <a:p>
-            <a:endParaRPr sz="1200" b="0">
-              <a:solidFill>
-                <a:srgbClr val="24292F"/>
-              </a:solidFill>
-              <a:latin typeface="微软雅黑"/>
-              <a:ea typeface="微软雅黑"/>
-              <a:cs typeface="微软雅黑"/>
-            </a:endParaRPr>
-          </a:p>
-          <a:p>
-            <a:r>
-              <a:rPr sz="1200" b="0">
-                <a:solidFill>
-                  <a:srgbClr val="24292F"/>
-                </a:solidFill>
-                <a:latin typeface="微软雅黑"/>
-                <a:ea typeface="微软雅黑"/>
-                <a:cs typeface="微软雅黑"/>
-              </a:rPr>
-              <a:t>- https://www.cas.cn/sygz/202409/t20240910_5031186.shtml</a:t>
-            </a:r>
-          </a:p>
-          <a:p>
-            <a:endParaRPr sz="1200" b="0">
-              <a:solidFill>
-                <a:srgbClr val="24292F"/>
-              </a:solidFill>
-              <a:latin typeface="微软雅黑"/>
-              <a:ea typeface="微软雅黑"/>
-              <a:cs typeface="微软雅黑"/>
-            </a:endParaRPr>
-          </a:p>
-          <a:p>
-            <a:r>
-              <a:rPr sz="1200" b="0">
-                <a:solidFill>
-                  <a:srgbClr val="24292F"/>
-                </a:solidFill>
-                <a:latin typeface="微软雅黑"/>
-                <a:ea typeface="微软雅黑"/>
-                <a:cs typeface="微软雅黑"/>
-              </a:rPr>
-              <a:t>- https://soo.sjtu.edu.cn/upload/file/20250217/20250217162021.pdf</a:t>
-            </a:r>
-          </a:p>
-          <a:p>
-            <a:endParaRPr sz="1200" b="0">
-              <a:solidFill>
-                <a:srgbClr val="24292F"/>
-              </a:solidFill>
-              <a:latin typeface="微软雅黑"/>
-              <a:ea typeface="微软雅黑"/>
-              <a:cs typeface="微软雅黑"/>
-            </a:endParaRPr>
-          </a:p>
-          <a:p>
-            <a:r>
-              <a:rPr sz="1200" b="0">
-                <a:solidFill>
-                  <a:srgbClr val="24292F"/>
-                </a:solidFill>
-                <a:latin typeface="微软雅黑"/>
-                <a:ea typeface="微软雅黑"/>
-                <a:cs typeface="微软雅黑"/>
-              </a:rPr>
-              <a:t>- 本课 handout.md 与 slides.md</a:t>
-            </a:r>
-          </a:p>
-          <a:p>
-            <a:endParaRPr sz="1200" b="0">
-              <a:solidFill>
-                <a:srgbClr val="24292F"/>
-              </a:solidFill>
-              <a:latin typeface="微软雅黑"/>
-              <a:ea typeface="微软雅黑"/>
-              <a:cs typeface="微软雅黑"/>
-            </a:endParaRPr>
-          </a:p>
-          <a:p>
-            <a:r>
-              <a:rPr sz="1200" b="0">
-                <a:solidFill>
-                  <a:srgbClr val="24292F"/>
-                </a:solidFill>
-                <a:latin typeface="微软雅黑"/>
-                <a:ea typeface="微软雅黑"/>
-                <a:cs typeface="微软雅黑"/>
-              </a:rPr>
-              <a:t>[/Sources]</a:t>
-            </a:r>
           </a:p>
         </p:txBody>
       </p:sp>
@@ -7383,129 +5969,73 @@
           <a:lstStyle/>
           <a:p>
             <a:r>
-              <a:rPr lang="zh-CN"/>
               <a:t>页面：P07 合作稿：输入与处理环境</a:t>
             </a:r>
           </a:p>
           <a:p>
             <a:r>
-              <a:rPr lang="zh-CN"/>
               <a:t/>
             </a:r>
-          </a:p>
-          <a:p>
-            <a:r>
-              <a:rPr lang="zh-CN"/>
-              <a:t>屏显核对：</a:t>
-            </a:r>
-          </a:p>
-          <a:p>
-            <a:r>
-              <a:rPr lang="zh-CN"/>
-              <a:t>同一研究目标：梳理研究问题与相关线索；当前路径；合作原稿；缺少发送授权；平台条款未核对；暂停外发；可继续的路径；确认输入与环境；获准讨论的问题描述；符合要求的处理环境；AI 辅助讨论；研究问题与相关线索；研究者核验；检查依据，记录取舍；先确认可讨论内容与处理环境，再决定是否发送。</a:t>
-            </a:r>
-          </a:p>
-          <a:p>
-            <a:r>
-              <a:rPr lang="zh-CN"/>
+            <a:endParaRPr/>
+          </a:p>
+          <a:p>
+            <a:r>
+              <a:t>讲述与校准：</a:t>
+            </a:r>
+          </a:p>
+          <a:p>
+            <a:r>
               <a:t/>
             </a:r>
           </a:p>
           <a:p>
             <a:r>
-              <a:rPr lang="zh-CN"/>
-              <a:t>教师讲述：</a:t>
-            </a:r>
-          </a:p>
-          <a:p>
-            <a:r>
-              <a:rPr lang="zh-CN"/>
-              <a:t>P04 的研究目标仍是梳理这份合作稿的研究问题与相关线索。当前没有原稿发送授权，平台条款也未核对，所以先暂停。继续讨论前，要确认哪些问题描述可提供给模型，所选环境能否处理这些内容；合作问题需要相应材料权利人的同意。下方描述条件满足后的新路径，不代表当前已经获准。AI 可以协助讨论研究问题、提出相关线索，研究者核验依据并记录取舍。本人可以自主决定分享、且符合所选环境要求的原创想法，也可以讨论；未公开状态本身不决定处置。若抽象描述仍暴露受限的核心内容，继续缩小输入或选择获批准处理该内容的环境；本地运行本身不替代授权。接下来在 P08 风险卡中写清对象、动作、风险、控制和责任人。</a:t>
-            </a:r>
-          </a:p>
-          <a:p>
-            <a:r>
-              <a:rPr lang="zh-CN"/>
               <a:t/>
             </a:r>
-          </a:p>
-          <a:p>
-            <a:r>
-              <a:rPr lang="zh-CN"/>
+            <a:endParaRPr/>
+          </a:p>
+          <a:p>
+            <a:r>
               <a:t>学生动作：</a:t>
             </a:r>
           </a:p>
           <a:p>
             <a:r>
-              <a:rPr lang="zh-CN"/>
-              <a:t>教师讲解后，学生快答继续前必须确认的输入与环境条件</a:t>
-            </a:r>
-          </a:p>
-          <a:p>
-            <a:r>
-              <a:rPr lang="zh-CN"/>
+              <a:t>依据本页方法检查本人项目；按需参考。</a:t>
+            </a:r>
+          </a:p>
+          <a:p>
+            <a:r>
               <a:t/>
             </a:r>
-          </a:p>
-          <a:p>
-            <a:r>
-              <a:rPr lang="zh-CN"/>
-              <a:t>讲义位置：§一、§二、§八·案例 A</a:t>
-            </a:r>
-          </a:p>
-          <a:p>
-            <a:r>
-              <a:rPr lang="zh-CN"/>
+            <a:endParaRPr/>
+          </a:p>
+          <a:p>
+            <a:r>
+              <a:t>课堂安排：按本稿下方 90 分钟教学路由安排；此页不另占独立时段。</a:t>
+            </a:r>
+          </a:p>
+          <a:p>
+            <a:r>
               <a:t/>
             </a:r>
           </a:p>
           <a:p>
             <a:r>
-              <a:rPr lang="zh-CN"/>
-              <a:t>来源与事实边界：</a:t>
-            </a:r>
-          </a:p>
-          <a:p>
-            <a:r>
-              <a:rPr lang="zh-CN"/>
-              <a:t>本课 handout.md §八·案例 A 与课堂构造合作稿；不对应真实学生、账户、稿件或数据；条件满足后的替代路径不冒充实际批准或执行结果。</a:t>
-            </a:r>
-          </a:p>
-          <a:p>
-            <a:r>
-              <a:rPr lang="zh-CN"/>
-              <a:t/>
-            </a:r>
-          </a:p>
-          <a:p>
-            <a:r>
-              <a:rPr lang="zh-CN"/>
               <a:t>[Sources]</a:t>
             </a:r>
-          </a:p>
-          <a:p>
-            <a:r>
-              <a:rPr lang="zh-CN"/>
-              <a:t>- lessons/lesson-02/handout.md §八·案例 A</a:t>
-            </a:r>
-          </a:p>
-          <a:p>
-            <a:r>
-              <a:rPr lang="zh-CN"/>
-              <a:t>- lessons/lesson-02/slides.md P04/P07/P08</a:t>
-            </a:r>
-          </a:p>
-          <a:p>
-            <a:r>
-              <a:rPr lang="zh-CN"/>
-              <a:t>- lessons/lesson-02/classroom-pack.md</a:t>
-            </a:r>
-          </a:p>
-          <a:p>
-            <a:r>
-              <a:rPr lang="zh-CN"/>
+            <a:endParaRPr/>
+          </a:p>
+          <a:p>
+            <a:r>
+              <a:t>本课 handout.md、judgment-task.md；../../course/judgment-path.md。</a:t>
+            </a:r>
+          </a:p>
+          <a:p>
+            <a:r>
               <a:t>[/Sources]</a:t>
             </a:r>
+            <a:endParaRPr/>
           </a:p>
         </p:txBody>
       </p:sp>
@@ -7593,6 +6123,9 @@
             </a:r>
           </a:p>
           <a:p>
+            <a:r>
+              <a:t/>
+            </a:r>
             <a:endParaRPr sz="1200" b="0">
               <a:solidFill>
                 <a:srgbClr val="24292F"/>
@@ -7601,9 +6134,6 @@
               <a:ea typeface="微软雅黑"/>
               <a:cs typeface="微软雅黑"/>
             </a:endParaRPr>
-            <a:r>
-              <a:t>讲义位置：§二</a:t>
-            </a:r>
           </a:p>
           <a:p>
             <a:r>
@@ -7615,10 +6145,13 @@
                 <a:ea typeface="微软雅黑"/>
                 <a:cs typeface="微软雅黑"/>
               </a:rPr>
-              <a:t>屏显核对：</a:t>
-            </a:r>
-          </a:p>
-          <a:p>
+              <a:t>讲述与校准：</a:t>
+            </a:r>
+          </a:p>
+          <a:p>
+            <a:r>
+              <a:t/>
+            </a:r>
             <a:endParaRPr sz="1200" b="0">
               <a:solidFill>
                 <a:srgbClr val="24292F"/>
@@ -7627,9 +6160,6 @@
               <a:ea typeface="微软雅黑"/>
               <a:cs typeface="微软雅黑"/>
             </a:endParaRPr>
-            <a:r>
-              <a:t>课堂构造填写示例 · 未公开合作稿；对象：未公开的共同作者工作稿；动作：上传到个人账户下的外部模型；风险：合作内容暴露，保密与知识产权风险；控制：暂停原稿外发，确认获准输入与处理环境；责任：共同作者决定材料授权，使用者核查执行边界。</a:t>
-            </a:r>
           </a:p>
           <a:p>
             <a:r>
@@ -7641,7 +6171,7 @@
                 <a:ea typeface="微软雅黑"/>
                 <a:cs typeface="微软雅黑"/>
               </a:rPr>
-              <a:t>教师讲述：</a:t>
+              <a:t/>
             </a:r>
           </a:p>
           <a:p>
@@ -7654,10 +6184,13 @@
                 <a:ea typeface="微软雅黑"/>
                 <a:cs typeface="微软雅黑"/>
               </a:rPr>
-              <a:t>沿用 P04 合作稿，接续 P07 的输入与环境选择，示范五字段风险卡。控制字段同时写明暂停当前外发、确认可讨论内容与处理环境。把原稿改成抽象描述后仍须核查，抽象本身不构成授权；责任字段说明由谁确认内容范围、由谁检查环境和实际执行。</a:t>
-            </a:r>
-          </a:p>
-          <a:p>
+              <a:t>学生动作：</a:t>
+            </a:r>
+          </a:p>
+          <a:p>
+            <a:r>
+              <a:t>依据本页方法检查本人项目；按需参考。</a:t>
+            </a:r>
             <a:endParaRPr sz="1200" b="0">
               <a:solidFill>
                 <a:srgbClr val="24292F"/>
@@ -7666,9 +6199,6 @@
               <a:ea typeface="微软雅黑"/>
               <a:cs typeface="微软雅黑"/>
             </a:endParaRPr>
-            <a:r>
-              <a:t>学生动作：</a:t>
-            </a:r>
           </a:p>
           <a:p>
             <a:r>
@@ -7680,7 +6210,7 @@
                 <a:ea typeface="微软雅黑"/>
                 <a:cs typeface="微软雅黑"/>
               </a:rPr>
-              <a:t>找出控制字段是否可检查</a:t>
+              <a:t/>
             </a:r>
           </a:p>
           <a:p>
@@ -7693,10 +6223,13 @@
                 <a:ea typeface="微软雅黑"/>
                 <a:cs typeface="微软雅黑"/>
               </a:rPr>
-              <a:t>来源与边界：</a:t>
-            </a:r>
-          </a:p>
-          <a:p>
+              <a:t>课堂安排：按本稿下方 90 分钟教学路由安排；此页不另占独立时段。</a:t>
+            </a:r>
+          </a:p>
+          <a:p>
+            <a:r>
+              <a:t/>
+            </a:r>
             <a:endParaRPr sz="1200" b="0">
               <a:solidFill>
                 <a:srgbClr val="24292F"/>
@@ -7705,9 +6238,6 @@
               <a:ea typeface="微软雅黑"/>
               <a:cs typeface="微软雅黑"/>
             </a:endParaRPr>
-            <a:r>
-              <a:t>/Users/bright/Projects/courses/graduate/lessons/lesson-02/handout.md</a:t>
-            </a:r>
           </a:p>
           <a:p>
             <a:r>
@@ -7732,10 +6262,13 @@
                 <a:ea typeface="微软雅黑"/>
                 <a:cs typeface="微软雅黑"/>
               </a:rPr>
-              <a:t>- lessons/lesson-02/handout.md</a:t>
-            </a:r>
-          </a:p>
-          <a:p>
+              <a:t>本课 handout.md、judgment-task.md；../../course/judgment-path.md。</a:t>
+            </a:r>
+          </a:p>
+          <a:p>
+            <a:r>
+              <a:t>[/Sources]</a:t>
+            </a:r>
             <a:endParaRPr sz="1200" b="0">
               <a:solidFill>
                 <a:srgbClr val="24292F"/>
@@ -7744,35 +6277,6 @@
               <a:ea typeface="微软雅黑"/>
               <a:cs typeface="微软雅黑"/>
             </a:endParaRPr>
-            <a:r>
-              <a:t>- lessons/lesson-02/slides.md</a:t>
-            </a:r>
-          </a:p>
-          <a:p>
-            <a:r>
-              <a:rPr sz="1200" b="0">
-                <a:solidFill>
-                  <a:srgbClr val="24292F"/>
-                </a:solidFill>
-                <a:latin typeface="微软雅黑"/>
-                <a:ea typeface="微软雅黑"/>
-                <a:cs typeface="微软雅黑"/>
-              </a:rPr>
-              <a:t>- lessons/lesson-02/classroom-pack.md</a:t>
-            </a:r>
-          </a:p>
-          <a:p>
-            <a:r>
-              <a:rPr sz="1200" b="0">
-                <a:solidFill>
-                  <a:srgbClr val="24292F"/>
-                </a:solidFill>
-                <a:latin typeface="微软雅黑"/>
-                <a:ea typeface="微软雅黑"/>
-                <a:cs typeface="微软雅黑"/>
-              </a:rPr>
-              <a:t>[/Sources]</a:t>
-            </a:r>
           </a:p>
         </p:txBody>
       </p:sp>
@@ -7860,6 +6364,9 @@
             </a:r>
           </a:p>
           <a:p>
+            <a:r>
+              <a:t/>
+            </a:r>
             <a:endParaRPr sz="1200" b="0">
               <a:solidFill>
                 <a:srgbClr val="24292F"/>
@@ -7868,9 +6375,6 @@
               <a:ea typeface="微软雅黑"/>
               <a:cs typeface="微软雅黑"/>
             </a:endParaRPr>
-            <a:r>
-              <a:t>讲义位置：§二</a:t>
-            </a:r>
           </a:p>
           <a:p>
             <a:r>
@@ -7882,10 +6386,13 @@
                 <a:ea typeface="微软雅黑"/>
                 <a:cs typeface="微软雅黑"/>
               </a:rPr>
-              <a:t>屏显核对：</a:t>
-            </a:r>
-          </a:p>
-          <a:p>
+              <a:t>讲述与校准：</a:t>
+            </a:r>
+          </a:p>
+          <a:p>
+            <a:r>
+              <a:t/>
+            </a:r>
             <a:endParaRPr sz="1200" b="0">
               <a:solidFill>
                 <a:srgbClr val="24292F"/>
@@ -7894,9 +6401,6 @@
               <a:ea typeface="微软雅黑"/>
               <a:cs typeface="微软雅黑"/>
             </a:endParaRPr>
-            <a:r>
-              <a:t>允许：用获准的问题描述讨论研究问题与线索，输入与环境条件已确认，研究者核验与记录取舍；有条件允许：在本地只读分析经授权的数据，先完成必要脱敏、限定目录并禁止外传；禁止：把模拟数据写成真实实验观测，材料身份被冒充，结论失去事实依据；同一项 AI 能力，处置取决于具体任务条件。</a:t>
-            </a:r>
           </a:p>
           <a:p>
             <a:r>
@@ -7908,7 +6412,7 @@
                 <a:ea typeface="微软雅黑"/>
                 <a:cs typeface="微软雅黑"/>
               </a:rPr>
-              <a:t>教师讲述：</a:t>
+              <a:t/>
             </a:r>
           </a:p>
           <a:p>
@@ -7921,10 +6425,13 @@
                 <a:ea typeface="微软雅黑"/>
                 <a:cs typeface="微软雅黑"/>
               </a:rPr>
-              <a:t>允许这一行承接 P07 条件已满足的新情境，假设获准的问题描述和所选处理环境已经确认，仍由研究者核验与记录取舍。它不表示 P04 当前原稿已经获准外发。后两行是向数据处理和证据真实性的迁移；有条件允许必须先补齐列出的条件。</a:t>
-            </a:r>
-          </a:p>
-          <a:p>
+              <a:t>学生动作：</a:t>
+            </a:r>
+          </a:p>
+          <a:p>
+            <a:r>
+              <a:t>依据本页方法检查本人项目；按需参考。</a:t>
+            </a:r>
             <a:endParaRPr sz="1200" b="0">
               <a:solidFill>
                 <a:srgbClr val="24292F"/>
@@ -7933,9 +6440,6 @@
               <a:ea typeface="微软雅黑"/>
               <a:cs typeface="微软雅黑"/>
             </a:endParaRPr>
-            <a:r>
-              <a:t>学生动作：</a:t>
-            </a:r>
           </a:p>
           <a:p>
             <a:r>
@@ -7947,7 +6451,7 @@
                 <a:ea typeface="微软雅黑"/>
                 <a:cs typeface="微软雅黑"/>
               </a:rPr>
-              <a:t>为自己的一个动作选择处置并说理由</a:t>
+              <a:t/>
             </a:r>
           </a:p>
           <a:p>
@@ -7960,10 +6464,13 @@
                 <a:ea typeface="微软雅黑"/>
                 <a:cs typeface="微软雅黑"/>
               </a:rPr>
-              <a:t>来源与边界：</a:t>
-            </a:r>
-          </a:p>
-          <a:p>
+              <a:t>课堂安排：按本稿下方 90 分钟教学路由安排；此页不另占独立时段。</a:t>
+            </a:r>
+          </a:p>
+          <a:p>
+            <a:r>
+              <a:t/>
+            </a:r>
             <a:endParaRPr sz="1200" b="0">
               <a:solidFill>
                 <a:srgbClr val="24292F"/>
@@ -7972,9 +6479,6 @@
               <a:ea typeface="微软雅黑"/>
               <a:cs typeface="微软雅黑"/>
             </a:endParaRPr>
-            <a:r>
-              <a:t>/Users/bright/Projects/courses/graduate/lessons/lesson-02/handout.md</a:t>
-            </a:r>
           </a:p>
           <a:p>
             <a:r>
@@ -7999,10 +6503,13 @@
                 <a:ea typeface="微软雅黑"/>
                 <a:cs typeface="微软雅黑"/>
               </a:rPr>
-              <a:t>- lessons/lesson-02/handout.md</a:t>
-            </a:r>
-          </a:p>
-          <a:p>
+              <a:t>本课 handout.md、judgment-task.md；../../course/judgment-path.md。</a:t>
+            </a:r>
+          </a:p>
+          <a:p>
+            <a:r>
+              <a:t>[/Sources]</a:t>
+            </a:r>
             <a:endParaRPr sz="1200" b="0">
               <a:solidFill>
                 <a:srgbClr val="24292F"/>
@@ -8011,35 +6518,6 @@
               <a:ea typeface="微软雅黑"/>
               <a:cs typeface="微软雅黑"/>
             </a:endParaRPr>
-            <a:r>
-              <a:t>- lessons/lesson-02/slides.md</a:t>
-            </a:r>
-          </a:p>
-          <a:p>
-            <a:r>
-              <a:rPr sz="1200" b="0">
-                <a:solidFill>
-                  <a:srgbClr val="24292F"/>
-                </a:solidFill>
-                <a:latin typeface="微软雅黑"/>
-                <a:ea typeface="微软雅黑"/>
-                <a:cs typeface="微软雅黑"/>
-              </a:rPr>
-              <a:t>- lessons/lesson-02/classroom-pack.md</a:t>
-            </a:r>
-          </a:p>
-          <a:p>
-            <a:r>
-              <a:rPr sz="1200" b="0">
-                <a:solidFill>
-                  <a:srgbClr val="24292F"/>
-                </a:solidFill>
-                <a:latin typeface="微软雅黑"/>
-                <a:ea typeface="微软雅黑"/>
-                <a:cs typeface="微软雅黑"/>
-              </a:rPr>
-              <a:t>[/Sources]</a:t>
-            </a:r>
           </a:p>
         </p:txBody>
       </p:sp>
@@ -23206,131 +21684,26 @@
         <p:nvPr/>
       </p:nvGrpSpPr>
       <p:grpSpPr>
-        <a:xfrm>
-          <a:off x="0" y="0"/>
-          <a:ext cx="0" cy="0"/>
-          <a:chOff x="0" y="0"/>
-          <a:chExt cx="0" cy="0"/>
-        </a:xfrm>
+        <a:xfrm/>
       </p:grpSpPr>
       <p:sp>
         <p:nvSpPr>
-          <p:cNvPr id="2" name="TextBox 1">
-            <a:extLst>
-              <a:ext uri="{FF2B5EF4-FFF2-40B4-BE49-F238E27FC236}">
-                <a16:creationId xmlns:a16="http://schemas.microsoft.com/office/drawing/2014/main" id="{75367AD3-1E26-416D-9F73-A47B8692BB62}"/>
-              </a:ext>
-            </a:extLst>
-          </p:cNvPr>
-          <p:cNvSpPr>
-            <a:spLocks noGrp="1"/>
-          </p:cNvSpPr>
-          <p:nvPr/>
-        </p:nvSpPr>
-        <p:spPr>
-          <a:xfrm>
-            <a:off x="1028700" y="57150"/>
-            <a:ext cx="10629900" cy="571500"/>
-          </a:xfrm>
-          <a:prstGeom prst="rect">
-            <a:avLst/>
-          </a:prstGeom>
-          <a:noFill/>
-        </p:spPr>
-        <p:txBody>
-          <a:bodyPr lIns="0" tIns="0" rIns="0" bIns="0" anchor="ctr">
-            <a:noAutofit/>
-          </a:bodyPr>
-          <a:lstStyle/>
-          <a:p>
-            <a:pPr algn="l">
-              <a:lnSpc>
-                <a:spcPct val="115000"/>
-              </a:lnSpc>
-              <a:buNone/>
-            </a:pPr>
-            <a:r>
-              <a:rPr sz="3000" b="1">
-                <a:solidFill>
-                  <a:srgbClr val="FFFFFF"/>
-                </a:solidFill>
-                <a:latin typeface="微软雅黑"/>
-                <a:ea typeface="微软雅黑"/>
-                <a:cs typeface="微软雅黑"/>
-              </a:rPr>
-              <a:t>个人实践：完成一条低风险动作记录</a:t>
-            </a:r>
-          </a:p>
-        </p:txBody>
-      </p:sp>
-      <p:sp>
-        <p:nvSpPr>
-          <p:cNvPr id="3" name="TextBox 2">
-            <a:extLst>
-              <a:ext uri="{FF2B5EF4-FFF2-40B4-BE49-F238E27FC236}">
-                <a16:creationId xmlns:a16="http://schemas.microsoft.com/office/drawing/2014/main" id="{21D2927F-EA4F-476B-9DDF-5DF9FD4EAED6}"/>
-              </a:ext>
-            </a:extLst>
-          </p:cNvPr>
-          <p:cNvSpPr>
-            <a:spLocks noGrp="1"/>
-          </p:cNvSpPr>
-          <p:nvPr/>
-        </p:nvSpPr>
-        <p:spPr>
-          <a:xfrm>
-            <a:off x="10899648" y="6473952"/>
-            <a:ext cx="566928" cy="256032"/>
-          </a:xfrm>
-          <a:prstGeom prst="rect">
-            <a:avLst/>
-          </a:prstGeom>
-          <a:noFill/>
-        </p:spPr>
-        <p:txBody>
-          <a:bodyPr wrap="square" lIns="0" tIns="0" rIns="0" bIns="0" anchor="ctr">
-            <a:spAutoFit/>
-          </a:bodyPr>
-          <a:lstStyle/>
-          <a:p>
-            <a:pPr algn="r">
-              <a:lnSpc>
-                <a:spcPct val="115000"/>
-              </a:lnSpc>
-              <a:buNone/>
-            </a:pPr>
-            <a:r>
-              <a:rPr sz="1200" b="0">
-                <a:solidFill>
-                  <a:srgbClr val="5F6B76"/>
-                </a:solidFill>
-                <a:latin typeface="Arial"/>
-                <a:ea typeface="Arial"/>
-                <a:cs typeface="Arial"/>
-              </a:rPr>
-              <a:t>24</a:t>
-            </a:r>
-          </a:p>
-        </p:txBody>
-      </p:sp>
-      <p:sp>
-        <p:nvSpPr>
-          <p:cNvPr id="4" name="your-action">
-            <a:extLst>
-              <a:ext uri="{FF2B5EF4-FFF2-40B4-BE49-F238E27FC236}">
-                <a16:creationId xmlns:a16="http://schemas.microsoft.com/office/drawing/2014/main" id="{5480FB21-1116-4C0E-B7B8-7B6A78D2697A}"/>
-              </a:ext>
-            </a:extLst>
-          </p:cNvPr>
-          <p:cNvSpPr>
-            <a:spLocks noGrp="1"/>
-          </p:cNvSpPr>
-          <p:nvPr/>
-        </p:nvSpPr>
-        <p:spPr>
-          <a:xfrm>
-            <a:off x="609600" y="1057275"/>
-            <a:ext cx="4762500" cy="495300"/>
+          <p:cNvPr id="7" name="judgment-title">
+            <a:extLst>
+              <a:ext uri="{FF2B5EF4-FFF2-40B4-BE49-F238E27FC236}">
+                <a16:creationId xmlns:a16="http://schemas.microsoft.com/office/drawing/2014/main" id="{B7E965D1-A17F-4D31-B3D3-6B794837659F}"/>
+              </a:ext>
+            </a:extLst>
+          </p:cNvPr>
+          <p:cNvSpPr>
+            <a:spLocks noGrp="1"/>
+          </p:cNvSpPr>
+          <p:nvPr/>
+        </p:nvSpPr>
+        <p:spPr>
+          <a:xfrm>
+            <a:off x="1028700" y="76200"/>
+            <a:ext cx="10687050" cy="514350"/>
           </a:xfrm>
           <a:prstGeom prst="rect">
             <a:avLst/>
@@ -23341,19 +21714,24 @@
           </a:ln>
         </p:spPr>
         <p:txBody>
-          <a:bodyPr lIns="0" tIns="0" rIns="0" bIns="0" anchor="t">
-            <a:noAutofit/>
-          </a:bodyPr>
-          <a:lstStyle/>
+          <a:bodyPr lIns="0" tIns="0" rIns="0" bIns="0" anchor="t"/>
+          <a:lstStyle>
+            <a:defPPr algn="l">
+              <a:defRPr sz="3000" b="1">
+                <a:solidFill>
+                  <a:srgbClr val="FFFFFF"/>
+                </a:solidFill>
+                <a:latin typeface="微软雅黑"/>
+                <a:ea typeface="微软雅黑"/>
+                <a:cs typeface="微软雅黑"/>
+              </a:defRPr>
+            </a:defPPr>
+          </a:lstStyle>
           <a:p>
             <a:pPr algn="l">
-              <a:lnSpc>
-                <a:spcPct val="130000"/>
-              </a:lnSpc>
-              <a:buNone/>
-              <a:defRPr sz="2800" b="1">
-                <a:solidFill>
-                  <a:srgbClr val="1F4D78"/>
+              <a:defRPr sz="3000" b="1">
+                <a:solidFill>
+                  <a:srgbClr val="FFFFFF"/>
                 </a:solidFill>
                 <a:latin typeface="微软雅黑"/>
                 <a:ea typeface="微软雅黑"/>
@@ -23361,37 +21739,37 @@
               </a:defRPr>
             </a:pPr>
             <a:r>
-              <a:rPr sz="2800" b="1">
-                <a:solidFill>
-                  <a:srgbClr val="1F4D78"/>
-                </a:solidFill>
-                <a:latin typeface="微软雅黑"/>
-                <a:ea typeface="微软雅黑"/>
-                <a:cs typeface="微软雅黑"/>
-              </a:rPr>
-              <a:t>选一个低风险科研动作</a:t>
-            </a:r>
-          </a:p>
-        </p:txBody>
-      </p:sp>
-      <p:sp>
-        <p:nvSpPr>
-          <p:cNvPr id="5" name="action-explanation">
-            <a:extLst>
-              <a:ext uri="{FF2B5EF4-FFF2-40B4-BE49-F238E27FC236}">
-                <a16:creationId xmlns:a16="http://schemas.microsoft.com/office/drawing/2014/main" id="{F8A129C9-7ED9-4907-B2E2-62BA16F78DE4}"/>
-              </a:ext>
-            </a:extLst>
-          </p:cNvPr>
-          <p:cNvSpPr>
-            <a:spLocks noGrp="1"/>
-          </p:cNvSpPr>
-          <p:nvPr/>
-        </p:nvSpPr>
-        <p:spPr>
-          <a:xfrm>
-            <a:off x="609600" y="1800225"/>
-            <a:ext cx="4448175" cy="942975"/>
+              <a:rPr sz="3000" b="1">
+                <a:solidFill>
+                  <a:srgbClr val="FFFFFF"/>
+                </a:solidFill>
+                <a:latin typeface="微软雅黑"/>
+                <a:ea typeface="微软雅黑"/>
+                <a:cs typeface="微软雅黑"/>
+              </a:rPr>
+              <a:t>本人项目：决定、核验与回写</a:t>
+            </a:r>
+          </a:p>
+        </p:txBody>
+      </p:sp>
+      <p:sp>
+        <p:nvSpPr>
+          <p:cNvPr id="2" name="judgment-body-0">
+            <a:extLst>
+              <a:ext uri="{FF2B5EF4-FFF2-40B4-BE49-F238E27FC236}">
+                <a16:creationId xmlns:a16="http://schemas.microsoft.com/office/drawing/2014/main" id="{80C29C7F-C468-408C-9F75-1CEE2039C2DD}"/>
+              </a:ext>
+            </a:extLst>
+          </p:cNvPr>
+          <p:cNvSpPr>
+            <a:spLocks noGrp="1"/>
+          </p:cNvSpPr>
+          <p:nvPr/>
+        </p:nvSpPr>
+        <p:spPr>
+          <a:xfrm>
+            <a:off x="666750" y="1066800"/>
+            <a:ext cx="10858500" cy="1476375"/>
           </a:xfrm>
           <a:prstGeom prst="rect">
             <a:avLst/>
@@ -23402,19 +21780,24 @@
           </a:ln>
         </p:spPr>
         <p:txBody>
-          <a:bodyPr lIns="0" tIns="0" rIns="0" bIns="0" anchor="t">
-            <a:noAutofit/>
-          </a:bodyPr>
-          <a:lstStyle/>
+          <a:bodyPr lIns="0" tIns="0" rIns="0" bIns="0" anchor="t"/>
+          <a:lstStyle>
+            <a:defPPr algn="l">
+              <a:defRPr sz="2400" b="0">
+                <a:solidFill>
+                  <a:srgbClr val="263746"/>
+                </a:solidFill>
+                <a:latin typeface="微软雅黑"/>
+                <a:ea typeface="微软雅黑"/>
+                <a:cs typeface="微软雅黑"/>
+              </a:defRPr>
+            </a:defPPr>
+          </a:lstStyle>
           <a:p>
             <a:pPr algn="l">
-              <a:lnSpc>
-                <a:spcPct val="120000"/>
-              </a:lnSpc>
-              <a:buNone/>
-              <a:defRPr sz="2800" b="0">
-                <a:solidFill>
-                  <a:srgbClr val="263442"/>
+              <a:defRPr sz="2400" b="0">
+                <a:solidFill>
+                  <a:srgbClr val="263746"/>
                 </a:solidFill>
                 <a:latin typeface="微软雅黑"/>
                 <a:ea typeface="微软雅黑"/>
@@ -23422,64 +21805,37 @@
               </a:defRPr>
             </a:pPr>
             <a:r>
-              <a:rPr sz="2800" b="0">
-                <a:solidFill>
-                  <a:srgbClr val="263442"/>
-                </a:solidFill>
-                <a:latin typeface="微软雅黑"/>
-                <a:ea typeface="微软雅黑"/>
-                <a:cs typeface="微软雅黑"/>
-              </a:rPr>
-              <a:t>写清材料边界</a:t>
-            </a:r>
-          </a:p>
-          <a:p>
-            <a:pPr algn="l">
-              <a:lnSpc>
-                <a:spcPct val="120000"/>
-              </a:lnSpc>
-              <a:buNone/>
-              <a:defRPr sz="2800" b="0">
-                <a:solidFill>
-                  <a:srgbClr val="263442"/>
-                </a:solidFill>
-                <a:latin typeface="微软雅黑"/>
-                <a:ea typeface="微软雅黑"/>
-                <a:cs typeface="微软雅黑"/>
-              </a:defRPr>
-            </a:pPr>
-            <a:r>
-              <a:rPr sz="2800" b="0">
-                <a:solidFill>
-                  <a:srgbClr val="263442"/>
-                </a:solidFill>
-                <a:latin typeface="微软雅黑"/>
-                <a:ea typeface="微软雅黑"/>
-                <a:cs typeface="微软雅黑"/>
-              </a:rPr>
-              <a:t>与写回范围。</a:t>
-            </a:r>
-          </a:p>
-        </p:txBody>
-      </p:sp>
-      <p:sp>
-        <p:nvSpPr>
-          <p:cNvPr id="6" name="first-part">
-            <a:extLst>
-              <a:ext uri="{FF2B5EF4-FFF2-40B4-BE49-F238E27FC236}">
-                <a16:creationId xmlns:a16="http://schemas.microsoft.com/office/drawing/2014/main" id="{BD6BC8E3-CB0C-45FE-863A-B6B1F40BACBB}"/>
-              </a:ext>
-            </a:extLst>
-          </p:cNvPr>
-          <p:cNvSpPr>
-            <a:spLocks noGrp="1"/>
-          </p:cNvSpPr>
-          <p:nvPr/>
-        </p:nvSpPr>
-        <p:spPr>
-          <a:xfrm>
-            <a:off x="609600" y="3038475"/>
-            <a:ext cx="4371975" cy="409575"/>
+              <a:rPr sz="2400" b="0">
+                <a:solidFill>
+                  <a:srgbClr val="263746"/>
+                </a:solidFill>
+                <a:latin typeface="微软雅黑"/>
+                <a:ea typeface="微软雅黑"/>
+                <a:cs typeface="微软雅黑"/>
+              </a:rPr>
+              <a:t>给本人一个动作写清读写范围、确认点与拒绝分支，更新既有权限行、风险卡和日志。选一次允许动作和一次越界尝试检验控制。</a:t>
+            </a:r>
+          </a:p>
+        </p:txBody>
+      </p:sp>
+      <p:sp>
+        <p:nvSpPr>
+          <p:cNvPr id="3" name="judgment-body-1">
+            <a:extLst>
+              <a:ext uri="{FF2B5EF4-FFF2-40B4-BE49-F238E27FC236}">
+                <a16:creationId xmlns:a16="http://schemas.microsoft.com/office/drawing/2014/main" id="{2BA41866-88E1-4594-9459-55CC278BF8DE}"/>
+              </a:ext>
+            </a:extLst>
+          </p:cNvPr>
+          <p:cNvSpPr>
+            <a:spLocks noGrp="1"/>
+          </p:cNvSpPr>
+          <p:nvPr/>
+        </p:nvSpPr>
+        <p:spPr>
+          <a:xfrm>
+            <a:off x="666750" y="2724150"/>
+            <a:ext cx="10858500" cy="1524000"/>
           </a:xfrm>
           <a:prstGeom prst="rect">
             <a:avLst/>
@@ -23490,19 +21846,24 @@
           </a:ln>
         </p:spPr>
         <p:txBody>
-          <a:bodyPr lIns="0" tIns="0" rIns="0" bIns="0" anchor="t">
-            <a:noAutofit/>
-          </a:bodyPr>
-          <a:lstStyle/>
+          <a:bodyPr lIns="0" tIns="0" rIns="0" bIns="0" anchor="t"/>
+          <a:lstStyle>
+            <a:defPPr algn="l">
+              <a:defRPr sz="2400" b="0">
+                <a:solidFill>
+                  <a:srgbClr val="263746"/>
+                </a:solidFill>
+                <a:latin typeface="微软雅黑"/>
+                <a:ea typeface="微软雅黑"/>
+                <a:cs typeface="微软雅黑"/>
+              </a:defRPr>
+            </a:defPPr>
+          </a:lstStyle>
           <a:p>
             <a:pPr algn="l">
-              <a:lnSpc>
-                <a:spcPct val="130000"/>
-              </a:lnSpc>
-              <a:buNone/>
-              <a:defRPr sz="2200" b="1">
-                <a:solidFill>
-                  <a:srgbClr val="1F4D78"/>
+              <a:defRPr sz="2400" b="0">
+                <a:solidFill>
+                  <a:srgbClr val="263746"/>
                 </a:solidFill>
                 <a:latin typeface="微软雅黑"/>
                 <a:ea typeface="微软雅黑"/>
@@ -23510,37 +21871,37 @@
               </a:defRPr>
             </a:pPr>
             <a:r>
-              <a:rPr sz="2200" b="1">
-                <a:solidFill>
-                  <a:srgbClr val="1F4D78"/>
-                </a:solidFill>
-                <a:latin typeface="微软雅黑"/>
-                <a:ea typeface="微软雅黑"/>
-                <a:cs typeface="微软雅黑"/>
-              </a:rPr>
-              <a:t>第一段：权限一行</a:t>
-            </a:r>
-          </a:p>
-        </p:txBody>
-      </p:sp>
-      <p:sp>
-        <p:nvSpPr>
-          <p:cNvPr id="7" name="second-part">
-            <a:extLst>
-              <a:ext uri="{FF2B5EF4-FFF2-40B4-BE49-F238E27FC236}">
-                <a16:creationId xmlns:a16="http://schemas.microsoft.com/office/drawing/2014/main" id="{E42BFFAA-23CE-4564-9118-DDD57C3C55D2}"/>
-              </a:ext>
-            </a:extLst>
-          </p:cNvPr>
-          <p:cNvSpPr>
-            <a:spLocks noGrp="1"/>
-          </p:cNvSpPr>
-          <p:nvPr/>
-        </p:nvSpPr>
-        <p:spPr>
-          <a:xfrm>
-            <a:off x="609600" y="3552825"/>
-            <a:ext cx="4371975" cy="762000"/>
+              <a:rPr sz="2400" b="0">
+                <a:solidFill>
+                  <a:srgbClr val="263746"/>
+                </a:solidFill>
+                <a:latin typeface="微软雅黑"/>
+                <a:ea typeface="微软雅黑"/>
+                <a:cs typeface="微软雅黑"/>
+              </a:rPr>
+              <a:t>用现有 access-check 接口或人工逐步拦截演示拒绝；如仅验证接口，记录“非操作系统隔离”。未获授权的读取不要真实执行。</a:t>
+            </a:r>
+          </a:p>
+        </p:txBody>
+      </p:sp>
+      <p:sp>
+        <p:nvSpPr>
+          <p:cNvPr id="4" name="judgment-body-2">
+            <a:extLst>
+              <a:ext uri="{FF2B5EF4-FFF2-40B4-BE49-F238E27FC236}">
+                <a16:creationId xmlns:a16="http://schemas.microsoft.com/office/drawing/2014/main" id="{694197D3-273C-4546-8462-A930C6E8F087}"/>
+              </a:ext>
+            </a:extLst>
+          </p:cNvPr>
+          <p:cNvSpPr>
+            <a:spLocks noGrp="1"/>
+          </p:cNvSpPr>
+          <p:nvPr/>
+        </p:nvSpPr>
+        <p:spPr>
+          <a:xfrm>
+            <a:off x="666750" y="4457700"/>
+            <a:ext cx="10858500" cy="1466850"/>
           </a:xfrm>
           <a:prstGeom prst="rect">
             <a:avLst/>
@@ -23551,19 +21912,24 @@
           </a:ln>
         </p:spPr>
         <p:txBody>
-          <a:bodyPr lIns="0" tIns="0" rIns="0" bIns="0" anchor="t">
-            <a:noAutofit/>
-          </a:bodyPr>
-          <a:lstStyle/>
+          <a:bodyPr lIns="0" tIns="0" rIns="0" bIns="0" anchor="t"/>
+          <a:lstStyle>
+            <a:defPPr algn="l">
+              <a:defRPr sz="2200" b="0">
+                <a:solidFill>
+                  <a:srgbClr val="1F4D78"/>
+                </a:solidFill>
+                <a:latin typeface="微软雅黑"/>
+                <a:ea typeface="微软雅黑"/>
+                <a:cs typeface="微软雅黑"/>
+              </a:defRPr>
+            </a:defPPr>
+          </a:lstStyle>
           <a:p>
             <a:pPr algn="l">
-              <a:lnSpc>
-                <a:spcPct val="125000"/>
-              </a:lnSpc>
-              <a:buNone/>
               <a:defRPr sz="2200" b="0">
                 <a:solidFill>
-                  <a:srgbClr val="263442"/>
+                  <a:srgbClr val="1F4D78"/>
                 </a:solidFill>
                 <a:latin typeface="微软雅黑"/>
                 <a:ea typeface="微软雅黑"/>
@@ -23573,62 +21939,35 @@
             <a:r>
               <a:rPr sz="2200" b="0">
                 <a:solidFill>
-                  <a:srgbClr val="263442"/>
-                </a:solidFill>
-                <a:latin typeface="微软雅黑"/>
-                <a:ea typeface="微软雅黑"/>
-                <a:cs typeface="微软雅黑"/>
-              </a:rPr>
-              <a:t>中点点评后：风险卡、</a:t>
-            </a:r>
-          </a:p>
-          <a:p>
-            <a:pPr algn="l">
-              <a:lnSpc>
-                <a:spcPct val="125000"/>
-              </a:lnSpc>
-              <a:buNone/>
-              <a:defRPr sz="2200" b="0">
-                <a:solidFill>
-                  <a:srgbClr val="263442"/>
-                </a:solidFill>
-                <a:latin typeface="微软雅黑"/>
-                <a:ea typeface="微软雅黑"/>
-                <a:cs typeface="微软雅黑"/>
-              </a:defRPr>
-            </a:pPr>
-            <a:r>
-              <a:rPr sz="2200" b="0">
-                <a:solidFill>
-                  <a:srgbClr val="263442"/>
-                </a:solidFill>
-                <a:latin typeface="微软雅黑"/>
-                <a:ea typeface="微软雅黑"/>
-                <a:cs typeface="微软雅黑"/>
-              </a:rPr>
-              <a:t>只读审查与使用记录</a:t>
-            </a:r>
-          </a:p>
-        </p:txBody>
-      </p:sp>
-      <p:sp>
-        <p:nvSpPr>
-          <p:cNvPr id="8" name="save-label">
-            <a:extLst>
-              <a:ext uri="{FF2B5EF4-FFF2-40B4-BE49-F238E27FC236}">
-                <a16:creationId xmlns:a16="http://schemas.microsoft.com/office/drawing/2014/main" id="{BE8C9B13-B840-4073-8515-E8CC6D02A316}"/>
-              </a:ext>
-            </a:extLst>
-          </p:cNvPr>
-          <p:cNvSpPr>
-            <a:spLocks noGrp="1"/>
-          </p:cNvSpPr>
-          <p:nvPr/>
-        </p:nvSpPr>
-        <p:spPr>
-          <a:xfrm>
-            <a:off x="609600" y="4495800"/>
-            <a:ext cx="4381500" cy="333375"/>
+                  <a:srgbClr val="1F4D78"/>
+                </a:solidFill>
+                <a:latin typeface="微软雅黑"/>
+                <a:ea typeface="微软雅黑"/>
+                <a:cs typeface="微软雅黑"/>
+              </a:rPr>
+              <a:t>保存：权限行、风险卡、一次允许/拒绝检查及日志</a:t>
+            </a:r>
+          </a:p>
+        </p:txBody>
+      </p:sp>
+      <p:sp>
+        <p:nvSpPr>
+          <p:cNvPr id="5" name="judgment-source">
+            <a:extLst>
+              <a:ext uri="{FF2B5EF4-FFF2-40B4-BE49-F238E27FC236}">
+                <a16:creationId xmlns:a16="http://schemas.microsoft.com/office/drawing/2014/main" id="{6C438CF6-584A-4489-8D4C-818A422EB96D}"/>
+              </a:ext>
+            </a:extLst>
+          </p:cNvPr>
+          <p:cNvSpPr>
+            <a:spLocks noGrp="1"/>
+          </p:cNvSpPr>
+          <p:nvPr/>
+        </p:nvSpPr>
+        <p:spPr>
+          <a:xfrm>
+            <a:off x="666750" y="6276975"/>
+            <a:ext cx="10572750" cy="209550"/>
           </a:xfrm>
           <a:prstGeom prst="rect">
             <a:avLst/>
@@ -23639,19 +21978,24 @@
           </a:ln>
         </p:spPr>
         <p:txBody>
-          <a:bodyPr lIns="0" tIns="0" rIns="0" bIns="0" anchor="t">
-            <a:noAutofit/>
-          </a:bodyPr>
-          <a:lstStyle/>
+          <a:bodyPr lIns="0" tIns="0" rIns="0" bIns="0" anchor="t"/>
+          <a:lstStyle>
+            <a:defPPr algn="l">
+              <a:defRPr sz="1100" b="0">
+                <a:solidFill>
+                  <a:srgbClr val="667684"/>
+                </a:solidFill>
+                <a:latin typeface="微软雅黑"/>
+                <a:ea typeface="微软雅黑"/>
+                <a:cs typeface="微软雅黑"/>
+              </a:defRPr>
+            </a:defPPr>
+          </a:lstStyle>
           <a:p>
             <a:pPr algn="l">
-              <a:lnSpc>
-                <a:spcPct val="130000"/>
-              </a:lnSpc>
-              <a:buNone/>
-              <a:defRPr sz="2000" b="1">
-                <a:solidFill>
-                  <a:srgbClr val="1F4D78"/>
+              <a:defRPr sz="1100" b="0">
+                <a:solidFill>
+                  <a:srgbClr val="667684"/>
                 </a:solidFill>
                 <a:latin typeface="微软雅黑"/>
                 <a:ea typeface="微软雅黑"/>
@@ -23659,37 +22003,37 @@
               </a:defRPr>
             </a:pPr>
             <a:r>
-              <a:rPr sz="2000" b="1">
-                <a:solidFill>
-                  <a:srgbClr val="1F4D78"/>
-                </a:solidFill>
-                <a:latin typeface="微软雅黑"/>
-                <a:ea typeface="微软雅黑"/>
-                <a:cs typeface="微软雅黑"/>
-              </a:rPr>
-              <a:t>保存到个人项目</a:t>
-            </a:r>
-          </a:p>
-        </p:txBody>
-      </p:sp>
-      <p:sp>
-        <p:nvSpPr>
-          <p:cNvPr id="9" name="save-files">
-            <a:extLst>
-              <a:ext uri="{FF2B5EF4-FFF2-40B4-BE49-F238E27FC236}">
-                <a16:creationId xmlns:a16="http://schemas.microsoft.com/office/drawing/2014/main" id="{AFEF2BB9-17ED-4072-B286-12DE6D729B7F}"/>
-              </a:ext>
-            </a:extLst>
-          </p:cNvPr>
-          <p:cNvSpPr>
-            <a:spLocks noGrp="1"/>
-          </p:cNvSpPr>
-          <p:nvPr/>
-        </p:nvSpPr>
-        <p:spPr>
-          <a:xfrm>
-            <a:off x="609600" y="4886325"/>
-            <a:ext cx="4543425" cy="809625"/>
+              <a:rPr sz="1100" b="0">
+                <a:solidFill>
+                  <a:srgbClr val="667684"/>
+                </a:solidFill>
+                <a:latin typeface="微软雅黑"/>
+                <a:ea typeface="微软雅黑"/>
+                <a:cs typeface="微软雅黑"/>
+              </a:rPr>
+              <a:t>来源：本课判断任务与讲义；构造材料及真实来源按材料包标识</a:t>
+            </a:r>
+          </a:p>
+        </p:txBody>
+      </p:sp>
+      <p:sp>
+        <p:nvSpPr>
+          <p:cNvPr id="6" name="judgment-page">
+            <a:extLst>
+              <a:ext uri="{FF2B5EF4-FFF2-40B4-BE49-F238E27FC236}">
+                <a16:creationId xmlns:a16="http://schemas.microsoft.com/office/drawing/2014/main" id="{9C72EF45-DED7-42CD-9DE7-44522D14F9A7}"/>
+              </a:ext>
+            </a:extLst>
+          </p:cNvPr>
+          <p:cNvSpPr>
+            <a:spLocks noGrp="1"/>
+          </p:cNvSpPr>
+          <p:nvPr/>
+        </p:nvSpPr>
+        <p:spPr>
+          <a:xfrm>
+            <a:off x="11715750" y="6562725"/>
+            <a:ext cx="238125" cy="171450"/>
           </a:xfrm>
           <a:prstGeom prst="rect">
             <a:avLst/>
@@ -23700,748 +22044,40 @@
           </a:ln>
         </p:spPr>
         <p:txBody>
-          <a:bodyPr lIns="0" tIns="0" rIns="0" bIns="0" anchor="t">
-            <a:noAutofit/>
-          </a:bodyPr>
-          <a:lstStyle/>
+          <a:bodyPr lIns="0" tIns="0" rIns="0" bIns="0" anchor="t"/>
+          <a:lstStyle>
+            <a:defPPr algn="l">
+              <a:defRPr sz="900" b="0">
+                <a:solidFill>
+                  <a:srgbClr val="A5A5A5"/>
+                </a:solidFill>
+                <a:latin typeface="微软雅黑"/>
+                <a:ea typeface="微软雅黑"/>
+                <a:cs typeface="微软雅黑"/>
+              </a:defRPr>
+            </a:defPPr>
+          </a:lstStyle>
           <a:p>
             <a:pPr algn="l">
-              <a:lnSpc>
-                <a:spcPct val="115000"/>
-              </a:lnSpc>
-              <a:buNone/>
-              <a:defRPr sz="1800" b="0">
-                <a:solidFill>
-                  <a:srgbClr val="263442"/>
-                </a:solidFill>
-                <a:latin typeface="Consolas"/>
-                <a:ea typeface="Consolas"/>
-                <a:cs typeface="Consolas"/>
+              <a:defRPr sz="900" b="0">
+                <a:solidFill>
+                  <a:srgbClr val="A5A5A5"/>
+                </a:solidFill>
+                <a:latin typeface="微软雅黑"/>
+                <a:ea typeface="微软雅黑"/>
+                <a:cs typeface="微软雅黑"/>
               </a:defRPr>
             </a:pPr>
             <a:r>
-              <a:rPr sz="1800" b="0">
-                <a:solidFill>
-                  <a:srgbClr val="263442"/>
-                </a:solidFill>
-                <a:latin typeface="Consolas"/>
-                <a:ea typeface="Consolas"/>
-                <a:cs typeface="Consolas"/>
-              </a:rPr>
-              <a:t>agent-permissions.md</a:t>
-            </a:r>
-          </a:p>
-          <a:p>
-            <a:pPr algn="l">
-              <a:lnSpc>
-                <a:spcPct val="115000"/>
-              </a:lnSpc>
-              <a:buNone/>
-              <a:defRPr sz="1800" b="0">
-                <a:solidFill>
-                  <a:srgbClr val="263442"/>
-                </a:solidFill>
-                <a:latin typeface="Consolas"/>
-                <a:ea typeface="Consolas"/>
-                <a:cs typeface="Consolas"/>
-              </a:defRPr>
-            </a:pPr>
-            <a:r>
-              <a:rPr sz="1800" b="0">
-                <a:solidFill>
-                  <a:srgbClr val="263442"/>
-                </a:solidFill>
-                <a:latin typeface="Consolas"/>
-                <a:ea typeface="Consolas"/>
-                <a:cs typeface="Consolas"/>
-              </a:rPr>
-              <a:t>ethics-and-compliance.md</a:t>
-            </a:r>
-          </a:p>
-          <a:p>
-            <a:pPr algn="l">
-              <a:lnSpc>
-                <a:spcPct val="115000"/>
-              </a:lnSpc>
-              <a:buNone/>
-              <a:defRPr sz="1800" b="0">
-                <a:solidFill>
-                  <a:srgbClr val="263442"/>
-                </a:solidFill>
-                <a:latin typeface="Consolas"/>
-                <a:ea typeface="Consolas"/>
-                <a:cs typeface="Consolas"/>
-              </a:defRPr>
-            </a:pPr>
-            <a:r>
-              <a:rPr sz="1800" b="0">
-                <a:solidFill>
-                  <a:srgbClr val="263442"/>
-                </a:solidFill>
-                <a:latin typeface="Consolas"/>
-                <a:ea typeface="Consolas"/>
-                <a:cs typeface="Consolas"/>
-              </a:rPr>
-              <a:t>ai-usage-log.md</a:t>
-            </a:r>
-          </a:p>
-        </p:txBody>
-      </p:sp>
-      <p:sp>
-        <p:nvSpPr>
-          <p:cNvPr id="10" name="example-start">
-            <a:extLst>
-              <a:ext uri="{FF2B5EF4-FFF2-40B4-BE49-F238E27FC236}">
-                <a16:creationId xmlns:a16="http://schemas.microsoft.com/office/drawing/2014/main" id="{ADC65F67-1BD5-48F0-AD76-1832A7CA34DC}"/>
-              </a:ext>
-            </a:extLst>
-          </p:cNvPr>
-          <p:cNvSpPr>
-            <a:spLocks noGrp="1"/>
-          </p:cNvSpPr>
-          <p:nvPr/>
-        </p:nvSpPr>
-        <p:spPr>
-          <a:xfrm>
-            <a:off x="5629275" y="1438275"/>
-            <a:ext cx="5953125" cy="0"/>
-          </a:xfrm>
-          <a:prstGeom prst="line">
-            <a:avLst/>
-          </a:prstGeom>
-          <a:noFill/>
-          <a:ln w="12383">
-            <a:solidFill>
-              <a:srgbClr val="1F4D78"/>
-            </a:solidFill>
-          </a:ln>
-        </p:spPr>
-      </p:sp>
-      <p:sp>
-        <p:nvSpPr>
-          <p:cNvPr id="11" name="example-mark">
-            <a:extLst>
-              <a:ext uri="{FF2B5EF4-FFF2-40B4-BE49-F238E27FC236}">
-                <a16:creationId xmlns:a16="http://schemas.microsoft.com/office/drawing/2014/main" id="{4D824D85-C736-4A3D-A2E8-F2CB07505A0D}"/>
-              </a:ext>
-            </a:extLst>
-          </p:cNvPr>
-          <p:cNvSpPr>
-            <a:spLocks noGrp="1"/>
-          </p:cNvSpPr>
-          <p:nvPr/>
-        </p:nvSpPr>
-        <p:spPr>
-          <a:xfrm>
-            <a:off x="5629275" y="1000125"/>
-            <a:ext cx="6000750" cy="323850"/>
-          </a:xfrm>
-          <a:prstGeom prst="rect">
-            <a:avLst/>
-          </a:prstGeom>
-          <a:noFill/>
-          <a:ln w="0">
-            <a:noFill/>
-          </a:ln>
-        </p:spPr>
-        <p:txBody>
-          <a:bodyPr lIns="0" tIns="0" rIns="0" bIns="0" anchor="t">
-            <a:noAutofit/>
-          </a:bodyPr>
-          <a:lstStyle/>
-          <a:p>
-            <a:pPr algn="l">
-              <a:lnSpc>
-                <a:spcPct val="130000"/>
-              </a:lnSpc>
-              <a:buNone/>
-              <a:defRPr sz="1800" b="0">
-                <a:solidFill>
-                  <a:srgbClr val="A96510"/>
-                </a:solidFill>
-                <a:latin typeface="微软雅黑"/>
-                <a:ea typeface="微软雅黑"/>
-                <a:cs typeface="微软雅黑"/>
-              </a:defRPr>
-            </a:pPr>
-            <a:r>
-              <a:rPr sz="1800" b="0">
-                <a:solidFill>
-                  <a:srgbClr val="A96510"/>
-                </a:solidFill>
-                <a:latin typeface="微软雅黑"/>
-                <a:ea typeface="微软雅黑"/>
-                <a:cs typeface="微软雅黑"/>
-              </a:rPr>
-              <a:t>课堂构造完成示例</a:t>
-            </a:r>
-          </a:p>
-        </p:txBody>
-      </p:sp>
-      <p:sp>
-        <p:nvSpPr>
-          <p:cNvPr id="12" name="example-label-0">
-            <a:extLst>
-              <a:ext uri="{FF2B5EF4-FFF2-40B4-BE49-F238E27FC236}">
-                <a16:creationId xmlns:a16="http://schemas.microsoft.com/office/drawing/2014/main" id="{1EC0881D-40C5-424C-AE38-E7A31C38664C}"/>
-              </a:ext>
-            </a:extLst>
-          </p:cNvPr>
-          <p:cNvSpPr>
-            <a:spLocks noGrp="1"/>
-          </p:cNvSpPr>
-          <p:nvPr/>
-        </p:nvSpPr>
-        <p:spPr>
-          <a:xfrm>
-            <a:off x="5629275" y="1695450"/>
-            <a:ext cx="5943600" cy="333375"/>
-          </a:xfrm>
-          <a:prstGeom prst="rect">
-            <a:avLst/>
-          </a:prstGeom>
-          <a:noFill/>
-          <a:ln w="0">
-            <a:noFill/>
-          </a:ln>
-        </p:spPr>
-        <p:txBody>
-          <a:bodyPr lIns="0" tIns="0" rIns="0" bIns="0" anchor="t">
-            <a:noAutofit/>
-          </a:bodyPr>
-          <a:lstStyle/>
-          <a:p>
-            <a:pPr algn="l">
-              <a:lnSpc>
-                <a:spcPct val="130000"/>
-              </a:lnSpc>
-              <a:buNone/>
-              <a:defRPr sz="2200" b="1">
-                <a:solidFill>
-                  <a:srgbClr val="1F4D78"/>
-                </a:solidFill>
-                <a:latin typeface="微软雅黑"/>
-                <a:ea typeface="微软雅黑"/>
-                <a:cs typeface="微软雅黑"/>
-              </a:defRPr>
-            </a:pPr>
-            <a:r>
-              <a:rPr sz="2200" b="1">
-                <a:solidFill>
-                  <a:srgbClr val="1F4D78"/>
-                </a:solidFill>
-                <a:latin typeface="微软雅黑"/>
-                <a:ea typeface="微软雅黑"/>
-                <a:cs typeface="微软雅黑"/>
-              </a:rPr>
-              <a:t>权限行</a:t>
-            </a:r>
-          </a:p>
-        </p:txBody>
-      </p:sp>
-      <p:sp>
-        <p:nvSpPr>
-          <p:cNvPr id="13" name="example-body-0">
-            <a:extLst>
-              <a:ext uri="{FF2B5EF4-FFF2-40B4-BE49-F238E27FC236}">
-                <a16:creationId xmlns:a16="http://schemas.microsoft.com/office/drawing/2014/main" id="{1322AA02-055C-4197-A1B0-C1FAC2D7F97A}"/>
-              </a:ext>
-            </a:extLst>
-          </p:cNvPr>
-          <p:cNvSpPr>
-            <a:spLocks noGrp="1"/>
-          </p:cNvSpPr>
-          <p:nvPr/>
-        </p:nvSpPr>
-        <p:spPr>
-          <a:xfrm>
-            <a:off x="5629275" y="2124075"/>
-            <a:ext cx="5953125" cy="866775"/>
-          </a:xfrm>
-          <a:prstGeom prst="rect">
-            <a:avLst/>
-          </a:prstGeom>
-          <a:noFill/>
-          <a:ln w="0">
-            <a:noFill/>
-          </a:ln>
-        </p:spPr>
-        <p:txBody>
-          <a:bodyPr lIns="0" tIns="0" rIns="0" bIns="0" anchor="t">
-            <a:noAutofit/>
-          </a:bodyPr>
-          <a:lstStyle/>
-          <a:p>
-            <a:pPr algn="l">
-              <a:lnSpc>
-                <a:spcPct val="120000"/>
-              </a:lnSpc>
-              <a:buNone/>
-              <a:defRPr sz="2200" b="0">
-                <a:solidFill>
-                  <a:srgbClr val="263442"/>
-                </a:solidFill>
-                <a:latin typeface="微软雅黑"/>
-                <a:ea typeface="微软雅黑"/>
-                <a:cs typeface="微软雅黑"/>
-              </a:defRPr>
-            </a:pPr>
-            <a:r>
-              <a:rPr sz="2200" b="0">
-                <a:solidFill>
-                  <a:srgbClr val="263442"/>
-                </a:solidFill>
-                <a:latin typeface="微软雅黑"/>
-                <a:ea typeface="微软雅黑"/>
-                <a:cs typeface="微软雅黑"/>
-              </a:rPr>
-              <a:t>只读获准问题描述，处理环境已确认；</a:t>
-            </a:r>
-          </a:p>
-          <a:p>
-            <a:pPr algn="l">
-              <a:lnSpc>
-                <a:spcPct val="120000"/>
-              </a:lnSpc>
-              <a:buNone/>
-              <a:defRPr sz="2200" b="0">
-                <a:solidFill>
-                  <a:srgbClr val="263442"/>
-                </a:solidFill>
-                <a:latin typeface="微软雅黑"/>
-                <a:ea typeface="微软雅黑"/>
-                <a:cs typeface="微软雅黑"/>
-              </a:defRPr>
-            </a:pPr>
-            <a:r>
-              <a:rPr sz="2200" b="0">
-                <a:solidFill>
-                  <a:srgbClr val="263442"/>
-                </a:solidFill>
-                <a:latin typeface="微软雅黑"/>
-                <a:ea typeface="微软雅黑"/>
-                <a:cs typeface="微软雅黑"/>
-              </a:rPr>
-              <a:t>写回前确认三份文件的具体段落。</a:t>
-            </a:r>
-          </a:p>
-        </p:txBody>
-      </p:sp>
-      <p:sp>
-        <p:nvSpPr>
-          <p:cNvPr id="14" name="example-line-0">
-            <a:extLst>
-              <a:ext uri="{FF2B5EF4-FFF2-40B4-BE49-F238E27FC236}">
-                <a16:creationId xmlns:a16="http://schemas.microsoft.com/office/drawing/2014/main" id="{D93484EE-4A76-4D6C-97EE-D9FBA665B349}"/>
-              </a:ext>
-            </a:extLst>
-          </p:cNvPr>
-          <p:cNvSpPr>
-            <a:spLocks noGrp="1"/>
-          </p:cNvSpPr>
-          <p:nvPr/>
-        </p:nvSpPr>
-        <p:spPr>
-          <a:xfrm>
-            <a:off x="5629275" y="2962275"/>
-            <a:ext cx="5953125" cy="0"/>
-          </a:xfrm>
-          <a:prstGeom prst="line">
-            <a:avLst/>
-          </a:prstGeom>
-          <a:noFill/>
-          <a:ln w="12383">
-            <a:solidFill>
-              <a:srgbClr val="CAD3DC"/>
-            </a:solidFill>
-          </a:ln>
-        </p:spPr>
-      </p:sp>
-      <p:sp>
-        <p:nvSpPr>
-          <p:cNvPr id="15" name="example-label-1">
-            <a:extLst>
-              <a:ext uri="{FF2B5EF4-FFF2-40B4-BE49-F238E27FC236}">
-                <a16:creationId xmlns:a16="http://schemas.microsoft.com/office/drawing/2014/main" id="{E85BCF0A-8669-4F36-8343-50E8806CAAA6}"/>
-              </a:ext>
-            </a:extLst>
-          </p:cNvPr>
-          <p:cNvSpPr>
-            <a:spLocks noGrp="1"/>
-          </p:cNvSpPr>
-          <p:nvPr/>
-        </p:nvSpPr>
-        <p:spPr>
-          <a:xfrm>
-            <a:off x="5629275" y="3076575"/>
-            <a:ext cx="5943600" cy="333375"/>
-          </a:xfrm>
-          <a:prstGeom prst="rect">
-            <a:avLst/>
-          </a:prstGeom>
-          <a:noFill/>
-          <a:ln w="0">
-            <a:noFill/>
-          </a:ln>
-        </p:spPr>
-        <p:txBody>
-          <a:bodyPr lIns="0" tIns="0" rIns="0" bIns="0" anchor="t">
-            <a:noAutofit/>
-          </a:bodyPr>
-          <a:lstStyle/>
-          <a:p>
-            <a:pPr algn="l">
-              <a:lnSpc>
-                <a:spcPct val="130000"/>
-              </a:lnSpc>
-              <a:buNone/>
-              <a:defRPr sz="2200" b="1">
-                <a:solidFill>
-                  <a:srgbClr val="1F4D78"/>
-                </a:solidFill>
-                <a:latin typeface="微软雅黑"/>
-                <a:ea typeface="微软雅黑"/>
-                <a:cs typeface="微软雅黑"/>
-              </a:defRPr>
-            </a:pPr>
-            <a:r>
-              <a:rPr sz="2200" b="1">
-                <a:solidFill>
-                  <a:srgbClr val="1F4D78"/>
-                </a:solidFill>
-                <a:latin typeface="微软雅黑"/>
-                <a:ea typeface="微软雅黑"/>
-                <a:cs typeface="微软雅黑"/>
-              </a:rPr>
-              <a:t>风险卡</a:t>
-            </a:r>
-          </a:p>
-        </p:txBody>
-      </p:sp>
-      <p:sp>
-        <p:nvSpPr>
-          <p:cNvPr id="16" name="example-body-1">
-            <a:extLst>
-              <a:ext uri="{FF2B5EF4-FFF2-40B4-BE49-F238E27FC236}">
-                <a16:creationId xmlns:a16="http://schemas.microsoft.com/office/drawing/2014/main" id="{FBAA1468-0746-4216-9D8A-777D5081487B}"/>
-              </a:ext>
-            </a:extLst>
-          </p:cNvPr>
-          <p:cNvSpPr>
-            <a:spLocks noGrp="1"/>
-          </p:cNvSpPr>
-          <p:nvPr/>
-        </p:nvSpPr>
-        <p:spPr>
-          <a:xfrm>
-            <a:off x="5629275" y="3505200"/>
-            <a:ext cx="5953125" cy="866775"/>
-          </a:xfrm>
-          <a:prstGeom prst="rect">
-            <a:avLst/>
-          </a:prstGeom>
-          <a:noFill/>
-          <a:ln w="0">
-            <a:noFill/>
-          </a:ln>
-        </p:spPr>
-        <p:txBody>
-          <a:bodyPr lIns="0" tIns="0" rIns="0" bIns="0" anchor="t">
-            <a:noAutofit/>
-          </a:bodyPr>
-          <a:lstStyle/>
-          <a:p>
-            <a:pPr algn="l">
-              <a:lnSpc>
-                <a:spcPct val="120000"/>
-              </a:lnSpc>
-              <a:buNone/>
-              <a:defRPr sz="2200" b="0">
-                <a:solidFill>
-                  <a:srgbClr val="263442"/>
-                </a:solidFill>
-                <a:latin typeface="微软雅黑"/>
-                <a:ea typeface="微软雅黑"/>
-                <a:cs typeface="微软雅黑"/>
-              </a:defRPr>
-            </a:pPr>
-            <a:r>
-              <a:rPr sz="2200" b="0">
-                <a:solidFill>
-                  <a:srgbClr val="263442"/>
-                </a:solidFill>
-                <a:latin typeface="微软雅黑"/>
-                <a:ea typeface="微软雅黑"/>
-                <a:cs typeface="微软雅黑"/>
-              </a:rPr>
-              <a:t>原稿外发会暴露合作内容。</a:t>
-            </a:r>
-          </a:p>
-          <a:p>
-            <a:pPr algn="l">
-              <a:lnSpc>
-                <a:spcPct val="120000"/>
-              </a:lnSpc>
-              <a:buNone/>
-              <a:defRPr sz="2200" b="0">
-                <a:solidFill>
-                  <a:srgbClr val="263442"/>
-                </a:solidFill>
-                <a:latin typeface="微软雅黑"/>
-                <a:ea typeface="微软雅黑"/>
-                <a:cs typeface="微软雅黑"/>
-              </a:defRPr>
-            </a:pPr>
-            <a:r>
-              <a:rPr sz="2200" b="0">
-                <a:solidFill>
-                  <a:srgbClr val="263442"/>
-                </a:solidFill>
-                <a:latin typeface="微软雅黑"/>
-                <a:ea typeface="微软雅黑"/>
-                <a:cs typeface="微软雅黑"/>
-              </a:rPr>
-              <a:t>确认获准输入与处理环境，由作者核查。</a:t>
-            </a:r>
-          </a:p>
-        </p:txBody>
-      </p:sp>
-      <p:sp>
-        <p:nvSpPr>
-          <p:cNvPr id="17" name="example-line-1">
-            <a:extLst>
-              <a:ext uri="{FF2B5EF4-FFF2-40B4-BE49-F238E27FC236}">
-                <a16:creationId xmlns:a16="http://schemas.microsoft.com/office/drawing/2014/main" id="{132BE5CF-DBAF-4CE2-8D70-6BC0AD70D27B}"/>
-              </a:ext>
-            </a:extLst>
-          </p:cNvPr>
-          <p:cNvSpPr>
-            <a:spLocks noGrp="1"/>
-          </p:cNvSpPr>
-          <p:nvPr/>
-        </p:nvSpPr>
-        <p:spPr>
-          <a:xfrm>
-            <a:off x="5629275" y="4343400"/>
-            <a:ext cx="5953125" cy="0"/>
-          </a:xfrm>
-          <a:prstGeom prst="line">
-            <a:avLst/>
-          </a:prstGeom>
-          <a:noFill/>
-          <a:ln w="12383">
-            <a:solidFill>
-              <a:srgbClr val="CAD3DC"/>
-            </a:solidFill>
-          </a:ln>
-        </p:spPr>
-      </p:sp>
-      <p:sp>
-        <p:nvSpPr>
-          <p:cNvPr id="18" name="example-label-2">
-            <a:extLst>
-              <a:ext uri="{FF2B5EF4-FFF2-40B4-BE49-F238E27FC236}">
-                <a16:creationId xmlns:a16="http://schemas.microsoft.com/office/drawing/2014/main" id="{E8B03F4E-AC2C-483C-B699-2B0339C23FA9}"/>
-              </a:ext>
-            </a:extLst>
-          </p:cNvPr>
-          <p:cNvSpPr>
-            <a:spLocks noGrp="1"/>
-          </p:cNvSpPr>
-          <p:nvPr/>
-        </p:nvSpPr>
-        <p:spPr>
-          <a:xfrm>
-            <a:off x="5629275" y="4457700"/>
-            <a:ext cx="5943600" cy="333375"/>
-          </a:xfrm>
-          <a:prstGeom prst="rect">
-            <a:avLst/>
-          </a:prstGeom>
-          <a:noFill/>
-          <a:ln w="0">
-            <a:noFill/>
-          </a:ln>
-        </p:spPr>
-        <p:txBody>
-          <a:bodyPr lIns="0" tIns="0" rIns="0" bIns="0" anchor="t">
-            <a:noAutofit/>
-          </a:bodyPr>
-          <a:lstStyle/>
-          <a:p>
-            <a:pPr algn="l">
-              <a:lnSpc>
-                <a:spcPct val="130000"/>
-              </a:lnSpc>
-              <a:buNone/>
-              <a:defRPr sz="2200" b="1">
-                <a:solidFill>
-                  <a:srgbClr val="1F4D78"/>
-                </a:solidFill>
-                <a:latin typeface="微软雅黑"/>
-                <a:ea typeface="微软雅黑"/>
-                <a:cs typeface="微软雅黑"/>
-              </a:defRPr>
-            </a:pPr>
-            <a:r>
-              <a:rPr sz="2200" b="1">
-                <a:solidFill>
-                  <a:srgbClr val="1F4D78"/>
-                </a:solidFill>
-                <a:latin typeface="微软雅黑"/>
-                <a:ea typeface="微软雅黑"/>
-                <a:cs typeface="微软雅黑"/>
-              </a:rPr>
-              <a:t>使用记录</a:t>
-            </a:r>
-          </a:p>
-        </p:txBody>
-      </p:sp>
-      <p:sp>
-        <p:nvSpPr>
-          <p:cNvPr id="19" name="example-body-2">
-            <a:extLst>
-              <a:ext uri="{FF2B5EF4-FFF2-40B4-BE49-F238E27FC236}">
-                <a16:creationId xmlns:a16="http://schemas.microsoft.com/office/drawing/2014/main" id="{314EAB8A-48BF-41A4-8894-0A774C557D0C}"/>
-              </a:ext>
-            </a:extLst>
-          </p:cNvPr>
-          <p:cNvSpPr>
-            <a:spLocks noGrp="1"/>
-          </p:cNvSpPr>
-          <p:nvPr/>
-        </p:nvSpPr>
-        <p:spPr>
-          <a:xfrm>
-            <a:off x="5629275" y="4886325"/>
-            <a:ext cx="5953125" cy="866775"/>
-          </a:xfrm>
-          <a:prstGeom prst="rect">
-            <a:avLst/>
-          </a:prstGeom>
-          <a:noFill/>
-          <a:ln w="0">
-            <a:noFill/>
-          </a:ln>
-        </p:spPr>
-        <p:txBody>
-          <a:bodyPr lIns="0" tIns="0" rIns="0" bIns="0" anchor="t">
-            <a:noAutofit/>
-          </a:bodyPr>
-          <a:lstStyle/>
-          <a:p>
-            <a:pPr algn="l">
-              <a:lnSpc>
-                <a:spcPct val="120000"/>
-              </a:lnSpc>
-              <a:buNone/>
-              <a:defRPr sz="2200" b="0">
-                <a:solidFill>
-                  <a:srgbClr val="263442"/>
-                </a:solidFill>
-                <a:latin typeface="微软雅黑"/>
-                <a:ea typeface="微软雅黑"/>
-                <a:cs typeface="微软雅黑"/>
-              </a:defRPr>
-            </a:pPr>
-            <a:r>
-              <a:rPr sz="2200" b="0">
-                <a:solidFill>
-                  <a:srgbClr val="263442"/>
-                </a:solidFill>
-                <a:latin typeface="微软雅黑"/>
-                <a:ea typeface="微软雅黑"/>
-                <a:cs typeface="微软雅黑"/>
-              </a:rPr>
-              <a:t>写明实际输入、采用理由与核验方法。</a:t>
-            </a:r>
-          </a:p>
-          <a:p>
-            <a:pPr algn="l">
-              <a:lnSpc>
-                <a:spcPct val="120000"/>
-              </a:lnSpc>
-              <a:buNone/>
-              <a:defRPr sz="2200" b="0">
-                <a:solidFill>
-                  <a:srgbClr val="263442"/>
-                </a:solidFill>
-                <a:latin typeface="微软雅黑"/>
-                <a:ea typeface="微软雅黑"/>
-                <a:cs typeface="微软雅黑"/>
-              </a:defRPr>
-            </a:pPr>
-            <a:r>
-              <a:rPr sz="2200" b="0">
-                <a:solidFill>
-                  <a:srgbClr val="263442"/>
-                </a:solidFill>
-                <a:latin typeface="微软雅黑"/>
-                <a:ea typeface="微软雅黑"/>
-                <a:cs typeface="微软雅黑"/>
-              </a:rPr>
-              <a:t>未调用模型时如实记录“未执行”。</a:t>
-            </a:r>
-          </a:p>
-        </p:txBody>
-      </p:sp>
-      <p:sp>
-        <p:nvSpPr>
-          <p:cNvPr id="20" name="finish-line">
-            <a:extLst>
-              <a:ext uri="{FF2B5EF4-FFF2-40B4-BE49-F238E27FC236}">
-                <a16:creationId xmlns:a16="http://schemas.microsoft.com/office/drawing/2014/main" id="{8A8608D7-4B38-490E-8BC7-8F10D90EAD40}"/>
-              </a:ext>
-            </a:extLst>
-          </p:cNvPr>
-          <p:cNvSpPr>
-            <a:spLocks noGrp="1"/>
-          </p:cNvSpPr>
-          <p:nvPr/>
-        </p:nvSpPr>
-        <p:spPr>
-          <a:xfrm>
-            <a:off x="609600" y="5972175"/>
-            <a:ext cx="10953750" cy="323850"/>
-          </a:xfrm>
-          <a:prstGeom prst="rect">
-            <a:avLst/>
-          </a:prstGeom>
-          <a:noFill/>
-          <a:ln w="0">
-            <a:noFill/>
-          </a:ln>
-        </p:spPr>
-        <p:txBody>
-          <a:bodyPr lIns="0" tIns="0" rIns="0" bIns="0" anchor="t">
-            <a:noAutofit/>
-          </a:bodyPr>
-          <a:lstStyle/>
-          <a:p>
-            <a:pPr algn="l">
-              <a:lnSpc>
-                <a:spcPct val="130000"/>
-              </a:lnSpc>
-              <a:buNone/>
-              <a:defRPr sz="2000" b="0">
-                <a:solidFill>
-                  <a:srgbClr val="1F4D78"/>
-                </a:solidFill>
-                <a:latin typeface="微软雅黑"/>
-                <a:ea typeface="微软雅黑"/>
-                <a:cs typeface="微软雅黑"/>
-              </a:defRPr>
-            </a:pPr>
-            <a:r>
-              <a:rPr sz="2000" b="0">
-                <a:solidFill>
-                  <a:srgbClr val="1F4D78"/>
-                </a:solidFill>
-                <a:latin typeface="微软雅黑"/>
-                <a:ea typeface="微软雅黑"/>
-                <a:cs typeface="微软雅黑"/>
-              </a:rPr>
-              <a:t>完成标志：三件工件相互一致，能解释一次具体动作</a:t>
+              <a:rPr sz="900" b="0">
+                <a:solidFill>
+                  <a:srgbClr val="A5A5A5"/>
+                </a:solidFill>
+                <a:latin typeface="微软雅黑"/>
+                <a:ea typeface="微软雅黑"/>
+                <a:cs typeface="微软雅黑"/>
+              </a:rPr>
+              <a:t>24</a:t>
             </a:r>
           </a:p>
         </p:txBody>
@@ -26072,131 +23708,26 @@
         <p:nvPr/>
       </p:nvGrpSpPr>
       <p:grpSpPr>
-        <a:xfrm>
-          <a:off x="0" y="0"/>
-          <a:ext cx="0" cy="0"/>
-          <a:chOff x="0" y="0"/>
-          <a:chExt cx="0" cy="0"/>
-        </a:xfrm>
+        <a:xfrm/>
       </p:grpSpPr>
       <p:sp>
         <p:nvSpPr>
-          <p:cNvPr id="2" name="TextBox 1">
-            <a:extLst>
-              <a:ext uri="{FF2B5EF4-FFF2-40B4-BE49-F238E27FC236}">
-                <a16:creationId xmlns:a16="http://schemas.microsoft.com/office/drawing/2014/main" id="{A1890327-D55D-4DCD-A8A5-1260C0C7D5BB}"/>
-              </a:ext>
-            </a:extLst>
-          </p:cNvPr>
-          <p:cNvSpPr>
-            <a:spLocks noGrp="1"/>
-          </p:cNvSpPr>
-          <p:nvPr/>
-        </p:nvSpPr>
-        <p:spPr>
-          <a:xfrm>
-            <a:off x="1028700" y="57150"/>
-            <a:ext cx="10629900" cy="571500"/>
-          </a:xfrm>
-          <a:prstGeom prst="rect">
-            <a:avLst/>
-          </a:prstGeom>
-          <a:noFill/>
-        </p:spPr>
-        <p:txBody>
-          <a:bodyPr lIns="0" tIns="0" rIns="0" bIns="0" anchor="ctr">
-            <a:noAutofit/>
-          </a:bodyPr>
-          <a:lstStyle/>
-          <a:p>
-            <a:pPr algn="l">
-              <a:lnSpc>
-                <a:spcPct val="115000"/>
-              </a:lnSpc>
-              <a:buNone/>
-            </a:pPr>
-            <a:r>
-              <a:rPr sz="3000" b="1">
-                <a:solidFill>
-                  <a:srgbClr val="FFFFFF"/>
-                </a:solidFill>
-                <a:latin typeface="微软雅黑"/>
-                <a:ea typeface="微软雅黑"/>
-                <a:cs typeface="微软雅黑"/>
-              </a:rPr>
-              <a:t>课后回写与第 3 课准备</a:t>
-            </a:r>
-          </a:p>
-        </p:txBody>
-      </p:sp>
-      <p:sp>
-        <p:nvSpPr>
-          <p:cNvPr id="3" name="TextBox 2">
-            <a:extLst>
-              <a:ext uri="{FF2B5EF4-FFF2-40B4-BE49-F238E27FC236}">
-                <a16:creationId xmlns:a16="http://schemas.microsoft.com/office/drawing/2014/main" id="{A9092B76-25CF-4081-AAAF-FA6C3CF78937}"/>
-              </a:ext>
-            </a:extLst>
-          </p:cNvPr>
-          <p:cNvSpPr>
-            <a:spLocks noGrp="1"/>
-          </p:cNvSpPr>
-          <p:nvPr/>
-        </p:nvSpPr>
-        <p:spPr>
-          <a:xfrm>
-            <a:off x="10899648" y="6473952"/>
-            <a:ext cx="566928" cy="256032"/>
-          </a:xfrm>
-          <a:prstGeom prst="rect">
-            <a:avLst/>
-          </a:prstGeom>
-          <a:noFill/>
-        </p:spPr>
-        <p:txBody>
-          <a:bodyPr wrap="square" lIns="0" tIns="0" rIns="0" bIns="0" anchor="ctr">
-            <a:spAutoFit/>
-          </a:bodyPr>
-          <a:lstStyle/>
-          <a:p>
-            <a:pPr algn="r">
-              <a:lnSpc>
-                <a:spcPct val="115000"/>
-              </a:lnSpc>
-              <a:buNone/>
-            </a:pPr>
-            <a:r>
-              <a:rPr sz="1200" b="0">
-                <a:solidFill>
-                  <a:srgbClr val="5F6B76"/>
-                </a:solidFill>
-                <a:latin typeface="Arial"/>
-                <a:ea typeface="Arial"/>
-                <a:cs typeface="Arial"/>
-              </a:rPr>
-              <a:t>27</a:t>
-            </a:r>
-          </a:p>
-        </p:txBody>
-      </p:sp>
-      <p:sp>
-        <p:nvSpPr>
-          <p:cNvPr id="4" name="body-570">
-            <a:extLst>
-              <a:ext uri="{FF2B5EF4-FFF2-40B4-BE49-F238E27FC236}">
-                <a16:creationId xmlns:a16="http://schemas.microsoft.com/office/drawing/2014/main" id="{9070CD3A-1914-4779-8CA8-EF18CEA905B1}"/>
-              </a:ext>
-            </a:extLst>
-          </p:cNvPr>
-          <p:cNvSpPr>
-            <a:spLocks noGrp="1"/>
-          </p:cNvSpPr>
-          <p:nvPr/>
-        </p:nvSpPr>
-        <p:spPr>
-          <a:xfrm>
-            <a:off x="609600" y="1657350"/>
-            <a:ext cx="2543175" cy="381000"/>
+          <p:cNvPr id="7" name="judgment-title">
+            <a:extLst>
+              <a:ext uri="{FF2B5EF4-FFF2-40B4-BE49-F238E27FC236}">
+                <a16:creationId xmlns:a16="http://schemas.microsoft.com/office/drawing/2014/main" id="{F3613387-2FDF-4E8C-81C5-F4DBE803AFC6}"/>
+              </a:ext>
+            </a:extLst>
+          </p:cNvPr>
+          <p:cNvSpPr>
+            <a:spLocks noGrp="1"/>
+          </p:cNvSpPr>
+          <p:nvPr/>
+        </p:nvSpPr>
+        <p:spPr>
+          <a:xfrm>
+            <a:off x="1028700" y="76200"/>
+            <a:ext cx="10687050" cy="514350"/>
           </a:xfrm>
           <a:prstGeom prst="rect">
             <a:avLst/>
@@ -26207,19 +23738,24 @@
           </a:ln>
         </p:spPr>
         <p:txBody>
-          <a:bodyPr lIns="0" tIns="0" rIns="0" bIns="0" anchor="t">
-            <a:noAutofit/>
-          </a:bodyPr>
-          <a:lstStyle/>
+          <a:bodyPr lIns="0" tIns="0" rIns="0" bIns="0" anchor="t"/>
+          <a:lstStyle>
+            <a:defPPr algn="l">
+              <a:defRPr sz="3000" b="1">
+                <a:solidFill>
+                  <a:srgbClr val="FFFFFF"/>
+                </a:solidFill>
+                <a:latin typeface="微软雅黑"/>
+                <a:ea typeface="微软雅黑"/>
+                <a:cs typeface="微软雅黑"/>
+              </a:defRPr>
+            </a:defPPr>
+          </a:lstStyle>
           <a:p>
             <a:pPr algn="l">
-              <a:lnSpc>
-                <a:spcPct val="130000"/>
-              </a:lnSpc>
-              <a:buNone/>
-              <a:defRPr sz="2400" b="1">
-                <a:solidFill>
-                  <a:srgbClr val="1F4D78"/>
+              <a:defRPr sz="3000" b="1">
+                <a:solidFill>
+                  <a:srgbClr val="FFFFFF"/>
                 </a:solidFill>
                 <a:latin typeface="微软雅黑"/>
                 <a:ea typeface="微软雅黑"/>
@@ -26227,37 +23763,37 @@
               </a:defRPr>
             </a:pPr>
             <a:r>
-              <a:rPr sz="2400" b="1">
-                <a:solidFill>
-                  <a:srgbClr val="1F4D78"/>
-                </a:solidFill>
-                <a:latin typeface="微软雅黑"/>
-                <a:ea typeface="微软雅黑"/>
-                <a:cs typeface="微软雅黑"/>
-              </a:rPr>
-              <a:t>继续完善</a:t>
-            </a:r>
-          </a:p>
-        </p:txBody>
-      </p:sp>
-      <p:sp>
-        <p:nvSpPr>
-          <p:cNvPr id="5" name="body-571">
-            <a:extLst>
-              <a:ext uri="{FF2B5EF4-FFF2-40B4-BE49-F238E27FC236}">
-                <a16:creationId xmlns:a16="http://schemas.microsoft.com/office/drawing/2014/main" id="{EC9BA24C-3E3C-4E89-AC16-6D0B698EED8E}"/>
-              </a:ext>
-            </a:extLst>
-          </p:cNvPr>
-          <p:cNvSpPr>
-            <a:spLocks noGrp="1"/>
-          </p:cNvSpPr>
-          <p:nvPr/>
-        </p:nvSpPr>
-        <p:spPr>
-          <a:xfrm>
-            <a:off x="3343275" y="1657350"/>
-            <a:ext cx="8239125" cy="1219200"/>
+              <a:rPr sz="3000" b="1">
+                <a:solidFill>
+                  <a:srgbClr val="FFFFFF"/>
+                </a:solidFill>
+                <a:latin typeface="微软雅黑"/>
+                <a:ea typeface="微软雅黑"/>
+                <a:cs typeface="微软雅黑"/>
+              </a:rPr>
+              <a:t>保留本课决定，准备下一课输入</a:t>
+            </a:r>
+          </a:p>
+        </p:txBody>
+      </p:sp>
+      <p:sp>
+        <p:nvSpPr>
+          <p:cNvPr id="2" name="judgment-body-0">
+            <a:extLst>
+              <a:ext uri="{FF2B5EF4-FFF2-40B4-BE49-F238E27FC236}">
+                <a16:creationId xmlns:a16="http://schemas.microsoft.com/office/drawing/2014/main" id="{D245162D-9064-4973-AF52-F952A270E6EB}"/>
+              </a:ext>
+            </a:extLst>
+          </p:cNvPr>
+          <p:cNvSpPr>
+            <a:spLocks noGrp="1"/>
+          </p:cNvSpPr>
+          <p:nvPr/>
+        </p:nvSpPr>
+        <p:spPr>
+          <a:xfrm>
+            <a:off x="666750" y="1066800"/>
+            <a:ext cx="10858500" cy="1009650"/>
           </a:xfrm>
           <a:prstGeom prst="rect">
             <a:avLst/>
@@ -26268,19 +23804,24 @@
           </a:ln>
         </p:spPr>
         <p:txBody>
-          <a:bodyPr lIns="0" tIns="0" rIns="0" bIns="0" anchor="t">
-            <a:noAutofit/>
-          </a:bodyPr>
-          <a:lstStyle/>
+          <a:bodyPr lIns="0" tIns="0" rIns="0" bIns="0" anchor="t"/>
+          <a:lstStyle>
+            <a:defPPr algn="l">
+              <a:defRPr sz="2400" b="0">
+                <a:solidFill>
+                  <a:srgbClr val="263746"/>
+                </a:solidFill>
+                <a:latin typeface="微软雅黑"/>
+                <a:ea typeface="微软雅黑"/>
+                <a:cs typeface="微软雅黑"/>
+              </a:defRPr>
+            </a:defPPr>
+          </a:lstStyle>
           <a:p>
             <a:pPr algn="l">
-              <a:lnSpc>
-                <a:spcPct val="115000"/>
-              </a:lnSpc>
-              <a:buNone/>
               <a:defRPr sz="2400" b="0">
                 <a:solidFill>
-                  <a:srgbClr val="263442"/>
+                  <a:srgbClr val="263746"/>
                 </a:solidFill>
                 <a:latin typeface="微软雅黑"/>
                 <a:ea typeface="微软雅黑"/>
@@ -26290,65 +23831,35 @@
             <a:r>
               <a:rPr sz="2400" b="0">
                 <a:solidFill>
-                  <a:srgbClr val="263442"/>
-                </a:solidFill>
-                <a:latin typeface="微软雅黑"/>
-                <a:ea typeface="微软雅黑"/>
-                <a:cs typeface="微软雅黑"/>
-              </a:rPr>
-              <a:t>按个人项目补齐材料边界、确认点和禁止项。</a:t>
-            </a:r>
-          </a:p>
-        </p:txBody>
-      </p:sp>
-      <p:sp>
-        <p:nvSpPr>
-          <p:cNvPr id="6" name="rule-572">
-            <a:extLst>
-              <a:ext uri="{FF2B5EF4-FFF2-40B4-BE49-F238E27FC236}">
-                <a16:creationId xmlns:a16="http://schemas.microsoft.com/office/drawing/2014/main" id="{E30F290C-8821-4CBC-81D9-E105B0CC1C19}"/>
-              </a:ext>
-            </a:extLst>
-          </p:cNvPr>
-          <p:cNvSpPr>
-            <a:spLocks noGrp="1"/>
-          </p:cNvSpPr>
-          <p:nvPr/>
-        </p:nvSpPr>
-        <p:spPr>
-          <a:xfrm>
-            <a:off x="609600" y="2847975"/>
-            <a:ext cx="10972800" cy="0"/>
-          </a:xfrm>
-          <a:prstGeom prst="line">
-            <a:avLst/>
-          </a:prstGeom>
-          <a:noFill/>
-          <a:ln w="12383">
-            <a:solidFill>
-              <a:srgbClr val="CAD3DC"/>
-            </a:solidFill>
-          </a:ln>
-        </p:spPr>
-      </p:sp>
-      <p:sp>
-        <p:nvSpPr>
-          <p:cNvPr id="7" name="body-573">
-            <a:extLst>
-              <a:ext uri="{FF2B5EF4-FFF2-40B4-BE49-F238E27FC236}">
-                <a16:creationId xmlns:a16="http://schemas.microsoft.com/office/drawing/2014/main" id="{A19927C5-AE90-40A4-A0C4-C830C6EC7C9F}"/>
-              </a:ext>
-            </a:extLst>
-          </p:cNvPr>
-          <p:cNvSpPr>
-            <a:spLocks noGrp="1"/>
-          </p:cNvSpPr>
-          <p:nvPr/>
-        </p:nvSpPr>
-        <p:spPr>
-          <a:xfrm>
-            <a:off x="609600" y="2962275"/>
-            <a:ext cx="2543175" cy="381000"/>
+                  <a:srgbClr val="263746"/>
+                </a:solidFill>
+                <a:latin typeface="微软雅黑"/>
+                <a:ea typeface="微软雅黑"/>
+                <a:cs typeface="微软雅黑"/>
+              </a:rPr>
+              <a:t>L3 只在已声明的公开来源和网络范围内检索。</a:t>
+            </a:r>
+          </a:p>
+        </p:txBody>
+      </p:sp>
+      <p:sp>
+        <p:nvSpPr>
+          <p:cNvPr id="3" name="judgment-body-1">
+            <a:extLst>
+              <a:ext uri="{FF2B5EF4-FFF2-40B4-BE49-F238E27FC236}">
+                <a16:creationId xmlns:a16="http://schemas.microsoft.com/office/drawing/2014/main" id="{1501036E-A9F6-425B-AE0B-C231F04431E3}"/>
+              </a:ext>
+            </a:extLst>
+          </p:cNvPr>
+          <p:cNvSpPr>
+            <a:spLocks noGrp="1"/>
+          </p:cNvSpPr>
+          <p:nvPr/>
+        </p:nvSpPr>
+        <p:spPr>
+          <a:xfrm>
+            <a:off x="666750" y="2238375"/>
+            <a:ext cx="10858500" cy="2076450"/>
           </a:xfrm>
           <a:prstGeom prst="rect">
             <a:avLst/>
@@ -26359,19 +23870,24 @@
           </a:ln>
         </p:spPr>
         <p:txBody>
-          <a:bodyPr lIns="0" tIns="0" rIns="0" bIns="0" anchor="t">
-            <a:noAutofit/>
-          </a:bodyPr>
-          <a:lstStyle/>
+          <a:bodyPr lIns="0" tIns="0" rIns="0" bIns="0" anchor="t"/>
+          <a:lstStyle>
+            <a:defPPr algn="l">
+              <a:defRPr sz="2400" b="0">
+                <a:solidFill>
+                  <a:srgbClr val="263746"/>
+                </a:solidFill>
+                <a:latin typeface="微软雅黑"/>
+                <a:ea typeface="微软雅黑"/>
+                <a:cs typeface="微软雅黑"/>
+              </a:defRPr>
+            </a:defPPr>
+          </a:lstStyle>
           <a:p>
             <a:pPr algn="l">
-              <a:lnSpc>
-                <a:spcPct val="130000"/>
-              </a:lnSpc>
-              <a:buNone/>
-              <a:defRPr sz="2400" b="1">
-                <a:solidFill>
-                  <a:srgbClr val="1F4D78"/>
+              <a:defRPr sz="2400" b="0">
+                <a:solidFill>
+                  <a:srgbClr val="263746"/>
                 </a:solidFill>
                 <a:latin typeface="微软雅黑"/>
                 <a:ea typeface="微软雅黑"/>
@@ -26379,37 +23895,37 @@
               </a:defRPr>
             </a:pPr>
             <a:r>
-              <a:rPr sz="2400" b="1">
-                <a:solidFill>
-                  <a:srgbClr val="1F4D78"/>
-                </a:solidFill>
-                <a:latin typeface="微软雅黑"/>
-                <a:ea typeface="微软雅黑"/>
-                <a:cs typeface="微软雅黑"/>
-              </a:rPr>
-              <a:t>补工件追踪</a:t>
-            </a:r>
-          </a:p>
-        </p:txBody>
-      </p:sp>
-      <p:sp>
-        <p:nvSpPr>
-          <p:cNvPr id="8" name="body-574">
-            <a:extLst>
-              <a:ext uri="{FF2B5EF4-FFF2-40B4-BE49-F238E27FC236}">
-                <a16:creationId xmlns:a16="http://schemas.microsoft.com/office/drawing/2014/main" id="{634ABF83-FF36-4DD5-81E6-FC0E0AFBE311}"/>
-              </a:ext>
-            </a:extLst>
-          </p:cNvPr>
-          <p:cNvSpPr>
-            <a:spLocks noGrp="1"/>
-          </p:cNvSpPr>
-          <p:nvPr/>
-        </p:nvSpPr>
-        <p:spPr>
-          <a:xfrm>
-            <a:off x="3343275" y="2962275"/>
-            <a:ext cx="8239125" cy="1219200"/>
+              <a:rPr sz="2400" b="0">
+                <a:solidFill>
+                  <a:srgbClr val="263746"/>
+                </a:solidFill>
+                <a:latin typeface="微软雅黑"/>
+                <a:ea typeface="微软雅黑"/>
+                <a:cs typeface="微软雅黑"/>
+              </a:rPr>
+              <a:t>回写已有项目：权限行、风险卡、一次允许/拒绝检查及日志</a:t>
+            </a:r>
+          </a:p>
+        </p:txBody>
+      </p:sp>
+      <p:sp>
+        <p:nvSpPr>
+          <p:cNvPr id="4" name="judgment-body-2">
+            <a:extLst>
+              <a:ext uri="{FF2B5EF4-FFF2-40B4-BE49-F238E27FC236}">
+                <a16:creationId xmlns:a16="http://schemas.microsoft.com/office/drawing/2014/main" id="{44E1D24B-A7F7-4DD1-B34C-0E7A29367EB2}"/>
+              </a:ext>
+            </a:extLst>
+          </p:cNvPr>
+          <p:cNvSpPr>
+            <a:spLocks noGrp="1"/>
+          </p:cNvSpPr>
+          <p:nvPr/>
+        </p:nvSpPr>
+        <p:spPr>
+          <a:xfrm>
+            <a:off x="666750" y="4495800"/>
+            <a:ext cx="10858500" cy="1409700"/>
           </a:xfrm>
           <a:prstGeom prst="rect">
             <a:avLst/>
@@ -26420,19 +23936,24 @@
           </a:ln>
         </p:spPr>
         <p:txBody>
-          <a:bodyPr lIns="0" tIns="0" rIns="0" bIns="0" anchor="t">
-            <a:noAutofit/>
-          </a:bodyPr>
-          <a:lstStyle/>
+          <a:bodyPr lIns="0" tIns="0" rIns="0" bIns="0" anchor="t"/>
+          <a:lstStyle>
+            <a:defPPr algn="l">
+              <a:defRPr sz="2200" b="0">
+                <a:solidFill>
+                  <a:srgbClr val="1F4D78"/>
+                </a:solidFill>
+                <a:latin typeface="微软雅黑"/>
+                <a:ea typeface="微软雅黑"/>
+                <a:cs typeface="微软雅黑"/>
+              </a:defRPr>
+            </a:defPPr>
+          </a:lstStyle>
           <a:p>
             <a:pPr algn="l">
-              <a:lnSpc>
-                <a:spcPct val="115000"/>
-              </a:lnSpc>
-              <a:buNone/>
-              <a:defRPr sz="2400" b="0">
-                <a:solidFill>
-                  <a:srgbClr val="263442"/>
+              <a:defRPr sz="2200" b="0">
+                <a:solidFill>
+                  <a:srgbClr val="1F4D78"/>
                 </a:solidFill>
                 <a:latin typeface="微软雅黑"/>
                 <a:ea typeface="微软雅黑"/>
@@ -26440,67 +23961,37 @@
               </a:defRPr>
             </a:pPr>
             <a:r>
-              <a:rPr sz="2400" b="0">
-                <a:solidFill>
-                  <a:srgbClr val="263442"/>
-                </a:solidFill>
-                <a:latin typeface="微软雅黑"/>
-                <a:ea typeface="微软雅黑"/>
-                <a:cs typeface="微软雅黑"/>
-              </a:rPr>
-              <a:t>为早期工件标状态，保留支持状态的依据。</a:t>
-            </a:r>
-          </a:p>
-        </p:txBody>
-      </p:sp>
-      <p:sp>
-        <p:nvSpPr>
-          <p:cNvPr id="9" name="rule-575">
-            <a:extLst>
-              <a:ext uri="{FF2B5EF4-FFF2-40B4-BE49-F238E27FC236}">
-                <a16:creationId xmlns:a16="http://schemas.microsoft.com/office/drawing/2014/main" id="{111C3DA1-662B-4E76-AA6D-133E1951520A}"/>
-              </a:ext>
-            </a:extLst>
-          </p:cNvPr>
-          <p:cNvSpPr>
-            <a:spLocks noGrp="1"/>
-          </p:cNvSpPr>
-          <p:nvPr/>
-        </p:nvSpPr>
-        <p:spPr>
-          <a:xfrm>
-            <a:off x="609600" y="4152900"/>
-            <a:ext cx="10972800" cy="0"/>
-          </a:xfrm>
-          <a:prstGeom prst="line">
-            <a:avLst/>
-          </a:prstGeom>
-          <a:noFill/>
-          <a:ln w="12383">
-            <a:solidFill>
-              <a:srgbClr val="CAD3DC"/>
-            </a:solidFill>
-          </a:ln>
-        </p:spPr>
-      </p:sp>
-      <p:sp>
-        <p:nvSpPr>
-          <p:cNvPr id="10" name="body-576">
-            <a:extLst>
-              <a:ext uri="{FF2B5EF4-FFF2-40B4-BE49-F238E27FC236}">
-                <a16:creationId xmlns:a16="http://schemas.microsoft.com/office/drawing/2014/main" id="{20BC3FD8-3311-443D-8513-CDF84FE6BC37}"/>
-              </a:ext>
-            </a:extLst>
-          </p:cNvPr>
-          <p:cNvSpPr>
-            <a:spLocks noGrp="1"/>
-          </p:cNvSpPr>
-          <p:nvPr/>
-        </p:nvSpPr>
-        <p:spPr>
-          <a:xfrm>
-            <a:off x="609600" y="4267200"/>
-            <a:ext cx="2543175" cy="381000"/>
+              <a:rPr sz="2200" b="0">
+                <a:solidFill>
+                  <a:srgbClr val="1F4D78"/>
+                </a:solidFill>
+                <a:latin typeface="微软雅黑"/>
+                <a:ea typeface="微软雅黑"/>
+                <a:cs typeface="微软雅黑"/>
+              </a:rPr>
+              <a:t>只读指定段落，补课堂留下的真实缺口。安装与排障计入课外总预算。</a:t>
+            </a:r>
+          </a:p>
+        </p:txBody>
+      </p:sp>
+      <p:sp>
+        <p:nvSpPr>
+          <p:cNvPr id="5" name="judgment-source">
+            <a:extLst>
+              <a:ext uri="{FF2B5EF4-FFF2-40B4-BE49-F238E27FC236}">
+                <a16:creationId xmlns:a16="http://schemas.microsoft.com/office/drawing/2014/main" id="{A0E586CC-45DC-4ADE-9072-DF14A2570385}"/>
+              </a:ext>
+            </a:extLst>
+          </p:cNvPr>
+          <p:cNvSpPr>
+            <a:spLocks noGrp="1"/>
+          </p:cNvSpPr>
+          <p:nvPr/>
+        </p:nvSpPr>
+        <p:spPr>
+          <a:xfrm>
+            <a:off x="666750" y="6276975"/>
+            <a:ext cx="10572750" cy="209550"/>
           </a:xfrm>
           <a:prstGeom prst="rect">
             <a:avLst/>
@@ -26511,19 +24002,24 @@
           </a:ln>
         </p:spPr>
         <p:txBody>
-          <a:bodyPr lIns="0" tIns="0" rIns="0" bIns="0" anchor="t">
-            <a:noAutofit/>
-          </a:bodyPr>
-          <a:lstStyle/>
+          <a:bodyPr lIns="0" tIns="0" rIns="0" bIns="0" anchor="t"/>
+          <a:lstStyle>
+            <a:defPPr algn="l">
+              <a:defRPr sz="1100" b="0">
+                <a:solidFill>
+                  <a:srgbClr val="667684"/>
+                </a:solidFill>
+                <a:latin typeface="微软雅黑"/>
+                <a:ea typeface="微软雅黑"/>
+                <a:cs typeface="微软雅黑"/>
+              </a:defRPr>
+            </a:defPPr>
+          </a:lstStyle>
           <a:p>
             <a:pPr algn="l">
-              <a:lnSpc>
-                <a:spcPct val="130000"/>
-              </a:lnSpc>
-              <a:buNone/>
-              <a:defRPr sz="2400" b="1">
-                <a:solidFill>
-                  <a:srgbClr val="1F4D78"/>
+              <a:defRPr sz="1100" b="0">
+                <a:solidFill>
+                  <a:srgbClr val="667684"/>
                 </a:solidFill>
                 <a:latin typeface="微软雅黑"/>
                 <a:ea typeface="微软雅黑"/>
@@ -26531,37 +24027,37 @@
               </a:defRPr>
             </a:pPr>
             <a:r>
-              <a:rPr sz="2400" b="1">
-                <a:solidFill>
-                  <a:srgbClr val="1F4D78"/>
-                </a:solidFill>
-                <a:latin typeface="微软雅黑"/>
-                <a:ea typeface="微软雅黑"/>
-                <a:cs typeface="微软雅黑"/>
-              </a:rPr>
-              <a:t>准备公开检索</a:t>
-            </a:r>
-          </a:p>
-        </p:txBody>
-      </p:sp>
-      <p:sp>
-        <p:nvSpPr>
-          <p:cNvPr id="11" name="body-577">
-            <a:extLst>
-              <a:ext uri="{FF2B5EF4-FFF2-40B4-BE49-F238E27FC236}">
-                <a16:creationId xmlns:a16="http://schemas.microsoft.com/office/drawing/2014/main" id="{C56BFABB-DE89-437A-B315-5C8FD8AD52AB}"/>
-              </a:ext>
-            </a:extLst>
-          </p:cNvPr>
-          <p:cNvSpPr>
-            <a:spLocks noGrp="1"/>
-          </p:cNvSpPr>
-          <p:nvPr/>
-        </p:nvSpPr>
-        <p:spPr>
-          <a:xfrm>
-            <a:off x="3343275" y="4267200"/>
-            <a:ext cx="8239125" cy="1219200"/>
+              <a:rPr sz="1100" b="0">
+                <a:solidFill>
+                  <a:srgbClr val="667684"/>
+                </a:solidFill>
+                <a:latin typeface="微软雅黑"/>
+                <a:ea typeface="微软雅黑"/>
+                <a:cs typeface="微软雅黑"/>
+              </a:rPr>
+              <a:t>来源：本课判断任务与讲义；构造材料及真实来源按材料包标识</a:t>
+            </a:r>
+          </a:p>
+        </p:txBody>
+      </p:sp>
+      <p:sp>
+        <p:nvSpPr>
+          <p:cNvPr id="6" name="judgment-page">
+            <a:extLst>
+              <a:ext uri="{FF2B5EF4-FFF2-40B4-BE49-F238E27FC236}">
+                <a16:creationId xmlns:a16="http://schemas.microsoft.com/office/drawing/2014/main" id="{7AA0ED79-1550-44F4-B380-55D56F07E212}"/>
+              </a:ext>
+            </a:extLst>
+          </p:cNvPr>
+          <p:cNvSpPr>
+            <a:spLocks noGrp="1"/>
+          </p:cNvSpPr>
+          <p:nvPr/>
+        </p:nvSpPr>
+        <p:spPr>
+          <a:xfrm>
+            <a:off x="11715750" y="6562725"/>
+            <a:ext cx="238125" cy="171450"/>
           </a:xfrm>
           <a:prstGeom prst="rect">
             <a:avLst/>
@@ -26572,19 +24068,24 @@
           </a:ln>
         </p:spPr>
         <p:txBody>
-          <a:bodyPr lIns="0" tIns="0" rIns="0" bIns="0" anchor="t">
-            <a:noAutofit/>
-          </a:bodyPr>
-          <a:lstStyle/>
+          <a:bodyPr lIns="0" tIns="0" rIns="0" bIns="0" anchor="t"/>
+          <a:lstStyle>
+            <a:defPPr algn="l">
+              <a:defRPr sz="900" b="0">
+                <a:solidFill>
+                  <a:srgbClr val="A5A5A5"/>
+                </a:solidFill>
+                <a:latin typeface="微软雅黑"/>
+                <a:ea typeface="微软雅黑"/>
+                <a:cs typeface="微软雅黑"/>
+              </a:defRPr>
+            </a:defPPr>
+          </a:lstStyle>
           <a:p>
             <a:pPr algn="l">
-              <a:lnSpc>
-                <a:spcPct val="115000"/>
-              </a:lnSpc>
-              <a:buNone/>
-              <a:defRPr sz="2400" b="0">
-                <a:solidFill>
-                  <a:srgbClr val="263442"/>
+              <a:defRPr sz="900" b="0">
+                <a:solidFill>
+                  <a:srgbClr val="A5A5A5"/>
                 </a:solidFill>
                 <a:latin typeface="微软雅黑"/>
                 <a:ea typeface="微软雅黑"/>
@@ -26592,76 +24093,15 @@
               </a:defRPr>
             </a:pPr>
             <a:r>
-              <a:rPr sz="2400" b="0">
-                <a:solidFill>
-                  <a:srgbClr val="263442"/>
-                </a:solidFill>
-                <a:latin typeface="微软雅黑"/>
-                <a:ea typeface="微软雅黑"/>
-                <a:cs typeface="微软雅黑"/>
-              </a:rPr>
-              <a:t>带着一个研究问题和一组候选关键词进入第 3 课。</a:t>
-            </a:r>
-          </a:p>
-        </p:txBody>
-      </p:sp>
-      <p:sp>
-        <p:nvSpPr>
-          <p:cNvPr id="12" name="body-578">
-            <a:extLst>
-              <a:ext uri="{FF2B5EF4-FFF2-40B4-BE49-F238E27FC236}">
-                <a16:creationId xmlns:a16="http://schemas.microsoft.com/office/drawing/2014/main" id="{D3D66342-7B2D-4872-A4CB-1932472363E4}"/>
-              </a:ext>
-            </a:extLst>
-          </p:cNvPr>
-          <p:cNvSpPr>
-            <a:spLocks noGrp="1"/>
-          </p:cNvSpPr>
-          <p:nvPr/>
-        </p:nvSpPr>
-        <p:spPr>
-          <a:xfrm>
-            <a:off x="609600" y="5762625"/>
-            <a:ext cx="10972800" cy="600075"/>
-          </a:xfrm>
-          <a:prstGeom prst="rect">
-            <a:avLst/>
-          </a:prstGeom>
-          <a:noFill/>
-          <a:ln w="0">
-            <a:noFill/>
-          </a:ln>
-        </p:spPr>
-        <p:txBody>
-          <a:bodyPr lIns="0" tIns="0" rIns="0" bIns="0" anchor="t">
-            <a:noAutofit/>
-          </a:bodyPr>
-          <a:lstStyle/>
-          <a:p>
-            <a:pPr algn="l">
-              <a:lnSpc>
-                <a:spcPct val="130000"/>
-              </a:lnSpc>
-              <a:buNone/>
-              <a:defRPr sz="2300" b="0">
-                <a:solidFill>
-                  <a:srgbClr val="1F4D78"/>
-                </a:solidFill>
-                <a:latin typeface="微软雅黑"/>
-                <a:ea typeface="微软雅黑"/>
-                <a:cs typeface="微软雅黑"/>
-              </a:defRPr>
-            </a:pPr>
-            <a:r>
-              <a:rPr sz="2300" b="0">
-                <a:solidFill>
-                  <a:srgbClr val="1F4D78"/>
-                </a:solidFill>
-                <a:latin typeface="微软雅黑"/>
-                <a:ea typeface="微软雅黑"/>
-                <a:cs typeface="微软雅黑"/>
-              </a:rPr>
-              <a:t>持续更新同一个人项目，累积第 6 课问题门的证据。</a:t>
+              <a:rPr sz="900" b="0">
+                <a:solidFill>
+                  <a:srgbClr val="A5A5A5"/>
+                </a:solidFill>
+                <a:latin typeface="微软雅黑"/>
+                <a:ea typeface="微软雅黑"/>
+                <a:cs typeface="微软雅黑"/>
+              </a:rPr>
+              <a:t>27</a:t>
             </a:r>
           </a:p>
         </p:txBody>
@@ -27458,131 +24898,26 @@
         <p:nvPr/>
       </p:nvGrpSpPr>
       <p:grpSpPr>
-        <a:xfrm>
-          <a:off x="0" y="0"/>
-          <a:ext cx="0" cy="0"/>
-          <a:chOff x="0" y="0"/>
-          <a:chExt cx="0" cy="0"/>
-        </a:xfrm>
+        <a:xfrm/>
       </p:grpSpPr>
       <p:sp>
         <p:nvSpPr>
-          <p:cNvPr id="2" name="TextBox 1">
-            <a:extLst>
-              <a:ext uri="{FF2B5EF4-FFF2-40B4-BE49-F238E27FC236}">
-                <a16:creationId xmlns:a16="http://schemas.microsoft.com/office/drawing/2014/main" id="{FB2B53A7-413B-4708-9486-83DB62258872}"/>
-              </a:ext>
-            </a:extLst>
-          </p:cNvPr>
-          <p:cNvSpPr>
-            <a:spLocks noGrp="1"/>
-          </p:cNvSpPr>
-          <p:nvPr/>
-        </p:nvSpPr>
-        <p:spPr>
-          <a:xfrm>
-            <a:off x="1028700" y="57150"/>
-            <a:ext cx="10629900" cy="571500"/>
-          </a:xfrm>
-          <a:prstGeom prst="rect">
-            <a:avLst/>
-          </a:prstGeom>
-          <a:noFill/>
-        </p:spPr>
-        <p:txBody>
-          <a:bodyPr lIns="0" tIns="0" rIns="0" bIns="0" anchor="ctr">
-            <a:noAutofit/>
-          </a:bodyPr>
-          <a:lstStyle/>
-          <a:p>
-            <a:pPr algn="l">
-              <a:lnSpc>
-                <a:spcPct val="115000"/>
-              </a:lnSpc>
-              <a:buNone/>
-            </a:pPr>
-            <a:r>
-              <a:rPr sz="3000" b="1">
-                <a:solidFill>
-                  <a:srgbClr val="FFFFFF"/>
-                </a:solidFill>
-                <a:latin typeface="微软雅黑"/>
-                <a:ea typeface="微软雅黑"/>
-                <a:cs typeface="微软雅黑"/>
-              </a:rPr>
-              <a:t>这份合作稿可以交给外部模型吗？</a:t>
-            </a:r>
-          </a:p>
-        </p:txBody>
-      </p:sp>
-      <p:sp>
-        <p:nvSpPr>
-          <p:cNvPr id="3" name="TextBox 2">
-            <a:extLst>
-              <a:ext uri="{FF2B5EF4-FFF2-40B4-BE49-F238E27FC236}">
-                <a16:creationId xmlns:a16="http://schemas.microsoft.com/office/drawing/2014/main" id="{93C92A5F-3C6A-4392-9DB1-30F99CAACB06}"/>
-              </a:ext>
-            </a:extLst>
-          </p:cNvPr>
-          <p:cNvSpPr>
-            <a:spLocks noGrp="1"/>
-          </p:cNvSpPr>
-          <p:nvPr/>
-        </p:nvSpPr>
-        <p:spPr>
-          <a:xfrm>
-            <a:off x="10899648" y="6473952"/>
-            <a:ext cx="566928" cy="256032"/>
-          </a:xfrm>
-          <a:prstGeom prst="rect">
-            <a:avLst/>
-          </a:prstGeom>
-          <a:noFill/>
-        </p:spPr>
-        <p:txBody>
-          <a:bodyPr wrap="square" lIns="0" tIns="0" rIns="0" bIns="0" anchor="ctr">
-            <a:spAutoFit/>
-          </a:bodyPr>
-          <a:lstStyle/>
-          <a:p>
-            <a:pPr algn="r">
-              <a:lnSpc>
-                <a:spcPct val="115000"/>
-              </a:lnSpc>
-              <a:buNone/>
-            </a:pPr>
-            <a:r>
-              <a:rPr sz="1200" b="0">
-                <a:solidFill>
-                  <a:srgbClr val="5F6B76"/>
-                </a:solidFill>
-                <a:latin typeface="Arial"/>
-                <a:ea typeface="Arial"/>
-                <a:cs typeface="Arial"/>
-              </a:rPr>
-              <a:t>4</a:t>
-            </a:r>
-          </a:p>
-        </p:txBody>
-      </p:sp>
-      <p:sp>
-        <p:nvSpPr>
-          <p:cNvPr id="4" name="body-373">
-            <a:extLst>
-              <a:ext uri="{FF2B5EF4-FFF2-40B4-BE49-F238E27FC236}">
-                <a16:creationId xmlns:a16="http://schemas.microsoft.com/office/drawing/2014/main" id="{716D5139-9C1C-4ED6-BDC1-0A8B801E735F}"/>
-              </a:ext>
-            </a:extLst>
-          </p:cNvPr>
-          <p:cNvSpPr>
-            <a:spLocks noGrp="1"/>
-          </p:cNvSpPr>
-          <p:nvPr/>
-        </p:nvSpPr>
-        <p:spPr>
-          <a:xfrm>
-            <a:off x="609600" y="1000125"/>
-            <a:ext cx="10972800" cy="304800"/>
+          <p:cNvPr id="7" name="judgment-title">
+            <a:extLst>
+              <a:ext uri="{FF2B5EF4-FFF2-40B4-BE49-F238E27FC236}">
+                <a16:creationId xmlns:a16="http://schemas.microsoft.com/office/drawing/2014/main" id="{900F4B97-7C17-4189-83E3-E8141B6A53F8}"/>
+              </a:ext>
+            </a:extLst>
+          </p:cNvPr>
+          <p:cNvSpPr>
+            <a:spLocks noGrp="1"/>
+          </p:cNvSpPr>
+          <p:nvPr/>
+        </p:nvSpPr>
+        <p:spPr>
+          <a:xfrm>
+            <a:off x="1028700" y="76200"/>
+            <a:ext cx="10687050" cy="514350"/>
           </a:xfrm>
           <a:prstGeom prst="rect">
             <a:avLst/>
@@ -27593,19 +24928,24 @@
           </a:ln>
         </p:spPr>
         <p:txBody>
-          <a:bodyPr lIns="0" tIns="0" rIns="0" bIns="0" anchor="t">
-            <a:noAutofit/>
-          </a:bodyPr>
-          <a:lstStyle/>
+          <a:bodyPr lIns="0" tIns="0" rIns="0" bIns="0" anchor="t"/>
+          <a:lstStyle>
+            <a:defPPr algn="l">
+              <a:defRPr sz="3000" b="1">
+                <a:solidFill>
+                  <a:srgbClr val="FFFFFF"/>
+                </a:solidFill>
+                <a:latin typeface="微软雅黑"/>
+                <a:ea typeface="微软雅黑"/>
+                <a:cs typeface="微软雅黑"/>
+              </a:defRPr>
+            </a:defPPr>
+          </a:lstStyle>
           <a:p>
             <a:pPr algn="l">
-              <a:lnSpc>
-                <a:spcPct val="130000"/>
-              </a:lnSpc>
-              <a:buNone/>
-              <a:defRPr sz="1800" b="0">
-                <a:solidFill>
-                  <a:srgbClr val="A96510"/>
+              <a:defRPr sz="3000" b="1">
+                <a:solidFill>
+                  <a:srgbClr val="FFFFFF"/>
                 </a:solidFill>
                 <a:latin typeface="微软雅黑"/>
                 <a:ea typeface="微软雅黑"/>
@@ -27613,37 +24953,37 @@
               </a:defRPr>
             </a:pPr>
             <a:r>
-              <a:rPr sz="1800" b="0">
-                <a:solidFill>
-                  <a:srgbClr val="A96510"/>
-                </a:solidFill>
-                <a:latin typeface="微软雅黑"/>
-                <a:ea typeface="微软雅黑"/>
-                <a:cs typeface="微软雅黑"/>
-              </a:rPr>
-              <a:t>课堂构造案例</a:t>
-            </a:r>
-          </a:p>
-        </p:txBody>
-      </p:sp>
-      <p:sp>
-        <p:nvSpPr>
-          <p:cNvPr id="5" name="body-374">
-            <a:extLst>
-              <a:ext uri="{FF2B5EF4-FFF2-40B4-BE49-F238E27FC236}">
-                <a16:creationId xmlns:a16="http://schemas.microsoft.com/office/drawing/2014/main" id="{0E64D0EA-925D-4492-AA53-E36688A26BB5}"/>
-              </a:ext>
-            </a:extLst>
-          </p:cNvPr>
-          <p:cNvSpPr>
-            <a:spLocks noGrp="1"/>
-          </p:cNvSpPr>
-          <p:nvPr/>
-        </p:nvSpPr>
-        <p:spPr>
-          <a:xfrm>
-            <a:off x="609600" y="1714500"/>
-            <a:ext cx="10972800" cy="1714500"/>
+              <a:rPr sz="3000" b="1">
+                <a:solidFill>
+                  <a:srgbClr val="FFFFFF"/>
+                </a:solidFill>
+                <a:latin typeface="微软雅黑"/>
+                <a:ea typeface="微软雅黑"/>
+                <a:cs typeface="微软雅黑"/>
+              </a:rPr>
+              <a:t>声明与 trace 的缺口</a:t>
+            </a:r>
+          </a:p>
+        </p:txBody>
+      </p:sp>
+      <p:sp>
+        <p:nvSpPr>
+          <p:cNvPr id="2" name="judgment-body-0">
+            <a:extLst>
+              <a:ext uri="{FF2B5EF4-FFF2-40B4-BE49-F238E27FC236}">
+                <a16:creationId xmlns:a16="http://schemas.microsoft.com/office/drawing/2014/main" id="{4A582FE4-7932-4ABC-8A84-9722D6CE4BEB}"/>
+              </a:ext>
+            </a:extLst>
+          </p:cNvPr>
+          <p:cNvSpPr>
+            <a:spLocks noGrp="1"/>
+          </p:cNvSpPr>
+          <p:nvPr/>
+        </p:nvSpPr>
+        <p:spPr>
+          <a:xfrm>
+            <a:off x="666750" y="1066800"/>
+            <a:ext cx="10858500" cy="1009650"/>
           </a:xfrm>
           <a:prstGeom prst="rect">
             <a:avLst/>
@@ -27654,19 +24994,24 @@
           </a:ln>
         </p:spPr>
         <p:txBody>
-          <a:bodyPr lIns="0" tIns="0" rIns="0" bIns="0" anchor="t">
-            <a:noAutofit/>
-          </a:bodyPr>
-          <a:lstStyle/>
+          <a:bodyPr lIns="0" tIns="0" rIns="0" bIns="0" anchor="t"/>
+          <a:lstStyle>
+            <a:defPPr algn="l">
+              <a:defRPr sz="2400" b="0">
+                <a:solidFill>
+                  <a:srgbClr val="263746"/>
+                </a:solidFill>
+                <a:latin typeface="微软雅黑"/>
+                <a:ea typeface="微软雅黑"/>
+                <a:cs typeface="微软雅黑"/>
+              </a:defRPr>
+            </a:defPPr>
+          </a:lstStyle>
           <a:p>
             <a:pPr algn="l">
-              <a:lnSpc>
-                <a:spcPct val="125000"/>
-              </a:lnSpc>
-              <a:buNone/>
-              <a:defRPr sz="3000" b="0">
-                <a:solidFill>
-                  <a:srgbClr val="1F4D78"/>
+              <a:defRPr sz="2400" b="0">
+                <a:solidFill>
+                  <a:srgbClr val="263746"/>
                 </a:solidFill>
                 <a:latin typeface="微软雅黑"/>
                 <a:ea typeface="微软雅黑"/>
@@ -27674,91 +25019,37 @@
               </a:defRPr>
             </a:pPr>
             <a:r>
-              <a:rPr sz="3000" b="0">
-                <a:solidFill>
-                  <a:srgbClr val="1F4D78"/>
-                </a:solidFill>
-                <a:latin typeface="微软雅黑"/>
-                <a:ea typeface="微软雅黑"/>
-                <a:cs typeface="微软雅黑"/>
-              </a:rPr>
-              <a:t>你有一份未公开的合作稿，</a:t>
-            </a:r>
-          </a:p>
-          <a:p>
-            <a:pPr algn="l">
-              <a:lnSpc>
-                <a:spcPct val="125000"/>
-              </a:lnSpc>
-              <a:buNone/>
-              <a:defRPr sz="3000" b="0">
-                <a:solidFill>
-                  <a:srgbClr val="1F4D78"/>
-                </a:solidFill>
-                <a:latin typeface="微软雅黑"/>
-                <a:ea typeface="微软雅黑"/>
-                <a:cs typeface="微软雅黑"/>
-              </a:defRPr>
-            </a:pPr>
-            <a:r>
-              <a:rPr sz="3000" b="0">
-                <a:solidFill>
-                  <a:srgbClr val="1F4D78"/>
-                </a:solidFill>
-                <a:latin typeface="微软雅黑"/>
-                <a:ea typeface="微软雅黑"/>
-                <a:cs typeface="微软雅黑"/>
-              </a:rPr>
-              <a:t>想交给个人账户下的外部模型，</a:t>
-            </a:r>
-          </a:p>
-          <a:p>
-            <a:pPr algn="l">
-              <a:lnSpc>
-                <a:spcPct val="125000"/>
-              </a:lnSpc>
-              <a:buNone/>
-              <a:defRPr sz="3000" b="0">
-                <a:solidFill>
-                  <a:srgbClr val="1F4D78"/>
-                </a:solidFill>
-                <a:latin typeface="微软雅黑"/>
-                <a:ea typeface="微软雅黑"/>
-                <a:cs typeface="微软雅黑"/>
-              </a:defRPr>
-            </a:pPr>
-            <a:r>
-              <a:rPr sz="3000" b="0">
-                <a:solidFill>
-                  <a:srgbClr val="1F4D78"/>
-                </a:solidFill>
-                <a:latin typeface="微软雅黑"/>
-                <a:ea typeface="微软雅黑"/>
-                <a:cs typeface="微软雅黑"/>
-              </a:rPr>
-              <a:t>帮助梳理相关研究。</a:t>
-            </a:r>
-          </a:p>
-        </p:txBody>
-      </p:sp>
-      <p:sp>
-        <p:nvSpPr>
-          <p:cNvPr id="6" name="body-375">
-            <a:extLst>
-              <a:ext uri="{FF2B5EF4-FFF2-40B4-BE49-F238E27FC236}">
-                <a16:creationId xmlns:a16="http://schemas.microsoft.com/office/drawing/2014/main" id="{4E59FFC3-7C91-4CB0-9376-BA05BC63FE49}"/>
-              </a:ext>
-            </a:extLst>
-          </p:cNvPr>
-          <p:cNvSpPr>
-            <a:spLocks noGrp="1"/>
-          </p:cNvSpPr>
-          <p:nvPr/>
-        </p:nvSpPr>
-        <p:spPr>
-          <a:xfrm>
-            <a:off x="609600" y="3724275"/>
-            <a:ext cx="10972800" cy="723900"/>
+              <a:rPr sz="2400" b="0">
+                <a:solidFill>
+                  <a:srgbClr val="263746"/>
+                </a:solidFill>
+                <a:latin typeface="微软雅黑"/>
+                <a:ea typeface="微软雅黑"/>
+                <a:cs typeface="微软雅黑"/>
+              </a:rPr>
+              <a:t>READ 仅 problem-definition.md；WRITE 仅获批段；NETWORK off</a:t>
+            </a:r>
+          </a:p>
+        </p:txBody>
+      </p:sp>
+      <p:sp>
+        <p:nvSpPr>
+          <p:cNvPr id="3" name="judgment-body-1">
+            <a:extLst>
+              <a:ext uri="{FF2B5EF4-FFF2-40B4-BE49-F238E27FC236}">
+                <a16:creationId xmlns:a16="http://schemas.microsoft.com/office/drawing/2014/main" id="{6363C68C-FEA0-4189-94FB-A36B737AF6A7}"/>
+              </a:ext>
+            </a:extLst>
+          </p:cNvPr>
+          <p:cNvSpPr>
+            <a:spLocks noGrp="1"/>
+          </p:cNvSpPr>
+          <p:nvPr/>
+        </p:nvSpPr>
+        <p:spPr>
+          <a:xfrm>
+            <a:off x="666750" y="2238375"/>
+            <a:ext cx="10858500" cy="2076450"/>
           </a:xfrm>
           <a:prstGeom prst="rect">
             <a:avLst/>
@@ -27769,19 +25060,24 @@
           </a:ln>
         </p:spPr>
         <p:txBody>
-          <a:bodyPr lIns="0" tIns="0" rIns="0" bIns="0" anchor="t">
-            <a:noAutofit/>
-          </a:bodyPr>
-          <a:lstStyle/>
+          <a:bodyPr lIns="0" tIns="0" rIns="0" bIns="0" anchor="t"/>
+          <a:lstStyle>
+            <a:defPPr algn="l">
+              <a:defRPr sz="2400" b="0">
+                <a:solidFill>
+                  <a:srgbClr val="263746"/>
+                </a:solidFill>
+                <a:latin typeface="微软雅黑"/>
+                <a:ea typeface="微软雅黑"/>
+                <a:cs typeface="微软雅黑"/>
+              </a:defRPr>
+            </a:defPPr>
+          </a:lstStyle>
           <a:p>
             <a:pPr algn="l">
-              <a:lnSpc>
-                <a:spcPct val="130000"/>
-              </a:lnSpc>
-              <a:buNone/>
               <a:defRPr sz="2400" b="0">
                 <a:solidFill>
-                  <a:srgbClr val="263442"/>
+                  <a:srgbClr val="263746"/>
                 </a:solidFill>
                 <a:latin typeface="微软雅黑"/>
                 <a:ea typeface="微软雅黑"/>
@@ -27789,48 +25085,83 @@
               </a:defRPr>
             </a:pPr>
             <a:r>
-              <a:rPr sz="2400" b="0" dirty="0" err="1">
-                <a:solidFill>
-                  <a:srgbClr val="263442"/>
-                </a:solidFill>
-                <a:latin typeface="微软雅黑"/>
-                <a:ea typeface="微软雅黑"/>
-                <a:cs typeface="微软雅黑"/>
-              </a:rPr>
-              <a:t>没有共同作者授权记录，也没有核对平台条款</a:t>
-            </a:r>
-            <a:r>
-              <a:rPr sz="2400" b="0" dirty="0">
-                <a:solidFill>
-                  <a:srgbClr val="263442"/>
-                </a:solidFill>
-                <a:latin typeface="微软雅黑"/>
-                <a:ea typeface="微软雅黑"/>
-                <a:cs typeface="微软雅黑"/>
-              </a:rPr>
-              <a:t>。</a:t>
-            </a:r>
-          </a:p>
-        </p:txBody>
-      </p:sp>
-      <p:sp>
-        <p:nvSpPr>
-          <p:cNvPr id="7" name="body-376">
-            <a:extLst>
-              <a:ext uri="{FF2B5EF4-FFF2-40B4-BE49-F238E27FC236}">
-                <a16:creationId xmlns:a16="http://schemas.microsoft.com/office/drawing/2014/main" id="{433617E5-7CEC-4908-A172-09D486FA8BB6}"/>
-              </a:ext>
-            </a:extLst>
-          </p:cNvPr>
-          <p:cNvSpPr>
-            <a:spLocks noGrp="1"/>
-          </p:cNvSpPr>
-          <p:nvPr/>
-        </p:nvSpPr>
-        <p:spPr>
-          <a:xfrm>
-            <a:off x="609600" y="4953000"/>
-            <a:ext cx="3181350" cy="504825"/>
+              <a:rPr sz="2400" b="0">
+                <a:solidFill>
+                  <a:srgbClr val="263746"/>
+                </a:solidFill>
+                <a:latin typeface="微软雅黑"/>
+                <a:ea typeface="微软雅黑"/>
+                <a:cs typeface="微软雅黑"/>
+              </a:rPr>
+              <a:t>E3｜批准建议 B</a:t>
+            </a:r>
+          </a:p>
+          <a:p>
+            <a:pPr algn="l">
+              <a:defRPr sz="2400" b="0">
+                <a:solidFill>
+                  <a:srgbClr val="263746"/>
+                </a:solidFill>
+                <a:latin typeface="微软雅黑"/>
+                <a:ea typeface="微软雅黑"/>
+                <a:cs typeface="微软雅黑"/>
+              </a:defRPr>
+            </a:pPr>
+            <a:r>
+              <a:rPr sz="2400" b="0">
+                <a:solidFill>
+                  <a:srgbClr val="263746"/>
+                </a:solidFill>
+                <a:latin typeface="微软雅黑"/>
+                <a:ea typeface="微软雅黑"/>
+                <a:cs typeface="微软雅黑"/>
+              </a:rPr>
+              <a:t>E4｜helper 读取 notes/source-list.md</a:t>
+            </a:r>
+          </a:p>
+          <a:p>
+            <a:pPr algn="l">
+              <a:defRPr sz="2400" b="0">
+                <a:solidFill>
+                  <a:srgbClr val="263746"/>
+                </a:solidFill>
+                <a:latin typeface="微软雅黑"/>
+                <a:ea typeface="微软雅黑"/>
+                <a:cs typeface="微软雅黑"/>
+              </a:defRPr>
+            </a:pPr>
+            <a:r>
+              <a:rPr sz="2400" b="0">
+                <a:solidFill>
+                  <a:srgbClr val="263746"/>
+                </a:solidFill>
+                <a:latin typeface="微软雅黑"/>
+                <a:ea typeface="微软雅黑"/>
+                <a:cs typeface="微软雅黑"/>
+              </a:rPr>
+              <a:t>E5｜diff 只含获批段</a:t>
+            </a:r>
+          </a:p>
+        </p:txBody>
+      </p:sp>
+      <p:sp>
+        <p:nvSpPr>
+          <p:cNvPr id="4" name="judgment-body-2">
+            <a:extLst>
+              <a:ext uri="{FF2B5EF4-FFF2-40B4-BE49-F238E27FC236}">
+                <a16:creationId xmlns:a16="http://schemas.microsoft.com/office/drawing/2014/main" id="{78FB5DBF-1D2D-412D-A527-11F677B4C635}"/>
+              </a:ext>
+            </a:extLst>
+          </p:cNvPr>
+          <p:cNvSpPr>
+            <a:spLocks noGrp="1"/>
+          </p:cNvSpPr>
+          <p:nvPr/>
+        </p:nvSpPr>
+        <p:spPr>
+          <a:xfrm>
+            <a:off x="666750" y="4495800"/>
+            <a:ext cx="10858500" cy="1409700"/>
           </a:xfrm>
           <a:prstGeom prst="rect">
             <a:avLst/>
@@ -27841,17 +25172,22 @@
           </a:ln>
         </p:spPr>
         <p:txBody>
-          <a:bodyPr lIns="0" tIns="0" rIns="0" bIns="0" anchor="t">
-            <a:noAutofit/>
-          </a:bodyPr>
-          <a:lstStyle/>
+          <a:bodyPr lIns="0" tIns="0" rIns="0" bIns="0" anchor="t"/>
+          <a:lstStyle>
+            <a:defPPr algn="l">
+              <a:defRPr sz="2200" b="0">
+                <a:solidFill>
+                  <a:srgbClr val="1F4D78"/>
+                </a:solidFill>
+                <a:latin typeface="微软雅黑"/>
+                <a:ea typeface="微软雅黑"/>
+                <a:cs typeface="微软雅黑"/>
+              </a:defRPr>
+            </a:defPPr>
+          </a:lstStyle>
           <a:p>
             <a:pPr algn="l">
-              <a:lnSpc>
-                <a:spcPct val="130000"/>
-              </a:lnSpc>
-              <a:buNone/>
-              <a:defRPr sz="2900" b="1">
+              <a:defRPr sz="2200" b="0">
                 <a:solidFill>
                   <a:srgbClr val="1F4D78"/>
                 </a:solidFill>
@@ -27861,7 +25197,7 @@
               </a:defRPr>
             </a:pPr>
             <a:r>
-              <a:rPr sz="2900" b="1">
+              <a:rPr sz="2200" b="0">
                 <a:solidFill>
                   <a:srgbClr val="1F4D78"/>
                 </a:solidFill>
@@ -27869,29 +25205,29 @@
                 <a:ea typeface="微软雅黑"/>
                 <a:cs typeface="微软雅黑"/>
               </a:rPr>
-              <a:t>允许</a:t>
-            </a:r>
-          </a:p>
-        </p:txBody>
-      </p:sp>
-      <p:sp>
-        <p:nvSpPr>
-          <p:cNvPr id="8" name="body-377">
-            <a:extLst>
-              <a:ext uri="{FF2B5EF4-FFF2-40B4-BE49-F238E27FC236}">
-                <a16:creationId xmlns:a16="http://schemas.microsoft.com/office/drawing/2014/main" id="{059EEDC9-51CE-42EA-A099-9400A9DF85EA}"/>
-              </a:ext>
-            </a:extLst>
-          </p:cNvPr>
-          <p:cNvSpPr>
-            <a:spLocks noGrp="1"/>
-          </p:cNvSpPr>
-          <p:nvPr/>
-        </p:nvSpPr>
-        <p:spPr>
-          <a:xfrm>
-            <a:off x="4505325" y="4953000"/>
-            <a:ext cx="3181350" cy="504825"/>
+              <a:t>diff 合规，能否据此接收“全部权限通过”？指出应暂停的位置。</a:t>
+            </a:r>
+          </a:p>
+        </p:txBody>
+      </p:sp>
+      <p:sp>
+        <p:nvSpPr>
+          <p:cNvPr id="5" name="judgment-source">
+            <a:extLst>
+              <a:ext uri="{FF2B5EF4-FFF2-40B4-BE49-F238E27FC236}">
+                <a16:creationId xmlns:a16="http://schemas.microsoft.com/office/drawing/2014/main" id="{0EFFBA70-CD89-43C6-8C77-C2A457DB011D}"/>
+              </a:ext>
+            </a:extLst>
+          </p:cNvPr>
+          <p:cNvSpPr>
+            <a:spLocks noGrp="1"/>
+          </p:cNvSpPr>
+          <p:nvPr/>
+        </p:nvSpPr>
+        <p:spPr>
+          <a:xfrm>
+            <a:off x="666750" y="6276975"/>
+            <a:ext cx="10572750" cy="209550"/>
           </a:xfrm>
           <a:prstGeom prst="rect">
             <a:avLst/>
@@ -27902,19 +25238,24 @@
           </a:ln>
         </p:spPr>
         <p:txBody>
-          <a:bodyPr lIns="0" tIns="0" rIns="0" bIns="0" anchor="t">
-            <a:noAutofit/>
-          </a:bodyPr>
-          <a:lstStyle/>
+          <a:bodyPr lIns="0" tIns="0" rIns="0" bIns="0" anchor="t"/>
+          <a:lstStyle>
+            <a:defPPr algn="l">
+              <a:defRPr sz="1100" b="0">
+                <a:solidFill>
+                  <a:srgbClr val="667684"/>
+                </a:solidFill>
+                <a:latin typeface="微软雅黑"/>
+                <a:ea typeface="微软雅黑"/>
+                <a:cs typeface="微软雅黑"/>
+              </a:defRPr>
+            </a:defPPr>
+          </a:lstStyle>
           <a:p>
             <a:pPr algn="l">
-              <a:lnSpc>
-                <a:spcPct val="130000"/>
-              </a:lnSpc>
-              <a:buNone/>
-              <a:defRPr sz="2900" b="1">
-                <a:solidFill>
-                  <a:srgbClr val="1F4D78"/>
+              <a:defRPr sz="1100" b="0">
+                <a:solidFill>
+                  <a:srgbClr val="667684"/>
                 </a:solidFill>
                 <a:latin typeface="微软雅黑"/>
                 <a:ea typeface="微软雅黑"/>
@@ -27922,37 +25263,37 @@
               </a:defRPr>
             </a:pPr>
             <a:r>
-              <a:rPr sz="2900" b="1">
-                <a:solidFill>
-                  <a:srgbClr val="1F4D78"/>
-                </a:solidFill>
-                <a:latin typeface="微软雅黑"/>
-                <a:ea typeface="微软雅黑"/>
-                <a:cs typeface="微软雅黑"/>
-              </a:rPr>
-              <a:t>有条件允许</a:t>
-            </a:r>
-          </a:p>
-        </p:txBody>
-      </p:sp>
-      <p:sp>
-        <p:nvSpPr>
-          <p:cNvPr id="9" name="body-378">
-            <a:extLst>
-              <a:ext uri="{FF2B5EF4-FFF2-40B4-BE49-F238E27FC236}">
-                <a16:creationId xmlns:a16="http://schemas.microsoft.com/office/drawing/2014/main" id="{D92C6535-ACB7-4E66-8624-03B9D5C2E642}"/>
-              </a:ext>
-            </a:extLst>
-          </p:cNvPr>
-          <p:cNvSpPr>
-            <a:spLocks noGrp="1"/>
-          </p:cNvSpPr>
-          <p:nvPr/>
-        </p:nvSpPr>
-        <p:spPr>
-          <a:xfrm>
-            <a:off x="8401050" y="4953000"/>
-            <a:ext cx="3181350" cy="504825"/>
+              <a:rPr sz="1100" b="0">
+                <a:solidFill>
+                  <a:srgbClr val="667684"/>
+                </a:solidFill>
+                <a:latin typeface="微软雅黑"/>
+                <a:ea typeface="微软雅黑"/>
+                <a:cs typeface="微软雅黑"/>
+              </a:rPr>
+              <a:t>来源：本课判断任务与讲义；构造材料及真实来源按材料包标识</a:t>
+            </a:r>
+          </a:p>
+        </p:txBody>
+      </p:sp>
+      <p:sp>
+        <p:nvSpPr>
+          <p:cNvPr id="6" name="judgment-page">
+            <a:extLst>
+              <a:ext uri="{FF2B5EF4-FFF2-40B4-BE49-F238E27FC236}">
+                <a16:creationId xmlns:a16="http://schemas.microsoft.com/office/drawing/2014/main" id="{CA772E1E-A59C-4D47-AE5E-B496578C210C}"/>
+              </a:ext>
+            </a:extLst>
+          </p:cNvPr>
+          <p:cNvSpPr>
+            <a:spLocks noGrp="1"/>
+          </p:cNvSpPr>
+          <p:nvPr/>
+        </p:nvSpPr>
+        <p:spPr>
+          <a:xfrm>
+            <a:off x="11715750" y="6562725"/>
+            <a:ext cx="238125" cy="171450"/>
           </a:xfrm>
           <a:prstGeom prst="rect">
             <a:avLst/>
@@ -27963,19 +25304,24 @@
           </a:ln>
         </p:spPr>
         <p:txBody>
-          <a:bodyPr lIns="0" tIns="0" rIns="0" bIns="0" anchor="t">
-            <a:noAutofit/>
-          </a:bodyPr>
-          <a:lstStyle/>
+          <a:bodyPr lIns="0" tIns="0" rIns="0" bIns="0" anchor="t"/>
+          <a:lstStyle>
+            <a:defPPr algn="l">
+              <a:defRPr sz="900" b="0">
+                <a:solidFill>
+                  <a:srgbClr val="A5A5A5"/>
+                </a:solidFill>
+                <a:latin typeface="微软雅黑"/>
+                <a:ea typeface="微软雅黑"/>
+                <a:cs typeface="微软雅黑"/>
+              </a:defRPr>
+            </a:defPPr>
+          </a:lstStyle>
           <a:p>
             <a:pPr algn="l">
-              <a:lnSpc>
-                <a:spcPct val="130000"/>
-              </a:lnSpc>
-              <a:buNone/>
-              <a:defRPr sz="2900" b="1">
-                <a:solidFill>
-                  <a:srgbClr val="1F4D78"/>
+              <a:defRPr sz="900" b="0">
+                <a:solidFill>
+                  <a:srgbClr val="A5A5A5"/>
                 </a:solidFill>
                 <a:latin typeface="微软雅黑"/>
                 <a:ea typeface="微软雅黑"/>
@@ -27983,76 +25329,15 @@
               </a:defRPr>
             </a:pPr>
             <a:r>
-              <a:rPr sz="2900" b="1">
-                <a:solidFill>
-                  <a:srgbClr val="1F4D78"/>
-                </a:solidFill>
-                <a:latin typeface="微软雅黑"/>
-                <a:ea typeface="微软雅黑"/>
-                <a:cs typeface="微软雅黑"/>
-              </a:rPr>
-              <a:t>禁止</a:t>
-            </a:r>
-          </a:p>
-        </p:txBody>
-      </p:sp>
-      <p:sp>
-        <p:nvSpPr>
-          <p:cNvPr id="10" name="body-379">
-            <a:extLst>
-              <a:ext uri="{FF2B5EF4-FFF2-40B4-BE49-F238E27FC236}">
-                <a16:creationId xmlns:a16="http://schemas.microsoft.com/office/drawing/2014/main" id="{83A396C2-967B-4F40-B824-4D3128B9F829}"/>
-              </a:ext>
-            </a:extLst>
-          </p:cNvPr>
-          <p:cNvSpPr>
-            <a:spLocks noGrp="1"/>
-          </p:cNvSpPr>
-          <p:nvPr/>
-        </p:nvSpPr>
-        <p:spPr>
-          <a:xfrm>
-            <a:off x="609600" y="5743575"/>
-            <a:ext cx="10972800" cy="523875"/>
-          </a:xfrm>
-          <a:prstGeom prst="rect">
-            <a:avLst/>
-          </a:prstGeom>
-          <a:noFill/>
-          <a:ln w="0">
-            <a:noFill/>
-          </a:ln>
-        </p:spPr>
-        <p:txBody>
-          <a:bodyPr lIns="0" tIns="0" rIns="0" bIns="0" anchor="t">
-            <a:noAutofit/>
-          </a:bodyPr>
-          <a:lstStyle/>
-          <a:p>
-            <a:pPr algn="l">
-              <a:lnSpc>
-                <a:spcPct val="130000"/>
-              </a:lnSpc>
-              <a:buNone/>
-              <a:defRPr sz="2400" b="1">
-                <a:solidFill>
-                  <a:srgbClr val="1F4D78"/>
-                </a:solidFill>
-                <a:latin typeface="微软雅黑"/>
-                <a:ea typeface="微软雅黑"/>
-                <a:cs typeface="微软雅黑"/>
-              </a:defRPr>
-            </a:pPr>
-            <a:r>
-              <a:rPr sz="2400" b="1">
-                <a:solidFill>
-                  <a:srgbClr val="1F4D78"/>
-                </a:solidFill>
-                <a:latin typeface="微软雅黑"/>
-                <a:ea typeface="微软雅黑"/>
-                <a:cs typeface="微软雅黑"/>
-              </a:rPr>
-              <a:t>先作判断，再说明决定性条件。</a:t>
+              <a:rPr sz="900" b="0">
+                <a:solidFill>
+                  <a:srgbClr val="A5A5A5"/>
+                </a:solidFill>
+                <a:latin typeface="微软雅黑"/>
+                <a:ea typeface="微软雅黑"/>
+                <a:cs typeface="微软雅黑"/>
+              </a:rPr>
+              <a:t>4</a:t>
             </a:r>
           </a:p>
         </p:txBody>
@@ -30985,7 +28270,7 @@
       </p:sp>
       <p:cxnSp>
         <p:nvCxnSpPr>
-          <p:cNvPr id="129" name=""/>
+          <p:cNvPr id="129" name="Straight Arrow Connector 128"/>
           <p:cNvCxnSpPr>
             <a:stCxn id="107" idx="3"/>
             <a:endCxn id="109" idx="1"/>
@@ -31010,7 +28295,7 @@
       </p:cxnSp>
       <p:cxnSp>
         <p:nvCxnSpPr>
-          <p:cNvPr id="130" name=""/>
+          <p:cNvPr id="130" name="Straight Arrow Connector 129"/>
           <p:cNvCxnSpPr>
             <a:stCxn id="109" idx="3"/>
             <a:endCxn id="111" idx="1"/>
